--- a/JPM_Project_3ii_week6.pptx
+++ b/JPM_Project_3ii_week6.pptx
@@ -20,6 +20,8 @@
     <p:sldId id="264" r:id="rId11"/>
     <p:sldId id="265" r:id="rId12"/>
     <p:sldId id="266" r:id="rId13"/>
+    <p:sldId id="271" r:id="rId20"/>
+    <p:sldId id="272" r:id="rId21"/>
     <p:sldId id="267" r:id="rId14"/>
   </p:sldIdLst>
   <p:sldSz cx="12192000" cy="6858000"/>
@@ -2632,7 +2634,7 @@
                   <a:srgbClr val="475569"/>
                 </a:solidFill>
               </a:rPr>
-              <a:t>9 / 12</a:t>
+              <a:t>9 / 14</a:t>
             </a:r>
             <a:endParaRPr lang="en-US" sz="780" dirty="0"/>
           </a:p>
@@ -3354,7 +3356,7 @@
                   <a:srgbClr val="475569"/>
                 </a:solidFill>
               </a:rPr>
-              <a:t>10 / 12</a:t>
+              <a:t>10 / 14</a:t>
             </a:r>
             <a:endParaRPr lang="en-US" sz="780" dirty="0"/>
           </a:p>
@@ -4254,7 +4256,7 @@
                   <a:srgbClr val="475569"/>
                 </a:solidFill>
               </a:rPr>
-              <a:t>11 / 12</a:t>
+              <a:t>11 / 14</a:t>
             </a:r>
             <a:endParaRPr lang="en-US" sz="780" dirty="0"/>
           </a:p>
@@ -5200,7 +5202,7 @@
                   <a:srgbClr val="475569"/>
                 </a:solidFill>
               </a:rPr>
-              <a:t>12 / 12</a:t>
+              <a:t>14 / 14</a:t>
             </a:r>
             <a:endParaRPr lang="en-US" sz="780" dirty="0"/>
           </a:p>
@@ -5595,7 +5597,7 @@
         <p:spPr>
           <a:xfrm>
             <a:off x="3840480" y="5303520"/>
-            <a:ext cx="7315200" cy="822960"/>
+            <a:ext cx="7315200" cy="400110"/>
           </a:xfrm>
           <a:prstGeom prst="rect">
             <a:avLst/>
@@ -5609,13 +5611,3885 @@
           <a:lstStyle/>
           <a:p>
             <a:r>
-              <a:rPr sz="1000">
+              <a:rPr sz="1000" dirty="0">
                 <a:solidFill>
                   <a:srgbClr val="222222"/>
                 </a:solidFill>
                 <a:latin typeface="Aptos"/>
               </a:rPr>
               <a:t>Is ~80% label capture (disclosure-bounded) sufficient, or should we prioritize the structural-model route?</a:t>
+            </a:r>
+            <a:r>
+              <a:rPr lang="en-US" sz="1000" dirty="0">
+                <a:solidFill>
+                  <a:srgbClr val="222222"/>
+                </a:solidFill>
+                <a:latin typeface="Aptos"/>
+              </a:rPr>
+              <a:t> </a:t>
+            </a:r>
+            <a:r>
+              <a:rPr lang="en-US" sz="1000" dirty="0">
+                <a:solidFill>
+                  <a:srgbClr val="222222"/>
+                </a:solidFill>
+                <a:highlight>
+                  <a:srgbClr val="FFFF00"/>
+                </a:highlight>
+                <a:latin typeface="Aptos"/>
+              </a:rPr>
+              <a:t>We are considering exploring Canda transactions, but their API may potentially be more difficult to work with.</a:t>
+            </a:r>
+            <a:endParaRPr sz="1000" dirty="0">
+              <a:solidFill>
+                <a:srgbClr val="222222"/>
+              </a:solidFill>
+              <a:highlight>
+                <a:srgbClr val="FFFF00"/>
+              </a:highlight>
+              <a:latin typeface="Aptos"/>
+            </a:endParaRPr>
+          </a:p>
+        </p:txBody>
+      </p:sp>
+    </p:spTree>
+  </p:cSld>
+  <p:clrMapOvr>
+    <a:masterClrMapping/>
+  </p:clrMapOvr>
+</p:sld>
+</file>
+
+<file path=ppt/slides/slide14.xml><?xml version="1.0" encoding="utf-8"?>
+<p:sld xmlns:a="http://schemas.openxmlformats.org/drawingml/2006/main" xmlns:p="http://schemas.openxmlformats.org/presentationml/2006/main" xmlns:r="http://schemas.openxmlformats.org/officeDocument/2006/relationships">
+  <p:cSld>
+    <p:spTree>
+      <p:nvGrpSpPr>
+        <p:cNvPr id="1" name=""/>
+        <p:cNvGrpSpPr/>
+        <p:nvPr/>
+      </p:nvGrpSpPr>
+      <p:grpSpPr/>
+      <p:sp>
+        <p:nvSpPr>
+          <p:cNvPr id="2" name="Rectangle 1"/>
+          <p:cNvSpPr/>
+          <p:nvPr/>
+        </p:nvSpPr>
+        <p:spPr>
+          <a:xfrm>
+            <a:off x="0" y="0"/>
+            <a:ext cx="12188952" cy="6858000"/>
+          </a:xfrm>
+          <a:prstGeom prst="rect">
+            <a:avLst/>
+          </a:prstGeom>
+          <a:solidFill>
+            <a:srgbClr val="FFFFFF"/>
+          </a:solidFill>
+          <a:ln>
+            <a:noFill/>
+          </a:ln>
+          <a:effectLst/>
+        </p:spPr>
+        <p:style>
+          <a:lnRef idx="1">
+            <a:schemeClr val="accent1"/>
+          </a:lnRef>
+          <a:fillRef idx="3">
+            <a:schemeClr val="accent1"/>
+          </a:fillRef>
+          <a:effectRef idx="2">
+            <a:schemeClr val="accent1"/>
+          </a:effectRef>
+          <a:fontRef idx="minor">
+            <a:schemeClr val="lt1"/>
+          </a:fontRef>
+        </p:style>
+        <p:txBody>
+          <a:bodyPr rtlCol="0" anchor="ctr"/>
+          <a:lstStyle/>
+          <a:p>
+            <a:pPr algn="ctr"/>
+          </a:p>
+        </p:txBody>
+      </p:sp>
+      <p:sp>
+        <p:nvSpPr>
+          <p:cNvPr id="3" name="Rectangle 2"/>
+          <p:cNvSpPr/>
+          <p:nvPr/>
+        </p:nvSpPr>
+        <p:spPr>
+          <a:xfrm>
+            <a:off x="0" y="0"/>
+            <a:ext cx="12188952" cy="164592"/>
+          </a:xfrm>
+          <a:prstGeom prst="rect">
+            <a:avLst/>
+          </a:prstGeom>
+          <a:solidFill>
+            <a:srgbClr val="14315A"/>
+          </a:solidFill>
+          <a:ln>
+            <a:noFill/>
+          </a:ln>
+          <a:effectLst/>
+        </p:spPr>
+        <p:style>
+          <a:lnRef idx="1">
+            <a:schemeClr val="accent1"/>
+          </a:lnRef>
+          <a:fillRef idx="3">
+            <a:schemeClr val="accent1"/>
+          </a:fillRef>
+          <a:effectRef idx="2">
+            <a:schemeClr val="accent1"/>
+          </a:effectRef>
+          <a:fontRef idx="minor">
+            <a:schemeClr val="lt1"/>
+          </a:fontRef>
+        </p:style>
+        <p:txBody>
+          <a:bodyPr rtlCol="0" anchor="ctr"/>
+          <a:lstStyle/>
+          <a:p>
+            <a:pPr algn="ctr"/>
+          </a:p>
+        </p:txBody>
+      </p:sp>
+      <p:sp>
+        <p:nvSpPr>
+          <p:cNvPr id="4" name="TextBox 3"/>
+          <p:cNvSpPr txBox="1"/>
+          <p:nvPr/>
+        </p:nvSpPr>
+        <p:spPr>
+          <a:xfrm>
+            <a:off x="502920" y="365760"/>
+            <a:ext cx="11155680" cy="502920"/>
+          </a:xfrm>
+          <a:prstGeom prst="rect">
+            <a:avLst/>
+          </a:prstGeom>
+          <a:noFill/>
+        </p:spPr>
+        <p:txBody>
+          <a:bodyPr wrap="square" lIns="0" rIns="0" tIns="0" bIns="0">
+            <a:spAutoFit/>
+          </a:bodyPr>
+          <a:lstStyle/>
+          <a:p>
+            <a:pPr algn="l"/>
+            <a:r>
+              <a:rPr sz="2800" b="1">
+                <a:solidFill>
+                  <a:srgbClr val="14315A"/>
+                </a:solidFill>
+              </a:rPr>
+              <a:t>Updated pipeline — extraction to Monte Carlo to trade</a:t>
+            </a:r>
+          </a:p>
+        </p:txBody>
+      </p:sp>
+      <p:sp>
+        <p:nvSpPr>
+          <p:cNvPr id="5" name="TextBox 4"/>
+          <p:cNvSpPr txBox="1"/>
+          <p:nvPr/>
+        </p:nvSpPr>
+        <p:spPr>
+          <a:xfrm>
+            <a:off x="512064" y="923544"/>
+            <a:ext cx="10881360" cy="329184"/>
+          </a:xfrm>
+          <a:prstGeom prst="rect">
+            <a:avLst/>
+          </a:prstGeom>
+          <a:noFill/>
+        </p:spPr>
+        <p:txBody>
+          <a:bodyPr wrap="square" lIns="0" rIns="0" tIns="0" bIns="0">
+            <a:spAutoFit/>
+          </a:bodyPr>
+          <a:lstStyle/>
+          <a:p>
+            <a:pPr algn="l"/>
+            <a:r>
+              <a:rPr sz="1350" b="0">
+                <a:solidFill>
+                  <a:srgbClr val="475569"/>
+                </a:solidFill>
+              </a:rPr>
+              <a:t>Full current flow: 2,068 raw deals → 73 clean labels → a calibrated model → a trade blotter</a:t>
+            </a:r>
+          </a:p>
+        </p:txBody>
+      </p:sp>
+      <p:sp>
+        <p:nvSpPr>
+          <p:cNvPr id="6" name="TextBox 5"/>
+          <p:cNvSpPr txBox="1"/>
+          <p:nvPr/>
+        </p:nvSpPr>
+        <p:spPr>
+          <a:xfrm>
+            <a:off x="502920" y="6473952"/>
+            <a:ext cx="6858000" cy="182880"/>
+          </a:xfrm>
+          <a:prstGeom prst="rect">
+            <a:avLst/>
+          </a:prstGeom>
+          <a:noFill/>
+        </p:spPr>
+        <p:txBody>
+          <a:bodyPr wrap="square" lIns="0" rIns="0" tIns="0" bIns="0">
+            <a:spAutoFit/>
+          </a:bodyPr>
+          <a:lstStyle/>
+          <a:p>
+            <a:pPr algn="l"/>
+            <a:r>
+              <a:rPr sz="780" b="0">
+                <a:solidFill>
+                  <a:srgbClr val="475569"/>
+                </a:solidFill>
+              </a:rPr>
+              <a:t>JPM Project 3ii · Weekly workflow validation</a:t>
+            </a:r>
+          </a:p>
+        </p:txBody>
+      </p:sp>
+      <p:sp>
+        <p:nvSpPr>
+          <p:cNvPr id="7" name="Rectangle 6"/>
+          <p:cNvSpPr/>
+          <p:nvPr/>
+        </p:nvSpPr>
+        <p:spPr>
+          <a:xfrm>
+            <a:off x="594360" y="1481328"/>
+            <a:ext cx="1417320" cy="676656"/>
+          </a:xfrm>
+          <a:prstGeom prst="rect">
+            <a:avLst/>
+          </a:prstGeom>
+          <a:solidFill>
+            <a:srgbClr val="EAF2FF"/>
+          </a:solidFill>
+          <a:ln>
+            <a:noFill/>
+          </a:ln>
+          <a:effectLst/>
+        </p:spPr>
+        <p:style>
+          <a:lnRef idx="1">
+            <a:schemeClr val="accent1"/>
+          </a:lnRef>
+          <a:fillRef idx="3">
+            <a:schemeClr val="accent1"/>
+          </a:fillRef>
+          <a:effectRef idx="2">
+            <a:schemeClr val="accent1"/>
+          </a:effectRef>
+          <a:fontRef idx="minor">
+            <a:schemeClr val="lt1"/>
+          </a:fontRef>
+        </p:style>
+        <p:txBody>
+          <a:bodyPr rtlCol="0" anchor="ctr"/>
+          <a:lstStyle/>
+          <a:p>
+            <a:pPr algn="ctr"/>
+          </a:p>
+        </p:txBody>
+      </p:sp>
+      <p:sp>
+        <p:nvSpPr>
+          <p:cNvPr id="8" name="TextBox 7"/>
+          <p:cNvSpPr txBox="1"/>
+          <p:nvPr/>
+        </p:nvSpPr>
+        <p:spPr>
+          <a:xfrm>
+            <a:off x="676656" y="1600200"/>
+            <a:ext cx="1252728" cy="182880"/>
+          </a:xfrm>
+          <a:prstGeom prst="rect">
+            <a:avLst/>
+          </a:prstGeom>
+          <a:noFill/>
+        </p:spPr>
+        <p:txBody>
+          <a:bodyPr wrap="square" lIns="0" rIns="0" tIns="0" bIns="0">
+            <a:spAutoFit/>
+          </a:bodyPr>
+          <a:lstStyle/>
+          <a:p>
+            <a:pPr algn="ctr"/>
+            <a:r>
+              <a:rPr sz="880" b="1">
+                <a:solidFill>
+                  <a:srgbClr val="14315A"/>
+                </a:solidFill>
+              </a:rPr>
+              <a:t>Universe</a:t>
+            </a:r>
+          </a:p>
+        </p:txBody>
+      </p:sp>
+      <p:sp>
+        <p:nvSpPr>
+          <p:cNvPr id="9" name="TextBox 8"/>
+          <p:cNvSpPr txBox="1"/>
+          <p:nvPr/>
+        </p:nvSpPr>
+        <p:spPr>
+          <a:xfrm>
+            <a:off x="676656" y="1837944"/>
+            <a:ext cx="1252728" cy="182880"/>
+          </a:xfrm>
+          <a:prstGeom prst="rect">
+            <a:avLst/>
+          </a:prstGeom>
+          <a:noFill/>
+        </p:spPr>
+        <p:txBody>
+          <a:bodyPr wrap="square" lIns="0" rIns="0" tIns="0" bIns="0">
+            <a:spAutoFit/>
+          </a:bodyPr>
+          <a:lstStyle/>
+          <a:p>
+            <a:pPr algn="ctr"/>
+            <a:r>
+              <a:rPr sz="720" b="0">
+                <a:solidFill>
+                  <a:srgbClr val="475569"/>
+                </a:solidFill>
+              </a:rPr>
+              <a:t>2,068 → 317</a:t>
+            </a:r>
+          </a:p>
+        </p:txBody>
+      </p:sp>
+      <p:sp>
+        <p:nvSpPr>
+          <p:cNvPr id="10" name="Rectangle 9"/>
+          <p:cNvSpPr/>
+          <p:nvPr/>
+        </p:nvSpPr>
+        <p:spPr>
+          <a:xfrm>
+            <a:off x="2057400" y="1737360"/>
+            <a:ext cx="146304" cy="182880"/>
+          </a:xfrm>
+          <a:prstGeom prst="rect">
+            <a:avLst/>
+          </a:prstGeom>
+          <a:solidFill>
+            <a:srgbClr val="CBD5E1"/>
+          </a:solidFill>
+          <a:ln>
+            <a:noFill/>
+          </a:ln>
+          <a:effectLst/>
+        </p:spPr>
+        <p:style>
+          <a:lnRef idx="1">
+            <a:schemeClr val="accent1"/>
+          </a:lnRef>
+          <a:fillRef idx="3">
+            <a:schemeClr val="accent1"/>
+          </a:fillRef>
+          <a:effectRef idx="2">
+            <a:schemeClr val="accent1"/>
+          </a:effectRef>
+          <a:fontRef idx="minor">
+            <a:schemeClr val="lt1"/>
+          </a:fontRef>
+        </p:style>
+        <p:txBody>
+          <a:bodyPr rtlCol="0" anchor="ctr"/>
+          <a:lstStyle/>
+          <a:p>
+            <a:pPr algn="ctr"/>
+          </a:p>
+        </p:txBody>
+      </p:sp>
+      <p:sp>
+        <p:nvSpPr>
+          <p:cNvPr id="11" name="Rectangle 10"/>
+          <p:cNvSpPr/>
+          <p:nvPr/>
+        </p:nvSpPr>
+        <p:spPr>
+          <a:xfrm>
+            <a:off x="2468879" y="1481328"/>
+            <a:ext cx="1417320" cy="676656"/>
+          </a:xfrm>
+          <a:prstGeom prst="rect">
+            <a:avLst/>
+          </a:prstGeom>
+          <a:solidFill>
+            <a:srgbClr val="EAF2FF"/>
+          </a:solidFill>
+          <a:ln>
+            <a:noFill/>
+          </a:ln>
+          <a:effectLst/>
+        </p:spPr>
+        <p:style>
+          <a:lnRef idx="1">
+            <a:schemeClr val="accent1"/>
+          </a:lnRef>
+          <a:fillRef idx="3">
+            <a:schemeClr val="accent1"/>
+          </a:fillRef>
+          <a:effectRef idx="2">
+            <a:schemeClr val="accent1"/>
+          </a:effectRef>
+          <a:fontRef idx="minor">
+            <a:schemeClr val="lt1"/>
+          </a:fontRef>
+        </p:style>
+        <p:txBody>
+          <a:bodyPr rtlCol="0" anchor="ctr"/>
+          <a:lstStyle/>
+          <a:p>
+            <a:pPr algn="ctr"/>
+          </a:p>
+        </p:txBody>
+      </p:sp>
+      <p:sp>
+        <p:nvSpPr>
+          <p:cNvPr id="12" name="TextBox 11"/>
+          <p:cNvSpPr txBox="1"/>
+          <p:nvPr/>
+        </p:nvSpPr>
+        <p:spPr>
+          <a:xfrm>
+            <a:off x="2551175" y="1600200"/>
+            <a:ext cx="1252728" cy="182880"/>
+          </a:xfrm>
+          <a:prstGeom prst="rect">
+            <a:avLst/>
+          </a:prstGeom>
+          <a:noFill/>
+        </p:spPr>
+        <p:txBody>
+          <a:bodyPr wrap="square" lIns="0" rIns="0" tIns="0" bIns="0">
+            <a:spAutoFit/>
+          </a:bodyPr>
+          <a:lstStyle/>
+          <a:p>
+            <a:pPr algn="ctr"/>
+            <a:r>
+              <a:rPr sz="880" b="1">
+                <a:solidFill>
+                  <a:srgbClr val="14315A"/>
+                </a:solidFill>
+              </a:rPr>
+              <a:t>SEC + Claude</a:t>
+            </a:r>
+          </a:p>
+        </p:txBody>
+      </p:sp>
+      <p:sp>
+        <p:nvSpPr>
+          <p:cNvPr id="13" name="TextBox 12"/>
+          <p:cNvSpPr txBox="1"/>
+          <p:nvPr/>
+        </p:nvSpPr>
+        <p:spPr>
+          <a:xfrm>
+            <a:off x="2551175" y="1837944"/>
+            <a:ext cx="1252728" cy="182880"/>
+          </a:xfrm>
+          <a:prstGeom prst="rect">
+            <a:avLst/>
+          </a:prstGeom>
+          <a:noFill/>
+        </p:spPr>
+        <p:txBody>
+          <a:bodyPr wrap="square" lIns="0" rIns="0" tIns="0" bIns="0">
+            <a:spAutoFit/>
+          </a:bodyPr>
+          <a:lstStyle/>
+          <a:p>
+            <a:pPr algn="ctr"/>
+            <a:r>
+              <a:rPr sz="720" b="0">
+                <a:solidFill>
+                  <a:srgbClr val="475569"/>
+                </a:solidFill>
+              </a:rPr>
+              <a:t>field extraction</a:t>
+            </a:r>
+          </a:p>
+        </p:txBody>
+      </p:sp>
+      <p:sp>
+        <p:nvSpPr>
+          <p:cNvPr id="14" name="Rectangle 13"/>
+          <p:cNvSpPr/>
+          <p:nvPr/>
+        </p:nvSpPr>
+        <p:spPr>
+          <a:xfrm>
+            <a:off x="3931920" y="1737360"/>
+            <a:ext cx="146304" cy="182880"/>
+          </a:xfrm>
+          <a:prstGeom prst="rect">
+            <a:avLst/>
+          </a:prstGeom>
+          <a:solidFill>
+            <a:srgbClr val="CBD5E1"/>
+          </a:solidFill>
+          <a:ln>
+            <a:noFill/>
+          </a:ln>
+          <a:effectLst/>
+        </p:spPr>
+        <p:style>
+          <a:lnRef idx="1">
+            <a:schemeClr val="accent1"/>
+          </a:lnRef>
+          <a:fillRef idx="3">
+            <a:schemeClr val="accent1"/>
+          </a:fillRef>
+          <a:effectRef idx="2">
+            <a:schemeClr val="accent1"/>
+          </a:effectRef>
+          <a:fontRef idx="minor">
+            <a:schemeClr val="lt1"/>
+          </a:fontRef>
+        </p:style>
+        <p:txBody>
+          <a:bodyPr rtlCol="0" anchor="ctr"/>
+          <a:lstStyle/>
+          <a:p>
+            <a:pPr algn="ctr"/>
+          </a:p>
+        </p:txBody>
+      </p:sp>
+      <p:sp>
+        <p:nvSpPr>
+          <p:cNvPr id="15" name="Rectangle 14"/>
+          <p:cNvSpPr/>
+          <p:nvPr/>
+        </p:nvSpPr>
+        <p:spPr>
+          <a:xfrm>
+            <a:off x="4343400" y="1481328"/>
+            <a:ext cx="1417320" cy="676656"/>
+          </a:xfrm>
+          <a:prstGeom prst="rect">
+            <a:avLst/>
+          </a:prstGeom>
+          <a:solidFill>
+            <a:srgbClr val="EAF2FF"/>
+          </a:solidFill>
+          <a:ln>
+            <a:noFill/>
+          </a:ln>
+          <a:effectLst/>
+        </p:spPr>
+        <p:style>
+          <a:lnRef idx="1">
+            <a:schemeClr val="accent1"/>
+          </a:lnRef>
+          <a:fillRef idx="3">
+            <a:schemeClr val="accent1"/>
+          </a:fillRef>
+          <a:effectRef idx="2">
+            <a:schemeClr val="accent1"/>
+          </a:effectRef>
+          <a:fontRef idx="minor">
+            <a:schemeClr val="lt1"/>
+          </a:fontRef>
+        </p:style>
+        <p:txBody>
+          <a:bodyPr rtlCol="0" anchor="ctr"/>
+          <a:lstStyle/>
+          <a:p>
+            <a:pPr algn="ctr"/>
+          </a:p>
+        </p:txBody>
+      </p:sp>
+      <p:sp>
+        <p:nvSpPr>
+          <p:cNvPr id="16" name="TextBox 15"/>
+          <p:cNvSpPr txBox="1"/>
+          <p:nvPr/>
+        </p:nvSpPr>
+        <p:spPr>
+          <a:xfrm>
+            <a:off x="4425696" y="1600200"/>
+            <a:ext cx="1252728" cy="182880"/>
+          </a:xfrm>
+          <a:prstGeom prst="rect">
+            <a:avLst/>
+          </a:prstGeom>
+          <a:noFill/>
+        </p:spPr>
+        <p:txBody>
+          <a:bodyPr wrap="square" lIns="0" rIns="0" tIns="0" bIns="0">
+            <a:spAutoFit/>
+          </a:bodyPr>
+          <a:lstStyle/>
+          <a:p>
+            <a:pPr algn="ctr"/>
+            <a:r>
+              <a:rPr sz="880" b="1">
+                <a:solidFill>
+                  <a:srgbClr val="14315A"/>
+                </a:solidFill>
+              </a:rPr>
+              <a:t>WRDS</a:t>
+            </a:r>
+          </a:p>
+        </p:txBody>
+      </p:sp>
+      <p:sp>
+        <p:nvSpPr>
+          <p:cNvPr id="17" name="TextBox 16"/>
+          <p:cNvSpPr txBox="1"/>
+          <p:nvPr/>
+        </p:nvSpPr>
+        <p:spPr>
+          <a:xfrm>
+            <a:off x="4425696" y="1837944"/>
+            <a:ext cx="1252728" cy="182880"/>
+          </a:xfrm>
+          <a:prstGeom prst="rect">
+            <a:avLst/>
+          </a:prstGeom>
+          <a:noFill/>
+        </p:spPr>
+        <p:txBody>
+          <a:bodyPr wrap="square" lIns="0" rIns="0" tIns="0" bIns="0">
+            <a:spAutoFit/>
+          </a:bodyPr>
+          <a:lstStyle/>
+          <a:p>
+            <a:pPr algn="ctr"/>
+            <a:r>
+              <a:rPr sz="720" b="0">
+                <a:solidFill>
+                  <a:srgbClr val="475569"/>
+                </a:solidFill>
+              </a:rPr>
+              <a:t>prices + own.</a:t>
+            </a:r>
+          </a:p>
+        </p:txBody>
+      </p:sp>
+      <p:sp>
+        <p:nvSpPr>
+          <p:cNvPr id="18" name="Rectangle 17"/>
+          <p:cNvSpPr/>
+          <p:nvPr/>
+        </p:nvSpPr>
+        <p:spPr>
+          <a:xfrm>
+            <a:off x="5806440" y="1737360"/>
+            <a:ext cx="146304" cy="182880"/>
+          </a:xfrm>
+          <a:prstGeom prst="rect">
+            <a:avLst/>
+          </a:prstGeom>
+          <a:solidFill>
+            <a:srgbClr val="CBD5E1"/>
+          </a:solidFill>
+          <a:ln>
+            <a:noFill/>
+          </a:ln>
+          <a:effectLst/>
+        </p:spPr>
+        <p:style>
+          <a:lnRef idx="1">
+            <a:schemeClr val="accent1"/>
+          </a:lnRef>
+          <a:fillRef idx="3">
+            <a:schemeClr val="accent1"/>
+          </a:fillRef>
+          <a:effectRef idx="2">
+            <a:schemeClr val="accent1"/>
+          </a:effectRef>
+          <a:fontRef idx="minor">
+            <a:schemeClr val="lt1"/>
+          </a:fontRef>
+        </p:style>
+        <p:txBody>
+          <a:bodyPr rtlCol="0" anchor="ctr"/>
+          <a:lstStyle/>
+          <a:p>
+            <a:pPr algn="ctr"/>
+          </a:p>
+        </p:txBody>
+      </p:sp>
+      <p:sp>
+        <p:nvSpPr>
+          <p:cNvPr id="19" name="Rectangle 18"/>
+          <p:cNvSpPr/>
+          <p:nvPr/>
+        </p:nvSpPr>
+        <p:spPr>
+          <a:xfrm>
+            <a:off x="6217920" y="1481328"/>
+            <a:ext cx="1417320" cy="676656"/>
+          </a:xfrm>
+          <a:prstGeom prst="rect">
+            <a:avLst/>
+          </a:prstGeom>
+          <a:solidFill>
+            <a:srgbClr val="EAF2FF"/>
+          </a:solidFill>
+          <a:ln>
+            <a:noFill/>
+          </a:ln>
+          <a:effectLst/>
+        </p:spPr>
+        <p:style>
+          <a:lnRef idx="1">
+            <a:schemeClr val="accent1"/>
+          </a:lnRef>
+          <a:fillRef idx="3">
+            <a:schemeClr val="accent1"/>
+          </a:fillRef>
+          <a:effectRef idx="2">
+            <a:schemeClr val="accent1"/>
+          </a:effectRef>
+          <a:fontRef idx="minor">
+            <a:schemeClr val="lt1"/>
+          </a:fontRef>
+        </p:style>
+        <p:txBody>
+          <a:bodyPr rtlCol="0" anchor="ctr"/>
+          <a:lstStyle/>
+          <a:p>
+            <a:pPr algn="ctr"/>
+          </a:p>
+        </p:txBody>
+      </p:sp>
+      <p:sp>
+        <p:nvSpPr>
+          <p:cNvPr id="20" name="TextBox 19"/>
+          <p:cNvSpPr txBox="1"/>
+          <p:nvPr/>
+        </p:nvSpPr>
+        <p:spPr>
+          <a:xfrm>
+            <a:off x="6300216" y="1600200"/>
+            <a:ext cx="1252728" cy="182880"/>
+          </a:xfrm>
+          <a:prstGeom prst="rect">
+            <a:avLst/>
+          </a:prstGeom>
+          <a:noFill/>
+        </p:spPr>
+        <p:txBody>
+          <a:bodyPr wrap="square" lIns="0" rIns="0" tIns="0" bIns="0">
+            <a:spAutoFit/>
+          </a:bodyPr>
+          <a:lstStyle/>
+          <a:p>
+            <a:pPr algn="ctr"/>
+            <a:r>
+              <a:rPr sz="880" b="1">
+                <a:solidFill>
+                  <a:srgbClr val="14315A"/>
+                </a:solidFill>
+              </a:rPr>
+              <a:t>Labels</a:t>
+            </a:r>
+          </a:p>
+        </p:txBody>
+      </p:sp>
+      <p:sp>
+        <p:nvSpPr>
+          <p:cNvPr id="21" name="TextBox 20"/>
+          <p:cNvSpPr txBox="1"/>
+          <p:nvPr/>
+        </p:nvSpPr>
+        <p:spPr>
+          <a:xfrm>
+            <a:off x="6300216" y="1837944"/>
+            <a:ext cx="1252728" cy="182880"/>
+          </a:xfrm>
+          <a:prstGeom prst="rect">
+            <a:avLst/>
+          </a:prstGeom>
+          <a:noFill/>
+        </p:spPr>
+        <p:txBody>
+          <a:bodyPr wrap="square" lIns="0" rIns="0" tIns="0" bIns="0">
+            <a:spAutoFit/>
+          </a:bodyPr>
+          <a:lstStyle/>
+          <a:p>
+            <a:pPr algn="ctr"/>
+            <a:r>
+              <a:rPr sz="720" b="0">
+                <a:solidFill>
+                  <a:srgbClr val="475569"/>
+                </a:solidFill>
+              </a:rPr>
+              <a:t>73 clean demand</a:t>
+            </a:r>
+          </a:p>
+        </p:txBody>
+      </p:sp>
+      <p:sp>
+        <p:nvSpPr>
+          <p:cNvPr id="22" name="Rectangle 21"/>
+          <p:cNvSpPr/>
+          <p:nvPr/>
+        </p:nvSpPr>
+        <p:spPr>
+          <a:xfrm>
+            <a:off x="7680960" y="1737360"/>
+            <a:ext cx="146304" cy="182880"/>
+          </a:xfrm>
+          <a:prstGeom prst="rect">
+            <a:avLst/>
+          </a:prstGeom>
+          <a:solidFill>
+            <a:srgbClr val="CBD5E1"/>
+          </a:solidFill>
+          <a:ln>
+            <a:noFill/>
+          </a:ln>
+          <a:effectLst/>
+        </p:spPr>
+        <p:style>
+          <a:lnRef idx="1">
+            <a:schemeClr val="accent1"/>
+          </a:lnRef>
+          <a:fillRef idx="3">
+            <a:schemeClr val="accent1"/>
+          </a:fillRef>
+          <a:effectRef idx="2">
+            <a:schemeClr val="accent1"/>
+          </a:effectRef>
+          <a:fontRef idx="minor">
+            <a:schemeClr val="lt1"/>
+          </a:fontRef>
+        </p:style>
+        <p:txBody>
+          <a:bodyPr rtlCol="0" anchor="ctr"/>
+          <a:lstStyle/>
+          <a:p>
+            <a:pPr algn="ctr"/>
+          </a:p>
+        </p:txBody>
+      </p:sp>
+      <p:sp>
+        <p:nvSpPr>
+          <p:cNvPr id="23" name="Rectangle 22"/>
+          <p:cNvSpPr/>
+          <p:nvPr/>
+        </p:nvSpPr>
+        <p:spPr>
+          <a:xfrm>
+            <a:off x="8092440" y="1481328"/>
+            <a:ext cx="1417320" cy="676656"/>
+          </a:xfrm>
+          <a:prstGeom prst="rect">
+            <a:avLst/>
+          </a:prstGeom>
+          <a:solidFill>
+            <a:srgbClr val="EAF2FF"/>
+          </a:solidFill>
+          <a:ln>
+            <a:noFill/>
+          </a:ln>
+          <a:effectLst/>
+        </p:spPr>
+        <p:style>
+          <a:lnRef idx="1">
+            <a:schemeClr val="accent1"/>
+          </a:lnRef>
+          <a:fillRef idx="3">
+            <a:schemeClr val="accent1"/>
+          </a:fillRef>
+          <a:effectRef idx="2">
+            <a:schemeClr val="accent1"/>
+          </a:effectRef>
+          <a:fontRef idx="minor">
+            <a:schemeClr val="lt1"/>
+          </a:fontRef>
+        </p:style>
+        <p:txBody>
+          <a:bodyPr rtlCol="0" anchor="ctr"/>
+          <a:lstStyle/>
+          <a:p>
+            <a:pPr algn="ctr"/>
+          </a:p>
+        </p:txBody>
+      </p:sp>
+      <p:sp>
+        <p:nvSpPr>
+          <p:cNvPr id="24" name="TextBox 23"/>
+          <p:cNvSpPr txBox="1"/>
+          <p:nvPr/>
+        </p:nvSpPr>
+        <p:spPr>
+          <a:xfrm>
+            <a:off x="8174736" y="1600200"/>
+            <a:ext cx="1252728" cy="182880"/>
+          </a:xfrm>
+          <a:prstGeom prst="rect">
+            <a:avLst/>
+          </a:prstGeom>
+          <a:noFill/>
+        </p:spPr>
+        <p:txBody>
+          <a:bodyPr wrap="square" lIns="0" rIns="0" tIns="0" bIns="0">
+            <a:spAutoFit/>
+          </a:bodyPr>
+          <a:lstStyle/>
+          <a:p>
+            <a:pPr algn="ctr"/>
+            <a:r>
+              <a:rPr sz="880" b="1">
+                <a:solidFill>
+                  <a:srgbClr val="14315A"/>
+                </a:solidFill>
+              </a:rPr>
+              <a:t>Monte Carlo</a:t>
+            </a:r>
+          </a:p>
+        </p:txBody>
+      </p:sp>
+      <p:sp>
+        <p:nvSpPr>
+          <p:cNvPr id="25" name="TextBox 24"/>
+          <p:cNvSpPr txBox="1"/>
+          <p:nvPr/>
+        </p:nvSpPr>
+        <p:spPr>
+          <a:xfrm>
+            <a:off x="8174736" y="1837944"/>
+            <a:ext cx="1252728" cy="182880"/>
+          </a:xfrm>
+          <a:prstGeom prst="rect">
+            <a:avLst/>
+          </a:prstGeom>
+          <a:noFill/>
+        </p:spPr>
+        <p:txBody>
+          <a:bodyPr wrap="square" lIns="0" rIns="0" tIns="0" bIns="0">
+            <a:spAutoFit/>
+          </a:bodyPr>
+          <a:lstStyle/>
+          <a:p>
+            <a:pPr algn="ctr"/>
+            <a:r>
+              <a:rPr sz="720" b="0">
+                <a:solidFill>
+                  <a:srgbClr val="475569"/>
+                </a:solidFill>
+              </a:rPr>
+              <a:t>demand → payoff</a:t>
+            </a:r>
+          </a:p>
+        </p:txBody>
+      </p:sp>
+      <p:sp>
+        <p:nvSpPr>
+          <p:cNvPr id="26" name="Rectangle 25"/>
+          <p:cNvSpPr/>
+          <p:nvPr/>
+        </p:nvSpPr>
+        <p:spPr>
+          <a:xfrm>
+            <a:off x="9555480" y="1737360"/>
+            <a:ext cx="146304" cy="182880"/>
+          </a:xfrm>
+          <a:prstGeom prst="rect">
+            <a:avLst/>
+          </a:prstGeom>
+          <a:solidFill>
+            <a:srgbClr val="CBD5E1"/>
+          </a:solidFill>
+          <a:ln>
+            <a:noFill/>
+          </a:ln>
+          <a:effectLst/>
+        </p:spPr>
+        <p:style>
+          <a:lnRef idx="1">
+            <a:schemeClr val="accent1"/>
+          </a:lnRef>
+          <a:fillRef idx="3">
+            <a:schemeClr val="accent1"/>
+          </a:fillRef>
+          <a:effectRef idx="2">
+            <a:schemeClr val="accent1"/>
+          </a:effectRef>
+          <a:fontRef idx="minor">
+            <a:schemeClr val="lt1"/>
+          </a:fontRef>
+        </p:style>
+        <p:txBody>
+          <a:bodyPr rtlCol="0" anchor="ctr"/>
+          <a:lstStyle/>
+          <a:p>
+            <a:pPr algn="ctr"/>
+          </a:p>
+        </p:txBody>
+      </p:sp>
+      <p:sp>
+        <p:nvSpPr>
+          <p:cNvPr id="27" name="Rectangle 26"/>
+          <p:cNvSpPr/>
+          <p:nvPr/>
+        </p:nvSpPr>
+        <p:spPr>
+          <a:xfrm>
+            <a:off x="9966959" y="1481328"/>
+            <a:ext cx="1417320" cy="676656"/>
+          </a:xfrm>
+          <a:prstGeom prst="rect">
+            <a:avLst/>
+          </a:prstGeom>
+          <a:solidFill>
+            <a:srgbClr val="EAF2FF"/>
+          </a:solidFill>
+          <a:ln>
+            <a:noFill/>
+          </a:ln>
+          <a:effectLst/>
+        </p:spPr>
+        <p:style>
+          <a:lnRef idx="1">
+            <a:schemeClr val="accent1"/>
+          </a:lnRef>
+          <a:fillRef idx="3">
+            <a:schemeClr val="accent1"/>
+          </a:fillRef>
+          <a:effectRef idx="2">
+            <a:schemeClr val="accent1"/>
+          </a:effectRef>
+          <a:fontRef idx="minor">
+            <a:schemeClr val="lt1"/>
+          </a:fontRef>
+        </p:style>
+        <p:txBody>
+          <a:bodyPr rtlCol="0" anchor="ctr"/>
+          <a:lstStyle/>
+          <a:p>
+            <a:pPr algn="ctr"/>
+          </a:p>
+        </p:txBody>
+      </p:sp>
+      <p:sp>
+        <p:nvSpPr>
+          <p:cNvPr id="28" name="TextBox 27"/>
+          <p:cNvSpPr txBox="1"/>
+          <p:nvPr/>
+        </p:nvSpPr>
+        <p:spPr>
+          <a:xfrm>
+            <a:off x="10049255" y="1600200"/>
+            <a:ext cx="1252728" cy="182880"/>
+          </a:xfrm>
+          <a:prstGeom prst="rect">
+            <a:avLst/>
+          </a:prstGeom>
+          <a:noFill/>
+        </p:spPr>
+        <p:txBody>
+          <a:bodyPr wrap="square" lIns="0" rIns="0" tIns="0" bIns="0">
+            <a:spAutoFit/>
+          </a:bodyPr>
+          <a:lstStyle/>
+          <a:p>
+            <a:pPr algn="ctr"/>
+            <a:r>
+              <a:rPr sz="880" b="1">
+                <a:solidFill>
+                  <a:srgbClr val="14315A"/>
+                </a:solidFill>
+              </a:rPr>
+              <a:t>Trade blotter</a:t>
+            </a:r>
+          </a:p>
+        </p:txBody>
+      </p:sp>
+      <p:sp>
+        <p:nvSpPr>
+          <p:cNvPr id="29" name="TextBox 28"/>
+          <p:cNvSpPr txBox="1"/>
+          <p:nvPr/>
+        </p:nvSpPr>
+        <p:spPr>
+          <a:xfrm>
+            <a:off x="10049255" y="1837944"/>
+            <a:ext cx="1252728" cy="182880"/>
+          </a:xfrm>
+          <a:prstGeom prst="rect">
+            <a:avLst/>
+          </a:prstGeom>
+          <a:noFill/>
+        </p:spPr>
+        <p:txBody>
+          <a:bodyPr wrap="square" lIns="0" rIns="0" tIns="0" bIns="0">
+            <a:spAutoFit/>
+          </a:bodyPr>
+          <a:lstStyle/>
+          <a:p>
+            <a:pPr algn="ctr"/>
+            <a:r>
+              <a:rPr sz="720" b="0">
+                <a:solidFill>
+                  <a:srgbClr val="475569"/>
+                </a:solidFill>
+              </a:rPr>
+              <a:t>entry + hedge</a:t>
+            </a:r>
+          </a:p>
+        </p:txBody>
+      </p:sp>
+      <p:sp>
+        <p:nvSpPr>
+          <p:cNvPr id="30" name="Rectangle 29"/>
+          <p:cNvSpPr/>
+          <p:nvPr/>
+        </p:nvSpPr>
+        <p:spPr>
+          <a:xfrm>
+            <a:off x="640080" y="2514600"/>
+            <a:ext cx="10927080" cy="384048"/>
+          </a:xfrm>
+          <a:prstGeom prst="rect">
+            <a:avLst/>
+          </a:prstGeom>
+          <a:solidFill>
+            <a:srgbClr val="14315A"/>
+          </a:solidFill>
+          <a:ln>
+            <a:noFill/>
+          </a:ln>
+          <a:effectLst/>
+        </p:spPr>
+        <p:style>
+          <a:lnRef idx="1">
+            <a:schemeClr val="accent1"/>
+          </a:lnRef>
+          <a:fillRef idx="3">
+            <a:schemeClr val="accent1"/>
+          </a:fillRef>
+          <a:effectRef idx="2">
+            <a:schemeClr val="accent1"/>
+          </a:effectRef>
+          <a:fontRef idx="minor">
+            <a:schemeClr val="lt1"/>
+          </a:fontRef>
+        </p:style>
+        <p:txBody>
+          <a:bodyPr rtlCol="0" anchor="ctr"/>
+          <a:lstStyle/>
+          <a:p>
+            <a:pPr algn="ctr"/>
+          </a:p>
+        </p:txBody>
+      </p:sp>
+      <p:sp>
+        <p:nvSpPr>
+          <p:cNvPr id="31" name="TextBox 30"/>
+          <p:cNvSpPr txBox="1"/>
+          <p:nvPr/>
+        </p:nvSpPr>
+        <p:spPr>
+          <a:xfrm>
+            <a:off x="713231" y="2633472"/>
+            <a:ext cx="2907791" cy="182880"/>
+          </a:xfrm>
+          <a:prstGeom prst="rect">
+            <a:avLst/>
+          </a:prstGeom>
+          <a:noFill/>
+        </p:spPr>
+        <p:txBody>
+          <a:bodyPr wrap="square" lIns="0" rIns="0" tIns="0" bIns="0">
+            <a:spAutoFit/>
+          </a:bodyPr>
+          <a:lstStyle/>
+          <a:p>
+            <a:pPr algn="l"/>
+            <a:r>
+              <a:rPr sz="890" b="1">
+                <a:solidFill>
+                  <a:srgbClr val="FFFFFF"/>
+                </a:solidFill>
+              </a:rPr>
+              <a:t>Stage</a:t>
+            </a:r>
+          </a:p>
+        </p:txBody>
+      </p:sp>
+      <p:sp>
+        <p:nvSpPr>
+          <p:cNvPr id="32" name="TextBox 31"/>
+          <p:cNvSpPr txBox="1"/>
+          <p:nvPr/>
+        </p:nvSpPr>
+        <p:spPr>
+          <a:xfrm>
+            <a:off x="3730752" y="2633472"/>
+            <a:ext cx="3502152" cy="182880"/>
+          </a:xfrm>
+          <a:prstGeom prst="rect">
+            <a:avLst/>
+          </a:prstGeom>
+          <a:noFill/>
+        </p:spPr>
+        <p:txBody>
+          <a:bodyPr wrap="square" lIns="0" rIns="0" tIns="0" bIns="0">
+            <a:spAutoFit/>
+          </a:bodyPr>
+          <a:lstStyle/>
+          <a:p>
+            <a:pPr algn="l"/>
+            <a:r>
+              <a:rPr sz="890" b="1">
+                <a:solidFill>
+                  <a:srgbClr val="FFFFFF"/>
+                </a:solidFill>
+              </a:rPr>
+              <a:t>Primary output</a:t>
+            </a:r>
+          </a:p>
+        </p:txBody>
+      </p:sp>
+      <p:sp>
+        <p:nvSpPr>
+          <p:cNvPr id="33" name="TextBox 32"/>
+          <p:cNvSpPr txBox="1"/>
+          <p:nvPr/>
+        </p:nvSpPr>
+        <p:spPr>
+          <a:xfrm>
+            <a:off x="7342632" y="2633472"/>
+            <a:ext cx="4187952" cy="182880"/>
+          </a:xfrm>
+          <a:prstGeom prst="rect">
+            <a:avLst/>
+          </a:prstGeom>
+          <a:noFill/>
+        </p:spPr>
+        <p:txBody>
+          <a:bodyPr wrap="square" lIns="0" rIns="0" tIns="0" bIns="0">
+            <a:spAutoFit/>
+          </a:bodyPr>
+          <a:lstStyle/>
+          <a:p>
+            <a:pPr algn="l"/>
+            <a:r>
+              <a:rPr sz="890" b="1">
+                <a:solidFill>
+                  <a:srgbClr val="FFFFFF"/>
+                </a:solidFill>
+              </a:rPr>
+              <a:t>Current state</a:t>
+            </a:r>
+          </a:p>
+        </p:txBody>
+      </p:sp>
+      <p:sp>
+        <p:nvSpPr>
+          <p:cNvPr id="34" name="Rectangle 33"/>
+          <p:cNvSpPr/>
+          <p:nvPr/>
+        </p:nvSpPr>
+        <p:spPr>
+          <a:xfrm>
+            <a:off x="640080" y="2898648"/>
+            <a:ext cx="10927080" cy="365760"/>
+          </a:xfrm>
+          <a:prstGeom prst="rect">
+            <a:avLst/>
+          </a:prstGeom>
+          <a:solidFill>
+            <a:srgbClr val="FFFFFF"/>
+          </a:solidFill>
+          <a:ln>
+            <a:noFill/>
+          </a:ln>
+          <a:effectLst/>
+        </p:spPr>
+        <p:style>
+          <a:lnRef idx="1">
+            <a:schemeClr val="accent1"/>
+          </a:lnRef>
+          <a:fillRef idx="3">
+            <a:schemeClr val="accent1"/>
+          </a:fillRef>
+          <a:effectRef idx="2">
+            <a:schemeClr val="accent1"/>
+          </a:effectRef>
+          <a:fontRef idx="minor">
+            <a:schemeClr val="lt1"/>
+          </a:fontRef>
+        </p:style>
+        <p:txBody>
+          <a:bodyPr rtlCol="0" anchor="ctr"/>
+          <a:lstStyle/>
+          <a:p>
+            <a:pPr algn="ctr"/>
+          </a:p>
+        </p:txBody>
+      </p:sp>
+      <p:sp>
+        <p:nvSpPr>
+          <p:cNvPr id="35" name="TextBox 34"/>
+          <p:cNvSpPr txBox="1"/>
+          <p:nvPr/>
+        </p:nvSpPr>
+        <p:spPr>
+          <a:xfrm>
+            <a:off x="713231" y="2999232"/>
+            <a:ext cx="2907791" cy="182880"/>
+          </a:xfrm>
+          <a:prstGeom prst="rect">
+            <a:avLst/>
+          </a:prstGeom>
+          <a:noFill/>
+        </p:spPr>
+        <p:txBody>
+          <a:bodyPr wrap="square" lIns="0" rIns="0" tIns="0" bIns="0">
+            <a:spAutoFit/>
+          </a:bodyPr>
+          <a:lstStyle/>
+          <a:p>
+            <a:pPr algn="l"/>
+            <a:r>
+              <a:rPr sz="880" b="0">
+                <a:solidFill>
+                  <a:srgbClr val="0F172A"/>
+                </a:solidFill>
+              </a:rPr>
+              <a:t>0–1  Universe + identifiers</a:t>
+            </a:r>
+          </a:p>
+        </p:txBody>
+      </p:sp>
+      <p:sp>
+        <p:nvSpPr>
+          <p:cNvPr id="36" name="TextBox 35"/>
+          <p:cNvSpPr txBox="1"/>
+          <p:nvPr/>
+        </p:nvSpPr>
+        <p:spPr>
+          <a:xfrm>
+            <a:off x="3730752" y="2999232"/>
+            <a:ext cx="3502152" cy="182880"/>
+          </a:xfrm>
+          <a:prstGeom prst="rect">
+            <a:avLst/>
+          </a:prstGeom>
+          <a:noFill/>
+        </p:spPr>
+        <p:txBody>
+          <a:bodyPr wrap="square" lIns="0" rIns="0" tIns="0" bIns="0">
+            <a:spAutoFit/>
+          </a:bodyPr>
+          <a:lstStyle/>
+          <a:p>
+            <a:pPr algn="l"/>
+            <a:r>
+              <a:rPr sz="880" b="0">
+                <a:solidFill>
+                  <a:srgbClr val="0F172A"/>
+                </a:solidFill>
+              </a:rPr>
+              <a:t>US_election_deals_for_analysis.csv (317)</a:t>
+            </a:r>
+          </a:p>
+        </p:txBody>
+      </p:sp>
+      <p:sp>
+        <p:nvSpPr>
+          <p:cNvPr id="37" name="TextBox 36"/>
+          <p:cNvSpPr txBox="1"/>
+          <p:nvPr/>
+        </p:nvSpPr>
+        <p:spPr>
+          <a:xfrm>
+            <a:off x="7342632" y="2999232"/>
+            <a:ext cx="4187952" cy="182880"/>
+          </a:xfrm>
+          <a:prstGeom prst="rect">
+            <a:avLst/>
+          </a:prstGeom>
+          <a:noFill/>
+        </p:spPr>
+        <p:txBody>
+          <a:bodyPr wrap="square" lIns="0" rIns="0" tIns="0" bIns="0">
+            <a:spAutoFit/>
+          </a:bodyPr>
+          <a:lstStyle/>
+          <a:p>
+            <a:pPr algn="l"/>
+            <a:r>
+              <a:rPr sz="880" b="0">
+                <a:solidFill>
+                  <a:srgbClr val="0F172A"/>
+                </a:solidFill>
+              </a:rPr>
+              <a:t>CIK + acquirer-PERMNO overrides for delisted/renamed</a:t>
+            </a:r>
+          </a:p>
+        </p:txBody>
+      </p:sp>
+      <p:sp>
+        <p:nvSpPr>
+          <p:cNvPr id="38" name="Rectangle 37"/>
+          <p:cNvSpPr/>
+          <p:nvPr/>
+        </p:nvSpPr>
+        <p:spPr>
+          <a:xfrm>
+            <a:off x="640080" y="3264408"/>
+            <a:ext cx="10927080" cy="365760"/>
+          </a:xfrm>
+          <a:prstGeom prst="rect">
+            <a:avLst/>
+          </a:prstGeom>
+          <a:solidFill>
+            <a:srgbClr val="F7F9FC"/>
+          </a:solidFill>
+          <a:ln>
+            <a:noFill/>
+          </a:ln>
+          <a:effectLst/>
+        </p:spPr>
+        <p:style>
+          <a:lnRef idx="1">
+            <a:schemeClr val="accent1"/>
+          </a:lnRef>
+          <a:fillRef idx="3">
+            <a:schemeClr val="accent1"/>
+          </a:fillRef>
+          <a:effectRef idx="2">
+            <a:schemeClr val="accent1"/>
+          </a:effectRef>
+          <a:fontRef idx="minor">
+            <a:schemeClr val="lt1"/>
+          </a:fontRef>
+        </p:style>
+        <p:txBody>
+          <a:bodyPr rtlCol="0" anchor="ctr"/>
+          <a:lstStyle/>
+          <a:p>
+            <a:pPr algn="ctr"/>
+          </a:p>
+        </p:txBody>
+      </p:sp>
+      <p:sp>
+        <p:nvSpPr>
+          <p:cNvPr id="39" name="TextBox 38"/>
+          <p:cNvSpPr txBox="1"/>
+          <p:nvPr/>
+        </p:nvSpPr>
+        <p:spPr>
+          <a:xfrm>
+            <a:off x="713231" y="3364991"/>
+            <a:ext cx="2907791" cy="182880"/>
+          </a:xfrm>
+          <a:prstGeom prst="rect">
+            <a:avLst/>
+          </a:prstGeom>
+          <a:noFill/>
+        </p:spPr>
+        <p:txBody>
+          <a:bodyPr wrap="square" lIns="0" rIns="0" tIns="0" bIns="0">
+            <a:spAutoFit/>
+          </a:bodyPr>
+          <a:lstStyle/>
+          <a:p>
+            <a:pPr algn="l"/>
+            <a:r>
+              <a:rPr sz="880" b="0">
+                <a:solidFill>
+                  <a:srgbClr val="0F172A"/>
+                </a:solidFill>
+              </a:rPr>
+              <a:t>2  SEC + Claude extraction</a:t>
+            </a:r>
+          </a:p>
+        </p:txBody>
+      </p:sp>
+      <p:sp>
+        <p:nvSpPr>
+          <p:cNvPr id="40" name="TextBox 39"/>
+          <p:cNvSpPr txBox="1"/>
+          <p:nvPr/>
+        </p:nvSpPr>
+        <p:spPr>
+          <a:xfrm>
+            <a:off x="3730752" y="3364991"/>
+            <a:ext cx="3502152" cy="182880"/>
+          </a:xfrm>
+          <a:prstGeom prst="rect">
+            <a:avLst/>
+          </a:prstGeom>
+          <a:noFill/>
+        </p:spPr>
+        <p:txBody>
+          <a:bodyPr wrap="square" lIns="0" rIns="0" tIns="0" bIns="0">
+            <a:spAutoFit/>
+          </a:bodyPr>
+          <a:lstStyle/>
+          <a:p>
+            <a:pPr algn="l"/>
+            <a:r>
+              <a:rPr sz="880" b="0">
+                <a:solidFill>
+                  <a:srgbClr val="0F172A"/>
+                </a:solidFill>
+              </a:rPr>
+              <a:t>ma_edgar_full/llm_field_extractions.csv</a:t>
+            </a:r>
+          </a:p>
+        </p:txBody>
+      </p:sp>
+      <p:sp>
+        <p:nvSpPr>
+          <p:cNvPr id="41" name="TextBox 40"/>
+          <p:cNvSpPr txBox="1"/>
+          <p:nvPr/>
+        </p:nvSpPr>
+        <p:spPr>
+          <a:xfrm>
+            <a:off x="7342632" y="3364991"/>
+            <a:ext cx="4187952" cy="182880"/>
+          </a:xfrm>
+          <a:prstGeom prst="rect">
+            <a:avLst/>
+          </a:prstGeom>
+          <a:noFill/>
+        </p:spPr>
+        <p:txBody>
+          <a:bodyPr wrap="square" lIns="0" rIns="0" tIns="0" bIns="0">
+            <a:spAutoFit/>
+          </a:bodyPr>
+          <a:lstStyle/>
+          <a:p>
+            <a:pPr algn="l"/>
+            <a:r>
+              <a:rPr sz="880" b="0">
+                <a:solidFill>
+                  <a:srgbClr val="0F172A"/>
+                </a:solidFill>
+              </a:rPr>
+              <a:t>303 deals, 17 canonical fields each</a:t>
+            </a:r>
+          </a:p>
+        </p:txBody>
+      </p:sp>
+      <p:sp>
+        <p:nvSpPr>
+          <p:cNvPr id="42" name="Rectangle 41"/>
+          <p:cNvSpPr/>
+          <p:nvPr/>
+        </p:nvSpPr>
+        <p:spPr>
+          <a:xfrm>
+            <a:off x="640080" y="3630168"/>
+            <a:ext cx="10927080" cy="365760"/>
+          </a:xfrm>
+          <a:prstGeom prst="rect">
+            <a:avLst/>
+          </a:prstGeom>
+          <a:solidFill>
+            <a:srgbClr val="FFFFFF"/>
+          </a:solidFill>
+          <a:ln>
+            <a:noFill/>
+          </a:ln>
+          <a:effectLst/>
+        </p:spPr>
+        <p:style>
+          <a:lnRef idx="1">
+            <a:schemeClr val="accent1"/>
+          </a:lnRef>
+          <a:fillRef idx="3">
+            <a:schemeClr val="accent1"/>
+          </a:fillRef>
+          <a:effectRef idx="2">
+            <a:schemeClr val="accent1"/>
+          </a:effectRef>
+          <a:fontRef idx="minor">
+            <a:schemeClr val="lt1"/>
+          </a:fontRef>
+        </p:style>
+        <p:txBody>
+          <a:bodyPr rtlCol="0" anchor="ctr"/>
+          <a:lstStyle/>
+          <a:p>
+            <a:pPr algn="ctr"/>
+          </a:p>
+        </p:txBody>
+      </p:sp>
+      <p:sp>
+        <p:nvSpPr>
+          <p:cNvPr id="43" name="TextBox 42"/>
+          <p:cNvSpPr txBox="1"/>
+          <p:nvPr/>
+        </p:nvSpPr>
+        <p:spPr>
+          <a:xfrm>
+            <a:off x="713231" y="3730752"/>
+            <a:ext cx="2907791" cy="182880"/>
+          </a:xfrm>
+          <a:prstGeom prst="rect">
+            <a:avLst/>
+          </a:prstGeom>
+          <a:noFill/>
+        </p:spPr>
+        <p:txBody>
+          <a:bodyPr wrap="square" lIns="0" rIns="0" tIns="0" bIns="0">
+            <a:spAutoFit/>
+          </a:bodyPr>
+          <a:lstStyle/>
+          <a:p>
+            <a:pPr algn="l"/>
+            <a:r>
+              <a:rPr sz="880" b="0">
+                <a:solidFill>
+                  <a:srgbClr val="0F172A"/>
+                </a:solidFill>
+              </a:rPr>
+              <a:t>3  WRDS market + ownership</a:t>
+            </a:r>
+          </a:p>
+        </p:txBody>
+      </p:sp>
+      <p:sp>
+        <p:nvSpPr>
+          <p:cNvPr id="44" name="TextBox 43"/>
+          <p:cNvSpPr txBox="1"/>
+          <p:nvPr/>
+        </p:nvSpPr>
+        <p:spPr>
+          <a:xfrm>
+            <a:off x="3730752" y="3730752"/>
+            <a:ext cx="3502152" cy="182880"/>
+          </a:xfrm>
+          <a:prstGeom prst="rect">
+            <a:avLst/>
+          </a:prstGeom>
+          <a:noFill/>
+        </p:spPr>
+        <p:txBody>
+          <a:bodyPr wrap="square" lIns="0" rIns="0" tIns="0" bIns="0">
+            <a:spAutoFit/>
+          </a:bodyPr>
+          <a:lstStyle/>
+          <a:p>
+            <a:pPr algn="l"/>
+            <a:r>
+              <a:rPr sz="880" b="0">
+                <a:solidFill>
+                  <a:srgbClr val="0F172A"/>
+                </a:solidFill>
+              </a:rPr>
+              <a:t>wrds_market_daily.csv · ownership_mix</a:t>
+            </a:r>
+          </a:p>
+        </p:txBody>
+      </p:sp>
+      <p:sp>
+        <p:nvSpPr>
+          <p:cNvPr id="45" name="TextBox 44"/>
+          <p:cNvSpPr txBox="1"/>
+          <p:nvPr/>
+        </p:nvSpPr>
+        <p:spPr>
+          <a:xfrm>
+            <a:off x="7342632" y="3730752"/>
+            <a:ext cx="4187952" cy="182880"/>
+          </a:xfrm>
+          <a:prstGeom prst="rect">
+            <a:avLst/>
+          </a:prstGeom>
+          <a:noFill/>
+        </p:spPr>
+        <p:txBody>
+          <a:bodyPr wrap="square" lIns="0" rIns="0" tIns="0" bIns="0">
+            <a:spAutoFit/>
+          </a:bodyPr>
+          <a:lstStyle/>
+          <a:p>
+            <a:pPr algn="l"/>
+            <a:r>
+              <a:rPr sz="880" b="0">
+                <a:solidFill>
+                  <a:srgbClr val="0F172A"/>
+                </a:solidFill>
+              </a:rPr>
+              <a:t>Target + acquirer prices, passive block</a:t>
+            </a:r>
+          </a:p>
+        </p:txBody>
+      </p:sp>
+      <p:sp>
+        <p:nvSpPr>
+          <p:cNvPr id="46" name="Rectangle 45"/>
+          <p:cNvSpPr/>
+          <p:nvPr/>
+        </p:nvSpPr>
+        <p:spPr>
+          <a:xfrm>
+            <a:off x="640080" y="3995928"/>
+            <a:ext cx="10927080" cy="365760"/>
+          </a:xfrm>
+          <a:prstGeom prst="rect">
+            <a:avLst/>
+          </a:prstGeom>
+          <a:solidFill>
+            <a:srgbClr val="F7F9FC"/>
+          </a:solidFill>
+          <a:ln>
+            <a:noFill/>
+          </a:ln>
+          <a:effectLst/>
+        </p:spPr>
+        <p:style>
+          <a:lnRef idx="1">
+            <a:schemeClr val="accent1"/>
+          </a:lnRef>
+          <a:fillRef idx="3">
+            <a:schemeClr val="accent1"/>
+          </a:fillRef>
+          <a:effectRef idx="2">
+            <a:schemeClr val="accent1"/>
+          </a:effectRef>
+          <a:fontRef idx="minor">
+            <a:schemeClr val="lt1"/>
+          </a:fontRef>
+        </p:style>
+        <p:txBody>
+          <a:bodyPr rtlCol="0" anchor="ctr"/>
+          <a:lstStyle/>
+          <a:p>
+            <a:pPr algn="ctr"/>
+          </a:p>
+        </p:txBody>
+      </p:sp>
+      <p:sp>
+        <p:nvSpPr>
+          <p:cNvPr id="47" name="TextBox 46"/>
+          <p:cNvSpPr txBox="1"/>
+          <p:nvPr/>
+        </p:nvSpPr>
+        <p:spPr>
+          <a:xfrm>
+            <a:off x="713231" y="4096512"/>
+            <a:ext cx="2907791" cy="182880"/>
+          </a:xfrm>
+          <a:prstGeom prst="rect">
+            <a:avLst/>
+          </a:prstGeom>
+          <a:noFill/>
+        </p:spPr>
+        <p:txBody>
+          <a:bodyPr wrap="square" lIns="0" rIns="0" tIns="0" bIns="0">
+            <a:spAutoFit/>
+          </a:bodyPr>
+          <a:lstStyle/>
+          <a:p>
+            <a:pPr algn="l"/>
+            <a:r>
+              <a:rPr sz="880" b="0">
+                <a:solidFill>
+                  <a:srgbClr val="0F172A"/>
+                </a:solidFill>
+              </a:rPr>
+              <a:t>4  Normalize labels</a:t>
+            </a:r>
+          </a:p>
+        </p:txBody>
+      </p:sp>
+      <p:sp>
+        <p:nvSpPr>
+          <p:cNvPr id="48" name="TextBox 47"/>
+          <p:cNvSpPr txBox="1"/>
+          <p:nvPr/>
+        </p:nvSpPr>
+        <p:spPr>
+          <a:xfrm>
+            <a:off x="3730752" y="4096512"/>
+            <a:ext cx="3502152" cy="182880"/>
+          </a:xfrm>
+          <a:prstGeom prst="rect">
+            <a:avLst/>
+          </a:prstGeom>
+          <a:noFill/>
+        </p:spPr>
+        <p:txBody>
+          <a:bodyPr wrap="square" lIns="0" rIns="0" tIns="0" bIns="0">
+            <a:spAutoFit/>
+          </a:bodyPr>
+          <a:lstStyle/>
+          <a:p>
+            <a:pPr algn="l"/>
+            <a:r>
+              <a:rPr sz="880" b="0">
+                <a:solidFill>
+                  <a:srgbClr val="0F172A"/>
+                </a:solidFill>
+              </a:rPr>
+              <a:t>normalized_labels.csv</a:t>
+            </a:r>
+          </a:p>
+        </p:txBody>
+      </p:sp>
+      <p:sp>
+        <p:nvSpPr>
+          <p:cNvPr id="49" name="TextBox 48"/>
+          <p:cNvSpPr txBox="1"/>
+          <p:nvPr/>
+        </p:nvSpPr>
+        <p:spPr>
+          <a:xfrm>
+            <a:off x="7342632" y="4096512"/>
+            <a:ext cx="4187952" cy="182880"/>
+          </a:xfrm>
+          <a:prstGeom prst="rect">
+            <a:avLst/>
+          </a:prstGeom>
+          <a:noFill/>
+        </p:spPr>
+        <p:txBody>
+          <a:bodyPr wrap="square" lIns="0" rIns="0" tIns="0" bIns="0">
+            <a:spAutoFit/>
+          </a:bodyPr>
+          <a:lstStyle/>
+          <a:p>
+            <a:pPr algn="l"/>
+            <a:r>
+              <a:rPr sz="880" b="0">
+                <a:solidFill>
+                  <a:srgbClr val="0F172A"/>
+                </a:solidFill>
+              </a:rPr>
+              <a:t>73 clean election-DEMAND labels (near disclosure ceiling)</a:t>
+            </a:r>
+          </a:p>
+        </p:txBody>
+      </p:sp>
+      <p:sp>
+        <p:nvSpPr>
+          <p:cNvPr id="50" name="Rectangle 49"/>
+          <p:cNvSpPr/>
+          <p:nvPr/>
+        </p:nvSpPr>
+        <p:spPr>
+          <a:xfrm>
+            <a:off x="640080" y="4361688"/>
+            <a:ext cx="10927080" cy="365760"/>
+          </a:xfrm>
+          <a:prstGeom prst="rect">
+            <a:avLst/>
+          </a:prstGeom>
+          <a:solidFill>
+            <a:srgbClr val="FFFFFF"/>
+          </a:solidFill>
+          <a:ln>
+            <a:noFill/>
+          </a:ln>
+          <a:effectLst/>
+        </p:spPr>
+        <p:style>
+          <a:lnRef idx="1">
+            <a:schemeClr val="accent1"/>
+          </a:lnRef>
+          <a:fillRef idx="3">
+            <a:schemeClr val="accent1"/>
+          </a:fillRef>
+          <a:effectRef idx="2">
+            <a:schemeClr val="accent1"/>
+          </a:effectRef>
+          <a:fontRef idx="minor">
+            <a:schemeClr val="lt1"/>
+          </a:fontRef>
+        </p:style>
+        <p:txBody>
+          <a:bodyPr rtlCol="0" anchor="ctr"/>
+          <a:lstStyle/>
+          <a:p>
+            <a:pPr algn="ctr"/>
+          </a:p>
+        </p:txBody>
+      </p:sp>
+      <p:sp>
+        <p:nvSpPr>
+          <p:cNvPr id="51" name="TextBox 50"/>
+          <p:cNvSpPr txBox="1"/>
+          <p:nvPr/>
+        </p:nvSpPr>
+        <p:spPr>
+          <a:xfrm>
+            <a:off x="713231" y="4462272"/>
+            <a:ext cx="2907791" cy="182880"/>
+          </a:xfrm>
+          <a:prstGeom prst="rect">
+            <a:avLst/>
+          </a:prstGeom>
+          <a:noFill/>
+        </p:spPr>
+        <p:txBody>
+          <a:bodyPr wrap="square" lIns="0" rIns="0" tIns="0" bIns="0">
+            <a:spAutoFit/>
+          </a:bodyPr>
+          <a:lstStyle/>
+          <a:p>
+            <a:pPr algn="l"/>
+            <a:r>
+              <a:rPr sz="880" b="0">
+                <a:solidFill>
+                  <a:srgbClr val="0F172A"/>
+                </a:solidFill>
+              </a:rPr>
+              <a:t>5  Deadline spread</a:t>
+            </a:r>
+          </a:p>
+        </p:txBody>
+      </p:sp>
+      <p:sp>
+        <p:nvSpPr>
+          <p:cNvPr id="52" name="TextBox 51"/>
+          <p:cNvSpPr txBox="1"/>
+          <p:nvPr/>
+        </p:nvSpPr>
+        <p:spPr>
+          <a:xfrm>
+            <a:off x="3730752" y="4462272"/>
+            <a:ext cx="3502152" cy="182880"/>
+          </a:xfrm>
+          <a:prstGeom prst="rect">
+            <a:avLst/>
+          </a:prstGeom>
+          <a:noFill/>
+        </p:spPr>
+        <p:txBody>
+          <a:bodyPr wrap="square" lIns="0" rIns="0" tIns="0" bIns="0">
+            <a:spAutoFit/>
+          </a:bodyPr>
+          <a:lstStyle/>
+          <a:p>
+            <a:pPr algn="l"/>
+            <a:r>
+              <a:rPr sz="880" b="0">
+                <a:solidFill>
+                  <a:srgbClr val="0F172A"/>
+                </a:solidFill>
+              </a:rPr>
+              <a:t>deadline_spread.csv</a:t>
+            </a:r>
+          </a:p>
+        </p:txBody>
+      </p:sp>
+      <p:sp>
+        <p:nvSpPr>
+          <p:cNvPr id="53" name="TextBox 52"/>
+          <p:cNvSpPr txBox="1"/>
+          <p:nvPr/>
+        </p:nvSpPr>
+        <p:spPr>
+          <a:xfrm>
+            <a:off x="7342632" y="4462272"/>
+            <a:ext cx="4187952" cy="182880"/>
+          </a:xfrm>
+          <a:prstGeom prst="rect">
+            <a:avLst/>
+          </a:prstGeom>
+          <a:noFill/>
+        </p:spPr>
+        <p:txBody>
+          <a:bodyPr wrap="square" lIns="0" rIns="0" tIns="0" bIns="0">
+            <a:spAutoFit/>
+          </a:bodyPr>
+          <a:lstStyle/>
+          <a:p>
+            <a:pPr algn="l"/>
+            <a:r>
+              <a:rPr sz="880" b="0">
+                <a:solidFill>
+                  <a:srgbClr val="0F172A"/>
+                </a:solidFill>
+              </a:rPr>
+              <a:t>Fixed vs floating split (floating = spread≈0, excluded)</a:t>
+            </a:r>
+          </a:p>
+        </p:txBody>
+      </p:sp>
+      <p:sp>
+        <p:nvSpPr>
+          <p:cNvPr id="54" name="Rectangle 53"/>
+          <p:cNvSpPr/>
+          <p:nvPr/>
+        </p:nvSpPr>
+        <p:spPr>
+          <a:xfrm>
+            <a:off x="640080" y="4727448"/>
+            <a:ext cx="10927080" cy="365760"/>
+          </a:xfrm>
+          <a:prstGeom prst="rect">
+            <a:avLst/>
+          </a:prstGeom>
+          <a:solidFill>
+            <a:srgbClr val="F7F9FC"/>
+          </a:solidFill>
+          <a:ln>
+            <a:noFill/>
+          </a:ln>
+          <a:effectLst/>
+        </p:spPr>
+        <p:style>
+          <a:lnRef idx="1">
+            <a:schemeClr val="accent1"/>
+          </a:lnRef>
+          <a:fillRef idx="3">
+            <a:schemeClr val="accent1"/>
+          </a:fillRef>
+          <a:effectRef idx="2">
+            <a:schemeClr val="accent1"/>
+          </a:effectRef>
+          <a:fontRef idx="minor">
+            <a:schemeClr val="lt1"/>
+          </a:fontRef>
+        </p:style>
+        <p:txBody>
+          <a:bodyPr rtlCol="0" anchor="ctr"/>
+          <a:lstStyle/>
+          <a:p>
+            <a:pPr algn="ctr"/>
+          </a:p>
+        </p:txBody>
+      </p:sp>
+      <p:sp>
+        <p:nvSpPr>
+          <p:cNvPr id="55" name="TextBox 54"/>
+          <p:cNvSpPr txBox="1"/>
+          <p:nvPr/>
+        </p:nvSpPr>
+        <p:spPr>
+          <a:xfrm>
+            <a:off x="713231" y="4828032"/>
+            <a:ext cx="2907791" cy="182880"/>
+          </a:xfrm>
+          <a:prstGeom prst="rect">
+            <a:avLst/>
+          </a:prstGeom>
+          <a:noFill/>
+        </p:spPr>
+        <p:txBody>
+          <a:bodyPr wrap="square" lIns="0" rIns="0" tIns="0" bIns="0">
+            <a:spAutoFit/>
+          </a:bodyPr>
+          <a:lstStyle/>
+          <a:p>
+            <a:pPr algn="l"/>
+            <a:r>
+              <a:rPr sz="880" b="0">
+                <a:solidFill>
+                  <a:srgbClr val="0F172A"/>
+                </a:solidFill>
+              </a:rPr>
+              <a:t>6  Monte Carlo  (arb_mc / arb_run)</a:t>
+            </a:r>
+          </a:p>
+        </p:txBody>
+      </p:sp>
+      <p:sp>
+        <p:nvSpPr>
+          <p:cNvPr id="56" name="TextBox 55"/>
+          <p:cNvSpPr txBox="1"/>
+          <p:nvPr/>
+        </p:nvSpPr>
+        <p:spPr>
+          <a:xfrm>
+            <a:off x="3730752" y="4828032"/>
+            <a:ext cx="3502152" cy="182880"/>
+          </a:xfrm>
+          <a:prstGeom prst="rect">
+            <a:avLst/>
+          </a:prstGeom>
+          <a:noFill/>
+        </p:spPr>
+        <p:txBody>
+          <a:bodyPr wrap="square" lIns="0" rIns="0" tIns="0" bIns="0">
+            <a:spAutoFit/>
+          </a:bodyPr>
+          <a:lstStyle/>
+          <a:p>
+            <a:pPr algn="l"/>
+            <a:r>
+              <a:rPr sz="880" b="0">
+                <a:solidFill>
+                  <a:srgbClr val="0F172A"/>
+                </a:solidFill>
+              </a:rPr>
+              <a:t>arb_output/ figures + summary</a:t>
+            </a:r>
+          </a:p>
+        </p:txBody>
+      </p:sp>
+      <p:sp>
+        <p:nvSpPr>
+          <p:cNvPr id="57" name="TextBox 56"/>
+          <p:cNvSpPr txBox="1"/>
+          <p:nvPr/>
+        </p:nvSpPr>
+        <p:spPr>
+          <a:xfrm>
+            <a:off x="7342632" y="4828032"/>
+            <a:ext cx="4187952" cy="182880"/>
+          </a:xfrm>
+          <a:prstGeom prst="rect">
+            <a:avLst/>
+          </a:prstGeom>
+          <a:noFill/>
+        </p:spPr>
+        <p:txBody>
+          <a:bodyPr wrap="square" lIns="0" rIns="0" tIns="0" bIns="0">
+            <a:spAutoFit/>
+          </a:bodyPr>
+          <a:lstStyle/>
+          <a:p>
+            <a:pPr algn="l"/>
+            <a:r>
+              <a:rPr sz="880" b="0">
+                <a:solidFill>
+                  <a:srgbClr val="0F172A"/>
+                </a:solidFill>
+              </a:rPr>
+              <a:t>Demand Beta; calibration KS p = 0.96</a:t>
+            </a:r>
+          </a:p>
+        </p:txBody>
+      </p:sp>
+      <p:sp>
+        <p:nvSpPr>
+          <p:cNvPr id="58" name="Rectangle 57"/>
+          <p:cNvSpPr/>
+          <p:nvPr/>
+        </p:nvSpPr>
+        <p:spPr>
+          <a:xfrm>
+            <a:off x="640080" y="5093208"/>
+            <a:ext cx="10927080" cy="365760"/>
+          </a:xfrm>
+          <a:prstGeom prst="rect">
+            <a:avLst/>
+          </a:prstGeom>
+          <a:solidFill>
+            <a:srgbClr val="FFFFFF"/>
+          </a:solidFill>
+          <a:ln>
+            <a:noFill/>
+          </a:ln>
+          <a:effectLst/>
+        </p:spPr>
+        <p:style>
+          <a:lnRef idx="1">
+            <a:schemeClr val="accent1"/>
+          </a:lnRef>
+          <a:fillRef idx="3">
+            <a:schemeClr val="accent1"/>
+          </a:fillRef>
+          <a:effectRef idx="2">
+            <a:schemeClr val="accent1"/>
+          </a:effectRef>
+          <a:fontRef idx="minor">
+            <a:schemeClr val="lt1"/>
+          </a:fontRef>
+        </p:style>
+        <p:txBody>
+          <a:bodyPr rtlCol="0" anchor="ctr"/>
+          <a:lstStyle/>
+          <a:p>
+            <a:pPr algn="ctr"/>
+          </a:p>
+        </p:txBody>
+      </p:sp>
+      <p:sp>
+        <p:nvSpPr>
+          <p:cNvPr id="59" name="TextBox 58"/>
+          <p:cNvSpPr txBox="1"/>
+          <p:nvPr/>
+        </p:nvSpPr>
+        <p:spPr>
+          <a:xfrm>
+            <a:off x="713231" y="5193792"/>
+            <a:ext cx="2907791" cy="182880"/>
+          </a:xfrm>
+          <a:prstGeom prst="rect">
+            <a:avLst/>
+          </a:prstGeom>
+          <a:noFill/>
+        </p:spPr>
+        <p:txBody>
+          <a:bodyPr wrap="square" lIns="0" rIns="0" tIns="0" bIns="0">
+            <a:spAutoFit/>
+          </a:bodyPr>
+          <a:lstStyle/>
+          <a:p>
+            <a:pPr algn="l"/>
+            <a:r>
+              <a:rPr sz="880" b="0">
+                <a:solidFill>
+                  <a:srgbClr val="0F172A"/>
+                </a:solidFill>
+              </a:rPr>
+              <a:t>7  Trade decision  (arb_signal)</a:t>
+            </a:r>
+          </a:p>
+        </p:txBody>
+      </p:sp>
+      <p:sp>
+        <p:nvSpPr>
+          <p:cNvPr id="60" name="TextBox 59"/>
+          <p:cNvSpPr txBox="1"/>
+          <p:nvPr/>
+        </p:nvSpPr>
+        <p:spPr>
+          <a:xfrm>
+            <a:off x="3730752" y="5193792"/>
+            <a:ext cx="3502152" cy="182880"/>
+          </a:xfrm>
+          <a:prstGeom prst="rect">
+            <a:avLst/>
+          </a:prstGeom>
+          <a:noFill/>
+        </p:spPr>
+        <p:txBody>
+          <a:bodyPr wrap="square" lIns="0" rIns="0" tIns="0" bIns="0">
+            <a:spAutoFit/>
+          </a:bodyPr>
+          <a:lstStyle/>
+          <a:p>
+            <a:pPr algn="l"/>
+            <a:r>
+              <a:rPr sz="880" b="0">
+                <a:solidFill>
+                  <a:srgbClr val="0F172A"/>
+                </a:solidFill>
+              </a:rPr>
+              <a:t>arb_signals.csv</a:t>
+            </a:r>
+          </a:p>
+        </p:txBody>
+      </p:sp>
+      <p:sp>
+        <p:nvSpPr>
+          <p:cNvPr id="61" name="TextBox 60"/>
+          <p:cNvSpPr txBox="1"/>
+          <p:nvPr/>
+        </p:nvSpPr>
+        <p:spPr>
+          <a:xfrm>
+            <a:off x="7342632" y="5193792"/>
+            <a:ext cx="4187952" cy="182880"/>
+          </a:xfrm>
+          <a:prstGeom prst="rect">
+            <a:avLst/>
+          </a:prstGeom>
+          <a:noFill/>
+        </p:spPr>
+        <p:txBody>
+          <a:bodyPr wrap="square" lIns="0" rIns="0" tIns="0" bIns="0">
+            <a:spAutoFit/>
+          </a:bodyPr>
+          <a:lstStyle/>
+          <a:p>
+            <a:pPr algn="l"/>
+            <a:r>
+              <a:rPr sz="880" b="0">
+                <a:solidFill>
+                  <a:srgbClr val="0F172A"/>
+                </a:solidFill>
+              </a:rPr>
+              <a:t>31 deals, 22 ENTER, signal skill corr +0.67</a:t>
+            </a:r>
+          </a:p>
+        </p:txBody>
+      </p:sp>
+      <p:sp>
+        <p:nvSpPr>
+          <p:cNvPr id="62" name="Rectangle 61"/>
+          <p:cNvSpPr/>
+          <p:nvPr/>
+        </p:nvSpPr>
+        <p:spPr>
+          <a:xfrm>
+            <a:off x="640080" y="5458968"/>
+            <a:ext cx="10927080" cy="365760"/>
+          </a:xfrm>
+          <a:prstGeom prst="rect">
+            <a:avLst/>
+          </a:prstGeom>
+          <a:solidFill>
+            <a:srgbClr val="F7F9FC"/>
+          </a:solidFill>
+          <a:ln>
+            <a:noFill/>
+          </a:ln>
+          <a:effectLst/>
+        </p:spPr>
+        <p:style>
+          <a:lnRef idx="1">
+            <a:schemeClr val="accent1"/>
+          </a:lnRef>
+          <a:fillRef idx="3">
+            <a:schemeClr val="accent1"/>
+          </a:fillRef>
+          <a:effectRef idx="2">
+            <a:schemeClr val="accent1"/>
+          </a:effectRef>
+          <a:fontRef idx="minor">
+            <a:schemeClr val="lt1"/>
+          </a:fontRef>
+        </p:style>
+        <p:txBody>
+          <a:bodyPr rtlCol="0" anchor="ctr"/>
+          <a:lstStyle/>
+          <a:p>
+            <a:pPr algn="ctr"/>
+          </a:p>
+        </p:txBody>
+      </p:sp>
+      <p:sp>
+        <p:nvSpPr>
+          <p:cNvPr id="63" name="TextBox 62"/>
+          <p:cNvSpPr txBox="1"/>
+          <p:nvPr/>
+        </p:nvSpPr>
+        <p:spPr>
+          <a:xfrm>
+            <a:off x="713231" y="5559552"/>
+            <a:ext cx="2907791" cy="182880"/>
+          </a:xfrm>
+          <a:prstGeom prst="rect">
+            <a:avLst/>
+          </a:prstGeom>
+          <a:noFill/>
+        </p:spPr>
+        <p:txBody>
+          <a:bodyPr wrap="square" lIns="0" rIns="0" tIns="0" bIns="0">
+            <a:spAutoFit/>
+          </a:bodyPr>
+          <a:lstStyle/>
+          <a:p>
+            <a:pPr algn="l"/>
+            <a:r>
+              <a:rPr sz="880" b="0">
+                <a:solidFill>
+                  <a:srgbClr val="0F172A"/>
+                </a:solidFill>
+              </a:rPr>
+              <a:t>8  Deliverable</a:t>
+            </a:r>
+          </a:p>
+        </p:txBody>
+      </p:sp>
+      <p:sp>
+        <p:nvSpPr>
+          <p:cNvPr id="64" name="TextBox 63"/>
+          <p:cNvSpPr txBox="1"/>
+          <p:nvPr/>
+        </p:nvSpPr>
+        <p:spPr>
+          <a:xfrm>
+            <a:off x="3730752" y="5559552"/>
+            <a:ext cx="3502152" cy="182880"/>
+          </a:xfrm>
+          <a:prstGeom prst="rect">
+            <a:avLst/>
+          </a:prstGeom>
+          <a:noFill/>
+        </p:spPr>
+        <p:txBody>
+          <a:bodyPr wrap="square" lIns="0" rIns="0" tIns="0" bIns="0">
+            <a:spAutoFit/>
+          </a:bodyPr>
+          <a:lstStyle/>
+          <a:p>
+            <a:pPr algn="l"/>
+            <a:r>
+              <a:rPr sz="880" b="0">
+                <a:solidFill>
+                  <a:srgbClr val="0F172A"/>
+                </a:solidFill>
+              </a:rPr>
+              <a:t>arb_output/walkthrough.html</a:t>
+            </a:r>
+          </a:p>
+        </p:txBody>
+      </p:sp>
+      <p:sp>
+        <p:nvSpPr>
+          <p:cNvPr id="65" name="TextBox 64"/>
+          <p:cNvSpPr txBox="1"/>
+          <p:nvPr/>
+        </p:nvSpPr>
+        <p:spPr>
+          <a:xfrm>
+            <a:off x="7342632" y="5559552"/>
+            <a:ext cx="4187952" cy="182880"/>
+          </a:xfrm>
+          <a:prstGeom prst="rect">
+            <a:avLst/>
+          </a:prstGeom>
+          <a:noFill/>
+        </p:spPr>
+        <p:txBody>
+          <a:bodyPr wrap="square" lIns="0" rIns="0" tIns="0" bIns="0">
+            <a:spAutoFit/>
+          </a:bodyPr>
+          <a:lstStyle/>
+          <a:p>
+            <a:pPr algn="l"/>
+            <a:r>
+              <a:rPr sz="880" b="0">
+                <a:solidFill>
+                  <a:srgbClr val="0F172A"/>
+                </a:solidFill>
+              </a:rPr>
+              <a:t>This deck + the browser walkthrough artifact</a:t>
+            </a:r>
+          </a:p>
+        </p:txBody>
+      </p:sp>
+      <p:sp>
+        <p:nvSpPr>
+          <p:cNvPr id="66" name="TextBox 65"/>
+          <p:cNvSpPr txBox="1"/>
+          <p:nvPr/>
+        </p:nvSpPr>
+        <p:spPr>
+          <a:xfrm>
+            <a:off x="11064240" y="6473952"/>
+            <a:ext cx="731520" cy="182880"/>
+          </a:xfrm>
+          <a:prstGeom prst="rect">
+            <a:avLst/>
+          </a:prstGeom>
+          <a:noFill/>
+        </p:spPr>
+        <p:txBody>
+          <a:bodyPr wrap="square" lIns="0" rIns="0" tIns="0" bIns="0">
+            <a:spAutoFit/>
+          </a:bodyPr>
+          <a:lstStyle/>
+          <a:p>
+            <a:pPr algn="r"/>
+            <a:r>
+              <a:rPr sz="780" b="0">
+                <a:solidFill>
+                  <a:srgbClr val="475569"/>
+                </a:solidFill>
+              </a:rPr>
+              <a:t>12 / 14</a:t>
+            </a:r>
+          </a:p>
+        </p:txBody>
+      </p:sp>
+    </p:spTree>
+  </p:cSld>
+  <p:clrMapOvr>
+    <a:masterClrMapping/>
+  </p:clrMapOvr>
+</p:sld>
+</file>
+
+<file path=ppt/slides/slide15.xml><?xml version="1.0" encoding="utf-8"?>
+<p:sld xmlns:a="http://schemas.openxmlformats.org/drawingml/2006/main" xmlns:p="http://schemas.openxmlformats.org/presentationml/2006/main" xmlns:r="http://schemas.openxmlformats.org/officeDocument/2006/relationships">
+  <p:cSld>
+    <p:spTree>
+      <p:nvGrpSpPr>
+        <p:cNvPr id="1" name=""/>
+        <p:cNvGrpSpPr/>
+        <p:nvPr/>
+      </p:nvGrpSpPr>
+      <p:grpSpPr/>
+      <p:sp>
+        <p:nvSpPr>
+          <p:cNvPr id="2" name="Rectangle 1"/>
+          <p:cNvSpPr/>
+          <p:nvPr/>
+        </p:nvSpPr>
+        <p:spPr>
+          <a:xfrm>
+            <a:off x="0" y="0"/>
+            <a:ext cx="12188952" cy="6858000"/>
+          </a:xfrm>
+          <a:prstGeom prst="rect">
+            <a:avLst/>
+          </a:prstGeom>
+          <a:solidFill>
+            <a:srgbClr val="FFFFFF"/>
+          </a:solidFill>
+          <a:ln>
+            <a:noFill/>
+          </a:ln>
+          <a:effectLst/>
+        </p:spPr>
+        <p:style>
+          <a:lnRef idx="1">
+            <a:schemeClr val="accent1"/>
+          </a:lnRef>
+          <a:fillRef idx="3">
+            <a:schemeClr val="accent1"/>
+          </a:fillRef>
+          <a:effectRef idx="2">
+            <a:schemeClr val="accent1"/>
+          </a:effectRef>
+          <a:fontRef idx="minor">
+            <a:schemeClr val="lt1"/>
+          </a:fontRef>
+        </p:style>
+        <p:txBody>
+          <a:bodyPr rtlCol="0" anchor="ctr"/>
+          <a:lstStyle/>
+          <a:p>
+            <a:pPr algn="ctr"/>
+          </a:p>
+        </p:txBody>
+      </p:sp>
+      <p:sp>
+        <p:nvSpPr>
+          <p:cNvPr id="3" name="Rectangle 2"/>
+          <p:cNvSpPr/>
+          <p:nvPr/>
+        </p:nvSpPr>
+        <p:spPr>
+          <a:xfrm>
+            <a:off x="0" y="0"/>
+            <a:ext cx="12188952" cy="164592"/>
+          </a:xfrm>
+          <a:prstGeom prst="rect">
+            <a:avLst/>
+          </a:prstGeom>
+          <a:solidFill>
+            <a:srgbClr val="14315A"/>
+          </a:solidFill>
+          <a:ln>
+            <a:noFill/>
+          </a:ln>
+          <a:effectLst/>
+        </p:spPr>
+        <p:style>
+          <a:lnRef idx="1">
+            <a:schemeClr val="accent1"/>
+          </a:lnRef>
+          <a:fillRef idx="3">
+            <a:schemeClr val="accent1"/>
+          </a:fillRef>
+          <a:effectRef idx="2">
+            <a:schemeClr val="accent1"/>
+          </a:effectRef>
+          <a:fontRef idx="minor">
+            <a:schemeClr val="lt1"/>
+          </a:fontRef>
+        </p:style>
+        <p:txBody>
+          <a:bodyPr rtlCol="0" anchor="ctr"/>
+          <a:lstStyle/>
+          <a:p>
+            <a:pPr algn="ctr"/>
+          </a:p>
+        </p:txBody>
+      </p:sp>
+      <p:sp>
+        <p:nvSpPr>
+          <p:cNvPr id="4" name="TextBox 3"/>
+          <p:cNvSpPr txBox="1"/>
+          <p:nvPr/>
+        </p:nvSpPr>
+        <p:spPr>
+          <a:xfrm>
+            <a:off x="502920" y="365760"/>
+            <a:ext cx="11155680" cy="502920"/>
+          </a:xfrm>
+          <a:prstGeom prst="rect">
+            <a:avLst/>
+          </a:prstGeom>
+          <a:noFill/>
+        </p:spPr>
+        <p:txBody>
+          <a:bodyPr wrap="square" lIns="0" rIns="0" tIns="0" bIns="0">
+            <a:spAutoFit/>
+          </a:bodyPr>
+          <a:lstStyle/>
+          <a:p>
+            <a:pPr algn="l"/>
+            <a:r>
+              <a:rPr sz="2800" b="1">
+                <a:solidFill>
+                  <a:srgbClr val="14315A"/>
+                </a:solidFill>
+              </a:rPr>
+              <a:t>Extraction walkthrough — one deal, end to end</a:t>
+            </a:r>
+          </a:p>
+        </p:txBody>
+      </p:sp>
+      <p:sp>
+        <p:nvSpPr>
+          <p:cNvPr id="5" name="TextBox 4"/>
+          <p:cNvSpPr txBox="1"/>
+          <p:nvPr/>
+        </p:nvSpPr>
+        <p:spPr>
+          <a:xfrm>
+            <a:off x="512064" y="923544"/>
+            <a:ext cx="10881360" cy="329184"/>
+          </a:xfrm>
+          <a:prstGeom prst="rect">
+            <a:avLst/>
+          </a:prstGeom>
+          <a:noFill/>
+        </p:spPr>
+        <p:txBody>
+          <a:bodyPr wrap="square" lIns="0" rIns="0" tIns="0" bIns="0">
+            <a:spAutoFit/>
+          </a:bodyPr>
+          <a:lstStyle/>
+          <a:p>
+            <a:pPr algn="l"/>
+            <a:r>
+              <a:rPr sz="1350" b="0">
+                <a:solidFill>
+                  <a:srgbClr val="475569"/>
+                </a:solidFill>
+              </a:rPr>
+              <a:t>PepsiAmericas ← PepsiCo (announced 2009-04-20, cash-or-stock election) — raw filings to a priced trade</a:t>
+            </a:r>
+          </a:p>
+        </p:txBody>
+      </p:sp>
+      <p:sp>
+        <p:nvSpPr>
+          <p:cNvPr id="6" name="TextBox 5"/>
+          <p:cNvSpPr txBox="1"/>
+          <p:nvPr/>
+        </p:nvSpPr>
+        <p:spPr>
+          <a:xfrm>
+            <a:off x="502920" y="6473952"/>
+            <a:ext cx="6858000" cy="182880"/>
+          </a:xfrm>
+          <a:prstGeom prst="rect">
+            <a:avLst/>
+          </a:prstGeom>
+          <a:noFill/>
+        </p:spPr>
+        <p:txBody>
+          <a:bodyPr wrap="square" lIns="0" rIns="0" tIns="0" bIns="0">
+            <a:spAutoFit/>
+          </a:bodyPr>
+          <a:lstStyle/>
+          <a:p>
+            <a:pPr algn="l"/>
+            <a:r>
+              <a:rPr sz="780" b="0">
+                <a:solidFill>
+                  <a:srgbClr val="475569"/>
+                </a:solidFill>
+              </a:rPr>
+              <a:t>JPM Project 3ii · Weekly workflow validation</a:t>
+            </a:r>
+          </a:p>
+        </p:txBody>
+      </p:sp>
+      <p:sp>
+        <p:nvSpPr>
+          <p:cNvPr id="7" name="Rectangle 6"/>
+          <p:cNvSpPr/>
+          <p:nvPr/>
+        </p:nvSpPr>
+        <p:spPr>
+          <a:xfrm>
+            <a:off x="640080" y="1517904"/>
+            <a:ext cx="2514600" cy="731520"/>
+          </a:xfrm>
+          <a:prstGeom prst="rect">
+            <a:avLst/>
+          </a:prstGeom>
+          <a:solidFill>
+            <a:srgbClr val="EAF2FF"/>
+          </a:solidFill>
+          <a:ln>
+            <a:noFill/>
+          </a:ln>
+          <a:effectLst/>
+        </p:spPr>
+        <p:style>
+          <a:lnRef idx="1">
+            <a:schemeClr val="accent1"/>
+          </a:lnRef>
+          <a:fillRef idx="3">
+            <a:schemeClr val="accent1"/>
+          </a:fillRef>
+          <a:effectRef idx="2">
+            <a:schemeClr val="accent1"/>
+          </a:effectRef>
+          <a:fontRef idx="minor">
+            <a:schemeClr val="lt1"/>
+          </a:fontRef>
+        </p:style>
+        <p:txBody>
+          <a:bodyPr rtlCol="0" anchor="ctr"/>
+          <a:lstStyle/>
+          <a:p>
+            <a:pPr algn="ctr"/>
+          </a:p>
+        </p:txBody>
+      </p:sp>
+      <p:sp>
+        <p:nvSpPr>
+          <p:cNvPr id="8" name="TextBox 7"/>
+          <p:cNvSpPr txBox="1"/>
+          <p:nvPr/>
+        </p:nvSpPr>
+        <p:spPr>
+          <a:xfrm>
+            <a:off x="731520" y="1645919"/>
+            <a:ext cx="2331720" cy="182880"/>
+          </a:xfrm>
+          <a:prstGeom prst="rect">
+            <a:avLst/>
+          </a:prstGeom>
+          <a:noFill/>
+        </p:spPr>
+        <p:txBody>
+          <a:bodyPr wrap="square" lIns="0" rIns="0" tIns="0" bIns="0">
+            <a:spAutoFit/>
+          </a:bodyPr>
+          <a:lstStyle/>
+          <a:p>
+            <a:pPr algn="l"/>
+            <a:r>
+              <a:rPr sz="1050" b="1">
+                <a:solidFill>
+                  <a:srgbClr val="14315A"/>
+                </a:solidFill>
+              </a:rPr>
+              <a:t>1  Deal input</a:t>
+            </a:r>
+          </a:p>
+        </p:txBody>
+      </p:sp>
+      <p:sp>
+        <p:nvSpPr>
+          <p:cNvPr id="9" name="TextBox 8"/>
+          <p:cNvSpPr txBox="1"/>
+          <p:nvPr/>
+        </p:nvSpPr>
+        <p:spPr>
+          <a:xfrm>
+            <a:off x="731520" y="1901952"/>
+            <a:ext cx="2331720" cy="182880"/>
+          </a:xfrm>
+          <a:prstGeom prst="rect">
+            <a:avLst/>
+          </a:prstGeom>
+          <a:noFill/>
+        </p:spPr>
+        <p:txBody>
+          <a:bodyPr wrap="square" lIns="0" rIns="0" tIns="0" bIns="0">
+            <a:spAutoFit/>
+          </a:bodyPr>
+          <a:lstStyle/>
+          <a:p>
+            <a:pPr algn="l"/>
+            <a:r>
+              <a:rPr sz="819" b="0">
+                <a:solidFill>
+                  <a:srgbClr val="475569"/>
+                </a:solidFill>
+              </a:rPr>
+              <a:t>Bloomberg row</a:t>
+            </a:r>
+          </a:p>
+        </p:txBody>
+      </p:sp>
+      <p:sp>
+        <p:nvSpPr>
+          <p:cNvPr id="10" name="Rectangle 9"/>
+          <p:cNvSpPr/>
+          <p:nvPr/>
+        </p:nvSpPr>
+        <p:spPr>
+          <a:xfrm>
+            <a:off x="3310128" y="1517904"/>
+            <a:ext cx="8257031" cy="731520"/>
+          </a:xfrm>
+          <a:prstGeom prst="rect">
+            <a:avLst/>
+          </a:prstGeom>
+          <a:solidFill>
+            <a:srgbClr val="FFFFFF"/>
+          </a:solidFill>
+          <a:ln w="9525">
+            <a:solidFill>
+              <a:srgbClr val="E2E8F0"/>
+            </a:solidFill>
+          </a:ln>
+          <a:effectLst/>
+        </p:spPr>
+        <p:style>
+          <a:lnRef idx="1">
+            <a:schemeClr val="accent1"/>
+          </a:lnRef>
+          <a:fillRef idx="3">
+            <a:schemeClr val="accent1"/>
+          </a:fillRef>
+          <a:effectRef idx="2">
+            <a:schemeClr val="accent1"/>
+          </a:effectRef>
+          <a:fontRef idx="minor">
+            <a:schemeClr val="lt1"/>
+          </a:fontRef>
+        </p:style>
+        <p:txBody>
+          <a:bodyPr rtlCol="0" anchor="ctr"/>
+          <a:lstStyle/>
+          <a:p>
+            <a:pPr algn="ctr"/>
+          </a:p>
+        </p:txBody>
+      </p:sp>
+      <p:sp>
+        <p:nvSpPr>
+          <p:cNvPr id="11" name="TextBox 10"/>
+          <p:cNvSpPr txBox="1"/>
+          <p:nvPr/>
+        </p:nvSpPr>
+        <p:spPr>
+          <a:xfrm>
+            <a:off x="3456432" y="1673351"/>
+            <a:ext cx="8001000" cy="457200"/>
+          </a:xfrm>
+          <a:prstGeom prst="rect">
+            <a:avLst/>
+          </a:prstGeom>
+          <a:noFill/>
+        </p:spPr>
+        <p:txBody>
+          <a:bodyPr wrap="square" lIns="0" rIns="0" tIns="0" bIns="0">
+            <a:spAutoFit/>
+          </a:bodyPr>
+          <a:lstStyle/>
+          <a:p>
+            <a:pPr algn="l"/>
+            <a:r>
+              <a:rPr sz="1019" b="0">
+                <a:solidFill>
+                  <a:srgbClr val="0F172A"/>
+                </a:solidFill>
+              </a:rPr>
+              <a:t>PepsiAmericas Inc  ←  PepsiCo Inc  ·  announced 2009-04-20  ·  Cash-or-Stock election  ·  status: completed</a:t>
+            </a:r>
+          </a:p>
+        </p:txBody>
+      </p:sp>
+      <p:sp>
+        <p:nvSpPr>
+          <p:cNvPr id="12" name="Rectangle 11"/>
+          <p:cNvSpPr/>
+          <p:nvPr/>
+        </p:nvSpPr>
+        <p:spPr>
+          <a:xfrm>
+            <a:off x="640080" y="2336291"/>
+            <a:ext cx="2514600" cy="731520"/>
+          </a:xfrm>
+          <a:prstGeom prst="rect">
+            <a:avLst/>
+          </a:prstGeom>
+          <a:solidFill>
+            <a:srgbClr val="EAF2FF"/>
+          </a:solidFill>
+          <a:ln>
+            <a:noFill/>
+          </a:ln>
+          <a:effectLst/>
+        </p:spPr>
+        <p:style>
+          <a:lnRef idx="1">
+            <a:schemeClr val="accent1"/>
+          </a:lnRef>
+          <a:fillRef idx="3">
+            <a:schemeClr val="accent1"/>
+          </a:fillRef>
+          <a:effectRef idx="2">
+            <a:schemeClr val="accent1"/>
+          </a:effectRef>
+          <a:fontRef idx="minor">
+            <a:schemeClr val="lt1"/>
+          </a:fontRef>
+        </p:style>
+        <p:txBody>
+          <a:bodyPr rtlCol="0" anchor="ctr"/>
+          <a:lstStyle/>
+          <a:p>
+            <a:pPr algn="ctr"/>
+          </a:p>
+        </p:txBody>
+      </p:sp>
+      <p:sp>
+        <p:nvSpPr>
+          <p:cNvPr id="13" name="TextBox 12"/>
+          <p:cNvSpPr txBox="1"/>
+          <p:nvPr/>
+        </p:nvSpPr>
+        <p:spPr>
+          <a:xfrm>
+            <a:off x="731520" y="2464308"/>
+            <a:ext cx="2331720" cy="182880"/>
+          </a:xfrm>
+          <a:prstGeom prst="rect">
+            <a:avLst/>
+          </a:prstGeom>
+          <a:noFill/>
+        </p:spPr>
+        <p:txBody>
+          <a:bodyPr wrap="square" lIns="0" rIns="0" tIns="0" bIns="0">
+            <a:spAutoFit/>
+          </a:bodyPr>
+          <a:lstStyle/>
+          <a:p>
+            <a:pPr algn="l"/>
+            <a:r>
+              <a:rPr sz="1050" b="1">
+                <a:solidFill>
+                  <a:srgbClr val="14315A"/>
+                </a:solidFill>
+              </a:rPr>
+              <a:t>2  SEC retrieval</a:t>
+            </a:r>
+          </a:p>
+        </p:txBody>
+      </p:sp>
+      <p:sp>
+        <p:nvSpPr>
+          <p:cNvPr id="14" name="TextBox 13"/>
+          <p:cNvSpPr txBox="1"/>
+          <p:nvPr/>
+        </p:nvSpPr>
+        <p:spPr>
+          <a:xfrm>
+            <a:off x="731520" y="2720339"/>
+            <a:ext cx="2331720" cy="182880"/>
+          </a:xfrm>
+          <a:prstGeom prst="rect">
+            <a:avLst/>
+          </a:prstGeom>
+          <a:noFill/>
+        </p:spPr>
+        <p:txBody>
+          <a:bodyPr wrap="square" lIns="0" rIns="0" tIns="0" bIns="0">
+            <a:spAutoFit/>
+          </a:bodyPr>
+          <a:lstStyle/>
+          <a:p>
+            <a:pPr algn="l"/>
+            <a:r>
+              <a:rPr sz="819" b="0">
+                <a:solidFill>
+                  <a:srgbClr val="475569"/>
+                </a:solidFill>
+              </a:rPr>
+              <a:t>download_ma_edgar_files.py</a:t>
+            </a:r>
+          </a:p>
+        </p:txBody>
+      </p:sp>
+      <p:sp>
+        <p:nvSpPr>
+          <p:cNvPr id="15" name="Rectangle 14"/>
+          <p:cNvSpPr/>
+          <p:nvPr/>
+        </p:nvSpPr>
+        <p:spPr>
+          <a:xfrm>
+            <a:off x="3310128" y="2336291"/>
+            <a:ext cx="8257031" cy="731520"/>
+          </a:xfrm>
+          <a:prstGeom prst="rect">
+            <a:avLst/>
+          </a:prstGeom>
+          <a:solidFill>
+            <a:srgbClr val="FFFFFF"/>
+          </a:solidFill>
+          <a:ln w="9525">
+            <a:solidFill>
+              <a:srgbClr val="E2E8F0"/>
+            </a:solidFill>
+          </a:ln>
+          <a:effectLst/>
+        </p:spPr>
+        <p:style>
+          <a:lnRef idx="1">
+            <a:schemeClr val="accent1"/>
+          </a:lnRef>
+          <a:fillRef idx="3">
+            <a:schemeClr val="accent1"/>
+          </a:fillRef>
+          <a:effectRef idx="2">
+            <a:schemeClr val="accent1"/>
+          </a:effectRef>
+          <a:fontRef idx="minor">
+            <a:schemeClr val="lt1"/>
+          </a:fontRef>
+        </p:style>
+        <p:txBody>
+          <a:bodyPr rtlCol="0" anchor="ctr"/>
+          <a:lstStyle/>
+          <a:p>
+            <a:pPr algn="ctr"/>
+          </a:p>
+        </p:txBody>
+      </p:sp>
+      <p:sp>
+        <p:nvSpPr>
+          <p:cNvPr id="16" name="TextBox 15"/>
+          <p:cNvSpPr txBox="1"/>
+          <p:nvPr/>
+        </p:nvSpPr>
+        <p:spPr>
+          <a:xfrm>
+            <a:off x="3456432" y="2491739"/>
+            <a:ext cx="8001000" cy="457200"/>
+          </a:xfrm>
+          <a:prstGeom prst="rect">
+            <a:avLst/>
+          </a:prstGeom>
+          <a:noFill/>
+        </p:spPr>
+        <p:txBody>
+          <a:bodyPr wrap="square" lIns="0" rIns="0" tIns="0" bIns="0">
+            <a:spAutoFit/>
+          </a:bodyPr>
+          <a:lstStyle/>
+          <a:p>
+            <a:pPr algn="l"/>
+            <a:r>
+              <a:rPr sz="1019" b="0">
+                <a:solidFill>
+                  <a:srgbClr val="0F172A"/>
+                </a:solidFill>
+              </a:rPr>
+              <a:t>Resolved CIK → pulled 553 documents / 104 unique filings (8-K, 425, DEFA14A, SC 13E3/A) → top 10 scored &amp; sent to Claude</a:t>
+            </a:r>
+          </a:p>
+        </p:txBody>
+      </p:sp>
+      <p:sp>
+        <p:nvSpPr>
+          <p:cNvPr id="17" name="Rectangle 16"/>
+          <p:cNvSpPr/>
+          <p:nvPr/>
+        </p:nvSpPr>
+        <p:spPr>
+          <a:xfrm>
+            <a:off x="640080" y="3154679"/>
+            <a:ext cx="2514600" cy="731520"/>
+          </a:xfrm>
+          <a:prstGeom prst="rect">
+            <a:avLst/>
+          </a:prstGeom>
+          <a:solidFill>
+            <a:srgbClr val="EAF2FF"/>
+          </a:solidFill>
+          <a:ln>
+            <a:noFill/>
+          </a:ln>
+          <a:effectLst/>
+        </p:spPr>
+        <p:style>
+          <a:lnRef idx="1">
+            <a:schemeClr val="accent1"/>
+          </a:lnRef>
+          <a:fillRef idx="3">
+            <a:schemeClr val="accent1"/>
+          </a:fillRef>
+          <a:effectRef idx="2">
+            <a:schemeClr val="accent1"/>
+          </a:effectRef>
+          <a:fontRef idx="minor">
+            <a:schemeClr val="lt1"/>
+          </a:fontRef>
+        </p:style>
+        <p:txBody>
+          <a:bodyPr rtlCol="0" anchor="ctr"/>
+          <a:lstStyle/>
+          <a:p>
+            <a:pPr algn="ctr"/>
+          </a:p>
+        </p:txBody>
+      </p:sp>
+      <p:sp>
+        <p:nvSpPr>
+          <p:cNvPr id="18" name="TextBox 17"/>
+          <p:cNvSpPr txBox="1"/>
+          <p:nvPr/>
+        </p:nvSpPr>
+        <p:spPr>
+          <a:xfrm>
+            <a:off x="731520" y="3282696"/>
+            <a:ext cx="2331720" cy="182880"/>
+          </a:xfrm>
+          <a:prstGeom prst="rect">
+            <a:avLst/>
+          </a:prstGeom>
+          <a:noFill/>
+        </p:spPr>
+        <p:txBody>
+          <a:bodyPr wrap="square" lIns="0" rIns="0" tIns="0" bIns="0">
+            <a:spAutoFit/>
+          </a:bodyPr>
+          <a:lstStyle/>
+          <a:p>
+            <a:pPr algn="l"/>
+            <a:r>
+              <a:rPr sz="1050" b="1">
+                <a:solidFill>
+                  <a:srgbClr val="14315A"/>
+                </a:solidFill>
+              </a:rPr>
+              <a:t>3  Claude extraction</a:t>
+            </a:r>
+          </a:p>
+        </p:txBody>
+      </p:sp>
+      <p:sp>
+        <p:nvSpPr>
+          <p:cNvPr id="19" name="TextBox 18"/>
+          <p:cNvSpPr txBox="1"/>
+          <p:nvPr/>
+        </p:nvSpPr>
+        <p:spPr>
+          <a:xfrm>
+            <a:off x="731520" y="3538727"/>
+            <a:ext cx="2331720" cy="182880"/>
+          </a:xfrm>
+          <a:prstGeom prst="rect">
+            <a:avLst/>
+          </a:prstGeom>
+          <a:noFill/>
+        </p:spPr>
+        <p:txBody>
+          <a:bodyPr wrap="square" lIns="0" rIns="0" tIns="0" bIns="0">
+            <a:spAutoFit/>
+          </a:bodyPr>
+          <a:lstStyle/>
+          <a:p>
+            <a:pPr algn="l"/>
+            <a:r>
+              <a:rPr sz="819" b="0">
+                <a:solidFill>
+                  <a:srgbClr val="475569"/>
+                </a:solidFill>
+              </a:rPr>
+              <a:t>17 canonical fields</a:t>
+            </a:r>
+          </a:p>
+        </p:txBody>
+      </p:sp>
+      <p:sp>
+        <p:nvSpPr>
+          <p:cNvPr id="20" name="Rectangle 19"/>
+          <p:cNvSpPr/>
+          <p:nvPr/>
+        </p:nvSpPr>
+        <p:spPr>
+          <a:xfrm>
+            <a:off x="3310128" y="3154679"/>
+            <a:ext cx="8257031" cy="731520"/>
+          </a:xfrm>
+          <a:prstGeom prst="rect">
+            <a:avLst/>
+          </a:prstGeom>
+          <a:solidFill>
+            <a:srgbClr val="FFFFFF"/>
+          </a:solidFill>
+          <a:ln w="9525">
+            <a:solidFill>
+              <a:srgbClr val="E2E8F0"/>
+            </a:solidFill>
+          </a:ln>
+          <a:effectLst/>
+        </p:spPr>
+        <p:style>
+          <a:lnRef idx="1">
+            <a:schemeClr val="accent1"/>
+          </a:lnRef>
+          <a:fillRef idx="3">
+            <a:schemeClr val="accent1"/>
+          </a:fillRef>
+          <a:effectRef idx="2">
+            <a:schemeClr val="accent1"/>
+          </a:effectRef>
+          <a:fontRef idx="minor">
+            <a:schemeClr val="lt1"/>
+          </a:fontRef>
+        </p:style>
+        <p:txBody>
+          <a:bodyPr rtlCol="0" anchor="ctr"/>
+          <a:lstStyle/>
+          <a:p>
+            <a:pPr algn="ctr"/>
+          </a:p>
+        </p:txBody>
+      </p:sp>
+      <p:sp>
+        <p:nvSpPr>
+          <p:cNvPr id="21" name="TextBox 20"/>
+          <p:cNvSpPr txBox="1"/>
+          <p:nvPr/>
+        </p:nvSpPr>
+        <p:spPr>
+          <a:xfrm>
+            <a:off x="3456432" y="3310127"/>
+            <a:ext cx="8001000" cy="457200"/>
+          </a:xfrm>
+          <a:prstGeom prst="rect">
+            <a:avLst/>
+          </a:prstGeom>
+          <a:noFill/>
+        </p:spPr>
+        <p:txBody>
+          <a:bodyPr wrap="square" lIns="0" rIns="0" tIns="0" bIns="0">
+            <a:spAutoFit/>
+          </a:bodyPr>
+          <a:lstStyle/>
+          <a:p>
+            <a:pPr algn="l"/>
+            <a:r>
+              <a:rPr sz="1019" b="0">
+                <a:solidFill>
+                  <a:srgbClr val="0F172A"/>
+                </a:solidFill>
+              </a:rPr>
+              <a:t>Cash $28.50/sh  ·  Stock 0.5022 PEP sh (fixed ratio)  ·  Cash cap 50% of shares  ·  deadline = 3rd business day pre-close</a:t>
+            </a:r>
+          </a:p>
+        </p:txBody>
+      </p:sp>
+      <p:sp>
+        <p:nvSpPr>
+          <p:cNvPr id="22" name="Rectangle 21"/>
+          <p:cNvSpPr/>
+          <p:nvPr/>
+        </p:nvSpPr>
+        <p:spPr>
+          <a:xfrm>
+            <a:off x="640080" y="3973068"/>
+            <a:ext cx="2514600" cy="731520"/>
+          </a:xfrm>
+          <a:prstGeom prst="rect">
+            <a:avLst/>
+          </a:prstGeom>
+          <a:solidFill>
+            <a:srgbClr val="EAF2FF"/>
+          </a:solidFill>
+          <a:ln>
+            <a:noFill/>
+          </a:ln>
+          <a:effectLst/>
+        </p:spPr>
+        <p:style>
+          <a:lnRef idx="1">
+            <a:schemeClr val="accent1"/>
+          </a:lnRef>
+          <a:fillRef idx="3">
+            <a:schemeClr val="accent1"/>
+          </a:fillRef>
+          <a:effectRef idx="2">
+            <a:schemeClr val="accent1"/>
+          </a:effectRef>
+          <a:fontRef idx="minor">
+            <a:schemeClr val="lt1"/>
+          </a:fontRef>
+        </p:style>
+        <p:txBody>
+          <a:bodyPr rtlCol="0" anchor="ctr"/>
+          <a:lstStyle/>
+          <a:p>
+            <a:pPr algn="ctr"/>
+          </a:p>
+        </p:txBody>
+      </p:sp>
+      <p:sp>
+        <p:nvSpPr>
+          <p:cNvPr id="23" name="TextBox 22"/>
+          <p:cNvSpPr txBox="1"/>
+          <p:nvPr/>
+        </p:nvSpPr>
+        <p:spPr>
+          <a:xfrm>
+            <a:off x="731520" y="4101083"/>
+            <a:ext cx="2331720" cy="182880"/>
+          </a:xfrm>
+          <a:prstGeom prst="rect">
+            <a:avLst/>
+          </a:prstGeom>
+          <a:noFill/>
+        </p:spPr>
+        <p:txBody>
+          <a:bodyPr wrap="square" lIns="0" rIns="0" tIns="0" bIns="0">
+            <a:spAutoFit/>
+          </a:bodyPr>
+          <a:lstStyle/>
+          <a:p>
+            <a:pPr algn="l"/>
+            <a:r>
+              <a:rPr sz="1050" b="1">
+                <a:solidFill>
+                  <a:srgbClr val="14315A"/>
+                </a:solidFill>
+              </a:rPr>
+              <a:t>4  Realized label</a:t>
+            </a:r>
+          </a:p>
+        </p:txBody>
+      </p:sp>
+      <p:sp>
+        <p:nvSpPr>
+          <p:cNvPr id="24" name="TextBox 23"/>
+          <p:cNvSpPr txBox="1"/>
+          <p:nvPr/>
+        </p:nvSpPr>
+        <p:spPr>
+          <a:xfrm>
+            <a:off x="731520" y="4357116"/>
+            <a:ext cx="2331720" cy="182880"/>
+          </a:xfrm>
+          <a:prstGeom prst="rect">
+            <a:avLst/>
+          </a:prstGeom>
+          <a:noFill/>
+        </p:spPr>
+        <p:txBody>
+          <a:bodyPr wrap="square" lIns="0" rIns="0" tIns="0" bIns="0">
+            <a:spAutoFit/>
+          </a:bodyPr>
+          <a:lstStyle/>
+          <a:p>
+            <a:pPr algn="l"/>
+            <a:r>
+              <a:rPr sz="819" b="0">
+                <a:solidFill>
+                  <a:srgbClr val="475569"/>
+                </a:solidFill>
+              </a:rPr>
+              <a:t>normalized_labels.csv</a:t>
+            </a:r>
+          </a:p>
+        </p:txBody>
+      </p:sp>
+      <p:sp>
+        <p:nvSpPr>
+          <p:cNvPr id="25" name="Rectangle 24"/>
+          <p:cNvSpPr/>
+          <p:nvPr/>
+        </p:nvSpPr>
+        <p:spPr>
+          <a:xfrm>
+            <a:off x="3310128" y="3973068"/>
+            <a:ext cx="8257031" cy="731520"/>
+          </a:xfrm>
+          <a:prstGeom prst="rect">
+            <a:avLst/>
+          </a:prstGeom>
+          <a:solidFill>
+            <a:srgbClr val="FFFFFF"/>
+          </a:solidFill>
+          <a:ln w="9525">
+            <a:solidFill>
+              <a:srgbClr val="E2E8F0"/>
+            </a:solidFill>
+          </a:ln>
+          <a:effectLst/>
+        </p:spPr>
+        <p:style>
+          <a:lnRef idx="1">
+            <a:schemeClr val="accent1"/>
+          </a:lnRef>
+          <a:fillRef idx="3">
+            <a:schemeClr val="accent1"/>
+          </a:fillRef>
+          <a:effectRef idx="2">
+            <a:schemeClr val="accent1"/>
+          </a:effectRef>
+          <a:fontRef idx="minor">
+            <a:schemeClr val="lt1"/>
+          </a:fontRef>
+        </p:style>
+        <p:txBody>
+          <a:bodyPr rtlCol="0" anchor="ctr"/>
+          <a:lstStyle/>
+          <a:p>
+            <a:pPr algn="ctr"/>
+          </a:p>
+        </p:txBody>
+      </p:sp>
+      <p:sp>
+        <p:nvSpPr>
+          <p:cNvPr id="26" name="TextBox 25"/>
+          <p:cNvSpPr txBox="1"/>
+          <p:nvPr/>
+        </p:nvSpPr>
+        <p:spPr>
+          <a:xfrm>
+            <a:off x="3456432" y="4128515"/>
+            <a:ext cx="8001000" cy="457200"/>
+          </a:xfrm>
+          <a:prstGeom prst="rect">
+            <a:avLst/>
+          </a:prstGeom>
+          <a:noFill/>
+        </p:spPr>
+        <p:txBody>
+          <a:bodyPr wrap="square" lIns="0" rIns="0" tIns="0" bIns="0">
+            <a:spAutoFit/>
+          </a:bodyPr>
+          <a:lstStyle/>
+          <a:p>
+            <a:pPr algn="l"/>
+            <a:r>
+              <a:rPr sz="1019" b="0">
+                <a:solidFill>
+                  <a:srgbClr val="0F172A"/>
+                </a:solidFill>
+              </a:rPr>
+              <a:t>Filing discloses DEMAND: ≈ 2,304,733 PAS shares elected cash → % elected cash (pre-proration) — the model's target variable</a:t>
+            </a:r>
+          </a:p>
+        </p:txBody>
+      </p:sp>
+      <p:sp>
+        <p:nvSpPr>
+          <p:cNvPr id="27" name="Rectangle 26"/>
+          <p:cNvSpPr/>
+          <p:nvPr/>
+        </p:nvSpPr>
+        <p:spPr>
+          <a:xfrm>
+            <a:off x="640080" y="4791456"/>
+            <a:ext cx="2514600" cy="731520"/>
+          </a:xfrm>
+          <a:prstGeom prst="rect">
+            <a:avLst/>
+          </a:prstGeom>
+          <a:solidFill>
+            <a:srgbClr val="EAF2FF"/>
+          </a:solidFill>
+          <a:ln>
+            <a:noFill/>
+          </a:ln>
+          <a:effectLst/>
+        </p:spPr>
+        <p:style>
+          <a:lnRef idx="1">
+            <a:schemeClr val="accent1"/>
+          </a:lnRef>
+          <a:fillRef idx="3">
+            <a:schemeClr val="accent1"/>
+          </a:fillRef>
+          <a:effectRef idx="2">
+            <a:schemeClr val="accent1"/>
+          </a:effectRef>
+          <a:fontRef idx="minor">
+            <a:schemeClr val="lt1"/>
+          </a:fontRef>
+        </p:style>
+        <p:txBody>
+          <a:bodyPr rtlCol="0" anchor="ctr"/>
+          <a:lstStyle/>
+          <a:p>
+            <a:pPr algn="ctr"/>
+          </a:p>
+        </p:txBody>
+      </p:sp>
+      <p:sp>
+        <p:nvSpPr>
+          <p:cNvPr id="28" name="TextBox 27"/>
+          <p:cNvSpPr txBox="1"/>
+          <p:nvPr/>
+        </p:nvSpPr>
+        <p:spPr>
+          <a:xfrm>
+            <a:off x="731520" y="4919472"/>
+            <a:ext cx="2331720" cy="182880"/>
+          </a:xfrm>
+          <a:prstGeom prst="rect">
+            <a:avLst/>
+          </a:prstGeom>
+          <a:noFill/>
+        </p:spPr>
+        <p:txBody>
+          <a:bodyPr wrap="square" lIns="0" rIns="0" tIns="0" bIns="0">
+            <a:spAutoFit/>
+          </a:bodyPr>
+          <a:lstStyle/>
+          <a:p>
+            <a:pPr algn="l"/>
+            <a:r>
+              <a:rPr sz="1050" b="1">
+                <a:solidFill>
+                  <a:srgbClr val="14315A"/>
+                </a:solidFill>
+              </a:rPr>
+              <a:t>5  WRDS join</a:t>
+            </a:r>
+          </a:p>
+        </p:txBody>
+      </p:sp>
+      <p:sp>
+        <p:nvSpPr>
+          <p:cNvPr id="29" name="TextBox 28"/>
+          <p:cNvSpPr txBox="1"/>
+          <p:nvPr/>
+        </p:nvSpPr>
+        <p:spPr>
+          <a:xfrm>
+            <a:off x="731520" y="5175504"/>
+            <a:ext cx="2331720" cy="182880"/>
+          </a:xfrm>
+          <a:prstGeom prst="rect">
+            <a:avLst/>
+          </a:prstGeom>
+          <a:noFill/>
+        </p:spPr>
+        <p:txBody>
+          <a:bodyPr wrap="square" lIns="0" rIns="0" tIns="0" bIns="0">
+            <a:spAutoFit/>
+          </a:bodyPr>
+          <a:lstStyle/>
+          <a:p>
+            <a:pPr algn="l"/>
+            <a:r>
+              <a:rPr sz="819" b="0">
+                <a:solidFill>
+                  <a:srgbClr val="475569"/>
+                </a:solidFill>
+              </a:rPr>
+              <a:t>wrds_market_daily.csv</a:t>
+            </a:r>
+          </a:p>
+        </p:txBody>
+      </p:sp>
+      <p:sp>
+        <p:nvSpPr>
+          <p:cNvPr id="30" name="Rectangle 29"/>
+          <p:cNvSpPr/>
+          <p:nvPr/>
+        </p:nvSpPr>
+        <p:spPr>
+          <a:xfrm>
+            <a:off x="3310128" y="4791456"/>
+            <a:ext cx="8257031" cy="731520"/>
+          </a:xfrm>
+          <a:prstGeom prst="rect">
+            <a:avLst/>
+          </a:prstGeom>
+          <a:solidFill>
+            <a:srgbClr val="FFFFFF"/>
+          </a:solidFill>
+          <a:ln w="9525">
+            <a:solidFill>
+              <a:srgbClr val="E2E8F0"/>
+            </a:solidFill>
+          </a:ln>
+          <a:effectLst/>
+        </p:spPr>
+        <p:style>
+          <a:lnRef idx="1">
+            <a:schemeClr val="accent1"/>
+          </a:lnRef>
+          <a:fillRef idx="3">
+            <a:schemeClr val="accent1"/>
+          </a:fillRef>
+          <a:effectRef idx="2">
+            <a:schemeClr val="accent1"/>
+          </a:effectRef>
+          <a:fontRef idx="minor">
+            <a:schemeClr val="lt1"/>
+          </a:fontRef>
+        </p:style>
+        <p:txBody>
+          <a:bodyPr rtlCol="0" anchor="ctr"/>
+          <a:lstStyle/>
+          <a:p>
+            <a:pPr algn="ctr"/>
+          </a:p>
+        </p:txBody>
+      </p:sp>
+      <p:sp>
+        <p:nvSpPr>
+          <p:cNvPr id="31" name="TextBox 30"/>
+          <p:cNvSpPr txBox="1"/>
+          <p:nvPr/>
+        </p:nvSpPr>
+        <p:spPr>
+          <a:xfrm>
+            <a:off x="3456432" y="4946904"/>
+            <a:ext cx="8001000" cy="457200"/>
+          </a:xfrm>
+          <a:prstGeom prst="rect">
+            <a:avLst/>
+          </a:prstGeom>
+          <a:noFill/>
+        </p:spPr>
+        <p:txBody>
+          <a:bodyPr wrap="square" lIns="0" rIns="0" tIns="0" bIns="0">
+            <a:spAutoFit/>
+          </a:bodyPr>
+          <a:lstStyle/>
+          <a:p>
+            <a:pPr algn="l"/>
+            <a:r>
+              <a:rPr sz="1019" b="0">
+                <a:solidFill>
+                  <a:srgbClr val="0F172A"/>
+                </a:solidFill>
+              </a:rPr>
+              <a:t>Target + acquirer (PepsiCo) daily prices joined — 85 trading days each; supplies the entry price and the hedge leg</a:t>
+            </a:r>
+          </a:p>
+        </p:txBody>
+      </p:sp>
+      <p:sp>
+        <p:nvSpPr>
+          <p:cNvPr id="32" name="Rectangle 31"/>
+          <p:cNvSpPr/>
+          <p:nvPr/>
+        </p:nvSpPr>
+        <p:spPr>
+          <a:xfrm>
+            <a:off x="640080" y="5609844"/>
+            <a:ext cx="2514600" cy="731520"/>
+          </a:xfrm>
+          <a:prstGeom prst="rect">
+            <a:avLst/>
+          </a:prstGeom>
+          <a:solidFill>
+            <a:srgbClr val="EAF2FF"/>
+          </a:solidFill>
+          <a:ln>
+            <a:noFill/>
+          </a:ln>
+          <a:effectLst/>
+        </p:spPr>
+        <p:style>
+          <a:lnRef idx="1">
+            <a:schemeClr val="accent1"/>
+          </a:lnRef>
+          <a:fillRef idx="3">
+            <a:schemeClr val="accent1"/>
+          </a:fillRef>
+          <a:effectRef idx="2">
+            <a:schemeClr val="accent1"/>
+          </a:effectRef>
+          <a:fontRef idx="minor">
+            <a:schemeClr val="lt1"/>
+          </a:fontRef>
+        </p:style>
+        <p:txBody>
+          <a:bodyPr rtlCol="0" anchor="ctr"/>
+          <a:lstStyle/>
+          <a:p>
+            <a:pPr algn="ctr"/>
+          </a:p>
+        </p:txBody>
+      </p:sp>
+      <p:sp>
+        <p:nvSpPr>
+          <p:cNvPr id="33" name="TextBox 32"/>
+          <p:cNvSpPr txBox="1"/>
+          <p:nvPr/>
+        </p:nvSpPr>
+        <p:spPr>
+          <a:xfrm>
+            <a:off x="731520" y="5737859"/>
+            <a:ext cx="2331720" cy="182880"/>
+          </a:xfrm>
+          <a:prstGeom prst="rect">
+            <a:avLst/>
+          </a:prstGeom>
+          <a:noFill/>
+        </p:spPr>
+        <p:txBody>
+          <a:bodyPr wrap="square" lIns="0" rIns="0" tIns="0" bIns="0">
+            <a:spAutoFit/>
+          </a:bodyPr>
+          <a:lstStyle/>
+          <a:p>
+            <a:pPr algn="l"/>
+            <a:r>
+              <a:rPr sz="1050" b="1">
+                <a:solidFill>
+                  <a:srgbClr val="14315A"/>
+                </a:solidFill>
+              </a:rPr>
+              <a:t>6  Trade decision</a:t>
+            </a:r>
+          </a:p>
+        </p:txBody>
+      </p:sp>
+      <p:sp>
+        <p:nvSpPr>
+          <p:cNvPr id="34" name="TextBox 33"/>
+          <p:cNvSpPr txBox="1"/>
+          <p:nvPr/>
+        </p:nvSpPr>
+        <p:spPr>
+          <a:xfrm>
+            <a:off x="731520" y="5993892"/>
+            <a:ext cx="2331720" cy="182880"/>
+          </a:xfrm>
+          <a:prstGeom prst="rect">
+            <a:avLst/>
+          </a:prstGeom>
+          <a:noFill/>
+        </p:spPr>
+        <p:txBody>
+          <a:bodyPr wrap="square" lIns="0" rIns="0" tIns="0" bIns="0">
+            <a:spAutoFit/>
+          </a:bodyPr>
+          <a:lstStyle/>
+          <a:p>
+            <a:pPr algn="l"/>
+            <a:r>
+              <a:rPr sz="819" b="0">
+                <a:solidFill>
+                  <a:srgbClr val="475569"/>
+                </a:solidFill>
+              </a:rPr>
+              <a:t>arb_signal.py</a:t>
+            </a:r>
+          </a:p>
+        </p:txBody>
+      </p:sp>
+      <p:sp>
+        <p:nvSpPr>
+          <p:cNvPr id="35" name="Rectangle 34"/>
+          <p:cNvSpPr/>
+          <p:nvPr/>
+        </p:nvSpPr>
+        <p:spPr>
+          <a:xfrm>
+            <a:off x="3310128" y="5609844"/>
+            <a:ext cx="8257031" cy="731520"/>
+          </a:xfrm>
+          <a:prstGeom prst="rect">
+            <a:avLst/>
+          </a:prstGeom>
+          <a:solidFill>
+            <a:srgbClr val="FFFFFF"/>
+          </a:solidFill>
+          <a:ln w="9525">
+            <a:solidFill>
+              <a:srgbClr val="E2E8F0"/>
+            </a:solidFill>
+          </a:ln>
+          <a:effectLst/>
+        </p:spPr>
+        <p:style>
+          <a:lnRef idx="1">
+            <a:schemeClr val="accent1"/>
+          </a:lnRef>
+          <a:fillRef idx="3">
+            <a:schemeClr val="accent1"/>
+          </a:fillRef>
+          <a:effectRef idx="2">
+            <a:schemeClr val="accent1"/>
+          </a:effectRef>
+          <a:fontRef idx="minor">
+            <a:schemeClr val="lt1"/>
+          </a:fontRef>
+        </p:style>
+        <p:txBody>
+          <a:bodyPr rtlCol="0" anchor="ctr"/>
+          <a:lstStyle/>
+          <a:p>
+            <a:pPr algn="ctr"/>
+          </a:p>
+        </p:txBody>
+      </p:sp>
+      <p:sp>
+        <p:nvSpPr>
+          <p:cNvPr id="36" name="TextBox 35"/>
+          <p:cNvSpPr txBox="1"/>
+          <p:nvPr/>
+        </p:nvSpPr>
+        <p:spPr>
+          <a:xfrm>
+            <a:off x="3456432" y="5765292"/>
+            <a:ext cx="8001000" cy="457200"/>
+          </a:xfrm>
+          <a:prstGeom prst="rect">
+            <a:avLst/>
+          </a:prstGeom>
+          <a:noFill/>
+        </p:spPr>
+        <p:txBody>
+          <a:bodyPr wrap="square" lIns="0" rIns="0" tIns="0" bIns="0">
+            <a:spAutoFit/>
+          </a:bodyPr>
+          <a:lstStyle/>
+          <a:p>
+            <a:pPr algn="l"/>
+            <a:r>
+              <a:rPr sz="1019" b="0">
+                <a:solidFill>
+                  <a:srgbClr val="0F172A"/>
+                </a:solidFill>
+              </a:rPr>
+              <a:t>Fair value $27.99 vs market $24.66 = +13.5% → risk-adjusted +9.1% → ENTER, elect CASH, hedge 0.066  ·  realized +15.6%</a:t>
+            </a:r>
+          </a:p>
+        </p:txBody>
+      </p:sp>
+      <p:sp>
+        <p:nvSpPr>
+          <p:cNvPr id="37" name="TextBox 36"/>
+          <p:cNvSpPr txBox="1"/>
+          <p:nvPr/>
+        </p:nvSpPr>
+        <p:spPr>
+          <a:xfrm>
+            <a:off x="11064240" y="6473952"/>
+            <a:ext cx="731520" cy="182880"/>
+          </a:xfrm>
+          <a:prstGeom prst="rect">
+            <a:avLst/>
+          </a:prstGeom>
+          <a:noFill/>
+        </p:spPr>
+        <p:txBody>
+          <a:bodyPr wrap="square" lIns="0" rIns="0" tIns="0" bIns="0">
+            <a:spAutoFit/>
+          </a:bodyPr>
+          <a:lstStyle/>
+          <a:p>
+            <a:pPr algn="r"/>
+            <a:r>
+              <a:rPr sz="780" b="0">
+                <a:solidFill>
+                  <a:srgbClr val="475569"/>
+                </a:solidFill>
+              </a:rPr>
+              <a:t>13 / 14</a:t>
             </a:r>
           </a:p>
         </p:txBody>
@@ -5748,8 +9622,8 @@
         </p:nvSpPr>
         <p:spPr>
           <a:xfrm>
-            <a:off x="685800" y="2797093"/>
-            <a:ext cx="10607040" cy="384048"/>
+            <a:off x="685800" y="1554480"/>
+            <a:ext cx="10881360" cy="384048"/>
           </a:xfrm>
           <a:prstGeom prst="rect">
             <a:avLst/>
@@ -5763,109 +9637,186 @@
           </a:bodyPr>
           <a:lstStyle/>
           <a:p>
-            <a:r>
-              <a:rPr lang="en-US" sz="1200" b="1" dirty="0"/>
+            <a:pPr>
+              <a:spcAft>
+                <a:spcPts val="300"/>
+              </a:spcAft>
+            </a:pPr>
+            <a:r>
+              <a:rPr sz="1200" b="1">
+                <a:solidFill>
+                  <a:srgbClr val="182B49"/>
+                </a:solidFill>
+              </a:rPr>
               <a:t>Accomplished this week</a:t>
             </a:r>
           </a:p>
           <a:p>
-            <a:pPr marL="171450" indent="-171450">
-              <a:buFont typeface="Arial" panose="020B0604020202020204" pitchFamily="34" charset="0"/>
-              <a:buChar char="•"/>
-            </a:pPr>
-            <a:r>
-              <a:rPr lang="en-US" sz="1200" dirty="0"/>
-              <a:t>Scaled the validated pipeline from one smoke-test deal to the full US election universe: 317 completed cash-or-stock deals, ~283 SEC-reachable</a:t>
-            </a:r>
-          </a:p>
-          <a:p>
-            <a:pPr marL="628650" indent="-171450">
-              <a:buFont typeface="Arial" panose="020B0604020202020204" pitchFamily="34" charset="0"/>
-              <a:buChar char="•"/>
-            </a:pPr>
-            <a:r>
-              <a:rPr lang="en-US" sz="1200" dirty="0"/>
-              <a:t>Rebuilt company → CIK resolution for delisted targets via EDGAR full-text search + hand-verified overrides (prior ticker table missed ~96% of acquired targets)</a:t>
-            </a:r>
-          </a:p>
-          <a:p>
-            <a:pPr marL="171450" indent="-171450">
-              <a:buFont typeface="Arial" panose="020B0604020202020204" pitchFamily="34" charset="0"/>
-              <a:buChar char="•"/>
-            </a:pPr>
-            <a:r>
-              <a:rPr lang="en-US" sz="1200" dirty="0"/>
-              <a:t>Anchored results-filing selection on the authoritative CRSP close date; fixed a bug where the deal-announcement 8-K out-scored the actual results 8-K</a:t>
-            </a:r>
-          </a:p>
-          <a:p>
-            <a:pPr marL="171450" indent="-171450">
-              <a:buFont typeface="Arial" panose="020B0604020202020204" pitchFamily="34" charset="0"/>
-              <a:buChar char="•"/>
-            </a:pPr>
-            <a:r>
-              <a:rPr lang="en-US" sz="1200" dirty="0"/>
-              <a:t>Captured the realized election-demand label (previously “not found”) by deriving it from share counts, aggregate cash, or the proration factor — ~80% capture on the validation sample</a:t>
-            </a:r>
-          </a:p>
-          <a:p>
-            <a:pPr marL="171450" indent="-171450">
-              <a:buFont typeface="Arial" panose="020B0604020202020204" pitchFamily="34" charset="0"/>
-              <a:buChar char="•"/>
-            </a:pPr>
-            <a:r>
-              <a:rPr lang="en-US" sz="1200" dirty="0"/>
-              <a:t>Validated Claude (Sonnet 5) extraction — correct on known deals, no fabricated numbers; added batch processing (~50% cheaper) with a hard cost cap</a:t>
-            </a:r>
-          </a:p>
-          <a:p>
-            <a:pPr marL="171450" indent="-171450">
-              <a:buFont typeface="Arial" panose="020B0604020202020204" pitchFamily="34" charset="0"/>
-              <a:buChar char="•"/>
-            </a:pPr>
-            <a:r>
-              <a:rPr lang="en-US" sz="1200" dirty="0">
-                <a:highlight>
-                  <a:srgbClr val="FFFF00"/>
-                </a:highlight>
-              </a:rPr>
-              <a:t>Ran end-to-end testing of Edgar Extraction + Claude Extraction for 12 deals. Now expanding to entire corpus.</a:t>
-            </a:r>
-          </a:p>
-          <a:p>
-            <a:r>
-              <a:rPr lang="en-US" sz="1200" b="1" dirty="0"/>
+            <a:pPr>
+              <a:spcAft>
+                <a:spcPts val="300"/>
+              </a:spcAft>
+            </a:pPr>
+            <a:r>
+              <a:rPr sz="1200" b="0">
+                <a:solidFill>
+                  <a:srgbClr val="0F172A"/>
+                </a:solidFill>
+              </a:rPr>
+              <a:t>•  Completed the full-universe SEC → Claude extraction: 317 deals, 303 with fields, 73 clean election-demand labels</a:t>
+            </a:r>
+          </a:p>
+          <a:p>
+            <a:pPr>
+              <a:spcAft>
+                <a:spcPts val="300"/>
+              </a:spcAft>
+            </a:pPr>
+            <a:r>
+              <a:rPr sz="1200" b="0">
+                <a:solidFill>
+                  <a:srgbClr val="0F172A"/>
+                </a:solidFill>
+              </a:rPr>
+              <a:t>•  Built the Monte Carlo framework — demand distribution (Beta) → proration mechanics → simulated payoff and portfolio P&amp;L</a:t>
+            </a:r>
+          </a:p>
+          <a:p>
+            <a:pPr>
+              <a:spcAft>
+                <a:spcPts val="300"/>
+              </a:spcAft>
+            </a:pPr>
+            <a:r>
+              <a:rPr sz="1200" b="0">
+                <a:solidFill>
+                  <a:srgbClr val="0F172A"/>
+                </a:solidFill>
+              </a:rPr>
+              <a:t>•  Validated the demand model out-of-sample: leave-one-out calibration passes (KS p = 0.96), model is honest, not over-confident</a:t>
+            </a:r>
+          </a:p>
+          <a:p>
+            <a:pPr>
+              <a:spcAft>
+                <a:spcPts val="300"/>
+              </a:spcAft>
+            </a:pPr>
+            <a:r>
+              <a:rPr sz="1200" b="0">
+                <a:solidFill>
+                  <a:srgbClr val="0F172A"/>
+                </a:solidFill>
+              </a:rPr>
+              <a:t>•  Built the trade decision layer (blotter): entry, election side, hedge, sizing and a go/no-go rule — signal skill corr +0.67</a:t>
+            </a:r>
+          </a:p>
+          <a:p>
+            <a:pPr>
+              <a:spcAft>
+                <a:spcPts val="300"/>
+              </a:spcAft>
+            </a:pPr>
+            <a:r>
+              <a:rPr sz="1200" b="0">
+                <a:solidFill>
+                  <a:srgbClr val="0F172A"/>
+                </a:solidFill>
+              </a:rPr>
+              <a:t>•  Recovered missing acquirer prices via CUSIP → PERMNO (identifier-drift fix, e.g. BB&amp;T→Truist); MC-ready deals 25 → 32</a:t>
+            </a:r>
+          </a:p>
+          <a:p>
+            <a:pPr>
+              <a:spcAft>
+                <a:spcPts val="300"/>
+              </a:spcAft>
+            </a:pPr>
+            <a:r>
+              <a:rPr sz="1200" b="0">
+                <a:solidFill>
+                  <a:srgbClr val="0F172A"/>
+                </a:solidFill>
+              </a:rPr>
+              <a:t>•  Proved the demand-disclosure ceiling empirically — a sharp-prompt re-extraction recovered ~0; it is non-disclosure, not a tooling gap</a:t>
+            </a:r>
+          </a:p>
+          <a:p>
+            <a:pPr>
+              <a:spcBef>
+                <a:spcPts val="800"/>
+              </a:spcBef>
+              <a:spcAft>
+                <a:spcPts val="300"/>
+              </a:spcAft>
+            </a:pPr>
+            <a:r>
+              <a:rPr sz="1200" b="1">
+                <a:solidFill>
+                  <a:srgbClr val="182B49"/>
+                </a:solidFill>
+              </a:rPr>
               <a:t>In progress / to do</a:t>
             </a:r>
           </a:p>
           <a:p>
-            <a:pPr marL="171450" indent="-171450">
-              <a:buFont typeface="Arial" panose="020B0604020202020204" pitchFamily="34" charset="0"/>
-              <a:buChar char="•"/>
-            </a:pPr>
-            <a:r>
-              <a:rPr lang="en-US" sz="1200" dirty="0"/>
-              <a:t>Full SEC download running across the ~283-deal universe (unattended); next: batch Claude extraction under a fixed cost cap</a:t>
-            </a:r>
-          </a:p>
-          <a:p>
-            <a:pPr marL="171450" indent="-171450">
-              <a:buFont typeface="Arial" panose="020B0604020202020204" pitchFamily="34" charset="0"/>
-              <a:buChar char="•"/>
-            </a:pPr>
-            <a:r>
-              <a:rPr lang="en-US" sz="1200" dirty="0"/>
-              <a:t>Join WRDS market data + ETF/passive ownership onto each extracted event</a:t>
-            </a:r>
-          </a:p>
-          <a:p>
-            <a:pPr marL="171450" indent="-171450">
-              <a:buFont typeface="Arial" panose="020B0604020202020204" pitchFamily="34" charset="0"/>
-              <a:buChar char="•"/>
-            </a:pPr>
-            <a:r>
-              <a:rPr lang="en-US" sz="1200" dirty="0"/>
-              <a:t>Run EDA and fit the structural p_active(spread) model on the realized-demand labels</a:t>
+            <a:pPr>
+              <a:spcAft>
+                <a:spcPts val="300"/>
+              </a:spcAft>
+            </a:pPr>
+            <a:r>
+              <a:rPr sz="1200" b="0">
+                <a:solidFill>
+                  <a:srgbClr val="0F172A"/>
+                </a:solidFill>
+              </a:rPr>
+              <a:t>•  Survivorship-aware P&amp;L backtest: add the terminated deals and extend prices to close so deal-break risk is priced, not assumed</a:t>
+            </a:r>
+          </a:p>
+          <a:p>
+            <a:pPr>
+              <a:spcAft>
+                <a:spcPts val="300"/>
+              </a:spcAft>
+            </a:pPr>
+            <a:r>
+              <a:rPr sz="1200" b="0">
+                <a:solidFill>
+                  <a:srgbClr val="0F172A"/>
+                </a:solidFill>
+              </a:rPr>
+              <a:t>•  Calibrate the deal-break probability and entry hurdle from data (currently placeholders: 12% break, 0.5% hurdle)</a:t>
+            </a:r>
+          </a:p>
+          <a:p>
+            <a:pPr>
+              <a:spcAft>
+                <a:spcPts val="300"/>
+              </a:spcAft>
+            </a:pPr>
+            <a:r>
+              <a:rPr sz="1200" b="0">
+                <a:solidFill>
+                  <a:srgbClr val="0F172A"/>
+                </a:solidFill>
+              </a:rPr>
+              <a:t>•  Censored-demand refinement ($0): fold proration-outcome deals into the Beta fit as bounded demand observations</a:t>
+            </a:r>
+          </a:p>
+          <a:p>
+            <a:pPr>
+              <a:spcAft>
+                <a:spcPts val="300"/>
+              </a:spcAft>
+            </a:pPr>
+            <a:r>
+              <a:rPr sz="1200" b="0">
+                <a:solidFill>
+                  <a:srgbClr val="0F172A"/>
+                </a:solidFill>
+              </a:rPr>
+              <a:t>•  Extend to the private/foreign-acquirer deals as an 'unhedgeable' bucket, and write up the two structural ceilings</a:t>
             </a:r>
           </a:p>
         </p:txBody>
@@ -6180,7 +10131,7 @@
                   <a:srgbClr val="475569"/>
                 </a:solidFill>
               </a:rPr>
-              <a:t>2 / 12</a:t>
+              <a:t>2 / 14</a:t>
             </a:r>
             <a:endParaRPr lang="en-US" sz="780" dirty="0"/>
           </a:p>
@@ -6727,7 +10678,7 @@
                   <a:srgbClr val="475569"/>
                 </a:solidFill>
               </a:rPr>
-              <a:t>3 / 12</a:t>
+              <a:t>3 / 14</a:t>
             </a:r>
             <a:endParaRPr lang="en-US" sz="780" dirty="0"/>
           </a:p>
@@ -8622,7 +12573,7 @@
                   <a:srgbClr val="475569"/>
                 </a:solidFill>
               </a:rPr>
-              <a:t>4 / 12</a:t>
+              <a:t>4 / 14</a:t>
             </a:r>
             <a:endParaRPr lang="en-US" sz="780" dirty="0"/>
           </a:p>
@@ -9782,7 +13733,7 @@
                   <a:srgbClr val="475569"/>
                 </a:solidFill>
               </a:rPr>
-              <a:t>5 / 12</a:t>
+              <a:t>5 / 14</a:t>
             </a:r>
             <a:endParaRPr lang="en-US" sz="780" dirty="0"/>
           </a:p>
@@ -10612,7 +14563,7 @@
                   <a:srgbClr val="475569"/>
                 </a:solidFill>
               </a:rPr>
-              <a:t>6 / 12</a:t>
+              <a:t>6 / 14</a:t>
             </a:r>
             <a:endParaRPr lang="en-US" sz="780" dirty="0"/>
           </a:p>
@@ -11728,7 +15679,7 @@
                   <a:srgbClr val="475569"/>
                 </a:solidFill>
               </a:rPr>
-              <a:t>7 / 12</a:t>
+              <a:t>7 / 14</a:t>
             </a:r>
             <a:endParaRPr lang="en-US" sz="780" dirty="0"/>
           </a:p>
@@ -13441,7 +17392,7 @@
                   <a:srgbClr val="475569"/>
                 </a:solidFill>
               </a:rPr>
-              <a:t>8 / 12</a:t>
+              <a:t>8 / 14</a:t>
             </a:r>
             <a:endParaRPr lang="en-US" sz="780" dirty="0"/>
           </a:p>

--- a/JPM_Project_3ii_week6.pptx
+++ b/JPM_Project_3ii_week6.pptx
@@ -20,6 +20,7 @@
     <p:sldId id="264" r:id="rId11"/>
     <p:sldId id="265" r:id="rId12"/>
     <p:sldId id="266" r:id="rId13"/>
+    <p:sldId id="273" r:id="rId22"/>
     <p:sldId id="271" r:id="rId20"/>
     <p:sldId id="272" r:id="rId21"/>
     <p:sldId id="267" r:id="rId14"/>
@@ -2634,7 +2635,7 @@
                   <a:srgbClr val="475569"/>
                 </a:solidFill>
               </a:rPr>
-              <a:t>9 / 14</a:t>
+              <a:t>9 / 15</a:t>
             </a:r>
             <a:endParaRPr lang="en-US" sz="780" dirty="0"/>
           </a:p>
@@ -3356,7 +3357,7 @@
                   <a:srgbClr val="475569"/>
                 </a:solidFill>
               </a:rPr>
-              <a:t>10 / 14</a:t>
+              <a:t>10 / 15</a:t>
             </a:r>
             <a:endParaRPr lang="en-US" sz="780" dirty="0"/>
           </a:p>
@@ -4256,7 +4257,7 @@
                   <a:srgbClr val="475569"/>
                 </a:solidFill>
               </a:rPr>
-              <a:t>11 / 14</a:t>
+              <a:t>11 / 15</a:t>
             </a:r>
             <a:endParaRPr lang="en-US" sz="780" dirty="0"/>
           </a:p>
@@ -5055,7 +5056,7 @@
 </file>
 
 <file path=ppt/slides/slide13.xml><?xml version="1.0" encoding="utf-8"?>
-<p:sld xmlns:a="http://schemas.openxmlformats.org/drawingml/2006/main" xmlns:r="http://schemas.openxmlformats.org/officeDocument/2006/relationships" xmlns:p="http://schemas.openxmlformats.org/presentationml/2006/main">
+<p:sld xmlns:a="http://schemas.openxmlformats.org/drawingml/2006/main" xmlns:p="http://schemas.openxmlformats.org/presentationml/2006/main" xmlns:r="http://schemas.openxmlformats.org/officeDocument/2006/relationships">
   <p:cSld>
     <p:spTree>
       <p:nvGrpSpPr>
@@ -5063,24 +5064,61 @@
         <p:cNvGrpSpPr/>
         <p:nvPr/>
       </p:nvGrpSpPr>
-      <p:grpSpPr>
-        <a:xfrm>
-          <a:off x="0" y="0"/>
-          <a:ext cx="0" cy="0"/>
-          <a:chOff x="0" y="0"/>
-          <a:chExt cx="0" cy="0"/>
-        </a:xfrm>
-      </p:grpSpPr>
-      <p:sp>
-        <p:nvSpPr>
-          <p:cNvPr id="3" name="Shape 1"/>
+      <p:grpSpPr/>
+      <p:sp>
+        <p:nvSpPr>
+          <p:cNvPr id="2" name="Rectangle 1"/>
           <p:cNvSpPr/>
           <p:nvPr/>
         </p:nvSpPr>
         <p:spPr>
           <a:xfrm>
             <a:off x="0" y="0"/>
-            <a:ext cx="12191695" cy="164592"/>
+            <a:ext cx="12188952" cy="6858000"/>
+          </a:xfrm>
+          <a:prstGeom prst="rect">
+            <a:avLst/>
+          </a:prstGeom>
+          <a:solidFill>
+            <a:srgbClr val="FFFFFF"/>
+          </a:solidFill>
+          <a:ln>
+            <a:noFill/>
+          </a:ln>
+          <a:effectLst/>
+        </p:spPr>
+        <p:style>
+          <a:lnRef idx="1">
+            <a:schemeClr val="accent1"/>
+          </a:lnRef>
+          <a:fillRef idx="3">
+            <a:schemeClr val="accent1"/>
+          </a:fillRef>
+          <a:effectRef idx="2">
+            <a:schemeClr val="accent1"/>
+          </a:effectRef>
+          <a:fontRef idx="minor">
+            <a:schemeClr val="lt1"/>
+          </a:fontRef>
+        </p:style>
+        <p:txBody>
+          <a:bodyPr rtlCol="0" anchor="ctr"/>
+          <a:lstStyle/>
+          <a:p>
+            <a:pPr algn="ctr"/>
+          </a:p>
+        </p:txBody>
+      </p:sp>
+      <p:sp>
+        <p:nvSpPr>
+          <p:cNvPr id="3" name="Rectangle 2"/>
+          <p:cNvSpPr/>
+          <p:nvPr/>
+        </p:nvSpPr>
+        <p:spPr>
+          <a:xfrm>
+            <a:off x="0" y="0"/>
+            <a:ext cx="12188952" cy="164592"/>
           </a:xfrm>
           <a:prstGeom prst="rect">
             <a:avLst/>
@@ -5088,25 +5126,37 @@
           <a:solidFill>
             <a:srgbClr val="14315A"/>
           </a:solidFill>
-          <a:ln w="12700">
-            <a:solidFill>
-              <a:srgbClr val="14315A"/>
-            </a:solidFill>
-            <a:prstDash val="solid"/>
+          <a:ln>
+            <a:noFill/>
           </a:ln>
-        </p:spPr>
-        <p:txBody>
-          <a:bodyPr/>
-          <a:lstStyle/>
-          <a:p>
-            <a:endParaRPr lang="en-US"/>
-          </a:p>
-        </p:txBody>
-      </p:sp>
-      <p:sp>
-        <p:nvSpPr>
-          <p:cNvPr id="4" name="Text 2"/>
-          <p:cNvSpPr/>
+          <a:effectLst/>
+        </p:spPr>
+        <p:style>
+          <a:lnRef idx="1">
+            <a:schemeClr val="accent1"/>
+          </a:lnRef>
+          <a:fillRef idx="3">
+            <a:schemeClr val="accent1"/>
+          </a:fillRef>
+          <a:effectRef idx="2">
+            <a:schemeClr val="accent1"/>
+          </a:effectRef>
+          <a:fontRef idx="minor">
+            <a:schemeClr val="lt1"/>
+          </a:fontRef>
+        </p:style>
+        <p:txBody>
+          <a:bodyPr rtlCol="0" anchor="ctr"/>
+          <a:lstStyle/>
+          <a:p>
+            <a:pPr algn="ctr"/>
+          </a:p>
+        </p:txBody>
+      </p:sp>
+      <p:sp>
+        <p:nvSpPr>
+          <p:cNvPr id="4" name="TextBox 3"/>
+          <p:cNvSpPr txBox="1"/>
           <p:nvPr/>
         </p:nvSpPr>
         <p:spPr>
@@ -5120,28 +5170,61 @@
           <a:noFill/>
         </p:spPr>
         <p:txBody>
-          <a:bodyPr wrap="square" lIns="0" tIns="0" rIns="0" bIns="0" rtlCol="0" anchor="ctr"/>
-          <a:lstStyle/>
-          <a:p>
-            <a:pPr marL="0" indent="0">
-              <a:buNone/>
-            </a:pPr>
-            <a:r>
-              <a:rPr lang="en-US" sz="2800" b="1" dirty="0">
+          <a:bodyPr wrap="square" lIns="0" rIns="0" tIns="0" bIns="0">
+            <a:spAutoFit/>
+          </a:bodyPr>
+          <a:lstStyle/>
+          <a:p>
+            <a:pPr algn="l"/>
+            <a:r>
+              <a:rPr sz="2800" b="1">
                 <a:solidFill>
                   <a:srgbClr val="14315A"/>
                 </a:solidFill>
               </a:rPr>
-              <a:t>Mentor discussion and next implementation steps</a:t>
-            </a:r>
-            <a:endParaRPr lang="en-US" sz="2800" dirty="0"/>
-          </a:p>
-        </p:txBody>
-      </p:sp>
-      <p:sp>
-        <p:nvSpPr>
-          <p:cNvPr id="6" name="Text 4"/>
-          <p:cNvSpPr/>
+              <a:t>Updated pipeline — extraction to Monte Carlo to trade</a:t>
+            </a:r>
+          </a:p>
+        </p:txBody>
+      </p:sp>
+      <p:sp>
+        <p:nvSpPr>
+          <p:cNvPr id="5" name="TextBox 4"/>
+          <p:cNvSpPr txBox="1"/>
+          <p:nvPr/>
+        </p:nvSpPr>
+        <p:spPr>
+          <a:xfrm>
+            <a:off x="512064" y="923544"/>
+            <a:ext cx="10881360" cy="329184"/>
+          </a:xfrm>
+          <a:prstGeom prst="rect">
+            <a:avLst/>
+          </a:prstGeom>
+          <a:noFill/>
+        </p:spPr>
+        <p:txBody>
+          <a:bodyPr wrap="square" lIns="0" rIns="0" tIns="0" bIns="0">
+            <a:spAutoFit/>
+          </a:bodyPr>
+          <a:lstStyle/>
+          <a:p>
+            <a:pPr algn="l"/>
+            <a:r>
+              <a:rPr sz="1350" b="0">
+                <a:solidFill>
+                  <a:srgbClr val="475569"/>
+                </a:solidFill>
+              </a:rPr>
+              <a:t>Full current flow: 2,068 raw deals → 73 clean labels → a calibrated model → a trade blotter</a:t>
+            </a:r>
+          </a:p>
+        </p:txBody>
+      </p:sp>
+      <p:sp>
+        <p:nvSpPr>
+          <p:cNvPr id="6" name="TextBox 5"/>
+          <p:cNvSpPr txBox="1"/>
           <p:nvPr/>
         </p:nvSpPr>
         <p:spPr>
@@ -5155,28 +5238,2233 @@
           <a:noFill/>
         </p:spPr>
         <p:txBody>
-          <a:bodyPr wrap="square" lIns="0" tIns="0" rIns="0" bIns="0" rtlCol="0" anchor="ctr"/>
-          <a:lstStyle/>
-          <a:p>
-            <a:pPr marL="0" indent="0">
-              <a:buNone/>
-            </a:pPr>
-            <a:r>
-              <a:rPr lang="en-US" sz="780" dirty="0">
+          <a:bodyPr wrap="square" lIns="0" rIns="0" tIns="0" bIns="0">
+            <a:spAutoFit/>
+          </a:bodyPr>
+          <a:lstStyle/>
+          <a:p>
+            <a:pPr algn="l"/>
+            <a:r>
+              <a:rPr sz="780" b="0">
                 <a:solidFill>
                   <a:srgbClr val="475569"/>
                 </a:solidFill>
               </a:rPr>
               <a:t>JPM Project 3ii · Weekly workflow validation</a:t>
             </a:r>
-            <a:endParaRPr lang="en-US" sz="780" dirty="0"/>
-          </a:p>
-        </p:txBody>
-      </p:sp>
-      <p:sp>
-        <p:nvSpPr>
-          <p:cNvPr id="7" name="Text 5"/>
-          <p:cNvSpPr/>
+          </a:p>
+        </p:txBody>
+      </p:sp>
+      <p:sp>
+        <p:nvSpPr>
+          <p:cNvPr id="7" name="Rectangle 6"/>
+          <p:cNvSpPr/>
+          <p:nvPr/>
+        </p:nvSpPr>
+        <p:spPr>
+          <a:xfrm>
+            <a:off x="594360" y="1481328"/>
+            <a:ext cx="1417320" cy="676656"/>
+          </a:xfrm>
+          <a:prstGeom prst="rect">
+            <a:avLst/>
+          </a:prstGeom>
+          <a:solidFill>
+            <a:srgbClr val="EAF2FF"/>
+          </a:solidFill>
+          <a:ln>
+            <a:noFill/>
+          </a:ln>
+          <a:effectLst/>
+        </p:spPr>
+        <p:style>
+          <a:lnRef idx="1">
+            <a:schemeClr val="accent1"/>
+          </a:lnRef>
+          <a:fillRef idx="3">
+            <a:schemeClr val="accent1"/>
+          </a:fillRef>
+          <a:effectRef idx="2">
+            <a:schemeClr val="accent1"/>
+          </a:effectRef>
+          <a:fontRef idx="minor">
+            <a:schemeClr val="lt1"/>
+          </a:fontRef>
+        </p:style>
+        <p:txBody>
+          <a:bodyPr rtlCol="0" anchor="ctr"/>
+          <a:lstStyle/>
+          <a:p>
+            <a:pPr algn="ctr"/>
+          </a:p>
+        </p:txBody>
+      </p:sp>
+      <p:sp>
+        <p:nvSpPr>
+          <p:cNvPr id="8" name="TextBox 7"/>
+          <p:cNvSpPr txBox="1"/>
+          <p:nvPr/>
+        </p:nvSpPr>
+        <p:spPr>
+          <a:xfrm>
+            <a:off x="676656" y="1600200"/>
+            <a:ext cx="1252728" cy="182880"/>
+          </a:xfrm>
+          <a:prstGeom prst="rect">
+            <a:avLst/>
+          </a:prstGeom>
+          <a:noFill/>
+        </p:spPr>
+        <p:txBody>
+          <a:bodyPr wrap="square" lIns="0" rIns="0" tIns="0" bIns="0">
+            <a:spAutoFit/>
+          </a:bodyPr>
+          <a:lstStyle/>
+          <a:p>
+            <a:pPr algn="ctr"/>
+            <a:r>
+              <a:rPr sz="880" b="1">
+                <a:solidFill>
+                  <a:srgbClr val="14315A"/>
+                </a:solidFill>
+              </a:rPr>
+              <a:t>Universe</a:t>
+            </a:r>
+          </a:p>
+        </p:txBody>
+      </p:sp>
+      <p:sp>
+        <p:nvSpPr>
+          <p:cNvPr id="9" name="TextBox 8"/>
+          <p:cNvSpPr txBox="1"/>
+          <p:nvPr/>
+        </p:nvSpPr>
+        <p:spPr>
+          <a:xfrm>
+            <a:off x="676656" y="1837944"/>
+            <a:ext cx="1252728" cy="182880"/>
+          </a:xfrm>
+          <a:prstGeom prst="rect">
+            <a:avLst/>
+          </a:prstGeom>
+          <a:noFill/>
+        </p:spPr>
+        <p:txBody>
+          <a:bodyPr wrap="square" lIns="0" rIns="0" tIns="0" bIns="0">
+            <a:spAutoFit/>
+          </a:bodyPr>
+          <a:lstStyle/>
+          <a:p>
+            <a:pPr algn="ctr"/>
+            <a:r>
+              <a:rPr sz="720" b="0">
+                <a:solidFill>
+                  <a:srgbClr val="475569"/>
+                </a:solidFill>
+              </a:rPr>
+              <a:t>2,068 → 317</a:t>
+            </a:r>
+          </a:p>
+        </p:txBody>
+      </p:sp>
+      <p:sp>
+        <p:nvSpPr>
+          <p:cNvPr id="10" name="Rectangle 9"/>
+          <p:cNvSpPr/>
+          <p:nvPr/>
+        </p:nvSpPr>
+        <p:spPr>
+          <a:xfrm>
+            <a:off x="2057400" y="1737360"/>
+            <a:ext cx="146304" cy="182880"/>
+          </a:xfrm>
+          <a:prstGeom prst="rect">
+            <a:avLst/>
+          </a:prstGeom>
+          <a:solidFill>
+            <a:srgbClr val="CBD5E1"/>
+          </a:solidFill>
+          <a:ln>
+            <a:noFill/>
+          </a:ln>
+          <a:effectLst/>
+        </p:spPr>
+        <p:style>
+          <a:lnRef idx="1">
+            <a:schemeClr val="accent1"/>
+          </a:lnRef>
+          <a:fillRef idx="3">
+            <a:schemeClr val="accent1"/>
+          </a:fillRef>
+          <a:effectRef idx="2">
+            <a:schemeClr val="accent1"/>
+          </a:effectRef>
+          <a:fontRef idx="minor">
+            <a:schemeClr val="lt1"/>
+          </a:fontRef>
+        </p:style>
+        <p:txBody>
+          <a:bodyPr rtlCol="0" anchor="ctr"/>
+          <a:lstStyle/>
+          <a:p>
+            <a:pPr algn="ctr"/>
+          </a:p>
+        </p:txBody>
+      </p:sp>
+      <p:sp>
+        <p:nvSpPr>
+          <p:cNvPr id="11" name="Rectangle 10"/>
+          <p:cNvSpPr/>
+          <p:nvPr/>
+        </p:nvSpPr>
+        <p:spPr>
+          <a:xfrm>
+            <a:off x="2468879" y="1481328"/>
+            <a:ext cx="1417320" cy="676656"/>
+          </a:xfrm>
+          <a:prstGeom prst="rect">
+            <a:avLst/>
+          </a:prstGeom>
+          <a:solidFill>
+            <a:srgbClr val="EAF2FF"/>
+          </a:solidFill>
+          <a:ln>
+            <a:noFill/>
+          </a:ln>
+          <a:effectLst/>
+        </p:spPr>
+        <p:style>
+          <a:lnRef idx="1">
+            <a:schemeClr val="accent1"/>
+          </a:lnRef>
+          <a:fillRef idx="3">
+            <a:schemeClr val="accent1"/>
+          </a:fillRef>
+          <a:effectRef idx="2">
+            <a:schemeClr val="accent1"/>
+          </a:effectRef>
+          <a:fontRef idx="minor">
+            <a:schemeClr val="lt1"/>
+          </a:fontRef>
+        </p:style>
+        <p:txBody>
+          <a:bodyPr rtlCol="0" anchor="ctr"/>
+          <a:lstStyle/>
+          <a:p>
+            <a:pPr algn="ctr"/>
+          </a:p>
+        </p:txBody>
+      </p:sp>
+      <p:sp>
+        <p:nvSpPr>
+          <p:cNvPr id="12" name="TextBox 11"/>
+          <p:cNvSpPr txBox="1"/>
+          <p:nvPr/>
+        </p:nvSpPr>
+        <p:spPr>
+          <a:xfrm>
+            <a:off x="2551175" y="1600200"/>
+            <a:ext cx="1252728" cy="182880"/>
+          </a:xfrm>
+          <a:prstGeom prst="rect">
+            <a:avLst/>
+          </a:prstGeom>
+          <a:noFill/>
+        </p:spPr>
+        <p:txBody>
+          <a:bodyPr wrap="square" lIns="0" rIns="0" tIns="0" bIns="0">
+            <a:spAutoFit/>
+          </a:bodyPr>
+          <a:lstStyle/>
+          <a:p>
+            <a:pPr algn="ctr"/>
+            <a:r>
+              <a:rPr sz="880" b="1">
+                <a:solidFill>
+                  <a:srgbClr val="14315A"/>
+                </a:solidFill>
+              </a:rPr>
+              <a:t>SEC + Claude</a:t>
+            </a:r>
+          </a:p>
+        </p:txBody>
+      </p:sp>
+      <p:sp>
+        <p:nvSpPr>
+          <p:cNvPr id="13" name="TextBox 12"/>
+          <p:cNvSpPr txBox="1"/>
+          <p:nvPr/>
+        </p:nvSpPr>
+        <p:spPr>
+          <a:xfrm>
+            <a:off x="2551175" y="1837944"/>
+            <a:ext cx="1252728" cy="182880"/>
+          </a:xfrm>
+          <a:prstGeom prst="rect">
+            <a:avLst/>
+          </a:prstGeom>
+          <a:noFill/>
+        </p:spPr>
+        <p:txBody>
+          <a:bodyPr wrap="square" lIns="0" rIns="0" tIns="0" bIns="0">
+            <a:spAutoFit/>
+          </a:bodyPr>
+          <a:lstStyle/>
+          <a:p>
+            <a:pPr algn="ctr"/>
+            <a:r>
+              <a:rPr sz="720" b="0">
+                <a:solidFill>
+                  <a:srgbClr val="475569"/>
+                </a:solidFill>
+              </a:rPr>
+              <a:t>field extraction</a:t>
+            </a:r>
+          </a:p>
+        </p:txBody>
+      </p:sp>
+      <p:sp>
+        <p:nvSpPr>
+          <p:cNvPr id="14" name="Rectangle 13"/>
+          <p:cNvSpPr/>
+          <p:nvPr/>
+        </p:nvSpPr>
+        <p:spPr>
+          <a:xfrm>
+            <a:off x="3931920" y="1737360"/>
+            <a:ext cx="146304" cy="182880"/>
+          </a:xfrm>
+          <a:prstGeom prst="rect">
+            <a:avLst/>
+          </a:prstGeom>
+          <a:solidFill>
+            <a:srgbClr val="CBD5E1"/>
+          </a:solidFill>
+          <a:ln>
+            <a:noFill/>
+          </a:ln>
+          <a:effectLst/>
+        </p:spPr>
+        <p:style>
+          <a:lnRef idx="1">
+            <a:schemeClr val="accent1"/>
+          </a:lnRef>
+          <a:fillRef idx="3">
+            <a:schemeClr val="accent1"/>
+          </a:fillRef>
+          <a:effectRef idx="2">
+            <a:schemeClr val="accent1"/>
+          </a:effectRef>
+          <a:fontRef idx="minor">
+            <a:schemeClr val="lt1"/>
+          </a:fontRef>
+        </p:style>
+        <p:txBody>
+          <a:bodyPr rtlCol="0" anchor="ctr"/>
+          <a:lstStyle/>
+          <a:p>
+            <a:pPr algn="ctr"/>
+          </a:p>
+        </p:txBody>
+      </p:sp>
+      <p:sp>
+        <p:nvSpPr>
+          <p:cNvPr id="15" name="Rectangle 14"/>
+          <p:cNvSpPr/>
+          <p:nvPr/>
+        </p:nvSpPr>
+        <p:spPr>
+          <a:xfrm>
+            <a:off x="4343400" y="1481328"/>
+            <a:ext cx="1417320" cy="676656"/>
+          </a:xfrm>
+          <a:prstGeom prst="rect">
+            <a:avLst/>
+          </a:prstGeom>
+          <a:solidFill>
+            <a:srgbClr val="EAF2FF"/>
+          </a:solidFill>
+          <a:ln>
+            <a:noFill/>
+          </a:ln>
+          <a:effectLst/>
+        </p:spPr>
+        <p:style>
+          <a:lnRef idx="1">
+            <a:schemeClr val="accent1"/>
+          </a:lnRef>
+          <a:fillRef idx="3">
+            <a:schemeClr val="accent1"/>
+          </a:fillRef>
+          <a:effectRef idx="2">
+            <a:schemeClr val="accent1"/>
+          </a:effectRef>
+          <a:fontRef idx="minor">
+            <a:schemeClr val="lt1"/>
+          </a:fontRef>
+        </p:style>
+        <p:txBody>
+          <a:bodyPr rtlCol="0" anchor="ctr"/>
+          <a:lstStyle/>
+          <a:p>
+            <a:pPr algn="ctr"/>
+          </a:p>
+        </p:txBody>
+      </p:sp>
+      <p:sp>
+        <p:nvSpPr>
+          <p:cNvPr id="16" name="TextBox 15"/>
+          <p:cNvSpPr txBox="1"/>
+          <p:nvPr/>
+        </p:nvSpPr>
+        <p:spPr>
+          <a:xfrm>
+            <a:off x="4425696" y="1600200"/>
+            <a:ext cx="1252728" cy="182880"/>
+          </a:xfrm>
+          <a:prstGeom prst="rect">
+            <a:avLst/>
+          </a:prstGeom>
+          <a:noFill/>
+        </p:spPr>
+        <p:txBody>
+          <a:bodyPr wrap="square" lIns="0" rIns="0" tIns="0" bIns="0">
+            <a:spAutoFit/>
+          </a:bodyPr>
+          <a:lstStyle/>
+          <a:p>
+            <a:pPr algn="ctr"/>
+            <a:r>
+              <a:rPr sz="880" b="1">
+                <a:solidFill>
+                  <a:srgbClr val="14315A"/>
+                </a:solidFill>
+              </a:rPr>
+              <a:t>WRDS</a:t>
+            </a:r>
+          </a:p>
+        </p:txBody>
+      </p:sp>
+      <p:sp>
+        <p:nvSpPr>
+          <p:cNvPr id="17" name="TextBox 16"/>
+          <p:cNvSpPr txBox="1"/>
+          <p:nvPr/>
+        </p:nvSpPr>
+        <p:spPr>
+          <a:xfrm>
+            <a:off x="4425696" y="1837944"/>
+            <a:ext cx="1252728" cy="182880"/>
+          </a:xfrm>
+          <a:prstGeom prst="rect">
+            <a:avLst/>
+          </a:prstGeom>
+          <a:noFill/>
+        </p:spPr>
+        <p:txBody>
+          <a:bodyPr wrap="square" lIns="0" rIns="0" tIns="0" bIns="0">
+            <a:spAutoFit/>
+          </a:bodyPr>
+          <a:lstStyle/>
+          <a:p>
+            <a:pPr algn="ctr"/>
+            <a:r>
+              <a:rPr sz="720" b="0">
+                <a:solidFill>
+                  <a:srgbClr val="475569"/>
+                </a:solidFill>
+              </a:rPr>
+              <a:t>prices + own.</a:t>
+            </a:r>
+          </a:p>
+        </p:txBody>
+      </p:sp>
+      <p:sp>
+        <p:nvSpPr>
+          <p:cNvPr id="18" name="Rectangle 17"/>
+          <p:cNvSpPr/>
+          <p:nvPr/>
+        </p:nvSpPr>
+        <p:spPr>
+          <a:xfrm>
+            <a:off x="5806440" y="1737360"/>
+            <a:ext cx="146304" cy="182880"/>
+          </a:xfrm>
+          <a:prstGeom prst="rect">
+            <a:avLst/>
+          </a:prstGeom>
+          <a:solidFill>
+            <a:srgbClr val="CBD5E1"/>
+          </a:solidFill>
+          <a:ln>
+            <a:noFill/>
+          </a:ln>
+          <a:effectLst/>
+        </p:spPr>
+        <p:style>
+          <a:lnRef idx="1">
+            <a:schemeClr val="accent1"/>
+          </a:lnRef>
+          <a:fillRef idx="3">
+            <a:schemeClr val="accent1"/>
+          </a:fillRef>
+          <a:effectRef idx="2">
+            <a:schemeClr val="accent1"/>
+          </a:effectRef>
+          <a:fontRef idx="minor">
+            <a:schemeClr val="lt1"/>
+          </a:fontRef>
+        </p:style>
+        <p:txBody>
+          <a:bodyPr rtlCol="0" anchor="ctr"/>
+          <a:lstStyle/>
+          <a:p>
+            <a:pPr algn="ctr"/>
+          </a:p>
+        </p:txBody>
+      </p:sp>
+      <p:sp>
+        <p:nvSpPr>
+          <p:cNvPr id="19" name="Rectangle 18"/>
+          <p:cNvSpPr/>
+          <p:nvPr/>
+        </p:nvSpPr>
+        <p:spPr>
+          <a:xfrm>
+            <a:off x="6217920" y="1481328"/>
+            <a:ext cx="1417320" cy="676656"/>
+          </a:xfrm>
+          <a:prstGeom prst="rect">
+            <a:avLst/>
+          </a:prstGeom>
+          <a:solidFill>
+            <a:srgbClr val="EAF2FF"/>
+          </a:solidFill>
+          <a:ln>
+            <a:noFill/>
+          </a:ln>
+          <a:effectLst/>
+        </p:spPr>
+        <p:style>
+          <a:lnRef idx="1">
+            <a:schemeClr val="accent1"/>
+          </a:lnRef>
+          <a:fillRef idx="3">
+            <a:schemeClr val="accent1"/>
+          </a:fillRef>
+          <a:effectRef idx="2">
+            <a:schemeClr val="accent1"/>
+          </a:effectRef>
+          <a:fontRef idx="minor">
+            <a:schemeClr val="lt1"/>
+          </a:fontRef>
+        </p:style>
+        <p:txBody>
+          <a:bodyPr rtlCol="0" anchor="ctr"/>
+          <a:lstStyle/>
+          <a:p>
+            <a:pPr algn="ctr"/>
+          </a:p>
+        </p:txBody>
+      </p:sp>
+      <p:sp>
+        <p:nvSpPr>
+          <p:cNvPr id="20" name="TextBox 19"/>
+          <p:cNvSpPr txBox="1"/>
+          <p:nvPr/>
+        </p:nvSpPr>
+        <p:spPr>
+          <a:xfrm>
+            <a:off x="6300216" y="1600200"/>
+            <a:ext cx="1252728" cy="182880"/>
+          </a:xfrm>
+          <a:prstGeom prst="rect">
+            <a:avLst/>
+          </a:prstGeom>
+          <a:noFill/>
+        </p:spPr>
+        <p:txBody>
+          <a:bodyPr wrap="square" lIns="0" rIns="0" tIns="0" bIns="0">
+            <a:spAutoFit/>
+          </a:bodyPr>
+          <a:lstStyle/>
+          <a:p>
+            <a:pPr algn="ctr"/>
+            <a:r>
+              <a:rPr sz="880" b="1">
+                <a:solidFill>
+                  <a:srgbClr val="14315A"/>
+                </a:solidFill>
+              </a:rPr>
+              <a:t>Labels</a:t>
+            </a:r>
+          </a:p>
+        </p:txBody>
+      </p:sp>
+      <p:sp>
+        <p:nvSpPr>
+          <p:cNvPr id="21" name="TextBox 20"/>
+          <p:cNvSpPr txBox="1"/>
+          <p:nvPr/>
+        </p:nvSpPr>
+        <p:spPr>
+          <a:xfrm>
+            <a:off x="6300216" y="1837944"/>
+            <a:ext cx="1252728" cy="182880"/>
+          </a:xfrm>
+          <a:prstGeom prst="rect">
+            <a:avLst/>
+          </a:prstGeom>
+          <a:noFill/>
+        </p:spPr>
+        <p:txBody>
+          <a:bodyPr wrap="square" lIns="0" rIns="0" tIns="0" bIns="0">
+            <a:spAutoFit/>
+          </a:bodyPr>
+          <a:lstStyle/>
+          <a:p>
+            <a:pPr algn="ctr"/>
+            <a:r>
+              <a:rPr sz="720" b="0">
+                <a:solidFill>
+                  <a:srgbClr val="475569"/>
+                </a:solidFill>
+              </a:rPr>
+              <a:t>73 clean demand</a:t>
+            </a:r>
+          </a:p>
+        </p:txBody>
+      </p:sp>
+      <p:sp>
+        <p:nvSpPr>
+          <p:cNvPr id="22" name="Rectangle 21"/>
+          <p:cNvSpPr/>
+          <p:nvPr/>
+        </p:nvSpPr>
+        <p:spPr>
+          <a:xfrm>
+            <a:off x="7680960" y="1737360"/>
+            <a:ext cx="146304" cy="182880"/>
+          </a:xfrm>
+          <a:prstGeom prst="rect">
+            <a:avLst/>
+          </a:prstGeom>
+          <a:solidFill>
+            <a:srgbClr val="CBD5E1"/>
+          </a:solidFill>
+          <a:ln>
+            <a:noFill/>
+          </a:ln>
+          <a:effectLst/>
+        </p:spPr>
+        <p:style>
+          <a:lnRef idx="1">
+            <a:schemeClr val="accent1"/>
+          </a:lnRef>
+          <a:fillRef idx="3">
+            <a:schemeClr val="accent1"/>
+          </a:fillRef>
+          <a:effectRef idx="2">
+            <a:schemeClr val="accent1"/>
+          </a:effectRef>
+          <a:fontRef idx="minor">
+            <a:schemeClr val="lt1"/>
+          </a:fontRef>
+        </p:style>
+        <p:txBody>
+          <a:bodyPr rtlCol="0" anchor="ctr"/>
+          <a:lstStyle/>
+          <a:p>
+            <a:pPr algn="ctr"/>
+          </a:p>
+        </p:txBody>
+      </p:sp>
+      <p:sp>
+        <p:nvSpPr>
+          <p:cNvPr id="23" name="Rectangle 22"/>
+          <p:cNvSpPr/>
+          <p:nvPr/>
+        </p:nvSpPr>
+        <p:spPr>
+          <a:xfrm>
+            <a:off x="8092440" y="1481328"/>
+            <a:ext cx="1417320" cy="676656"/>
+          </a:xfrm>
+          <a:prstGeom prst="rect">
+            <a:avLst/>
+          </a:prstGeom>
+          <a:solidFill>
+            <a:srgbClr val="EAF2FF"/>
+          </a:solidFill>
+          <a:ln>
+            <a:noFill/>
+          </a:ln>
+          <a:effectLst/>
+        </p:spPr>
+        <p:style>
+          <a:lnRef idx="1">
+            <a:schemeClr val="accent1"/>
+          </a:lnRef>
+          <a:fillRef idx="3">
+            <a:schemeClr val="accent1"/>
+          </a:fillRef>
+          <a:effectRef idx="2">
+            <a:schemeClr val="accent1"/>
+          </a:effectRef>
+          <a:fontRef idx="minor">
+            <a:schemeClr val="lt1"/>
+          </a:fontRef>
+        </p:style>
+        <p:txBody>
+          <a:bodyPr rtlCol="0" anchor="ctr"/>
+          <a:lstStyle/>
+          <a:p>
+            <a:pPr algn="ctr"/>
+          </a:p>
+        </p:txBody>
+      </p:sp>
+      <p:sp>
+        <p:nvSpPr>
+          <p:cNvPr id="24" name="TextBox 23"/>
+          <p:cNvSpPr txBox="1"/>
+          <p:nvPr/>
+        </p:nvSpPr>
+        <p:spPr>
+          <a:xfrm>
+            <a:off x="8174736" y="1600200"/>
+            <a:ext cx="1252728" cy="182880"/>
+          </a:xfrm>
+          <a:prstGeom prst="rect">
+            <a:avLst/>
+          </a:prstGeom>
+          <a:noFill/>
+        </p:spPr>
+        <p:txBody>
+          <a:bodyPr wrap="square" lIns="0" rIns="0" tIns="0" bIns="0">
+            <a:spAutoFit/>
+          </a:bodyPr>
+          <a:lstStyle/>
+          <a:p>
+            <a:pPr algn="ctr"/>
+            <a:r>
+              <a:rPr sz="880" b="1">
+                <a:solidFill>
+                  <a:srgbClr val="14315A"/>
+                </a:solidFill>
+              </a:rPr>
+              <a:t>Monte Carlo</a:t>
+            </a:r>
+          </a:p>
+        </p:txBody>
+      </p:sp>
+      <p:sp>
+        <p:nvSpPr>
+          <p:cNvPr id="25" name="TextBox 24"/>
+          <p:cNvSpPr txBox="1"/>
+          <p:nvPr/>
+        </p:nvSpPr>
+        <p:spPr>
+          <a:xfrm>
+            <a:off x="8174736" y="1837944"/>
+            <a:ext cx="1252728" cy="182880"/>
+          </a:xfrm>
+          <a:prstGeom prst="rect">
+            <a:avLst/>
+          </a:prstGeom>
+          <a:noFill/>
+        </p:spPr>
+        <p:txBody>
+          <a:bodyPr wrap="square" lIns="0" rIns="0" tIns="0" bIns="0">
+            <a:spAutoFit/>
+          </a:bodyPr>
+          <a:lstStyle/>
+          <a:p>
+            <a:pPr algn="ctr"/>
+            <a:r>
+              <a:rPr sz="720" b="0">
+                <a:solidFill>
+                  <a:srgbClr val="475569"/>
+                </a:solidFill>
+              </a:rPr>
+              <a:t>demand → payoff</a:t>
+            </a:r>
+          </a:p>
+        </p:txBody>
+      </p:sp>
+      <p:sp>
+        <p:nvSpPr>
+          <p:cNvPr id="26" name="Rectangle 25"/>
+          <p:cNvSpPr/>
+          <p:nvPr/>
+        </p:nvSpPr>
+        <p:spPr>
+          <a:xfrm>
+            <a:off x="9555480" y="1737360"/>
+            <a:ext cx="146304" cy="182880"/>
+          </a:xfrm>
+          <a:prstGeom prst="rect">
+            <a:avLst/>
+          </a:prstGeom>
+          <a:solidFill>
+            <a:srgbClr val="CBD5E1"/>
+          </a:solidFill>
+          <a:ln>
+            <a:noFill/>
+          </a:ln>
+          <a:effectLst/>
+        </p:spPr>
+        <p:style>
+          <a:lnRef idx="1">
+            <a:schemeClr val="accent1"/>
+          </a:lnRef>
+          <a:fillRef idx="3">
+            <a:schemeClr val="accent1"/>
+          </a:fillRef>
+          <a:effectRef idx="2">
+            <a:schemeClr val="accent1"/>
+          </a:effectRef>
+          <a:fontRef idx="minor">
+            <a:schemeClr val="lt1"/>
+          </a:fontRef>
+        </p:style>
+        <p:txBody>
+          <a:bodyPr rtlCol="0" anchor="ctr"/>
+          <a:lstStyle/>
+          <a:p>
+            <a:pPr algn="ctr"/>
+          </a:p>
+        </p:txBody>
+      </p:sp>
+      <p:sp>
+        <p:nvSpPr>
+          <p:cNvPr id="27" name="Rectangle 26"/>
+          <p:cNvSpPr/>
+          <p:nvPr/>
+        </p:nvSpPr>
+        <p:spPr>
+          <a:xfrm>
+            <a:off x="9966959" y="1481328"/>
+            <a:ext cx="1417320" cy="676656"/>
+          </a:xfrm>
+          <a:prstGeom prst="rect">
+            <a:avLst/>
+          </a:prstGeom>
+          <a:solidFill>
+            <a:srgbClr val="EAF2FF"/>
+          </a:solidFill>
+          <a:ln>
+            <a:noFill/>
+          </a:ln>
+          <a:effectLst/>
+        </p:spPr>
+        <p:style>
+          <a:lnRef idx="1">
+            <a:schemeClr val="accent1"/>
+          </a:lnRef>
+          <a:fillRef idx="3">
+            <a:schemeClr val="accent1"/>
+          </a:fillRef>
+          <a:effectRef idx="2">
+            <a:schemeClr val="accent1"/>
+          </a:effectRef>
+          <a:fontRef idx="minor">
+            <a:schemeClr val="lt1"/>
+          </a:fontRef>
+        </p:style>
+        <p:txBody>
+          <a:bodyPr rtlCol="0" anchor="ctr"/>
+          <a:lstStyle/>
+          <a:p>
+            <a:pPr algn="ctr"/>
+          </a:p>
+        </p:txBody>
+      </p:sp>
+      <p:sp>
+        <p:nvSpPr>
+          <p:cNvPr id="28" name="TextBox 27"/>
+          <p:cNvSpPr txBox="1"/>
+          <p:nvPr/>
+        </p:nvSpPr>
+        <p:spPr>
+          <a:xfrm>
+            <a:off x="10049255" y="1600200"/>
+            <a:ext cx="1252728" cy="182880"/>
+          </a:xfrm>
+          <a:prstGeom prst="rect">
+            <a:avLst/>
+          </a:prstGeom>
+          <a:noFill/>
+        </p:spPr>
+        <p:txBody>
+          <a:bodyPr wrap="square" lIns="0" rIns="0" tIns="0" bIns="0">
+            <a:spAutoFit/>
+          </a:bodyPr>
+          <a:lstStyle/>
+          <a:p>
+            <a:pPr algn="ctr"/>
+            <a:r>
+              <a:rPr sz="880" b="1">
+                <a:solidFill>
+                  <a:srgbClr val="14315A"/>
+                </a:solidFill>
+              </a:rPr>
+              <a:t>Trade blotter</a:t>
+            </a:r>
+          </a:p>
+        </p:txBody>
+      </p:sp>
+      <p:sp>
+        <p:nvSpPr>
+          <p:cNvPr id="29" name="TextBox 28"/>
+          <p:cNvSpPr txBox="1"/>
+          <p:nvPr/>
+        </p:nvSpPr>
+        <p:spPr>
+          <a:xfrm>
+            <a:off x="10049255" y="1837944"/>
+            <a:ext cx="1252728" cy="182880"/>
+          </a:xfrm>
+          <a:prstGeom prst="rect">
+            <a:avLst/>
+          </a:prstGeom>
+          <a:noFill/>
+        </p:spPr>
+        <p:txBody>
+          <a:bodyPr wrap="square" lIns="0" rIns="0" tIns="0" bIns="0">
+            <a:spAutoFit/>
+          </a:bodyPr>
+          <a:lstStyle/>
+          <a:p>
+            <a:pPr algn="ctr"/>
+            <a:r>
+              <a:rPr sz="720" b="0">
+                <a:solidFill>
+                  <a:srgbClr val="475569"/>
+                </a:solidFill>
+              </a:rPr>
+              <a:t>entry + hedge</a:t>
+            </a:r>
+          </a:p>
+        </p:txBody>
+      </p:sp>
+      <p:sp>
+        <p:nvSpPr>
+          <p:cNvPr id="30" name="Rectangle 29"/>
+          <p:cNvSpPr/>
+          <p:nvPr/>
+        </p:nvSpPr>
+        <p:spPr>
+          <a:xfrm>
+            <a:off x="640080" y="2514600"/>
+            <a:ext cx="10927080" cy="384048"/>
+          </a:xfrm>
+          <a:prstGeom prst="rect">
+            <a:avLst/>
+          </a:prstGeom>
+          <a:solidFill>
+            <a:srgbClr val="14315A"/>
+          </a:solidFill>
+          <a:ln>
+            <a:noFill/>
+          </a:ln>
+          <a:effectLst/>
+        </p:spPr>
+        <p:style>
+          <a:lnRef idx="1">
+            <a:schemeClr val="accent1"/>
+          </a:lnRef>
+          <a:fillRef idx="3">
+            <a:schemeClr val="accent1"/>
+          </a:fillRef>
+          <a:effectRef idx="2">
+            <a:schemeClr val="accent1"/>
+          </a:effectRef>
+          <a:fontRef idx="minor">
+            <a:schemeClr val="lt1"/>
+          </a:fontRef>
+        </p:style>
+        <p:txBody>
+          <a:bodyPr rtlCol="0" anchor="ctr"/>
+          <a:lstStyle/>
+          <a:p>
+            <a:pPr algn="ctr"/>
+          </a:p>
+        </p:txBody>
+      </p:sp>
+      <p:sp>
+        <p:nvSpPr>
+          <p:cNvPr id="31" name="TextBox 30"/>
+          <p:cNvSpPr txBox="1"/>
+          <p:nvPr/>
+        </p:nvSpPr>
+        <p:spPr>
+          <a:xfrm>
+            <a:off x="713231" y="2633472"/>
+            <a:ext cx="2907791" cy="182880"/>
+          </a:xfrm>
+          <a:prstGeom prst="rect">
+            <a:avLst/>
+          </a:prstGeom>
+          <a:noFill/>
+        </p:spPr>
+        <p:txBody>
+          <a:bodyPr wrap="square" lIns="0" rIns="0" tIns="0" bIns="0">
+            <a:spAutoFit/>
+          </a:bodyPr>
+          <a:lstStyle/>
+          <a:p>
+            <a:pPr algn="l"/>
+            <a:r>
+              <a:rPr sz="890" b="1">
+                <a:solidFill>
+                  <a:srgbClr val="FFFFFF"/>
+                </a:solidFill>
+              </a:rPr>
+              <a:t>Stage</a:t>
+            </a:r>
+          </a:p>
+        </p:txBody>
+      </p:sp>
+      <p:sp>
+        <p:nvSpPr>
+          <p:cNvPr id="32" name="TextBox 31"/>
+          <p:cNvSpPr txBox="1"/>
+          <p:nvPr/>
+        </p:nvSpPr>
+        <p:spPr>
+          <a:xfrm>
+            <a:off x="3730752" y="2633472"/>
+            <a:ext cx="3502152" cy="182880"/>
+          </a:xfrm>
+          <a:prstGeom prst="rect">
+            <a:avLst/>
+          </a:prstGeom>
+          <a:noFill/>
+        </p:spPr>
+        <p:txBody>
+          <a:bodyPr wrap="square" lIns="0" rIns="0" tIns="0" bIns="0">
+            <a:spAutoFit/>
+          </a:bodyPr>
+          <a:lstStyle/>
+          <a:p>
+            <a:pPr algn="l"/>
+            <a:r>
+              <a:rPr sz="890" b="1">
+                <a:solidFill>
+                  <a:srgbClr val="FFFFFF"/>
+                </a:solidFill>
+              </a:rPr>
+              <a:t>Primary output</a:t>
+            </a:r>
+          </a:p>
+        </p:txBody>
+      </p:sp>
+      <p:sp>
+        <p:nvSpPr>
+          <p:cNvPr id="33" name="TextBox 32"/>
+          <p:cNvSpPr txBox="1"/>
+          <p:nvPr/>
+        </p:nvSpPr>
+        <p:spPr>
+          <a:xfrm>
+            <a:off x="7342632" y="2633472"/>
+            <a:ext cx="4187952" cy="182880"/>
+          </a:xfrm>
+          <a:prstGeom prst="rect">
+            <a:avLst/>
+          </a:prstGeom>
+          <a:noFill/>
+        </p:spPr>
+        <p:txBody>
+          <a:bodyPr wrap="square" lIns="0" rIns="0" tIns="0" bIns="0">
+            <a:spAutoFit/>
+          </a:bodyPr>
+          <a:lstStyle/>
+          <a:p>
+            <a:pPr algn="l"/>
+            <a:r>
+              <a:rPr sz="890" b="1">
+                <a:solidFill>
+                  <a:srgbClr val="FFFFFF"/>
+                </a:solidFill>
+              </a:rPr>
+              <a:t>Current state</a:t>
+            </a:r>
+          </a:p>
+        </p:txBody>
+      </p:sp>
+      <p:sp>
+        <p:nvSpPr>
+          <p:cNvPr id="34" name="Rectangle 33"/>
+          <p:cNvSpPr/>
+          <p:nvPr/>
+        </p:nvSpPr>
+        <p:spPr>
+          <a:xfrm>
+            <a:off x="640080" y="2898648"/>
+            <a:ext cx="10927080" cy="365760"/>
+          </a:xfrm>
+          <a:prstGeom prst="rect">
+            <a:avLst/>
+          </a:prstGeom>
+          <a:solidFill>
+            <a:srgbClr val="FFFFFF"/>
+          </a:solidFill>
+          <a:ln>
+            <a:noFill/>
+          </a:ln>
+          <a:effectLst/>
+        </p:spPr>
+        <p:style>
+          <a:lnRef idx="1">
+            <a:schemeClr val="accent1"/>
+          </a:lnRef>
+          <a:fillRef idx="3">
+            <a:schemeClr val="accent1"/>
+          </a:fillRef>
+          <a:effectRef idx="2">
+            <a:schemeClr val="accent1"/>
+          </a:effectRef>
+          <a:fontRef idx="minor">
+            <a:schemeClr val="lt1"/>
+          </a:fontRef>
+        </p:style>
+        <p:txBody>
+          <a:bodyPr rtlCol="0" anchor="ctr"/>
+          <a:lstStyle/>
+          <a:p>
+            <a:pPr algn="ctr"/>
+          </a:p>
+        </p:txBody>
+      </p:sp>
+      <p:sp>
+        <p:nvSpPr>
+          <p:cNvPr id="35" name="TextBox 34"/>
+          <p:cNvSpPr txBox="1"/>
+          <p:nvPr/>
+        </p:nvSpPr>
+        <p:spPr>
+          <a:xfrm>
+            <a:off x="713231" y="2999232"/>
+            <a:ext cx="2907791" cy="182880"/>
+          </a:xfrm>
+          <a:prstGeom prst="rect">
+            <a:avLst/>
+          </a:prstGeom>
+          <a:noFill/>
+        </p:spPr>
+        <p:txBody>
+          <a:bodyPr wrap="square" lIns="0" rIns="0" tIns="0" bIns="0">
+            <a:spAutoFit/>
+          </a:bodyPr>
+          <a:lstStyle/>
+          <a:p>
+            <a:pPr algn="l"/>
+            <a:r>
+              <a:rPr sz="880" b="0">
+                <a:solidFill>
+                  <a:srgbClr val="0F172A"/>
+                </a:solidFill>
+              </a:rPr>
+              <a:t>0–1  Universe + identifiers</a:t>
+            </a:r>
+          </a:p>
+        </p:txBody>
+      </p:sp>
+      <p:sp>
+        <p:nvSpPr>
+          <p:cNvPr id="36" name="TextBox 35"/>
+          <p:cNvSpPr txBox="1"/>
+          <p:nvPr/>
+        </p:nvSpPr>
+        <p:spPr>
+          <a:xfrm>
+            <a:off x="3730752" y="2999232"/>
+            <a:ext cx="3502152" cy="182880"/>
+          </a:xfrm>
+          <a:prstGeom prst="rect">
+            <a:avLst/>
+          </a:prstGeom>
+          <a:noFill/>
+        </p:spPr>
+        <p:txBody>
+          <a:bodyPr wrap="square" lIns="0" rIns="0" tIns="0" bIns="0">
+            <a:spAutoFit/>
+          </a:bodyPr>
+          <a:lstStyle/>
+          <a:p>
+            <a:pPr algn="l"/>
+            <a:r>
+              <a:rPr sz="880" b="0">
+                <a:solidFill>
+                  <a:srgbClr val="0F172A"/>
+                </a:solidFill>
+              </a:rPr>
+              <a:t>US_election_deals_for_analysis.csv (317)</a:t>
+            </a:r>
+          </a:p>
+        </p:txBody>
+      </p:sp>
+      <p:sp>
+        <p:nvSpPr>
+          <p:cNvPr id="37" name="TextBox 36"/>
+          <p:cNvSpPr txBox="1"/>
+          <p:nvPr/>
+        </p:nvSpPr>
+        <p:spPr>
+          <a:xfrm>
+            <a:off x="7342632" y="2999232"/>
+            <a:ext cx="4187952" cy="182880"/>
+          </a:xfrm>
+          <a:prstGeom prst="rect">
+            <a:avLst/>
+          </a:prstGeom>
+          <a:noFill/>
+        </p:spPr>
+        <p:txBody>
+          <a:bodyPr wrap="square" lIns="0" rIns="0" tIns="0" bIns="0">
+            <a:spAutoFit/>
+          </a:bodyPr>
+          <a:lstStyle/>
+          <a:p>
+            <a:pPr algn="l"/>
+            <a:r>
+              <a:rPr sz="880" b="0">
+                <a:solidFill>
+                  <a:srgbClr val="0F172A"/>
+                </a:solidFill>
+              </a:rPr>
+              <a:t>CIK + acquirer-PERMNO overrides for delisted/renamed</a:t>
+            </a:r>
+          </a:p>
+        </p:txBody>
+      </p:sp>
+      <p:sp>
+        <p:nvSpPr>
+          <p:cNvPr id="38" name="Rectangle 37"/>
+          <p:cNvSpPr/>
+          <p:nvPr/>
+        </p:nvSpPr>
+        <p:spPr>
+          <a:xfrm>
+            <a:off x="640080" y="3264408"/>
+            <a:ext cx="10927080" cy="365760"/>
+          </a:xfrm>
+          <a:prstGeom prst="rect">
+            <a:avLst/>
+          </a:prstGeom>
+          <a:solidFill>
+            <a:srgbClr val="F7F9FC"/>
+          </a:solidFill>
+          <a:ln>
+            <a:noFill/>
+          </a:ln>
+          <a:effectLst/>
+        </p:spPr>
+        <p:style>
+          <a:lnRef idx="1">
+            <a:schemeClr val="accent1"/>
+          </a:lnRef>
+          <a:fillRef idx="3">
+            <a:schemeClr val="accent1"/>
+          </a:fillRef>
+          <a:effectRef idx="2">
+            <a:schemeClr val="accent1"/>
+          </a:effectRef>
+          <a:fontRef idx="minor">
+            <a:schemeClr val="lt1"/>
+          </a:fontRef>
+        </p:style>
+        <p:txBody>
+          <a:bodyPr rtlCol="0" anchor="ctr"/>
+          <a:lstStyle/>
+          <a:p>
+            <a:pPr algn="ctr"/>
+          </a:p>
+        </p:txBody>
+      </p:sp>
+      <p:sp>
+        <p:nvSpPr>
+          <p:cNvPr id="39" name="TextBox 38"/>
+          <p:cNvSpPr txBox="1"/>
+          <p:nvPr/>
+        </p:nvSpPr>
+        <p:spPr>
+          <a:xfrm>
+            <a:off x="713231" y="3364991"/>
+            <a:ext cx="2907791" cy="182880"/>
+          </a:xfrm>
+          <a:prstGeom prst="rect">
+            <a:avLst/>
+          </a:prstGeom>
+          <a:noFill/>
+        </p:spPr>
+        <p:txBody>
+          <a:bodyPr wrap="square" lIns="0" rIns="0" tIns="0" bIns="0">
+            <a:spAutoFit/>
+          </a:bodyPr>
+          <a:lstStyle/>
+          <a:p>
+            <a:pPr algn="l"/>
+            <a:r>
+              <a:rPr sz="880" b="0">
+                <a:solidFill>
+                  <a:srgbClr val="0F172A"/>
+                </a:solidFill>
+              </a:rPr>
+              <a:t>2  SEC + Claude extraction</a:t>
+            </a:r>
+          </a:p>
+        </p:txBody>
+      </p:sp>
+      <p:sp>
+        <p:nvSpPr>
+          <p:cNvPr id="40" name="TextBox 39"/>
+          <p:cNvSpPr txBox="1"/>
+          <p:nvPr/>
+        </p:nvSpPr>
+        <p:spPr>
+          <a:xfrm>
+            <a:off x="3730752" y="3364991"/>
+            <a:ext cx="3502152" cy="182880"/>
+          </a:xfrm>
+          <a:prstGeom prst="rect">
+            <a:avLst/>
+          </a:prstGeom>
+          <a:noFill/>
+        </p:spPr>
+        <p:txBody>
+          <a:bodyPr wrap="square" lIns="0" rIns="0" tIns="0" bIns="0">
+            <a:spAutoFit/>
+          </a:bodyPr>
+          <a:lstStyle/>
+          <a:p>
+            <a:pPr algn="l"/>
+            <a:r>
+              <a:rPr sz="880" b="0">
+                <a:solidFill>
+                  <a:srgbClr val="0F172A"/>
+                </a:solidFill>
+              </a:rPr>
+              <a:t>ma_edgar_full/llm_field_extractions.csv</a:t>
+            </a:r>
+          </a:p>
+        </p:txBody>
+      </p:sp>
+      <p:sp>
+        <p:nvSpPr>
+          <p:cNvPr id="41" name="TextBox 40"/>
+          <p:cNvSpPr txBox="1"/>
+          <p:nvPr/>
+        </p:nvSpPr>
+        <p:spPr>
+          <a:xfrm>
+            <a:off x="7342632" y="3364991"/>
+            <a:ext cx="4187952" cy="182880"/>
+          </a:xfrm>
+          <a:prstGeom prst="rect">
+            <a:avLst/>
+          </a:prstGeom>
+          <a:noFill/>
+        </p:spPr>
+        <p:txBody>
+          <a:bodyPr wrap="square" lIns="0" rIns="0" tIns="0" bIns="0">
+            <a:spAutoFit/>
+          </a:bodyPr>
+          <a:lstStyle/>
+          <a:p>
+            <a:pPr algn="l"/>
+            <a:r>
+              <a:rPr sz="880" b="0">
+                <a:solidFill>
+                  <a:srgbClr val="0F172A"/>
+                </a:solidFill>
+              </a:rPr>
+              <a:t>303 deals, 17 canonical fields each</a:t>
+            </a:r>
+          </a:p>
+        </p:txBody>
+      </p:sp>
+      <p:sp>
+        <p:nvSpPr>
+          <p:cNvPr id="42" name="Rectangle 41"/>
+          <p:cNvSpPr/>
+          <p:nvPr/>
+        </p:nvSpPr>
+        <p:spPr>
+          <a:xfrm>
+            <a:off x="640080" y="3630168"/>
+            <a:ext cx="10927080" cy="365760"/>
+          </a:xfrm>
+          <a:prstGeom prst="rect">
+            <a:avLst/>
+          </a:prstGeom>
+          <a:solidFill>
+            <a:srgbClr val="FFFFFF"/>
+          </a:solidFill>
+          <a:ln>
+            <a:noFill/>
+          </a:ln>
+          <a:effectLst/>
+        </p:spPr>
+        <p:style>
+          <a:lnRef idx="1">
+            <a:schemeClr val="accent1"/>
+          </a:lnRef>
+          <a:fillRef idx="3">
+            <a:schemeClr val="accent1"/>
+          </a:fillRef>
+          <a:effectRef idx="2">
+            <a:schemeClr val="accent1"/>
+          </a:effectRef>
+          <a:fontRef idx="minor">
+            <a:schemeClr val="lt1"/>
+          </a:fontRef>
+        </p:style>
+        <p:txBody>
+          <a:bodyPr rtlCol="0" anchor="ctr"/>
+          <a:lstStyle/>
+          <a:p>
+            <a:pPr algn="ctr"/>
+          </a:p>
+        </p:txBody>
+      </p:sp>
+      <p:sp>
+        <p:nvSpPr>
+          <p:cNvPr id="43" name="TextBox 42"/>
+          <p:cNvSpPr txBox="1"/>
+          <p:nvPr/>
+        </p:nvSpPr>
+        <p:spPr>
+          <a:xfrm>
+            <a:off x="713231" y="3730752"/>
+            <a:ext cx="2907791" cy="182880"/>
+          </a:xfrm>
+          <a:prstGeom prst="rect">
+            <a:avLst/>
+          </a:prstGeom>
+          <a:noFill/>
+        </p:spPr>
+        <p:txBody>
+          <a:bodyPr wrap="square" lIns="0" rIns="0" tIns="0" bIns="0">
+            <a:spAutoFit/>
+          </a:bodyPr>
+          <a:lstStyle/>
+          <a:p>
+            <a:pPr algn="l"/>
+            <a:r>
+              <a:rPr sz="880" b="0">
+                <a:solidFill>
+                  <a:srgbClr val="0F172A"/>
+                </a:solidFill>
+              </a:rPr>
+              <a:t>3  WRDS market + ownership</a:t>
+            </a:r>
+          </a:p>
+        </p:txBody>
+      </p:sp>
+      <p:sp>
+        <p:nvSpPr>
+          <p:cNvPr id="44" name="TextBox 43"/>
+          <p:cNvSpPr txBox="1"/>
+          <p:nvPr/>
+        </p:nvSpPr>
+        <p:spPr>
+          <a:xfrm>
+            <a:off x="3730752" y="3730752"/>
+            <a:ext cx="3502152" cy="182880"/>
+          </a:xfrm>
+          <a:prstGeom prst="rect">
+            <a:avLst/>
+          </a:prstGeom>
+          <a:noFill/>
+        </p:spPr>
+        <p:txBody>
+          <a:bodyPr wrap="square" lIns="0" rIns="0" tIns="0" bIns="0">
+            <a:spAutoFit/>
+          </a:bodyPr>
+          <a:lstStyle/>
+          <a:p>
+            <a:pPr algn="l"/>
+            <a:r>
+              <a:rPr sz="880" b="0">
+                <a:solidFill>
+                  <a:srgbClr val="0F172A"/>
+                </a:solidFill>
+              </a:rPr>
+              <a:t>wrds_market_daily.csv · ownership_mix</a:t>
+            </a:r>
+          </a:p>
+        </p:txBody>
+      </p:sp>
+      <p:sp>
+        <p:nvSpPr>
+          <p:cNvPr id="45" name="TextBox 44"/>
+          <p:cNvSpPr txBox="1"/>
+          <p:nvPr/>
+        </p:nvSpPr>
+        <p:spPr>
+          <a:xfrm>
+            <a:off x="7342632" y="3730752"/>
+            <a:ext cx="4187952" cy="182880"/>
+          </a:xfrm>
+          <a:prstGeom prst="rect">
+            <a:avLst/>
+          </a:prstGeom>
+          <a:noFill/>
+        </p:spPr>
+        <p:txBody>
+          <a:bodyPr wrap="square" lIns="0" rIns="0" tIns="0" bIns="0">
+            <a:spAutoFit/>
+          </a:bodyPr>
+          <a:lstStyle/>
+          <a:p>
+            <a:pPr algn="l"/>
+            <a:r>
+              <a:rPr sz="880" b="0">
+                <a:solidFill>
+                  <a:srgbClr val="0F172A"/>
+                </a:solidFill>
+              </a:rPr>
+              <a:t>Target + acquirer prices, passive block</a:t>
+            </a:r>
+          </a:p>
+        </p:txBody>
+      </p:sp>
+      <p:sp>
+        <p:nvSpPr>
+          <p:cNvPr id="46" name="Rectangle 45"/>
+          <p:cNvSpPr/>
+          <p:nvPr/>
+        </p:nvSpPr>
+        <p:spPr>
+          <a:xfrm>
+            <a:off x="640080" y="3995928"/>
+            <a:ext cx="10927080" cy="365760"/>
+          </a:xfrm>
+          <a:prstGeom prst="rect">
+            <a:avLst/>
+          </a:prstGeom>
+          <a:solidFill>
+            <a:srgbClr val="F7F9FC"/>
+          </a:solidFill>
+          <a:ln>
+            <a:noFill/>
+          </a:ln>
+          <a:effectLst/>
+        </p:spPr>
+        <p:style>
+          <a:lnRef idx="1">
+            <a:schemeClr val="accent1"/>
+          </a:lnRef>
+          <a:fillRef idx="3">
+            <a:schemeClr val="accent1"/>
+          </a:fillRef>
+          <a:effectRef idx="2">
+            <a:schemeClr val="accent1"/>
+          </a:effectRef>
+          <a:fontRef idx="minor">
+            <a:schemeClr val="lt1"/>
+          </a:fontRef>
+        </p:style>
+        <p:txBody>
+          <a:bodyPr rtlCol="0" anchor="ctr"/>
+          <a:lstStyle/>
+          <a:p>
+            <a:pPr algn="ctr"/>
+          </a:p>
+        </p:txBody>
+      </p:sp>
+      <p:sp>
+        <p:nvSpPr>
+          <p:cNvPr id="47" name="TextBox 46"/>
+          <p:cNvSpPr txBox="1"/>
+          <p:nvPr/>
+        </p:nvSpPr>
+        <p:spPr>
+          <a:xfrm>
+            <a:off x="713231" y="4096512"/>
+            <a:ext cx="2907791" cy="182880"/>
+          </a:xfrm>
+          <a:prstGeom prst="rect">
+            <a:avLst/>
+          </a:prstGeom>
+          <a:noFill/>
+        </p:spPr>
+        <p:txBody>
+          <a:bodyPr wrap="square" lIns="0" rIns="0" tIns="0" bIns="0">
+            <a:spAutoFit/>
+          </a:bodyPr>
+          <a:lstStyle/>
+          <a:p>
+            <a:pPr algn="l"/>
+            <a:r>
+              <a:rPr sz="880" b="0">
+                <a:solidFill>
+                  <a:srgbClr val="0F172A"/>
+                </a:solidFill>
+              </a:rPr>
+              <a:t>4  Normalize labels</a:t>
+            </a:r>
+          </a:p>
+        </p:txBody>
+      </p:sp>
+      <p:sp>
+        <p:nvSpPr>
+          <p:cNvPr id="48" name="TextBox 47"/>
+          <p:cNvSpPr txBox="1"/>
+          <p:nvPr/>
+        </p:nvSpPr>
+        <p:spPr>
+          <a:xfrm>
+            <a:off x="3730752" y="4096512"/>
+            <a:ext cx="3502152" cy="182880"/>
+          </a:xfrm>
+          <a:prstGeom prst="rect">
+            <a:avLst/>
+          </a:prstGeom>
+          <a:noFill/>
+        </p:spPr>
+        <p:txBody>
+          <a:bodyPr wrap="square" lIns="0" rIns="0" tIns="0" bIns="0">
+            <a:spAutoFit/>
+          </a:bodyPr>
+          <a:lstStyle/>
+          <a:p>
+            <a:pPr algn="l"/>
+            <a:r>
+              <a:rPr sz="880" b="0">
+                <a:solidFill>
+                  <a:srgbClr val="0F172A"/>
+                </a:solidFill>
+              </a:rPr>
+              <a:t>normalized_labels.csv</a:t>
+            </a:r>
+          </a:p>
+        </p:txBody>
+      </p:sp>
+      <p:sp>
+        <p:nvSpPr>
+          <p:cNvPr id="49" name="TextBox 48"/>
+          <p:cNvSpPr txBox="1"/>
+          <p:nvPr/>
+        </p:nvSpPr>
+        <p:spPr>
+          <a:xfrm>
+            <a:off x="7342632" y="4096512"/>
+            <a:ext cx="4187952" cy="182880"/>
+          </a:xfrm>
+          <a:prstGeom prst="rect">
+            <a:avLst/>
+          </a:prstGeom>
+          <a:noFill/>
+        </p:spPr>
+        <p:txBody>
+          <a:bodyPr wrap="square" lIns="0" rIns="0" tIns="0" bIns="0">
+            <a:spAutoFit/>
+          </a:bodyPr>
+          <a:lstStyle/>
+          <a:p>
+            <a:pPr algn="l"/>
+            <a:r>
+              <a:rPr sz="880" b="0">
+                <a:solidFill>
+                  <a:srgbClr val="0F172A"/>
+                </a:solidFill>
+              </a:rPr>
+              <a:t>73 clean election-DEMAND labels (near disclosure ceiling)</a:t>
+            </a:r>
+          </a:p>
+        </p:txBody>
+      </p:sp>
+      <p:sp>
+        <p:nvSpPr>
+          <p:cNvPr id="50" name="Rectangle 49"/>
+          <p:cNvSpPr/>
+          <p:nvPr/>
+        </p:nvSpPr>
+        <p:spPr>
+          <a:xfrm>
+            <a:off x="640080" y="4361688"/>
+            <a:ext cx="10927080" cy="365760"/>
+          </a:xfrm>
+          <a:prstGeom prst="rect">
+            <a:avLst/>
+          </a:prstGeom>
+          <a:solidFill>
+            <a:srgbClr val="FFFFFF"/>
+          </a:solidFill>
+          <a:ln>
+            <a:noFill/>
+          </a:ln>
+          <a:effectLst/>
+        </p:spPr>
+        <p:style>
+          <a:lnRef idx="1">
+            <a:schemeClr val="accent1"/>
+          </a:lnRef>
+          <a:fillRef idx="3">
+            <a:schemeClr val="accent1"/>
+          </a:fillRef>
+          <a:effectRef idx="2">
+            <a:schemeClr val="accent1"/>
+          </a:effectRef>
+          <a:fontRef idx="minor">
+            <a:schemeClr val="lt1"/>
+          </a:fontRef>
+        </p:style>
+        <p:txBody>
+          <a:bodyPr rtlCol="0" anchor="ctr"/>
+          <a:lstStyle/>
+          <a:p>
+            <a:pPr algn="ctr"/>
+          </a:p>
+        </p:txBody>
+      </p:sp>
+      <p:sp>
+        <p:nvSpPr>
+          <p:cNvPr id="51" name="TextBox 50"/>
+          <p:cNvSpPr txBox="1"/>
+          <p:nvPr/>
+        </p:nvSpPr>
+        <p:spPr>
+          <a:xfrm>
+            <a:off x="713231" y="4462272"/>
+            <a:ext cx="2907791" cy="182880"/>
+          </a:xfrm>
+          <a:prstGeom prst="rect">
+            <a:avLst/>
+          </a:prstGeom>
+          <a:noFill/>
+        </p:spPr>
+        <p:txBody>
+          <a:bodyPr wrap="square" lIns="0" rIns="0" tIns="0" bIns="0">
+            <a:spAutoFit/>
+          </a:bodyPr>
+          <a:lstStyle/>
+          <a:p>
+            <a:pPr algn="l"/>
+            <a:r>
+              <a:rPr sz="880" b="0">
+                <a:solidFill>
+                  <a:srgbClr val="0F172A"/>
+                </a:solidFill>
+              </a:rPr>
+              <a:t>5  Deadline spread</a:t>
+            </a:r>
+          </a:p>
+        </p:txBody>
+      </p:sp>
+      <p:sp>
+        <p:nvSpPr>
+          <p:cNvPr id="52" name="TextBox 51"/>
+          <p:cNvSpPr txBox="1"/>
+          <p:nvPr/>
+        </p:nvSpPr>
+        <p:spPr>
+          <a:xfrm>
+            <a:off x="3730752" y="4462272"/>
+            <a:ext cx="3502152" cy="182880"/>
+          </a:xfrm>
+          <a:prstGeom prst="rect">
+            <a:avLst/>
+          </a:prstGeom>
+          <a:noFill/>
+        </p:spPr>
+        <p:txBody>
+          <a:bodyPr wrap="square" lIns="0" rIns="0" tIns="0" bIns="0">
+            <a:spAutoFit/>
+          </a:bodyPr>
+          <a:lstStyle/>
+          <a:p>
+            <a:pPr algn="l"/>
+            <a:r>
+              <a:rPr sz="880" b="0">
+                <a:solidFill>
+                  <a:srgbClr val="0F172A"/>
+                </a:solidFill>
+              </a:rPr>
+              <a:t>deadline_spread.csv</a:t>
+            </a:r>
+          </a:p>
+        </p:txBody>
+      </p:sp>
+      <p:sp>
+        <p:nvSpPr>
+          <p:cNvPr id="53" name="TextBox 52"/>
+          <p:cNvSpPr txBox="1"/>
+          <p:nvPr/>
+        </p:nvSpPr>
+        <p:spPr>
+          <a:xfrm>
+            <a:off x="7342632" y="4462272"/>
+            <a:ext cx="4187952" cy="182880"/>
+          </a:xfrm>
+          <a:prstGeom prst="rect">
+            <a:avLst/>
+          </a:prstGeom>
+          <a:noFill/>
+        </p:spPr>
+        <p:txBody>
+          <a:bodyPr wrap="square" lIns="0" rIns="0" tIns="0" bIns="0">
+            <a:spAutoFit/>
+          </a:bodyPr>
+          <a:lstStyle/>
+          <a:p>
+            <a:pPr algn="l"/>
+            <a:r>
+              <a:rPr sz="880" b="0">
+                <a:solidFill>
+                  <a:srgbClr val="0F172A"/>
+                </a:solidFill>
+              </a:rPr>
+              <a:t>Fixed vs floating split (floating = spread≈0, excluded)</a:t>
+            </a:r>
+          </a:p>
+        </p:txBody>
+      </p:sp>
+      <p:sp>
+        <p:nvSpPr>
+          <p:cNvPr id="54" name="Rectangle 53"/>
+          <p:cNvSpPr/>
+          <p:nvPr/>
+        </p:nvSpPr>
+        <p:spPr>
+          <a:xfrm>
+            <a:off x="640080" y="4727448"/>
+            <a:ext cx="10927080" cy="365760"/>
+          </a:xfrm>
+          <a:prstGeom prst="rect">
+            <a:avLst/>
+          </a:prstGeom>
+          <a:solidFill>
+            <a:srgbClr val="F7F9FC"/>
+          </a:solidFill>
+          <a:ln>
+            <a:noFill/>
+          </a:ln>
+          <a:effectLst/>
+        </p:spPr>
+        <p:style>
+          <a:lnRef idx="1">
+            <a:schemeClr val="accent1"/>
+          </a:lnRef>
+          <a:fillRef idx="3">
+            <a:schemeClr val="accent1"/>
+          </a:fillRef>
+          <a:effectRef idx="2">
+            <a:schemeClr val="accent1"/>
+          </a:effectRef>
+          <a:fontRef idx="minor">
+            <a:schemeClr val="lt1"/>
+          </a:fontRef>
+        </p:style>
+        <p:txBody>
+          <a:bodyPr rtlCol="0" anchor="ctr"/>
+          <a:lstStyle/>
+          <a:p>
+            <a:pPr algn="ctr"/>
+          </a:p>
+        </p:txBody>
+      </p:sp>
+      <p:sp>
+        <p:nvSpPr>
+          <p:cNvPr id="55" name="TextBox 54"/>
+          <p:cNvSpPr txBox="1"/>
+          <p:nvPr/>
+        </p:nvSpPr>
+        <p:spPr>
+          <a:xfrm>
+            <a:off x="713231" y="4828032"/>
+            <a:ext cx="2907791" cy="182880"/>
+          </a:xfrm>
+          <a:prstGeom prst="rect">
+            <a:avLst/>
+          </a:prstGeom>
+          <a:noFill/>
+        </p:spPr>
+        <p:txBody>
+          <a:bodyPr wrap="square" lIns="0" rIns="0" tIns="0" bIns="0">
+            <a:spAutoFit/>
+          </a:bodyPr>
+          <a:lstStyle/>
+          <a:p>
+            <a:pPr algn="l"/>
+            <a:r>
+              <a:rPr sz="880" b="0">
+                <a:solidFill>
+                  <a:srgbClr val="0F172A"/>
+                </a:solidFill>
+              </a:rPr>
+              <a:t>6  Monte Carlo  (arb_mc / arb_run)</a:t>
+            </a:r>
+          </a:p>
+        </p:txBody>
+      </p:sp>
+      <p:sp>
+        <p:nvSpPr>
+          <p:cNvPr id="56" name="TextBox 55"/>
+          <p:cNvSpPr txBox="1"/>
+          <p:nvPr/>
+        </p:nvSpPr>
+        <p:spPr>
+          <a:xfrm>
+            <a:off x="3730752" y="4828032"/>
+            <a:ext cx="3502152" cy="182880"/>
+          </a:xfrm>
+          <a:prstGeom prst="rect">
+            <a:avLst/>
+          </a:prstGeom>
+          <a:noFill/>
+        </p:spPr>
+        <p:txBody>
+          <a:bodyPr wrap="square" lIns="0" rIns="0" tIns="0" bIns="0">
+            <a:spAutoFit/>
+          </a:bodyPr>
+          <a:lstStyle/>
+          <a:p>
+            <a:pPr algn="l"/>
+            <a:r>
+              <a:rPr sz="880" b="0">
+                <a:solidFill>
+                  <a:srgbClr val="0F172A"/>
+                </a:solidFill>
+              </a:rPr>
+              <a:t>arb_output/ figures + summary</a:t>
+            </a:r>
+          </a:p>
+        </p:txBody>
+      </p:sp>
+      <p:sp>
+        <p:nvSpPr>
+          <p:cNvPr id="57" name="TextBox 56"/>
+          <p:cNvSpPr txBox="1"/>
+          <p:nvPr/>
+        </p:nvSpPr>
+        <p:spPr>
+          <a:xfrm>
+            <a:off x="7342632" y="4828032"/>
+            <a:ext cx="4187952" cy="182880"/>
+          </a:xfrm>
+          <a:prstGeom prst="rect">
+            <a:avLst/>
+          </a:prstGeom>
+          <a:noFill/>
+        </p:spPr>
+        <p:txBody>
+          <a:bodyPr wrap="square" lIns="0" rIns="0" tIns="0" bIns="0">
+            <a:spAutoFit/>
+          </a:bodyPr>
+          <a:lstStyle/>
+          <a:p>
+            <a:pPr algn="l"/>
+            <a:r>
+              <a:rPr sz="880" b="0">
+                <a:solidFill>
+                  <a:srgbClr val="0F172A"/>
+                </a:solidFill>
+              </a:rPr>
+              <a:t>Demand Beta; calibration KS p = 0.96</a:t>
+            </a:r>
+          </a:p>
+        </p:txBody>
+      </p:sp>
+      <p:sp>
+        <p:nvSpPr>
+          <p:cNvPr id="58" name="Rectangle 57"/>
+          <p:cNvSpPr/>
+          <p:nvPr/>
+        </p:nvSpPr>
+        <p:spPr>
+          <a:xfrm>
+            <a:off x="640080" y="5093208"/>
+            <a:ext cx="10927080" cy="365760"/>
+          </a:xfrm>
+          <a:prstGeom prst="rect">
+            <a:avLst/>
+          </a:prstGeom>
+          <a:solidFill>
+            <a:srgbClr val="FFFFFF"/>
+          </a:solidFill>
+          <a:ln>
+            <a:noFill/>
+          </a:ln>
+          <a:effectLst/>
+        </p:spPr>
+        <p:style>
+          <a:lnRef idx="1">
+            <a:schemeClr val="accent1"/>
+          </a:lnRef>
+          <a:fillRef idx="3">
+            <a:schemeClr val="accent1"/>
+          </a:fillRef>
+          <a:effectRef idx="2">
+            <a:schemeClr val="accent1"/>
+          </a:effectRef>
+          <a:fontRef idx="minor">
+            <a:schemeClr val="lt1"/>
+          </a:fontRef>
+        </p:style>
+        <p:txBody>
+          <a:bodyPr rtlCol="0" anchor="ctr"/>
+          <a:lstStyle/>
+          <a:p>
+            <a:pPr algn="ctr"/>
+          </a:p>
+        </p:txBody>
+      </p:sp>
+      <p:sp>
+        <p:nvSpPr>
+          <p:cNvPr id="59" name="TextBox 58"/>
+          <p:cNvSpPr txBox="1"/>
+          <p:nvPr/>
+        </p:nvSpPr>
+        <p:spPr>
+          <a:xfrm>
+            <a:off x="713231" y="5193792"/>
+            <a:ext cx="2907791" cy="182880"/>
+          </a:xfrm>
+          <a:prstGeom prst="rect">
+            <a:avLst/>
+          </a:prstGeom>
+          <a:noFill/>
+        </p:spPr>
+        <p:txBody>
+          <a:bodyPr wrap="square" lIns="0" rIns="0" tIns="0" bIns="0">
+            <a:spAutoFit/>
+          </a:bodyPr>
+          <a:lstStyle/>
+          <a:p>
+            <a:pPr algn="l"/>
+            <a:r>
+              <a:rPr sz="880" b="0">
+                <a:solidFill>
+                  <a:srgbClr val="0F172A"/>
+                </a:solidFill>
+              </a:rPr>
+              <a:t>7  Trade decision  (arb_signal)</a:t>
+            </a:r>
+          </a:p>
+        </p:txBody>
+      </p:sp>
+      <p:sp>
+        <p:nvSpPr>
+          <p:cNvPr id="60" name="TextBox 59"/>
+          <p:cNvSpPr txBox="1"/>
+          <p:nvPr/>
+        </p:nvSpPr>
+        <p:spPr>
+          <a:xfrm>
+            <a:off x="3730752" y="5193792"/>
+            <a:ext cx="3502152" cy="182880"/>
+          </a:xfrm>
+          <a:prstGeom prst="rect">
+            <a:avLst/>
+          </a:prstGeom>
+          <a:noFill/>
+        </p:spPr>
+        <p:txBody>
+          <a:bodyPr wrap="square" lIns="0" rIns="0" tIns="0" bIns="0">
+            <a:spAutoFit/>
+          </a:bodyPr>
+          <a:lstStyle/>
+          <a:p>
+            <a:pPr algn="l"/>
+            <a:r>
+              <a:rPr sz="880" b="0">
+                <a:solidFill>
+                  <a:srgbClr val="0F172A"/>
+                </a:solidFill>
+              </a:rPr>
+              <a:t>arb_signals.csv</a:t>
+            </a:r>
+          </a:p>
+        </p:txBody>
+      </p:sp>
+      <p:sp>
+        <p:nvSpPr>
+          <p:cNvPr id="61" name="TextBox 60"/>
+          <p:cNvSpPr txBox="1"/>
+          <p:nvPr/>
+        </p:nvSpPr>
+        <p:spPr>
+          <a:xfrm>
+            <a:off x="7342632" y="5193792"/>
+            <a:ext cx="4187952" cy="182880"/>
+          </a:xfrm>
+          <a:prstGeom prst="rect">
+            <a:avLst/>
+          </a:prstGeom>
+          <a:noFill/>
+        </p:spPr>
+        <p:txBody>
+          <a:bodyPr wrap="square" lIns="0" rIns="0" tIns="0" bIns="0">
+            <a:spAutoFit/>
+          </a:bodyPr>
+          <a:lstStyle/>
+          <a:p>
+            <a:pPr algn="l"/>
+            <a:r>
+              <a:rPr sz="880" b="0">
+                <a:solidFill>
+                  <a:srgbClr val="0F172A"/>
+                </a:solidFill>
+              </a:rPr>
+              <a:t>31 deals, 22 ENTER, signal skill corr +0.67</a:t>
+            </a:r>
+          </a:p>
+        </p:txBody>
+      </p:sp>
+      <p:sp>
+        <p:nvSpPr>
+          <p:cNvPr id="62" name="Rectangle 61"/>
+          <p:cNvSpPr/>
+          <p:nvPr/>
+        </p:nvSpPr>
+        <p:spPr>
+          <a:xfrm>
+            <a:off x="640080" y="5458968"/>
+            <a:ext cx="10927080" cy="365760"/>
+          </a:xfrm>
+          <a:prstGeom prst="rect">
+            <a:avLst/>
+          </a:prstGeom>
+          <a:solidFill>
+            <a:srgbClr val="F7F9FC"/>
+          </a:solidFill>
+          <a:ln>
+            <a:noFill/>
+          </a:ln>
+          <a:effectLst/>
+        </p:spPr>
+        <p:style>
+          <a:lnRef idx="1">
+            <a:schemeClr val="accent1"/>
+          </a:lnRef>
+          <a:fillRef idx="3">
+            <a:schemeClr val="accent1"/>
+          </a:fillRef>
+          <a:effectRef idx="2">
+            <a:schemeClr val="accent1"/>
+          </a:effectRef>
+          <a:fontRef idx="minor">
+            <a:schemeClr val="lt1"/>
+          </a:fontRef>
+        </p:style>
+        <p:txBody>
+          <a:bodyPr rtlCol="0" anchor="ctr"/>
+          <a:lstStyle/>
+          <a:p>
+            <a:pPr algn="ctr"/>
+          </a:p>
+        </p:txBody>
+      </p:sp>
+      <p:sp>
+        <p:nvSpPr>
+          <p:cNvPr id="63" name="TextBox 62"/>
+          <p:cNvSpPr txBox="1"/>
+          <p:nvPr/>
+        </p:nvSpPr>
+        <p:spPr>
+          <a:xfrm>
+            <a:off x="713231" y="5559552"/>
+            <a:ext cx="2907791" cy="182880"/>
+          </a:xfrm>
+          <a:prstGeom prst="rect">
+            <a:avLst/>
+          </a:prstGeom>
+          <a:noFill/>
+        </p:spPr>
+        <p:txBody>
+          <a:bodyPr wrap="square" lIns="0" rIns="0" tIns="0" bIns="0">
+            <a:spAutoFit/>
+          </a:bodyPr>
+          <a:lstStyle/>
+          <a:p>
+            <a:pPr algn="l"/>
+            <a:r>
+              <a:rPr sz="880" b="0">
+                <a:solidFill>
+                  <a:srgbClr val="0F172A"/>
+                </a:solidFill>
+              </a:rPr>
+              <a:t>8  Deliverable</a:t>
+            </a:r>
+          </a:p>
+        </p:txBody>
+      </p:sp>
+      <p:sp>
+        <p:nvSpPr>
+          <p:cNvPr id="64" name="TextBox 63"/>
+          <p:cNvSpPr txBox="1"/>
+          <p:nvPr/>
+        </p:nvSpPr>
+        <p:spPr>
+          <a:xfrm>
+            <a:off x="3730752" y="5559552"/>
+            <a:ext cx="3502152" cy="182880"/>
+          </a:xfrm>
+          <a:prstGeom prst="rect">
+            <a:avLst/>
+          </a:prstGeom>
+          <a:noFill/>
+        </p:spPr>
+        <p:txBody>
+          <a:bodyPr wrap="square" lIns="0" rIns="0" tIns="0" bIns="0">
+            <a:spAutoFit/>
+          </a:bodyPr>
+          <a:lstStyle/>
+          <a:p>
+            <a:pPr algn="l"/>
+            <a:r>
+              <a:rPr sz="880" b="0">
+                <a:solidFill>
+                  <a:srgbClr val="0F172A"/>
+                </a:solidFill>
+              </a:rPr>
+              <a:t>arb_output/walkthrough.html</a:t>
+            </a:r>
+          </a:p>
+        </p:txBody>
+      </p:sp>
+      <p:sp>
+        <p:nvSpPr>
+          <p:cNvPr id="65" name="TextBox 64"/>
+          <p:cNvSpPr txBox="1"/>
+          <p:nvPr/>
+        </p:nvSpPr>
+        <p:spPr>
+          <a:xfrm>
+            <a:off x="7342632" y="5559552"/>
+            <a:ext cx="4187952" cy="182880"/>
+          </a:xfrm>
+          <a:prstGeom prst="rect">
+            <a:avLst/>
+          </a:prstGeom>
+          <a:noFill/>
+        </p:spPr>
+        <p:txBody>
+          <a:bodyPr wrap="square" lIns="0" rIns="0" tIns="0" bIns="0">
+            <a:spAutoFit/>
+          </a:bodyPr>
+          <a:lstStyle/>
+          <a:p>
+            <a:pPr algn="l"/>
+            <a:r>
+              <a:rPr sz="880" b="0">
+                <a:solidFill>
+                  <a:srgbClr val="0F172A"/>
+                </a:solidFill>
+              </a:rPr>
+              <a:t>This deck + the browser walkthrough artifact</a:t>
+            </a:r>
+          </a:p>
+        </p:txBody>
+      </p:sp>
+      <p:sp>
+        <p:nvSpPr>
+          <p:cNvPr id="66" name="TextBox 65"/>
+          <p:cNvSpPr txBox="1"/>
           <p:nvPr/>
         </p:nvSpPr>
         <p:spPr>
@@ -5190,465 +7478,20 @@
           <a:noFill/>
         </p:spPr>
         <p:txBody>
-          <a:bodyPr wrap="square" lIns="0" tIns="0" rIns="0" bIns="0" rtlCol="0" anchor="ctr"/>
-          <a:lstStyle/>
-          <a:p>
-            <a:pPr marL="0" indent="0" algn="r">
-              <a:buNone/>
-            </a:pPr>
-            <a:r>
-              <a:rPr lang="en-US" sz="780" dirty="0">
+          <a:bodyPr wrap="square" lIns="0" rIns="0" tIns="0" bIns="0">
+            <a:spAutoFit/>
+          </a:bodyPr>
+          <a:lstStyle/>
+          <a:p>
+            <a:pPr algn="r"/>
+            <a:r>
+              <a:rPr sz="780" b="0">
                 <a:solidFill>
                   <a:srgbClr val="475569"/>
                 </a:solidFill>
               </a:rPr>
-              <a:t>14 / 14</a:t>
-            </a:r>
-            <a:endParaRPr lang="en-US" sz="780" dirty="0"/>
-          </a:p>
-        </p:txBody>
-      </p:sp>
-      <p:sp>
-        <p:nvSpPr>
-          <p:cNvPr id="9" name="Text 7"/>
-          <p:cNvSpPr/>
-          <p:nvPr/>
-        </p:nvSpPr>
-        <p:spPr>
-          <a:xfrm>
-            <a:off x="896112" y="1389888"/>
-            <a:ext cx="2803550" cy="146304"/>
-          </a:xfrm>
-          <a:prstGeom prst="rect">
-            <a:avLst/>
-          </a:prstGeom>
-          <a:noFill/>
-        </p:spPr>
-        <p:txBody>
-          <a:bodyPr wrap="square" lIns="0" tIns="0" rIns="0" bIns="0" rtlCol="0" anchor="ctr">
-            <a:normAutofit/>
-          </a:bodyPr>
-          <a:lstStyle/>
-          <a:p>
-            <a:pPr marL="0" indent="0">
-              <a:buNone/>
-            </a:pPr>
-            <a:r>
-              <a:rPr lang="en-US" sz="890" b="1" dirty="0">
-                <a:solidFill>
-                  <a:srgbClr val="FFFFFF"/>
-                </a:solidFill>
-              </a:rPr>
-              <a:t>Next step</a:t>
-            </a:r>
-            <a:endParaRPr lang="en-US" sz="890" dirty="0"/>
-          </a:p>
-        </p:txBody>
-      </p:sp>
-      <p:sp>
-        <p:nvSpPr>
-          <p:cNvPr id="10" name="Text 8"/>
-          <p:cNvSpPr/>
-          <p:nvPr/>
-        </p:nvSpPr>
-        <p:spPr>
-          <a:xfrm>
-            <a:off x="3827678" y="1389888"/>
-            <a:ext cx="7410298" cy="146304"/>
-          </a:xfrm>
-          <a:prstGeom prst="rect">
-            <a:avLst/>
-          </a:prstGeom>
-          <a:noFill/>
-        </p:spPr>
-        <p:txBody>
-          <a:bodyPr wrap="square" lIns="0" tIns="0" rIns="0" bIns="0" rtlCol="0" anchor="ctr">
-            <a:normAutofit/>
-          </a:bodyPr>
-          <a:lstStyle/>
-          <a:p>
-            <a:pPr marL="0" indent="0">
-              <a:buNone/>
-            </a:pPr>
-            <a:r>
-              <a:rPr lang="en-US" sz="890" b="1" dirty="0">
-                <a:solidFill>
-                  <a:srgbClr val="FFFFFF"/>
-                </a:solidFill>
-              </a:rPr>
-              <a:t>Implementation detail</a:t>
-            </a:r>
-            <a:endParaRPr lang="en-US" sz="890" dirty="0"/>
-          </a:p>
-        </p:txBody>
-      </p:sp>
-      <p:sp>
-        <p:nvSpPr>
-          <p:cNvPr id="11" name="TextBox 10"/>
-          <p:cNvSpPr txBox="1"/>
-          <p:nvPr/>
-        </p:nvSpPr>
-        <p:spPr>
-          <a:xfrm>
-            <a:off x="914400" y="1828800"/>
-            <a:ext cx="2743200" cy="822960"/>
-          </a:xfrm>
-          <a:prstGeom prst="rect">
-            <a:avLst/>
-          </a:prstGeom>
-          <a:noFill/>
-        </p:spPr>
-        <p:txBody>
-          <a:bodyPr wrap="square">
-            <a:spAutoFit/>
-          </a:bodyPr>
-          <a:lstStyle/>
-          <a:p>
-            <a:r>
-              <a:rPr sz="1000" b="1">
-                <a:solidFill>
-                  <a:srgbClr val="44546A"/>
-                </a:solidFill>
-                <a:latin typeface="Aptos"/>
-              </a:rPr>
-              <a:t>Complete full-universe extraction</a:t>
-            </a:r>
-          </a:p>
-        </p:txBody>
-      </p:sp>
-      <p:sp>
-        <p:nvSpPr>
-          <p:cNvPr id="12" name="TextBox 11"/>
-          <p:cNvSpPr txBox="1"/>
-          <p:nvPr/>
-        </p:nvSpPr>
-        <p:spPr>
-          <a:xfrm>
-            <a:off x="3840480" y="1828800"/>
-            <a:ext cx="7315200" cy="822960"/>
-          </a:xfrm>
-          <a:prstGeom prst="rect">
-            <a:avLst/>
-          </a:prstGeom>
-          <a:noFill/>
-        </p:spPr>
-        <p:txBody>
-          <a:bodyPr wrap="square">
-            <a:spAutoFit/>
-          </a:bodyPr>
-          <a:lstStyle/>
-          <a:p>
-            <a:r>
-              <a:rPr sz="1000">
-                <a:solidFill>
-                  <a:srgbClr val="222222"/>
-                </a:solidFill>
-                <a:latin typeface="Aptos"/>
-              </a:rPr>
-              <a:t>Batch Claude run over the ~283 deals under a fixed cost cap; measure the realized-label capture rate</a:t>
-            </a:r>
-          </a:p>
-        </p:txBody>
-      </p:sp>
-      <p:sp>
-        <p:nvSpPr>
-          <p:cNvPr id="13" name="TextBox 12"/>
-          <p:cNvSpPr txBox="1"/>
-          <p:nvPr/>
-        </p:nvSpPr>
-        <p:spPr>
-          <a:xfrm>
-            <a:off x="914400" y="2697480"/>
-            <a:ext cx="2743200" cy="822960"/>
-          </a:xfrm>
-          <a:prstGeom prst="rect">
-            <a:avLst/>
-          </a:prstGeom>
-          <a:noFill/>
-        </p:spPr>
-        <p:txBody>
-          <a:bodyPr wrap="square">
-            <a:spAutoFit/>
-          </a:bodyPr>
-          <a:lstStyle/>
-          <a:p>
-            <a:r>
-              <a:rPr sz="1000" b="1">
-                <a:solidFill>
-                  <a:srgbClr val="44546A"/>
-                </a:solidFill>
-                <a:latin typeface="Aptos"/>
-              </a:rPr>
-              <a:t>Build the modeling panel</a:t>
-            </a:r>
-          </a:p>
-        </p:txBody>
-      </p:sp>
-      <p:sp>
-        <p:nvSpPr>
-          <p:cNvPr id="14" name="TextBox 13"/>
-          <p:cNvSpPr txBox="1"/>
-          <p:nvPr/>
-        </p:nvSpPr>
-        <p:spPr>
-          <a:xfrm>
-            <a:off x="3840480" y="2697480"/>
-            <a:ext cx="7315200" cy="822960"/>
-          </a:xfrm>
-          <a:prstGeom prst="rect">
-            <a:avLst/>
-          </a:prstGeom>
-          <a:noFill/>
-        </p:spPr>
-        <p:txBody>
-          <a:bodyPr wrap="square">
-            <a:spAutoFit/>
-          </a:bodyPr>
-          <a:lstStyle/>
-          <a:p>
-            <a:r>
-              <a:rPr sz="1000">
-                <a:solidFill>
-                  <a:srgbClr val="222222"/>
-                </a:solidFill>
-                <a:latin typeface="Aptos"/>
-              </a:rPr>
-              <a:t>Join WRDS market + ETF/passive ownership onto each event; assemble one row per deal</a:t>
-            </a:r>
-          </a:p>
-        </p:txBody>
-      </p:sp>
-      <p:sp>
-        <p:nvSpPr>
-          <p:cNvPr id="15" name="TextBox 14"/>
-          <p:cNvSpPr txBox="1"/>
-          <p:nvPr/>
-        </p:nvSpPr>
-        <p:spPr>
-          <a:xfrm>
-            <a:off x="914400" y="3566160"/>
-            <a:ext cx="2743200" cy="822960"/>
-          </a:xfrm>
-          <a:prstGeom prst="rect">
-            <a:avLst/>
-          </a:prstGeom>
-          <a:noFill/>
-        </p:spPr>
-        <p:txBody>
-          <a:bodyPr wrap="square">
-            <a:spAutoFit/>
-          </a:bodyPr>
-          <a:lstStyle/>
-          <a:p>
-            <a:r>
-              <a:rPr sz="1000" b="1">
-                <a:solidFill>
-                  <a:srgbClr val="44546A"/>
-                </a:solidFill>
-                <a:latin typeface="Aptos"/>
-              </a:rPr>
-              <a:t>Fit p_active(spread)</a:t>
-            </a:r>
-          </a:p>
-        </p:txBody>
-      </p:sp>
-      <p:sp>
-        <p:nvSpPr>
-          <p:cNvPr id="16" name="TextBox 15"/>
-          <p:cNvSpPr txBox="1"/>
-          <p:nvPr/>
-        </p:nvSpPr>
-        <p:spPr>
-          <a:xfrm>
-            <a:off x="3840480" y="3566160"/>
-            <a:ext cx="7315200" cy="822960"/>
-          </a:xfrm>
-          <a:prstGeom prst="rect">
-            <a:avLst/>
-          </a:prstGeom>
-          <a:noFill/>
-        </p:spPr>
-        <p:txBody>
-          <a:bodyPr wrap="square">
-            <a:spAutoFit/>
-          </a:bodyPr>
-          <a:lstStyle/>
-          <a:p>
-            <a:r>
-              <a:rPr sz="1000">
-                <a:solidFill>
-                  <a:srgbClr val="222222"/>
-                </a:solidFill>
-                <a:latin typeface="Aptos"/>
-              </a:rPr>
-              <a:t>Calibrate active-investor cash-election propensity from the realized-demand labels vs. the deadline spread</a:t>
-            </a:r>
-          </a:p>
-        </p:txBody>
-      </p:sp>
-      <p:sp>
-        <p:nvSpPr>
-          <p:cNvPr id="17" name="TextBox 16"/>
-          <p:cNvSpPr txBox="1"/>
-          <p:nvPr/>
-        </p:nvSpPr>
-        <p:spPr>
-          <a:xfrm>
-            <a:off x="914400" y="4434840"/>
-            <a:ext cx="2743200" cy="822960"/>
-          </a:xfrm>
-          <a:prstGeom prst="rect">
-            <a:avLst/>
-          </a:prstGeom>
-          <a:noFill/>
-        </p:spPr>
-        <p:txBody>
-          <a:bodyPr wrap="square">
-            <a:spAutoFit/>
-          </a:bodyPr>
-          <a:lstStyle/>
-          <a:p>
-            <a:r>
-              <a:rPr sz="1000" b="1">
-                <a:solidFill>
-                  <a:srgbClr val="44546A"/>
-                </a:solidFill>
-                <a:latin typeface="Aptos"/>
-              </a:rPr>
-              <a:t>Choose deliverable framing</a:t>
-            </a:r>
-          </a:p>
-        </p:txBody>
-      </p:sp>
-      <p:sp>
-        <p:nvSpPr>
-          <p:cNvPr id="18" name="TextBox 17"/>
-          <p:cNvSpPr txBox="1"/>
-          <p:nvPr/>
-        </p:nvSpPr>
-        <p:spPr>
-          <a:xfrm>
-            <a:off x="3840480" y="4434840"/>
-            <a:ext cx="7315200" cy="822960"/>
-          </a:xfrm>
-          <a:prstGeom prst="rect">
-            <a:avLst/>
-          </a:prstGeom>
-          <a:noFill/>
-        </p:spPr>
-        <p:txBody>
-          <a:bodyPr wrap="square">
-            <a:spAutoFit/>
-          </a:bodyPr>
-          <a:lstStyle/>
-          <a:p>
-            <a:r>
-              <a:rPr sz="1000">
-                <a:solidFill>
-                  <a:srgbClr val="222222"/>
-                </a:solidFill>
-                <a:latin typeface="Aptos"/>
-              </a:rPr>
-              <a:t>Large-N regression if capture is high; structural framework + case studies if issuer disclosure limits N</a:t>
-            </a:r>
-          </a:p>
-        </p:txBody>
-      </p:sp>
-      <p:sp>
-        <p:nvSpPr>
-          <p:cNvPr id="19" name="TextBox 18"/>
-          <p:cNvSpPr txBox="1"/>
-          <p:nvPr/>
-        </p:nvSpPr>
-        <p:spPr>
-          <a:xfrm>
-            <a:off x="914400" y="5303520"/>
-            <a:ext cx="2743200" cy="822960"/>
-          </a:xfrm>
-          <a:prstGeom prst="rect">
-            <a:avLst/>
-          </a:prstGeom>
-          <a:noFill/>
-        </p:spPr>
-        <p:txBody>
-          <a:bodyPr wrap="square">
-            <a:spAutoFit/>
-          </a:bodyPr>
-          <a:lstStyle/>
-          <a:p>
-            <a:r>
-              <a:rPr sz="1000" b="1">
-                <a:solidFill>
-                  <a:srgbClr val="44546A"/>
-                </a:solidFill>
-                <a:latin typeface="Aptos"/>
-              </a:rPr>
-              <a:t>Mentor discussion</a:t>
-            </a:r>
-          </a:p>
-        </p:txBody>
-      </p:sp>
-      <p:sp>
-        <p:nvSpPr>
-          <p:cNvPr id="20" name="TextBox 19"/>
-          <p:cNvSpPr txBox="1"/>
-          <p:nvPr/>
-        </p:nvSpPr>
-        <p:spPr>
-          <a:xfrm>
-            <a:off x="3840480" y="5303520"/>
-            <a:ext cx="7315200" cy="400110"/>
-          </a:xfrm>
-          <a:prstGeom prst="rect">
-            <a:avLst/>
-          </a:prstGeom>
-          <a:noFill/>
-        </p:spPr>
-        <p:txBody>
-          <a:bodyPr wrap="square">
-            <a:spAutoFit/>
-          </a:bodyPr>
-          <a:lstStyle/>
-          <a:p>
-            <a:r>
-              <a:rPr sz="1000" dirty="0">
-                <a:solidFill>
-                  <a:srgbClr val="222222"/>
-                </a:solidFill>
-                <a:latin typeface="Aptos"/>
-              </a:rPr>
-              <a:t>Is ~80% label capture (disclosure-bounded) sufficient, or should we prioritize the structural-model route?</a:t>
-            </a:r>
-            <a:r>
-              <a:rPr lang="en-US" sz="1000" dirty="0">
-                <a:solidFill>
-                  <a:srgbClr val="222222"/>
-                </a:solidFill>
-                <a:latin typeface="Aptos"/>
-              </a:rPr>
-              <a:t> </a:t>
-            </a:r>
-            <a:r>
-              <a:rPr lang="en-US" sz="1000" dirty="0">
-                <a:solidFill>
-                  <a:srgbClr val="222222"/>
-                </a:solidFill>
-                <a:highlight>
-                  <a:srgbClr val="FFFF00"/>
-                </a:highlight>
-                <a:latin typeface="Aptos"/>
-              </a:rPr>
-              <a:t>We are considering exploring Canda transactions, but their API may potentially be more difficult to work with.</a:t>
-            </a:r>
-            <a:endParaRPr sz="1000" dirty="0">
-              <a:solidFill>
-                <a:srgbClr val="222222"/>
-              </a:solidFill>
-              <a:highlight>
-                <a:srgbClr val="FFFF00"/>
-              </a:highlight>
-              <a:latin typeface="Aptos"/>
-            </a:endParaRPr>
+              <a:t>13 / 15</a:t>
+            </a:r>
           </a:p>
         </p:txBody>
       </p:sp>
@@ -5787,7 +7630,7 @@
                   <a:srgbClr val="14315A"/>
                 </a:solidFill>
               </a:rPr>
-              <a:t>Updated pipeline — extraction to Monte Carlo to trade</a:t>
+              <a:t>Extraction walkthrough — one deal, end to end</a:t>
             </a:r>
           </a:p>
         </p:txBody>
@@ -5821,7 +7664,7 @@
                   <a:srgbClr val="475569"/>
                 </a:solidFill>
               </a:rPr>
-              <a:t>Full current flow: 2,068 raw deals → 73 clean labels → a calibrated model → a trade blotter</a:t>
+              <a:t>PepsiAmericas ← PepsiCo (announced 2009-04-20, cash-or-stock election) — raw filings to a priced trade</a:t>
             </a:r>
           </a:p>
         </p:txBody>
@@ -5868,8 +7711,8 @@
         </p:nvSpPr>
         <p:spPr>
           <a:xfrm>
-            <a:off x="594360" y="1481328"/>
-            <a:ext cx="1417320" cy="676656"/>
+            <a:off x="640080" y="1517904"/>
+            <a:ext cx="2514600" cy="731520"/>
           </a:xfrm>
           <a:prstGeom prst="rect">
             <a:avLst/>
@@ -5912,8 +7755,8 @@
         </p:nvSpPr>
         <p:spPr>
           <a:xfrm>
-            <a:off x="676656" y="1600200"/>
-            <a:ext cx="1252728" cy="182880"/>
+            <a:off x="731520" y="1645919"/>
+            <a:ext cx="2331720" cy="182880"/>
           </a:xfrm>
           <a:prstGeom prst="rect">
             <a:avLst/>
@@ -5926,14 +7769,14 @@
           </a:bodyPr>
           <a:lstStyle/>
           <a:p>
-            <a:pPr algn="ctr"/>
-            <a:r>
-              <a:rPr sz="880" b="1">
+            <a:pPr algn="l"/>
+            <a:r>
+              <a:rPr sz="1050" b="1">
                 <a:solidFill>
                   <a:srgbClr val="14315A"/>
                 </a:solidFill>
               </a:rPr>
-              <a:t>Universe</a:t>
+              <a:t>1  Deal input</a:t>
             </a:r>
           </a:p>
         </p:txBody>
@@ -5946,8 +7789,8 @@
         </p:nvSpPr>
         <p:spPr>
           <a:xfrm>
-            <a:off x="676656" y="1837944"/>
-            <a:ext cx="1252728" cy="182880"/>
+            <a:off x="731520" y="1901952"/>
+            <a:ext cx="2331720" cy="182880"/>
           </a:xfrm>
           <a:prstGeom prst="rect">
             <a:avLst/>
@@ -5960,14 +7803,14 @@
           </a:bodyPr>
           <a:lstStyle/>
           <a:p>
-            <a:pPr algn="ctr"/>
-            <a:r>
-              <a:rPr sz="720" b="0">
+            <a:pPr algn="l"/>
+            <a:r>
+              <a:rPr sz="819" b="0">
                 <a:solidFill>
                   <a:srgbClr val="475569"/>
                 </a:solidFill>
               </a:rPr>
-              <a:t>2,068 → 317</a:t>
+              <a:t>Bloomberg row</a:t>
             </a:r>
           </a:p>
         </p:txBody>
@@ -5980,17 +7823,19 @@
         </p:nvSpPr>
         <p:spPr>
           <a:xfrm>
-            <a:off x="2057400" y="1737360"/>
-            <a:ext cx="146304" cy="182880"/>
+            <a:off x="3310128" y="1517904"/>
+            <a:ext cx="8257031" cy="731520"/>
           </a:xfrm>
           <a:prstGeom prst="rect">
             <a:avLst/>
           </a:prstGeom>
           <a:solidFill>
-            <a:srgbClr val="CBD5E1"/>
+            <a:srgbClr val="FFFFFF"/>
           </a:solidFill>
-          <a:ln>
-            <a:noFill/>
+          <a:ln w="9525">
+            <a:solidFill>
+              <a:srgbClr val="E2E8F0"/>
+            </a:solidFill>
           </a:ln>
           <a:effectLst/>
         </p:spPr>
@@ -6018,14 +7863,48 @@
       </p:sp>
       <p:sp>
         <p:nvSpPr>
-          <p:cNvPr id="11" name="Rectangle 10"/>
-          <p:cNvSpPr/>
-          <p:nvPr/>
-        </p:nvSpPr>
-        <p:spPr>
-          <a:xfrm>
-            <a:off x="2468879" y="1481328"/>
-            <a:ext cx="1417320" cy="676656"/>
+          <p:cNvPr id="11" name="TextBox 10"/>
+          <p:cNvSpPr txBox="1"/>
+          <p:nvPr/>
+        </p:nvSpPr>
+        <p:spPr>
+          <a:xfrm>
+            <a:off x="3456432" y="1673351"/>
+            <a:ext cx="8001000" cy="457200"/>
+          </a:xfrm>
+          <a:prstGeom prst="rect">
+            <a:avLst/>
+          </a:prstGeom>
+          <a:noFill/>
+        </p:spPr>
+        <p:txBody>
+          <a:bodyPr wrap="square" lIns="0" rIns="0" tIns="0" bIns="0">
+            <a:spAutoFit/>
+          </a:bodyPr>
+          <a:lstStyle/>
+          <a:p>
+            <a:pPr algn="l"/>
+            <a:r>
+              <a:rPr sz="1019" b="0">
+                <a:solidFill>
+                  <a:srgbClr val="0F172A"/>
+                </a:solidFill>
+              </a:rPr>
+              <a:t>PepsiAmericas Inc  ←  PepsiCo Inc  ·  announced 2009-04-20  ·  Cash-or-Stock election  ·  status: completed</a:t>
+            </a:r>
+          </a:p>
+        </p:txBody>
+      </p:sp>
+      <p:sp>
+        <p:nvSpPr>
+          <p:cNvPr id="12" name="Rectangle 11"/>
+          <p:cNvSpPr/>
+          <p:nvPr/>
+        </p:nvSpPr>
+        <p:spPr>
+          <a:xfrm>
+            <a:off x="640080" y="2336291"/>
+            <a:ext cx="2514600" cy="731520"/>
           </a:xfrm>
           <a:prstGeom prst="rect">
             <a:avLst/>
@@ -6062,14 +7941,14 @@
       </p:sp>
       <p:sp>
         <p:nvSpPr>
-          <p:cNvPr id="12" name="TextBox 11"/>
+          <p:cNvPr id="13" name="TextBox 12"/>
           <p:cNvSpPr txBox="1"/>
           <p:nvPr/>
         </p:nvSpPr>
         <p:spPr>
           <a:xfrm>
-            <a:off x="2551175" y="1600200"/>
-            <a:ext cx="1252728" cy="182880"/>
+            <a:off x="731520" y="2464308"/>
+            <a:ext cx="2331720" cy="182880"/>
           </a:xfrm>
           <a:prstGeom prst="rect">
             <a:avLst/>
@@ -6082,28 +7961,28 @@
           </a:bodyPr>
           <a:lstStyle/>
           <a:p>
-            <a:pPr algn="ctr"/>
-            <a:r>
-              <a:rPr sz="880" b="1">
+            <a:pPr algn="l"/>
+            <a:r>
+              <a:rPr sz="1050" b="1">
                 <a:solidFill>
                   <a:srgbClr val="14315A"/>
                 </a:solidFill>
               </a:rPr>
-              <a:t>SEC + Claude</a:t>
-            </a:r>
-          </a:p>
-        </p:txBody>
-      </p:sp>
-      <p:sp>
-        <p:nvSpPr>
-          <p:cNvPr id="13" name="TextBox 12"/>
+              <a:t>2  SEC retrieval</a:t>
+            </a:r>
+          </a:p>
+        </p:txBody>
+      </p:sp>
+      <p:sp>
+        <p:nvSpPr>
+          <p:cNvPr id="14" name="TextBox 13"/>
           <p:cNvSpPr txBox="1"/>
           <p:nvPr/>
         </p:nvSpPr>
         <p:spPr>
           <a:xfrm>
-            <a:off x="2551175" y="1837944"/>
-            <a:ext cx="1252728" cy="182880"/>
+            <a:off x="731520" y="2720339"/>
+            <a:ext cx="2331720" cy="182880"/>
           </a:xfrm>
           <a:prstGeom prst="rect">
             <a:avLst/>
@@ -6116,37 +7995,39 @@
           </a:bodyPr>
           <a:lstStyle/>
           <a:p>
-            <a:pPr algn="ctr"/>
-            <a:r>
-              <a:rPr sz="720" b="0">
+            <a:pPr algn="l"/>
+            <a:r>
+              <a:rPr sz="819" b="0">
                 <a:solidFill>
                   <a:srgbClr val="475569"/>
                 </a:solidFill>
               </a:rPr>
-              <a:t>field extraction</a:t>
-            </a:r>
-          </a:p>
-        </p:txBody>
-      </p:sp>
-      <p:sp>
-        <p:nvSpPr>
-          <p:cNvPr id="14" name="Rectangle 13"/>
-          <p:cNvSpPr/>
-          <p:nvPr/>
-        </p:nvSpPr>
-        <p:spPr>
-          <a:xfrm>
-            <a:off x="3931920" y="1737360"/>
-            <a:ext cx="146304" cy="182880"/>
+              <a:t>download_ma_edgar_files.py</a:t>
+            </a:r>
+          </a:p>
+        </p:txBody>
+      </p:sp>
+      <p:sp>
+        <p:nvSpPr>
+          <p:cNvPr id="15" name="Rectangle 14"/>
+          <p:cNvSpPr/>
+          <p:nvPr/>
+        </p:nvSpPr>
+        <p:spPr>
+          <a:xfrm>
+            <a:off x="3310128" y="2336291"/>
+            <a:ext cx="8257031" cy="731520"/>
           </a:xfrm>
           <a:prstGeom prst="rect">
             <a:avLst/>
           </a:prstGeom>
           <a:solidFill>
-            <a:srgbClr val="CBD5E1"/>
+            <a:srgbClr val="FFFFFF"/>
           </a:solidFill>
-          <a:ln>
-            <a:noFill/>
+          <a:ln w="9525">
+            <a:solidFill>
+              <a:srgbClr val="E2E8F0"/>
+            </a:solidFill>
           </a:ln>
           <a:effectLst/>
         </p:spPr>
@@ -6174,14 +8055,48 @@
       </p:sp>
       <p:sp>
         <p:nvSpPr>
-          <p:cNvPr id="15" name="Rectangle 14"/>
-          <p:cNvSpPr/>
-          <p:nvPr/>
-        </p:nvSpPr>
-        <p:spPr>
-          <a:xfrm>
-            <a:off x="4343400" y="1481328"/>
-            <a:ext cx="1417320" cy="676656"/>
+          <p:cNvPr id="16" name="TextBox 15"/>
+          <p:cNvSpPr txBox="1"/>
+          <p:nvPr/>
+        </p:nvSpPr>
+        <p:spPr>
+          <a:xfrm>
+            <a:off x="3456432" y="2491739"/>
+            <a:ext cx="8001000" cy="457200"/>
+          </a:xfrm>
+          <a:prstGeom prst="rect">
+            <a:avLst/>
+          </a:prstGeom>
+          <a:noFill/>
+        </p:spPr>
+        <p:txBody>
+          <a:bodyPr wrap="square" lIns="0" rIns="0" tIns="0" bIns="0">
+            <a:spAutoFit/>
+          </a:bodyPr>
+          <a:lstStyle/>
+          <a:p>
+            <a:pPr algn="l"/>
+            <a:r>
+              <a:rPr sz="1019" b="0">
+                <a:solidFill>
+                  <a:srgbClr val="0F172A"/>
+                </a:solidFill>
+              </a:rPr>
+              <a:t>Resolved CIK → pulled 553 documents / 104 unique filings (8-K, 425, DEFA14A, SC 13E3/A) → top 10 scored &amp; sent to Claude</a:t>
+            </a:r>
+          </a:p>
+        </p:txBody>
+      </p:sp>
+      <p:sp>
+        <p:nvSpPr>
+          <p:cNvPr id="17" name="Rectangle 16"/>
+          <p:cNvSpPr/>
+          <p:nvPr/>
+        </p:nvSpPr>
+        <p:spPr>
+          <a:xfrm>
+            <a:off x="640080" y="3154679"/>
+            <a:ext cx="2514600" cy="731520"/>
           </a:xfrm>
           <a:prstGeom prst="rect">
             <a:avLst/>
@@ -6218,14 +8133,14 @@
       </p:sp>
       <p:sp>
         <p:nvSpPr>
-          <p:cNvPr id="16" name="TextBox 15"/>
+          <p:cNvPr id="18" name="TextBox 17"/>
           <p:cNvSpPr txBox="1"/>
           <p:nvPr/>
         </p:nvSpPr>
         <p:spPr>
           <a:xfrm>
-            <a:off x="4425696" y="1600200"/>
-            <a:ext cx="1252728" cy="182880"/>
+            <a:off x="731520" y="3282696"/>
+            <a:ext cx="2331720" cy="182880"/>
           </a:xfrm>
           <a:prstGeom prst="rect">
             <a:avLst/>
@@ -6238,28 +8153,28 @@
           </a:bodyPr>
           <a:lstStyle/>
           <a:p>
-            <a:pPr algn="ctr"/>
-            <a:r>
-              <a:rPr sz="880" b="1">
+            <a:pPr algn="l"/>
+            <a:r>
+              <a:rPr sz="1050" b="1">
                 <a:solidFill>
                   <a:srgbClr val="14315A"/>
                 </a:solidFill>
               </a:rPr>
-              <a:t>WRDS</a:t>
-            </a:r>
-          </a:p>
-        </p:txBody>
-      </p:sp>
-      <p:sp>
-        <p:nvSpPr>
-          <p:cNvPr id="17" name="TextBox 16"/>
+              <a:t>3  Claude extraction</a:t>
+            </a:r>
+          </a:p>
+        </p:txBody>
+      </p:sp>
+      <p:sp>
+        <p:nvSpPr>
+          <p:cNvPr id="19" name="TextBox 18"/>
           <p:cNvSpPr txBox="1"/>
           <p:nvPr/>
         </p:nvSpPr>
         <p:spPr>
           <a:xfrm>
-            <a:off x="4425696" y="1837944"/>
-            <a:ext cx="1252728" cy="182880"/>
+            <a:off x="731520" y="3538727"/>
+            <a:ext cx="2331720" cy="182880"/>
           </a:xfrm>
           <a:prstGeom prst="rect">
             <a:avLst/>
@@ -6272,37 +8187,39 @@
           </a:bodyPr>
           <a:lstStyle/>
           <a:p>
-            <a:pPr algn="ctr"/>
-            <a:r>
-              <a:rPr sz="720" b="0">
+            <a:pPr algn="l"/>
+            <a:r>
+              <a:rPr sz="819" b="0">
                 <a:solidFill>
                   <a:srgbClr val="475569"/>
                 </a:solidFill>
               </a:rPr>
-              <a:t>prices + own.</a:t>
-            </a:r>
-          </a:p>
-        </p:txBody>
-      </p:sp>
-      <p:sp>
-        <p:nvSpPr>
-          <p:cNvPr id="18" name="Rectangle 17"/>
-          <p:cNvSpPr/>
-          <p:nvPr/>
-        </p:nvSpPr>
-        <p:spPr>
-          <a:xfrm>
-            <a:off x="5806440" y="1737360"/>
-            <a:ext cx="146304" cy="182880"/>
+              <a:t>17 canonical fields</a:t>
+            </a:r>
+          </a:p>
+        </p:txBody>
+      </p:sp>
+      <p:sp>
+        <p:nvSpPr>
+          <p:cNvPr id="20" name="Rectangle 19"/>
+          <p:cNvSpPr/>
+          <p:nvPr/>
+        </p:nvSpPr>
+        <p:spPr>
+          <a:xfrm>
+            <a:off x="3310128" y="3154679"/>
+            <a:ext cx="8257031" cy="731520"/>
           </a:xfrm>
           <a:prstGeom prst="rect">
             <a:avLst/>
           </a:prstGeom>
           <a:solidFill>
-            <a:srgbClr val="CBD5E1"/>
+            <a:srgbClr val="FFFFFF"/>
           </a:solidFill>
-          <a:ln>
-            <a:noFill/>
+          <a:ln w="9525">
+            <a:solidFill>
+              <a:srgbClr val="E2E8F0"/>
+            </a:solidFill>
           </a:ln>
           <a:effectLst/>
         </p:spPr>
@@ -6330,14 +8247,48 @@
       </p:sp>
       <p:sp>
         <p:nvSpPr>
-          <p:cNvPr id="19" name="Rectangle 18"/>
-          <p:cNvSpPr/>
-          <p:nvPr/>
-        </p:nvSpPr>
-        <p:spPr>
-          <a:xfrm>
-            <a:off x="6217920" y="1481328"/>
-            <a:ext cx="1417320" cy="676656"/>
+          <p:cNvPr id="21" name="TextBox 20"/>
+          <p:cNvSpPr txBox="1"/>
+          <p:nvPr/>
+        </p:nvSpPr>
+        <p:spPr>
+          <a:xfrm>
+            <a:off x="3456432" y="3310127"/>
+            <a:ext cx="8001000" cy="457200"/>
+          </a:xfrm>
+          <a:prstGeom prst="rect">
+            <a:avLst/>
+          </a:prstGeom>
+          <a:noFill/>
+        </p:spPr>
+        <p:txBody>
+          <a:bodyPr wrap="square" lIns="0" rIns="0" tIns="0" bIns="0">
+            <a:spAutoFit/>
+          </a:bodyPr>
+          <a:lstStyle/>
+          <a:p>
+            <a:pPr algn="l"/>
+            <a:r>
+              <a:rPr sz="1019" b="0">
+                <a:solidFill>
+                  <a:srgbClr val="0F172A"/>
+                </a:solidFill>
+              </a:rPr>
+              <a:t>Cash $28.50/sh  ·  Stock 0.5022 PEP sh (fixed ratio)  ·  Cash cap 50% of shares  ·  deadline = 3rd business day pre-close</a:t>
+            </a:r>
+          </a:p>
+        </p:txBody>
+      </p:sp>
+      <p:sp>
+        <p:nvSpPr>
+          <p:cNvPr id="22" name="Rectangle 21"/>
+          <p:cNvSpPr/>
+          <p:nvPr/>
+        </p:nvSpPr>
+        <p:spPr>
+          <a:xfrm>
+            <a:off x="640080" y="3973068"/>
+            <a:ext cx="2514600" cy="731520"/>
           </a:xfrm>
           <a:prstGeom prst="rect">
             <a:avLst/>
@@ -6374,14 +8325,14 @@
       </p:sp>
       <p:sp>
         <p:nvSpPr>
-          <p:cNvPr id="20" name="TextBox 19"/>
+          <p:cNvPr id="23" name="TextBox 22"/>
           <p:cNvSpPr txBox="1"/>
           <p:nvPr/>
         </p:nvSpPr>
         <p:spPr>
           <a:xfrm>
-            <a:off x="6300216" y="1600200"/>
-            <a:ext cx="1252728" cy="182880"/>
+            <a:off x="731520" y="4101083"/>
+            <a:ext cx="2331720" cy="182880"/>
           </a:xfrm>
           <a:prstGeom prst="rect">
             <a:avLst/>
@@ -6394,28 +8345,28 @@
           </a:bodyPr>
           <a:lstStyle/>
           <a:p>
-            <a:pPr algn="ctr"/>
-            <a:r>
-              <a:rPr sz="880" b="1">
+            <a:pPr algn="l"/>
+            <a:r>
+              <a:rPr sz="1050" b="1">
                 <a:solidFill>
                   <a:srgbClr val="14315A"/>
                 </a:solidFill>
               </a:rPr>
-              <a:t>Labels</a:t>
-            </a:r>
-          </a:p>
-        </p:txBody>
-      </p:sp>
-      <p:sp>
-        <p:nvSpPr>
-          <p:cNvPr id="21" name="TextBox 20"/>
+              <a:t>4  Realized label</a:t>
+            </a:r>
+          </a:p>
+        </p:txBody>
+      </p:sp>
+      <p:sp>
+        <p:nvSpPr>
+          <p:cNvPr id="24" name="TextBox 23"/>
           <p:cNvSpPr txBox="1"/>
           <p:nvPr/>
         </p:nvSpPr>
         <p:spPr>
           <a:xfrm>
-            <a:off x="6300216" y="1837944"/>
-            <a:ext cx="1252728" cy="182880"/>
+            <a:off x="731520" y="4357116"/>
+            <a:ext cx="2331720" cy="182880"/>
           </a:xfrm>
           <a:prstGeom prst="rect">
             <a:avLst/>
@@ -6428,37 +8379,39 @@
           </a:bodyPr>
           <a:lstStyle/>
           <a:p>
-            <a:pPr algn="ctr"/>
-            <a:r>
-              <a:rPr sz="720" b="0">
+            <a:pPr algn="l"/>
+            <a:r>
+              <a:rPr sz="819" b="0">
                 <a:solidFill>
                   <a:srgbClr val="475569"/>
                 </a:solidFill>
               </a:rPr>
-              <a:t>73 clean demand</a:t>
-            </a:r>
-          </a:p>
-        </p:txBody>
-      </p:sp>
-      <p:sp>
-        <p:nvSpPr>
-          <p:cNvPr id="22" name="Rectangle 21"/>
-          <p:cNvSpPr/>
-          <p:nvPr/>
-        </p:nvSpPr>
-        <p:spPr>
-          <a:xfrm>
-            <a:off x="7680960" y="1737360"/>
-            <a:ext cx="146304" cy="182880"/>
+              <a:t>normalized_labels.csv</a:t>
+            </a:r>
+          </a:p>
+        </p:txBody>
+      </p:sp>
+      <p:sp>
+        <p:nvSpPr>
+          <p:cNvPr id="25" name="Rectangle 24"/>
+          <p:cNvSpPr/>
+          <p:nvPr/>
+        </p:nvSpPr>
+        <p:spPr>
+          <a:xfrm>
+            <a:off x="3310128" y="3973068"/>
+            <a:ext cx="8257031" cy="731520"/>
           </a:xfrm>
           <a:prstGeom prst="rect">
             <a:avLst/>
           </a:prstGeom>
           <a:solidFill>
-            <a:srgbClr val="CBD5E1"/>
+            <a:srgbClr val="FFFFFF"/>
           </a:solidFill>
-          <a:ln>
-            <a:noFill/>
+          <a:ln w="9525">
+            <a:solidFill>
+              <a:srgbClr val="E2E8F0"/>
+            </a:solidFill>
           </a:ln>
           <a:effectLst/>
         </p:spPr>
@@ -6486,14 +8439,48 @@
       </p:sp>
       <p:sp>
         <p:nvSpPr>
-          <p:cNvPr id="23" name="Rectangle 22"/>
-          <p:cNvSpPr/>
-          <p:nvPr/>
-        </p:nvSpPr>
-        <p:spPr>
-          <a:xfrm>
-            <a:off x="8092440" y="1481328"/>
-            <a:ext cx="1417320" cy="676656"/>
+          <p:cNvPr id="26" name="TextBox 25"/>
+          <p:cNvSpPr txBox="1"/>
+          <p:nvPr/>
+        </p:nvSpPr>
+        <p:spPr>
+          <a:xfrm>
+            <a:off x="3456432" y="4128515"/>
+            <a:ext cx="8001000" cy="457200"/>
+          </a:xfrm>
+          <a:prstGeom prst="rect">
+            <a:avLst/>
+          </a:prstGeom>
+          <a:noFill/>
+        </p:spPr>
+        <p:txBody>
+          <a:bodyPr wrap="square" lIns="0" rIns="0" tIns="0" bIns="0">
+            <a:spAutoFit/>
+          </a:bodyPr>
+          <a:lstStyle/>
+          <a:p>
+            <a:pPr algn="l"/>
+            <a:r>
+              <a:rPr sz="1019" b="0">
+                <a:solidFill>
+                  <a:srgbClr val="0F172A"/>
+                </a:solidFill>
+              </a:rPr>
+              <a:t>Filing discloses DEMAND: ≈ 2,304,733 PAS shares elected cash → % elected cash (pre-proration) — the model's target variable</a:t>
+            </a:r>
+          </a:p>
+        </p:txBody>
+      </p:sp>
+      <p:sp>
+        <p:nvSpPr>
+          <p:cNvPr id="27" name="Rectangle 26"/>
+          <p:cNvSpPr/>
+          <p:nvPr/>
+        </p:nvSpPr>
+        <p:spPr>
+          <a:xfrm>
+            <a:off x="640080" y="4791456"/>
+            <a:ext cx="2514600" cy="731520"/>
           </a:xfrm>
           <a:prstGeom prst="rect">
             <a:avLst/>
@@ -6530,14 +8517,14 @@
       </p:sp>
       <p:sp>
         <p:nvSpPr>
-          <p:cNvPr id="24" name="TextBox 23"/>
+          <p:cNvPr id="28" name="TextBox 27"/>
           <p:cNvSpPr txBox="1"/>
           <p:nvPr/>
         </p:nvSpPr>
         <p:spPr>
           <a:xfrm>
-            <a:off x="8174736" y="1600200"/>
-            <a:ext cx="1252728" cy="182880"/>
+            <a:off x="731520" y="4919472"/>
+            <a:ext cx="2331720" cy="182880"/>
           </a:xfrm>
           <a:prstGeom prst="rect">
             <a:avLst/>
@@ -6550,28 +8537,28 @@
           </a:bodyPr>
           <a:lstStyle/>
           <a:p>
-            <a:pPr algn="ctr"/>
-            <a:r>
-              <a:rPr sz="880" b="1">
+            <a:pPr algn="l"/>
+            <a:r>
+              <a:rPr sz="1050" b="1">
                 <a:solidFill>
                   <a:srgbClr val="14315A"/>
                 </a:solidFill>
               </a:rPr>
-              <a:t>Monte Carlo</a:t>
-            </a:r>
-          </a:p>
-        </p:txBody>
-      </p:sp>
-      <p:sp>
-        <p:nvSpPr>
-          <p:cNvPr id="25" name="TextBox 24"/>
+              <a:t>5  WRDS join</a:t>
+            </a:r>
+          </a:p>
+        </p:txBody>
+      </p:sp>
+      <p:sp>
+        <p:nvSpPr>
+          <p:cNvPr id="29" name="TextBox 28"/>
           <p:cNvSpPr txBox="1"/>
           <p:nvPr/>
         </p:nvSpPr>
         <p:spPr>
           <a:xfrm>
-            <a:off x="8174736" y="1837944"/>
-            <a:ext cx="1252728" cy="182880"/>
+            <a:off x="731520" y="5175504"/>
+            <a:ext cx="2331720" cy="182880"/>
           </a:xfrm>
           <a:prstGeom prst="rect">
             <a:avLst/>
@@ -6584,37 +8571,39 @@
           </a:bodyPr>
           <a:lstStyle/>
           <a:p>
-            <a:pPr algn="ctr"/>
-            <a:r>
-              <a:rPr sz="720" b="0">
+            <a:pPr algn="l"/>
+            <a:r>
+              <a:rPr sz="819" b="0">
                 <a:solidFill>
                   <a:srgbClr val="475569"/>
                 </a:solidFill>
               </a:rPr>
-              <a:t>demand → payoff</a:t>
-            </a:r>
-          </a:p>
-        </p:txBody>
-      </p:sp>
-      <p:sp>
-        <p:nvSpPr>
-          <p:cNvPr id="26" name="Rectangle 25"/>
-          <p:cNvSpPr/>
-          <p:nvPr/>
-        </p:nvSpPr>
-        <p:spPr>
-          <a:xfrm>
-            <a:off x="9555480" y="1737360"/>
-            <a:ext cx="146304" cy="182880"/>
+              <a:t>wrds_market_daily.csv</a:t>
+            </a:r>
+          </a:p>
+        </p:txBody>
+      </p:sp>
+      <p:sp>
+        <p:nvSpPr>
+          <p:cNvPr id="30" name="Rectangle 29"/>
+          <p:cNvSpPr/>
+          <p:nvPr/>
+        </p:nvSpPr>
+        <p:spPr>
+          <a:xfrm>
+            <a:off x="3310128" y="4791456"/>
+            <a:ext cx="8257031" cy="731520"/>
           </a:xfrm>
           <a:prstGeom prst="rect">
             <a:avLst/>
           </a:prstGeom>
           <a:solidFill>
-            <a:srgbClr val="CBD5E1"/>
+            <a:srgbClr val="FFFFFF"/>
           </a:solidFill>
-          <a:ln>
-            <a:noFill/>
+          <a:ln w="9525">
+            <a:solidFill>
+              <a:srgbClr val="E2E8F0"/>
+            </a:solidFill>
           </a:ln>
           <a:effectLst/>
         </p:spPr>
@@ -6642,14 +8631,48 @@
       </p:sp>
       <p:sp>
         <p:nvSpPr>
-          <p:cNvPr id="27" name="Rectangle 26"/>
-          <p:cNvSpPr/>
-          <p:nvPr/>
-        </p:nvSpPr>
-        <p:spPr>
-          <a:xfrm>
-            <a:off x="9966959" y="1481328"/>
-            <a:ext cx="1417320" cy="676656"/>
+          <p:cNvPr id="31" name="TextBox 30"/>
+          <p:cNvSpPr txBox="1"/>
+          <p:nvPr/>
+        </p:nvSpPr>
+        <p:spPr>
+          <a:xfrm>
+            <a:off x="3456432" y="4946904"/>
+            <a:ext cx="8001000" cy="457200"/>
+          </a:xfrm>
+          <a:prstGeom prst="rect">
+            <a:avLst/>
+          </a:prstGeom>
+          <a:noFill/>
+        </p:spPr>
+        <p:txBody>
+          <a:bodyPr wrap="square" lIns="0" rIns="0" tIns="0" bIns="0">
+            <a:spAutoFit/>
+          </a:bodyPr>
+          <a:lstStyle/>
+          <a:p>
+            <a:pPr algn="l"/>
+            <a:r>
+              <a:rPr sz="1019" b="0">
+                <a:solidFill>
+                  <a:srgbClr val="0F172A"/>
+                </a:solidFill>
+              </a:rPr>
+              <a:t>Target + acquirer (PepsiCo) daily prices joined — 85 trading days each; supplies the entry price and the hedge leg</a:t>
+            </a:r>
+          </a:p>
+        </p:txBody>
+      </p:sp>
+      <p:sp>
+        <p:nvSpPr>
+          <p:cNvPr id="32" name="Rectangle 31"/>
+          <p:cNvSpPr/>
+          <p:nvPr/>
+        </p:nvSpPr>
+        <p:spPr>
+          <a:xfrm>
+            <a:off x="640080" y="5609844"/>
+            <a:ext cx="2514600" cy="731520"/>
           </a:xfrm>
           <a:prstGeom prst="rect">
             <a:avLst/>
@@ -6686,14 +8709,14 @@
       </p:sp>
       <p:sp>
         <p:nvSpPr>
-          <p:cNvPr id="28" name="TextBox 27"/>
+          <p:cNvPr id="33" name="TextBox 32"/>
           <p:cNvSpPr txBox="1"/>
           <p:nvPr/>
         </p:nvSpPr>
         <p:spPr>
           <a:xfrm>
-            <a:off x="10049255" y="1600200"/>
-            <a:ext cx="1252728" cy="182880"/>
+            <a:off x="731520" y="5737859"/>
+            <a:ext cx="2331720" cy="182880"/>
           </a:xfrm>
           <a:prstGeom prst="rect">
             <a:avLst/>
@@ -6706,28 +8729,28 @@
           </a:bodyPr>
           <a:lstStyle/>
           <a:p>
-            <a:pPr algn="ctr"/>
-            <a:r>
-              <a:rPr sz="880" b="1">
+            <a:pPr algn="l"/>
+            <a:r>
+              <a:rPr sz="1050" b="1">
                 <a:solidFill>
                   <a:srgbClr val="14315A"/>
                 </a:solidFill>
               </a:rPr>
-              <a:t>Trade blotter</a:t>
-            </a:r>
-          </a:p>
-        </p:txBody>
-      </p:sp>
-      <p:sp>
-        <p:nvSpPr>
-          <p:cNvPr id="29" name="TextBox 28"/>
+              <a:t>6  Trade decision</a:t>
+            </a:r>
+          </a:p>
+        </p:txBody>
+      </p:sp>
+      <p:sp>
+        <p:nvSpPr>
+          <p:cNvPr id="34" name="TextBox 33"/>
           <p:cNvSpPr txBox="1"/>
           <p:nvPr/>
         </p:nvSpPr>
         <p:spPr>
           <a:xfrm>
-            <a:off x="10049255" y="1837944"/>
-            <a:ext cx="1252728" cy="182880"/>
+            <a:off x="731520" y="5993892"/>
+            <a:ext cx="2331720" cy="182880"/>
           </a:xfrm>
           <a:prstGeom prst="rect">
             <a:avLst/>
@@ -6740,37 +8763,39 @@
           </a:bodyPr>
           <a:lstStyle/>
           <a:p>
-            <a:pPr algn="ctr"/>
-            <a:r>
-              <a:rPr sz="720" b="0">
+            <a:pPr algn="l"/>
+            <a:r>
+              <a:rPr sz="819" b="0">
                 <a:solidFill>
                   <a:srgbClr val="475569"/>
                 </a:solidFill>
               </a:rPr>
-              <a:t>entry + hedge</a:t>
-            </a:r>
-          </a:p>
-        </p:txBody>
-      </p:sp>
-      <p:sp>
-        <p:nvSpPr>
-          <p:cNvPr id="30" name="Rectangle 29"/>
-          <p:cNvSpPr/>
-          <p:nvPr/>
-        </p:nvSpPr>
-        <p:spPr>
-          <a:xfrm>
-            <a:off x="640080" y="2514600"/>
-            <a:ext cx="10927080" cy="384048"/>
+              <a:t>arb_signal.py</a:t>
+            </a:r>
+          </a:p>
+        </p:txBody>
+      </p:sp>
+      <p:sp>
+        <p:nvSpPr>
+          <p:cNvPr id="35" name="Rectangle 34"/>
+          <p:cNvSpPr/>
+          <p:nvPr/>
+        </p:nvSpPr>
+        <p:spPr>
+          <a:xfrm>
+            <a:off x="3310128" y="5609844"/>
+            <a:ext cx="8257031" cy="731520"/>
           </a:xfrm>
           <a:prstGeom prst="rect">
             <a:avLst/>
           </a:prstGeom>
           <a:solidFill>
-            <a:srgbClr val="14315A"/>
+            <a:srgbClr val="FFFFFF"/>
           </a:solidFill>
-          <a:ln>
-            <a:noFill/>
+          <a:ln w="9525">
+            <a:solidFill>
+              <a:srgbClr val="E2E8F0"/>
+            </a:solidFill>
           </a:ln>
           <a:effectLst/>
         </p:spPr>
@@ -6798,14 +8823,14 @@
       </p:sp>
       <p:sp>
         <p:nvSpPr>
-          <p:cNvPr id="31" name="TextBox 30"/>
+          <p:cNvPr id="36" name="TextBox 35"/>
           <p:cNvSpPr txBox="1"/>
           <p:nvPr/>
         </p:nvSpPr>
         <p:spPr>
           <a:xfrm>
-            <a:off x="713231" y="2633472"/>
-            <a:ext cx="2907791" cy="182880"/>
+            <a:off x="3456432" y="5765292"/>
+            <a:ext cx="8001000" cy="457200"/>
           </a:xfrm>
           <a:prstGeom prst="rect">
             <a:avLst/>
@@ -6820,26 +8845,26 @@
           <a:p>
             <a:pPr algn="l"/>
             <a:r>
-              <a:rPr sz="890" b="1">
-                <a:solidFill>
-                  <a:srgbClr val="FFFFFF"/>
-                </a:solidFill>
-              </a:rPr>
-              <a:t>Stage</a:t>
-            </a:r>
-          </a:p>
-        </p:txBody>
-      </p:sp>
-      <p:sp>
-        <p:nvSpPr>
-          <p:cNvPr id="32" name="TextBox 31"/>
+              <a:rPr sz="1019" b="0">
+                <a:solidFill>
+                  <a:srgbClr val="0F172A"/>
+                </a:solidFill>
+              </a:rPr>
+              <a:t>Fair value $27.99 vs market $24.66 = +13.5% → risk-adjusted +9.1% → ENTER, elect CASH, hedge 0.066  ·  realized +15.6%</a:t>
+            </a:r>
+          </a:p>
+        </p:txBody>
+      </p:sp>
+      <p:sp>
+        <p:nvSpPr>
+          <p:cNvPr id="37" name="TextBox 36"/>
           <p:cNvSpPr txBox="1"/>
           <p:nvPr/>
         </p:nvSpPr>
         <p:spPr>
           <a:xfrm>
-            <a:off x="3730752" y="2633472"/>
-            <a:ext cx="3502152" cy="182880"/>
+            <a:off x="11064240" y="6473952"/>
+            <a:ext cx="731520" cy="182880"/>
           </a:xfrm>
           <a:prstGeom prst="rect">
             <a:avLst/>
@@ -6852,62 +8877,652 @@
           </a:bodyPr>
           <a:lstStyle/>
           <a:p>
-            <a:pPr algn="l"/>
-            <a:r>
-              <a:rPr sz="890" b="1">
+            <a:pPr algn="r"/>
+            <a:r>
+              <a:rPr sz="780" b="0">
+                <a:solidFill>
+                  <a:srgbClr val="475569"/>
+                </a:solidFill>
+              </a:rPr>
+              <a:t>14 / 15</a:t>
+            </a:r>
+          </a:p>
+        </p:txBody>
+      </p:sp>
+    </p:spTree>
+  </p:cSld>
+  <p:clrMapOvr>
+    <a:masterClrMapping/>
+  </p:clrMapOvr>
+</p:sld>
+</file>
+
+<file path=ppt/slides/slide15.xml><?xml version="1.0" encoding="utf-8"?>
+<p:sld xmlns:a="http://schemas.openxmlformats.org/drawingml/2006/main" xmlns:r="http://schemas.openxmlformats.org/officeDocument/2006/relationships" xmlns:p="http://schemas.openxmlformats.org/presentationml/2006/main">
+  <p:cSld>
+    <p:spTree>
+      <p:nvGrpSpPr>
+        <p:cNvPr id="1" name=""/>
+        <p:cNvGrpSpPr/>
+        <p:nvPr/>
+      </p:nvGrpSpPr>
+      <p:grpSpPr>
+        <a:xfrm>
+          <a:off x="0" y="0"/>
+          <a:ext cx="0" cy="0"/>
+          <a:chOff x="0" y="0"/>
+          <a:chExt cx="0" cy="0"/>
+        </a:xfrm>
+      </p:grpSpPr>
+      <p:sp>
+        <p:nvSpPr>
+          <p:cNvPr id="3" name="Shape 1"/>
+          <p:cNvSpPr/>
+          <p:nvPr/>
+        </p:nvSpPr>
+        <p:spPr>
+          <a:xfrm>
+            <a:off x="0" y="0"/>
+            <a:ext cx="12191695" cy="164592"/>
+          </a:xfrm>
+          <a:prstGeom prst="rect">
+            <a:avLst/>
+          </a:prstGeom>
+          <a:solidFill>
+            <a:srgbClr val="14315A"/>
+          </a:solidFill>
+          <a:ln w="12700">
+            <a:solidFill>
+              <a:srgbClr val="14315A"/>
+            </a:solidFill>
+            <a:prstDash val="solid"/>
+          </a:ln>
+        </p:spPr>
+        <p:txBody>
+          <a:bodyPr/>
+          <a:lstStyle/>
+          <a:p>
+            <a:endParaRPr lang="en-US"/>
+          </a:p>
+        </p:txBody>
+      </p:sp>
+      <p:sp>
+        <p:nvSpPr>
+          <p:cNvPr id="4" name="Text 2"/>
+          <p:cNvSpPr/>
+          <p:nvPr/>
+        </p:nvSpPr>
+        <p:spPr>
+          <a:xfrm>
+            <a:off x="502920" y="365760"/>
+            <a:ext cx="11155680" cy="502920"/>
+          </a:xfrm>
+          <a:prstGeom prst="rect">
+            <a:avLst/>
+          </a:prstGeom>
+          <a:noFill/>
+        </p:spPr>
+        <p:txBody>
+          <a:bodyPr wrap="square" lIns="0" tIns="0" rIns="0" bIns="0" rtlCol="0" anchor="ctr"/>
+          <a:lstStyle/>
+          <a:p>
+            <a:pPr marL="0" indent="0">
+              <a:buNone/>
+            </a:pPr>
+            <a:r>
+              <a:rPr lang="en-US" sz="2800" b="1" dirty="0">
+                <a:solidFill>
+                  <a:srgbClr val="14315A"/>
+                </a:solidFill>
+              </a:rPr>
+              <a:t>Mentor discussion and next implementation steps</a:t>
+            </a:r>
+            <a:endParaRPr lang="en-US" sz="2800" dirty="0"/>
+          </a:p>
+        </p:txBody>
+      </p:sp>
+      <p:sp>
+        <p:nvSpPr>
+          <p:cNvPr id="6" name="Text 4"/>
+          <p:cNvSpPr/>
+          <p:nvPr/>
+        </p:nvSpPr>
+        <p:spPr>
+          <a:xfrm>
+            <a:off x="502920" y="6473952"/>
+            <a:ext cx="6858000" cy="182880"/>
+          </a:xfrm>
+          <a:prstGeom prst="rect">
+            <a:avLst/>
+          </a:prstGeom>
+          <a:noFill/>
+        </p:spPr>
+        <p:txBody>
+          <a:bodyPr wrap="square" lIns="0" tIns="0" rIns="0" bIns="0" rtlCol="0" anchor="ctr"/>
+          <a:lstStyle/>
+          <a:p>
+            <a:pPr marL="0" indent="0">
+              <a:buNone/>
+            </a:pPr>
+            <a:r>
+              <a:rPr lang="en-US" sz="780" dirty="0">
+                <a:solidFill>
+                  <a:srgbClr val="475569"/>
+                </a:solidFill>
+              </a:rPr>
+              <a:t>JPM Project 3ii · Weekly workflow validation</a:t>
+            </a:r>
+            <a:endParaRPr lang="en-US" sz="780" dirty="0"/>
+          </a:p>
+        </p:txBody>
+      </p:sp>
+      <p:sp>
+        <p:nvSpPr>
+          <p:cNvPr id="7" name="Text 5"/>
+          <p:cNvSpPr/>
+          <p:nvPr/>
+        </p:nvSpPr>
+        <p:spPr>
+          <a:xfrm>
+            <a:off x="11064240" y="6473952"/>
+            <a:ext cx="731520" cy="182880"/>
+          </a:xfrm>
+          <a:prstGeom prst="rect">
+            <a:avLst/>
+          </a:prstGeom>
+          <a:noFill/>
+        </p:spPr>
+        <p:txBody>
+          <a:bodyPr wrap="square" lIns="0" tIns="0" rIns="0" bIns="0" rtlCol="0" anchor="ctr"/>
+          <a:lstStyle/>
+          <a:p>
+            <a:pPr marL="0" indent="0" algn="r">
+              <a:buNone/>
+            </a:pPr>
+            <a:r>
+              <a:rPr lang="en-US" sz="780" dirty="0">
+                <a:solidFill>
+                  <a:srgbClr val="475569"/>
+                </a:solidFill>
+              </a:rPr>
+              <a:t>15 / 15</a:t>
+            </a:r>
+            <a:endParaRPr lang="en-US" sz="780" dirty="0"/>
+          </a:p>
+        </p:txBody>
+      </p:sp>
+      <p:sp>
+        <p:nvSpPr>
+          <p:cNvPr id="9" name="Text 7"/>
+          <p:cNvSpPr/>
+          <p:nvPr/>
+        </p:nvSpPr>
+        <p:spPr>
+          <a:xfrm>
+            <a:off x="896112" y="1389888"/>
+            <a:ext cx="2803550" cy="146304"/>
+          </a:xfrm>
+          <a:prstGeom prst="rect">
+            <a:avLst/>
+          </a:prstGeom>
+          <a:noFill/>
+        </p:spPr>
+        <p:txBody>
+          <a:bodyPr wrap="square" lIns="0" tIns="0" rIns="0" bIns="0" rtlCol="0" anchor="ctr">
+            <a:normAutofit/>
+          </a:bodyPr>
+          <a:lstStyle/>
+          <a:p>
+            <a:pPr marL="0" indent="0">
+              <a:buNone/>
+            </a:pPr>
+            <a:r>
+              <a:rPr lang="en-US" sz="890" b="1" dirty="0">
                 <a:solidFill>
                   <a:srgbClr val="FFFFFF"/>
                 </a:solidFill>
               </a:rPr>
-              <a:t>Primary output</a:t>
-            </a:r>
-          </a:p>
-        </p:txBody>
-      </p:sp>
-      <p:sp>
-        <p:nvSpPr>
-          <p:cNvPr id="33" name="TextBox 32"/>
+              <a:t>Next step</a:t>
+            </a:r>
+            <a:endParaRPr lang="en-US" sz="890" dirty="0"/>
+          </a:p>
+        </p:txBody>
+      </p:sp>
+      <p:sp>
+        <p:nvSpPr>
+          <p:cNvPr id="10" name="Text 8"/>
+          <p:cNvSpPr/>
+          <p:nvPr/>
+        </p:nvSpPr>
+        <p:spPr>
+          <a:xfrm>
+            <a:off x="3827678" y="1389888"/>
+            <a:ext cx="7410298" cy="146304"/>
+          </a:xfrm>
+          <a:prstGeom prst="rect">
+            <a:avLst/>
+          </a:prstGeom>
+          <a:noFill/>
+        </p:spPr>
+        <p:txBody>
+          <a:bodyPr wrap="square" lIns="0" tIns="0" rIns="0" bIns="0" rtlCol="0" anchor="ctr">
+            <a:normAutofit/>
+          </a:bodyPr>
+          <a:lstStyle/>
+          <a:p>
+            <a:pPr marL="0" indent="0">
+              <a:buNone/>
+            </a:pPr>
+            <a:r>
+              <a:rPr lang="en-US" sz="890" b="1" dirty="0">
+                <a:solidFill>
+                  <a:srgbClr val="FFFFFF"/>
+                </a:solidFill>
+              </a:rPr>
+              <a:t>Implementation detail</a:t>
+            </a:r>
+            <a:endParaRPr lang="en-US" sz="890" dirty="0"/>
+          </a:p>
+        </p:txBody>
+      </p:sp>
+      <p:sp>
+        <p:nvSpPr>
+          <p:cNvPr id="11" name="TextBox 10"/>
           <p:cNvSpPr txBox="1"/>
           <p:nvPr/>
         </p:nvSpPr>
         <p:spPr>
           <a:xfrm>
-            <a:off x="7342632" y="2633472"/>
-            <a:ext cx="4187952" cy="182880"/>
-          </a:xfrm>
-          <a:prstGeom prst="rect">
-            <a:avLst/>
-          </a:prstGeom>
-          <a:noFill/>
-        </p:spPr>
-        <p:txBody>
-          <a:bodyPr wrap="square" lIns="0" rIns="0" tIns="0" bIns="0">
+            <a:off x="914400" y="1828800"/>
+            <a:ext cx="2743200" cy="822960"/>
+          </a:xfrm>
+          <a:prstGeom prst="rect">
+            <a:avLst/>
+          </a:prstGeom>
+          <a:noFill/>
+        </p:spPr>
+        <p:txBody>
+          <a:bodyPr wrap="square">
             <a:spAutoFit/>
           </a:bodyPr>
           <a:lstStyle/>
           <a:p>
-            <a:pPr algn="l"/>
-            <a:r>
-              <a:rPr sz="890" b="1">
-                <a:solidFill>
-                  <a:srgbClr val="FFFFFF"/>
-                </a:solidFill>
-              </a:rPr>
-              <a:t>Current state</a:t>
-            </a:r>
-          </a:p>
-        </p:txBody>
-      </p:sp>
-      <p:sp>
-        <p:nvSpPr>
-          <p:cNvPr id="34" name="Rectangle 33"/>
-          <p:cNvSpPr/>
-          <p:nvPr/>
-        </p:nvSpPr>
-        <p:spPr>
-          <a:xfrm>
-            <a:off x="640080" y="2898648"/>
-            <a:ext cx="10927080" cy="365760"/>
+            <a:r>
+              <a:rPr sz="1000" b="1">
+                <a:solidFill>
+                  <a:srgbClr val="44546A"/>
+                </a:solidFill>
+                <a:latin typeface="Aptos"/>
+              </a:rPr>
+              <a:t>Complete full-universe extraction</a:t>
+            </a:r>
+          </a:p>
+        </p:txBody>
+      </p:sp>
+      <p:sp>
+        <p:nvSpPr>
+          <p:cNvPr id="12" name="TextBox 11"/>
+          <p:cNvSpPr txBox="1"/>
+          <p:nvPr/>
+        </p:nvSpPr>
+        <p:spPr>
+          <a:xfrm>
+            <a:off x="3840480" y="1828800"/>
+            <a:ext cx="7315200" cy="822960"/>
+          </a:xfrm>
+          <a:prstGeom prst="rect">
+            <a:avLst/>
+          </a:prstGeom>
+          <a:noFill/>
+        </p:spPr>
+        <p:txBody>
+          <a:bodyPr wrap="square">
+            <a:spAutoFit/>
+          </a:bodyPr>
+          <a:lstStyle/>
+          <a:p>
+            <a:r>
+              <a:rPr sz="1000">
+                <a:solidFill>
+                  <a:srgbClr val="222222"/>
+                </a:solidFill>
+                <a:latin typeface="Aptos"/>
+              </a:rPr>
+              <a:t>Batch Claude run over the ~283 deals under a fixed cost cap; measure the realized-label capture rate</a:t>
+            </a:r>
+          </a:p>
+        </p:txBody>
+      </p:sp>
+      <p:sp>
+        <p:nvSpPr>
+          <p:cNvPr id="13" name="TextBox 12"/>
+          <p:cNvSpPr txBox="1"/>
+          <p:nvPr/>
+        </p:nvSpPr>
+        <p:spPr>
+          <a:xfrm>
+            <a:off x="914400" y="2697480"/>
+            <a:ext cx="2743200" cy="822960"/>
+          </a:xfrm>
+          <a:prstGeom prst="rect">
+            <a:avLst/>
+          </a:prstGeom>
+          <a:noFill/>
+        </p:spPr>
+        <p:txBody>
+          <a:bodyPr wrap="square">
+            <a:spAutoFit/>
+          </a:bodyPr>
+          <a:lstStyle/>
+          <a:p>
+            <a:r>
+              <a:rPr sz="1000" b="1">
+                <a:solidFill>
+                  <a:srgbClr val="44546A"/>
+                </a:solidFill>
+                <a:latin typeface="Aptos"/>
+              </a:rPr>
+              <a:t>Build the modeling panel</a:t>
+            </a:r>
+          </a:p>
+        </p:txBody>
+      </p:sp>
+      <p:sp>
+        <p:nvSpPr>
+          <p:cNvPr id="14" name="TextBox 13"/>
+          <p:cNvSpPr txBox="1"/>
+          <p:nvPr/>
+        </p:nvSpPr>
+        <p:spPr>
+          <a:xfrm>
+            <a:off x="3840480" y="2697480"/>
+            <a:ext cx="7315200" cy="822960"/>
+          </a:xfrm>
+          <a:prstGeom prst="rect">
+            <a:avLst/>
+          </a:prstGeom>
+          <a:noFill/>
+        </p:spPr>
+        <p:txBody>
+          <a:bodyPr wrap="square">
+            <a:spAutoFit/>
+          </a:bodyPr>
+          <a:lstStyle/>
+          <a:p>
+            <a:r>
+              <a:rPr sz="1000">
+                <a:solidFill>
+                  <a:srgbClr val="222222"/>
+                </a:solidFill>
+                <a:latin typeface="Aptos"/>
+              </a:rPr>
+              <a:t>Join WRDS market + ETF/passive ownership onto each event; assemble one row per deal</a:t>
+            </a:r>
+          </a:p>
+        </p:txBody>
+      </p:sp>
+      <p:sp>
+        <p:nvSpPr>
+          <p:cNvPr id="15" name="TextBox 14"/>
+          <p:cNvSpPr txBox="1"/>
+          <p:nvPr/>
+        </p:nvSpPr>
+        <p:spPr>
+          <a:xfrm>
+            <a:off x="914400" y="3566160"/>
+            <a:ext cx="2743200" cy="822960"/>
+          </a:xfrm>
+          <a:prstGeom prst="rect">
+            <a:avLst/>
+          </a:prstGeom>
+          <a:noFill/>
+        </p:spPr>
+        <p:txBody>
+          <a:bodyPr wrap="square">
+            <a:spAutoFit/>
+          </a:bodyPr>
+          <a:lstStyle/>
+          <a:p>
+            <a:r>
+              <a:rPr sz="1000" b="1">
+                <a:solidFill>
+                  <a:srgbClr val="44546A"/>
+                </a:solidFill>
+                <a:latin typeface="Aptos"/>
+              </a:rPr>
+              <a:t>Fit p_active(spread)</a:t>
+            </a:r>
+          </a:p>
+        </p:txBody>
+      </p:sp>
+      <p:sp>
+        <p:nvSpPr>
+          <p:cNvPr id="16" name="TextBox 15"/>
+          <p:cNvSpPr txBox="1"/>
+          <p:nvPr/>
+        </p:nvSpPr>
+        <p:spPr>
+          <a:xfrm>
+            <a:off x="3840480" y="3566160"/>
+            <a:ext cx="7315200" cy="822960"/>
+          </a:xfrm>
+          <a:prstGeom prst="rect">
+            <a:avLst/>
+          </a:prstGeom>
+          <a:noFill/>
+        </p:spPr>
+        <p:txBody>
+          <a:bodyPr wrap="square">
+            <a:spAutoFit/>
+          </a:bodyPr>
+          <a:lstStyle/>
+          <a:p>
+            <a:r>
+              <a:rPr sz="1000">
+                <a:solidFill>
+                  <a:srgbClr val="222222"/>
+                </a:solidFill>
+                <a:latin typeface="Aptos"/>
+              </a:rPr>
+              <a:t>Calibrate active-investor cash-election propensity from the realized-demand labels vs. the deadline spread</a:t>
+            </a:r>
+          </a:p>
+        </p:txBody>
+      </p:sp>
+      <p:sp>
+        <p:nvSpPr>
+          <p:cNvPr id="17" name="TextBox 16"/>
+          <p:cNvSpPr txBox="1"/>
+          <p:nvPr/>
+        </p:nvSpPr>
+        <p:spPr>
+          <a:xfrm>
+            <a:off x="914400" y="4434840"/>
+            <a:ext cx="2743200" cy="822960"/>
+          </a:xfrm>
+          <a:prstGeom prst="rect">
+            <a:avLst/>
+          </a:prstGeom>
+          <a:noFill/>
+        </p:spPr>
+        <p:txBody>
+          <a:bodyPr wrap="square">
+            <a:spAutoFit/>
+          </a:bodyPr>
+          <a:lstStyle/>
+          <a:p>
+            <a:r>
+              <a:rPr sz="1000" b="1">
+                <a:solidFill>
+                  <a:srgbClr val="44546A"/>
+                </a:solidFill>
+                <a:latin typeface="Aptos"/>
+              </a:rPr>
+              <a:t>Choose deliverable framing</a:t>
+            </a:r>
+          </a:p>
+        </p:txBody>
+      </p:sp>
+      <p:sp>
+        <p:nvSpPr>
+          <p:cNvPr id="18" name="TextBox 17"/>
+          <p:cNvSpPr txBox="1"/>
+          <p:nvPr/>
+        </p:nvSpPr>
+        <p:spPr>
+          <a:xfrm>
+            <a:off x="3840480" y="4434840"/>
+            <a:ext cx="7315200" cy="822960"/>
+          </a:xfrm>
+          <a:prstGeom prst="rect">
+            <a:avLst/>
+          </a:prstGeom>
+          <a:noFill/>
+        </p:spPr>
+        <p:txBody>
+          <a:bodyPr wrap="square">
+            <a:spAutoFit/>
+          </a:bodyPr>
+          <a:lstStyle/>
+          <a:p>
+            <a:r>
+              <a:rPr sz="1000">
+                <a:solidFill>
+                  <a:srgbClr val="222222"/>
+                </a:solidFill>
+                <a:latin typeface="Aptos"/>
+              </a:rPr>
+              <a:t>Large-N regression if capture is high; structural framework + case studies if issuer disclosure limits N</a:t>
+            </a:r>
+          </a:p>
+        </p:txBody>
+      </p:sp>
+      <p:sp>
+        <p:nvSpPr>
+          <p:cNvPr id="19" name="TextBox 18"/>
+          <p:cNvSpPr txBox="1"/>
+          <p:nvPr/>
+        </p:nvSpPr>
+        <p:spPr>
+          <a:xfrm>
+            <a:off x="914400" y="5303520"/>
+            <a:ext cx="2743200" cy="822960"/>
+          </a:xfrm>
+          <a:prstGeom prst="rect">
+            <a:avLst/>
+          </a:prstGeom>
+          <a:noFill/>
+        </p:spPr>
+        <p:txBody>
+          <a:bodyPr wrap="square">
+            <a:spAutoFit/>
+          </a:bodyPr>
+          <a:lstStyle/>
+          <a:p>
+            <a:r>
+              <a:rPr sz="1000" b="1">
+                <a:solidFill>
+                  <a:srgbClr val="44546A"/>
+                </a:solidFill>
+                <a:latin typeface="Aptos"/>
+              </a:rPr>
+              <a:t>Mentor discussion</a:t>
+            </a:r>
+          </a:p>
+        </p:txBody>
+      </p:sp>
+      <p:sp>
+        <p:nvSpPr>
+          <p:cNvPr id="20" name="TextBox 19"/>
+          <p:cNvSpPr txBox="1"/>
+          <p:nvPr/>
+        </p:nvSpPr>
+        <p:spPr>
+          <a:xfrm>
+            <a:off x="3840480" y="5303520"/>
+            <a:ext cx="7315200" cy="400110"/>
+          </a:xfrm>
+          <a:prstGeom prst="rect">
+            <a:avLst/>
+          </a:prstGeom>
+          <a:noFill/>
+        </p:spPr>
+        <p:txBody>
+          <a:bodyPr wrap="square">
+            <a:spAutoFit/>
+          </a:bodyPr>
+          <a:lstStyle/>
+          <a:p>
+            <a:r>
+              <a:rPr sz="1000" dirty="0">
+                <a:solidFill>
+                  <a:srgbClr val="222222"/>
+                </a:solidFill>
+                <a:latin typeface="Aptos"/>
+              </a:rPr>
+              <a:t>Is ~80% label capture (disclosure-bounded) sufficient, or should we prioritize the structural-model route?</a:t>
+            </a:r>
+            <a:r>
+              <a:rPr lang="en-US" sz="1000" dirty="0">
+                <a:solidFill>
+                  <a:srgbClr val="222222"/>
+                </a:solidFill>
+                <a:latin typeface="Aptos"/>
+              </a:rPr>
+              <a:t> </a:t>
+            </a:r>
+            <a:r>
+              <a:rPr lang="en-US" sz="1000" dirty="0">
+                <a:solidFill>
+                  <a:srgbClr val="222222"/>
+                </a:solidFill>
+                <a:highlight>
+                  <a:srgbClr val="FFFF00"/>
+                </a:highlight>
+                <a:latin typeface="Aptos"/>
+              </a:rPr>
+              <a:t>We are considering exploring Canda transactions, but their API may potentially be more difficult to work with.</a:t>
+            </a:r>
+            <a:endParaRPr sz="1000" dirty="0">
+              <a:solidFill>
+                <a:srgbClr val="222222"/>
+              </a:solidFill>
+              <a:highlight>
+                <a:srgbClr val="FFFF00"/>
+              </a:highlight>
+              <a:latin typeface="Aptos"/>
+            </a:endParaRPr>
+          </a:p>
+        </p:txBody>
+      </p:sp>
+    </p:spTree>
+  </p:cSld>
+  <p:clrMapOvr>
+    <a:masterClrMapping/>
+  </p:clrMapOvr>
+</p:sld>
+</file>
+
+<file path=ppt/slides/slide16.xml><?xml version="1.0" encoding="utf-8"?>
+<p:sld xmlns:a="http://schemas.openxmlformats.org/drawingml/2006/main" xmlns:p="http://schemas.openxmlformats.org/presentationml/2006/main" xmlns:r="http://schemas.openxmlformats.org/officeDocument/2006/relationships">
+  <p:cSld>
+    <p:spTree>
+      <p:nvGrpSpPr>
+        <p:cNvPr id="1" name=""/>
+        <p:cNvGrpSpPr/>
+        <p:nvPr/>
+      </p:nvGrpSpPr>
+      <p:grpSpPr/>
+      <p:sp>
+        <p:nvSpPr>
+          <p:cNvPr id="2" name="Rectangle 1"/>
+          <p:cNvSpPr/>
+          <p:nvPr/>
+        </p:nvSpPr>
+        <p:spPr>
+          <a:xfrm>
+            <a:off x="0" y="0"/>
+            <a:ext cx="12188952" cy="6858000"/>
           </a:xfrm>
           <a:prstGeom prst="rect">
             <a:avLst/>
@@ -6944,122 +9559,20 @@
       </p:sp>
       <p:sp>
         <p:nvSpPr>
-          <p:cNvPr id="35" name="TextBox 34"/>
-          <p:cNvSpPr txBox="1"/>
-          <p:nvPr/>
-        </p:nvSpPr>
-        <p:spPr>
-          <a:xfrm>
-            <a:off x="713231" y="2999232"/>
-            <a:ext cx="2907791" cy="182880"/>
-          </a:xfrm>
-          <a:prstGeom prst="rect">
-            <a:avLst/>
-          </a:prstGeom>
-          <a:noFill/>
-        </p:spPr>
-        <p:txBody>
-          <a:bodyPr wrap="square" lIns="0" rIns="0" tIns="0" bIns="0">
-            <a:spAutoFit/>
-          </a:bodyPr>
-          <a:lstStyle/>
-          <a:p>
-            <a:pPr algn="l"/>
-            <a:r>
-              <a:rPr sz="880" b="0">
-                <a:solidFill>
-                  <a:srgbClr val="0F172A"/>
-                </a:solidFill>
-              </a:rPr>
-              <a:t>0–1  Universe + identifiers</a:t>
-            </a:r>
-          </a:p>
-        </p:txBody>
-      </p:sp>
-      <p:sp>
-        <p:nvSpPr>
-          <p:cNvPr id="36" name="TextBox 35"/>
-          <p:cNvSpPr txBox="1"/>
-          <p:nvPr/>
-        </p:nvSpPr>
-        <p:spPr>
-          <a:xfrm>
-            <a:off x="3730752" y="2999232"/>
-            <a:ext cx="3502152" cy="182880"/>
-          </a:xfrm>
-          <a:prstGeom prst="rect">
-            <a:avLst/>
-          </a:prstGeom>
-          <a:noFill/>
-        </p:spPr>
-        <p:txBody>
-          <a:bodyPr wrap="square" lIns="0" rIns="0" tIns="0" bIns="0">
-            <a:spAutoFit/>
-          </a:bodyPr>
-          <a:lstStyle/>
-          <a:p>
-            <a:pPr algn="l"/>
-            <a:r>
-              <a:rPr sz="880" b="0">
-                <a:solidFill>
-                  <a:srgbClr val="0F172A"/>
-                </a:solidFill>
-              </a:rPr>
-              <a:t>US_election_deals_for_analysis.csv (317)</a:t>
-            </a:r>
-          </a:p>
-        </p:txBody>
-      </p:sp>
-      <p:sp>
-        <p:nvSpPr>
-          <p:cNvPr id="37" name="TextBox 36"/>
-          <p:cNvSpPr txBox="1"/>
-          <p:nvPr/>
-        </p:nvSpPr>
-        <p:spPr>
-          <a:xfrm>
-            <a:off x="7342632" y="2999232"/>
-            <a:ext cx="4187952" cy="182880"/>
-          </a:xfrm>
-          <a:prstGeom prst="rect">
-            <a:avLst/>
-          </a:prstGeom>
-          <a:noFill/>
-        </p:spPr>
-        <p:txBody>
-          <a:bodyPr wrap="square" lIns="0" rIns="0" tIns="0" bIns="0">
-            <a:spAutoFit/>
-          </a:bodyPr>
-          <a:lstStyle/>
-          <a:p>
-            <a:pPr algn="l"/>
-            <a:r>
-              <a:rPr sz="880" b="0">
-                <a:solidFill>
-                  <a:srgbClr val="0F172A"/>
-                </a:solidFill>
-              </a:rPr>
-              <a:t>CIK + acquirer-PERMNO overrides for delisted/renamed</a:t>
-            </a:r>
-          </a:p>
-        </p:txBody>
-      </p:sp>
-      <p:sp>
-        <p:nvSpPr>
-          <p:cNvPr id="38" name="Rectangle 37"/>
-          <p:cNvSpPr/>
-          <p:nvPr/>
-        </p:nvSpPr>
-        <p:spPr>
-          <a:xfrm>
-            <a:off x="640080" y="3264408"/>
-            <a:ext cx="10927080" cy="365760"/>
+          <p:cNvPr id="3" name="Rectangle 2"/>
+          <p:cNvSpPr/>
+          <p:nvPr/>
+        </p:nvSpPr>
+        <p:spPr>
+          <a:xfrm>
+            <a:off x="0" y="0"/>
+            <a:ext cx="12188952" cy="164592"/>
           </a:xfrm>
           <a:prstGeom prst="rect">
             <a:avLst/>
           </a:prstGeom>
           <a:solidFill>
-            <a:srgbClr val="F7F9FC"/>
+            <a:srgbClr val="14315A"/>
           </a:solidFill>
           <a:ln>
             <a:noFill/>
@@ -7090,14 +9603,14 @@
       </p:sp>
       <p:sp>
         <p:nvSpPr>
-          <p:cNvPr id="39" name="TextBox 38"/>
+          <p:cNvPr id="4" name="TextBox 3"/>
           <p:cNvSpPr txBox="1"/>
           <p:nvPr/>
         </p:nvSpPr>
         <p:spPr>
           <a:xfrm>
-            <a:off x="713231" y="3364991"/>
-            <a:ext cx="2907791" cy="182880"/>
+            <a:off x="502920" y="365760"/>
+            <a:ext cx="11155680" cy="502920"/>
           </a:xfrm>
           <a:prstGeom prst="rect">
             <a:avLst/>
@@ -7112,26 +9625,26 @@
           <a:p>
             <a:pPr algn="l"/>
             <a:r>
-              <a:rPr sz="880" b="0">
-                <a:solidFill>
-                  <a:srgbClr val="0F172A"/>
-                </a:solidFill>
-              </a:rPr>
-              <a:t>2  SEC + Claude extraction</a:t>
-            </a:r>
-          </a:p>
-        </p:txBody>
-      </p:sp>
-      <p:sp>
-        <p:nvSpPr>
-          <p:cNvPr id="40" name="TextBox 39"/>
+              <a:rPr sz="2800" b="1">
+                <a:solidFill>
+                  <a:srgbClr val="14315A"/>
+                </a:solidFill>
+              </a:rPr>
+              <a:t>From 2,068 raw deals to 73 usable labels</a:t>
+            </a:r>
+          </a:p>
+        </p:txBody>
+      </p:sp>
+      <p:sp>
+        <p:nvSpPr>
+          <p:cNvPr id="5" name="TextBox 4"/>
           <p:cNvSpPr txBox="1"/>
           <p:nvPr/>
         </p:nvSpPr>
         <p:spPr>
           <a:xfrm>
-            <a:off x="3730752" y="3364991"/>
-            <a:ext cx="3502152" cy="182880"/>
+            <a:off x="512064" y="923544"/>
+            <a:ext cx="10881360" cy="329184"/>
           </a:xfrm>
           <a:prstGeom prst="rect">
             <a:avLst/>
@@ -7146,26 +9659,26 @@
           <a:p>
             <a:pPr algn="l"/>
             <a:r>
-              <a:rPr sz="880" b="0">
-                <a:solidFill>
-                  <a:srgbClr val="0F172A"/>
-                </a:solidFill>
-              </a:rPr>
-              <a:t>ma_edgar_full/llm_field_extractions.csv</a:t>
-            </a:r>
-          </a:p>
-        </p:txBody>
-      </p:sp>
-      <p:sp>
-        <p:nvSpPr>
-          <p:cNvPr id="41" name="TextBox 40"/>
+              <a:rPr sz="1350" b="0">
+                <a:solidFill>
+                  <a:srgbClr val="475569"/>
+                </a:solidFill>
+              </a:rPr>
+              <a:t>Most of the funnel is structural — deals that were never eligible, not pipeline losses</a:t>
+            </a:r>
+          </a:p>
+        </p:txBody>
+      </p:sp>
+      <p:sp>
+        <p:nvSpPr>
+          <p:cNvPr id="6" name="TextBox 5"/>
           <p:cNvSpPr txBox="1"/>
           <p:nvPr/>
         </p:nvSpPr>
         <p:spPr>
           <a:xfrm>
-            <a:off x="7342632" y="3364991"/>
-            <a:ext cx="4187952" cy="182880"/>
+            <a:off x="502920" y="6473952"/>
+            <a:ext cx="6858000" cy="182880"/>
           </a:xfrm>
           <a:prstGeom prst="rect">
             <a:avLst/>
@@ -7180,32 +9693,32 @@
           <a:p>
             <a:pPr algn="l"/>
             <a:r>
-              <a:rPr sz="880" b="0">
-                <a:solidFill>
-                  <a:srgbClr val="0F172A"/>
-                </a:solidFill>
-              </a:rPr>
-              <a:t>303 deals, 17 canonical fields each</a:t>
-            </a:r>
-          </a:p>
-        </p:txBody>
-      </p:sp>
-      <p:sp>
-        <p:nvSpPr>
-          <p:cNvPr id="42" name="Rectangle 41"/>
-          <p:cNvSpPr/>
-          <p:nvPr/>
-        </p:nvSpPr>
-        <p:spPr>
-          <a:xfrm>
-            <a:off x="640080" y="3630168"/>
-            <a:ext cx="10927080" cy="365760"/>
+              <a:rPr sz="780" b="0">
+                <a:solidFill>
+                  <a:srgbClr val="475569"/>
+                </a:solidFill>
+              </a:rPr>
+              <a:t>JPM Project 3ii · Weekly workflow validation</a:t>
+            </a:r>
+          </a:p>
+        </p:txBody>
+      </p:sp>
+      <p:sp>
+        <p:nvSpPr>
+          <p:cNvPr id="7" name="Rectangle 6"/>
+          <p:cNvSpPr/>
+          <p:nvPr/>
+        </p:nvSpPr>
+        <p:spPr>
+          <a:xfrm>
+            <a:off x="640080" y="1847088"/>
+            <a:ext cx="10927080" cy="384048"/>
           </a:xfrm>
           <a:prstGeom prst="rect">
             <a:avLst/>
           </a:prstGeom>
           <a:solidFill>
-            <a:srgbClr val="FFFFFF"/>
+            <a:srgbClr val="14315A"/>
           </a:solidFill>
           <a:ln>
             <a:noFill/>
@@ -7236,14 +9749,14 @@
       </p:sp>
       <p:sp>
         <p:nvSpPr>
-          <p:cNvPr id="43" name="TextBox 42"/>
+          <p:cNvPr id="8" name="TextBox 7"/>
           <p:cNvSpPr txBox="1"/>
           <p:nvPr/>
         </p:nvSpPr>
         <p:spPr>
           <a:xfrm>
-            <a:off x="713231" y="3730752"/>
-            <a:ext cx="2907791" cy="182880"/>
+            <a:off x="713231" y="1965960"/>
+            <a:ext cx="3822191" cy="182880"/>
           </a:xfrm>
           <a:prstGeom prst="rect">
             <a:avLst/>
@@ -7258,26 +9771,26 @@
           <a:p>
             <a:pPr algn="l"/>
             <a:r>
-              <a:rPr sz="880" b="0">
-                <a:solidFill>
-                  <a:srgbClr val="0F172A"/>
-                </a:solidFill>
-              </a:rPr>
-              <a:t>3  WRDS market + ownership</a:t>
-            </a:r>
-          </a:p>
-        </p:txBody>
-      </p:sp>
-      <p:sp>
-        <p:nvSpPr>
-          <p:cNvPr id="44" name="TextBox 43"/>
+              <a:rPr sz="890" b="1">
+                <a:solidFill>
+                  <a:srgbClr val="FFFFFF"/>
+                </a:solidFill>
+              </a:rPr>
+              <a:t>Filter</a:t>
+            </a:r>
+          </a:p>
+        </p:txBody>
+      </p:sp>
+      <p:sp>
+        <p:nvSpPr>
+          <p:cNvPr id="9" name="TextBox 8"/>
           <p:cNvSpPr txBox="1"/>
           <p:nvPr/>
         </p:nvSpPr>
         <p:spPr>
           <a:xfrm>
-            <a:off x="3730752" y="3730752"/>
-            <a:ext cx="3502152" cy="182880"/>
+            <a:off x="4645152" y="1965960"/>
+            <a:ext cx="1078992" cy="182880"/>
           </a:xfrm>
           <a:prstGeom prst="rect">
             <a:avLst/>
@@ -7292,26 +9805,26 @@
           <a:p>
             <a:pPr algn="l"/>
             <a:r>
-              <a:rPr sz="880" b="0">
-                <a:solidFill>
-                  <a:srgbClr val="0F172A"/>
-                </a:solidFill>
-              </a:rPr>
-              <a:t>wrds_market_daily.csv · ownership_mix</a:t>
-            </a:r>
-          </a:p>
-        </p:txBody>
-      </p:sp>
-      <p:sp>
-        <p:nvSpPr>
-          <p:cNvPr id="45" name="TextBox 44"/>
+              <a:rPr sz="890" b="1">
+                <a:solidFill>
+                  <a:srgbClr val="FFFFFF"/>
+                </a:solidFill>
+              </a:rPr>
+              <a:t>Remaining</a:t>
+            </a:r>
+          </a:p>
+        </p:txBody>
+      </p:sp>
+      <p:sp>
+        <p:nvSpPr>
+          <p:cNvPr id="10" name="TextBox 9"/>
           <p:cNvSpPr txBox="1"/>
           <p:nvPr/>
         </p:nvSpPr>
         <p:spPr>
           <a:xfrm>
-            <a:off x="7342632" y="3730752"/>
-            <a:ext cx="4187952" cy="182880"/>
+            <a:off x="5833872" y="1965960"/>
+            <a:ext cx="1078992" cy="182880"/>
           </a:xfrm>
           <a:prstGeom prst="rect">
             <a:avLst/>
@@ -7326,32 +9839,66 @@
           <a:p>
             <a:pPr algn="l"/>
             <a:r>
-              <a:rPr sz="880" b="0">
-                <a:solidFill>
-                  <a:srgbClr val="0F172A"/>
-                </a:solidFill>
-              </a:rPr>
-              <a:t>Target + acquirer prices, passive block</a:t>
-            </a:r>
-          </a:p>
-        </p:txBody>
-      </p:sp>
-      <p:sp>
-        <p:nvSpPr>
-          <p:cNvPr id="46" name="Rectangle 45"/>
-          <p:cNvSpPr/>
-          <p:nvPr/>
-        </p:nvSpPr>
-        <p:spPr>
-          <a:xfrm>
-            <a:off x="640080" y="3995928"/>
-            <a:ext cx="10927080" cy="365760"/>
+              <a:rPr sz="890" b="1">
+                <a:solidFill>
+                  <a:srgbClr val="FFFFFF"/>
+                </a:solidFill>
+              </a:rPr>
+              <a:t>Dropped</a:t>
+            </a:r>
+          </a:p>
+        </p:txBody>
+      </p:sp>
+      <p:sp>
+        <p:nvSpPr>
+          <p:cNvPr id="11" name="TextBox 10"/>
+          <p:cNvSpPr txBox="1"/>
+          <p:nvPr/>
+        </p:nvSpPr>
+        <p:spPr>
+          <a:xfrm>
+            <a:off x="7022592" y="1965960"/>
+            <a:ext cx="4507992" cy="182880"/>
+          </a:xfrm>
+          <a:prstGeom prst="rect">
+            <a:avLst/>
+          </a:prstGeom>
+          <a:noFill/>
+        </p:spPr>
+        <p:txBody>
+          <a:bodyPr wrap="square" lIns="0" rIns="0" tIns="0" bIns="0">
+            <a:spAutoFit/>
+          </a:bodyPr>
+          <a:lstStyle/>
+          <a:p>
+            <a:pPr algn="l"/>
+            <a:r>
+              <a:rPr sz="890" b="1">
+                <a:solidFill>
+                  <a:srgbClr val="FFFFFF"/>
+                </a:solidFill>
+              </a:rPr>
+              <a:t>Why it drops</a:t>
+            </a:r>
+          </a:p>
+        </p:txBody>
+      </p:sp>
+      <p:sp>
+        <p:nvSpPr>
+          <p:cNvPr id="12" name="Rectangle 11"/>
+          <p:cNvSpPr/>
+          <p:nvPr/>
+        </p:nvSpPr>
+        <p:spPr>
+          <a:xfrm>
+            <a:off x="640080" y="2231136"/>
+            <a:ext cx="10927080" cy="402336"/>
           </a:xfrm>
           <a:prstGeom prst="rect">
             <a:avLst/>
           </a:prstGeom>
           <a:solidFill>
-            <a:srgbClr val="F7F9FC"/>
+            <a:srgbClr val="FFFFFF"/>
           </a:solidFill>
           <a:ln>
             <a:noFill/>
@@ -7382,14 +9929,14 @@
       </p:sp>
       <p:sp>
         <p:nvSpPr>
-          <p:cNvPr id="47" name="TextBox 46"/>
+          <p:cNvPr id="13" name="TextBox 12"/>
           <p:cNvSpPr txBox="1"/>
           <p:nvPr/>
         </p:nvSpPr>
         <p:spPr>
           <a:xfrm>
-            <a:off x="713231" y="4096512"/>
-            <a:ext cx="2907791" cy="182880"/>
+            <a:off x="713231" y="2331720"/>
+            <a:ext cx="3822191" cy="182880"/>
           </a:xfrm>
           <a:prstGeom prst="rect">
             <a:avLst/>
@@ -7409,21 +9956,21 @@
                   <a:srgbClr val="0F172A"/>
                 </a:solidFill>
               </a:rPr>
-              <a:t>4  Normalize labels</a:t>
-            </a:r>
-          </a:p>
-        </p:txBody>
-      </p:sp>
-      <p:sp>
-        <p:nvSpPr>
-          <p:cNvPr id="48" name="TextBox 47"/>
+              <a:t>Raw Bloomberg pull (2006+)</a:t>
+            </a:r>
+          </a:p>
+        </p:txBody>
+      </p:sp>
+      <p:sp>
+        <p:nvSpPr>
+          <p:cNvPr id="14" name="TextBox 13"/>
           <p:cNvSpPr txBox="1"/>
           <p:nvPr/>
         </p:nvSpPr>
         <p:spPr>
           <a:xfrm>
-            <a:off x="3730752" y="4096512"/>
-            <a:ext cx="3502152" cy="182880"/>
+            <a:off x="4645152" y="2331720"/>
+            <a:ext cx="1078992" cy="182880"/>
           </a:xfrm>
           <a:prstGeom prst="rect">
             <a:avLst/>
@@ -7443,21 +9990,21 @@
                   <a:srgbClr val="0F172A"/>
                 </a:solidFill>
               </a:rPr>
-              <a:t>normalized_labels.csv</a:t>
-            </a:r>
-          </a:p>
-        </p:txBody>
-      </p:sp>
-      <p:sp>
-        <p:nvSpPr>
-          <p:cNvPr id="49" name="TextBox 48"/>
+              <a:t>2,068</a:t>
+            </a:r>
+          </a:p>
+        </p:txBody>
+      </p:sp>
+      <p:sp>
+        <p:nvSpPr>
+          <p:cNvPr id="15" name="TextBox 14"/>
           <p:cNvSpPr txBox="1"/>
           <p:nvPr/>
         </p:nvSpPr>
         <p:spPr>
           <a:xfrm>
-            <a:off x="7342632" y="4096512"/>
-            <a:ext cx="4187952" cy="182880"/>
+            <a:off x="5833872" y="2331720"/>
+            <a:ext cx="1078992" cy="182880"/>
           </a:xfrm>
           <a:prstGeom prst="rect">
             <a:avLst/>
@@ -7477,27 +10024,61 @@
                   <a:srgbClr val="0F172A"/>
                 </a:solidFill>
               </a:rPr>
-              <a:t>73 clean election-DEMAND labels (near disclosure ceiling)</a:t>
-            </a:r>
-          </a:p>
-        </p:txBody>
-      </p:sp>
-      <p:sp>
-        <p:nvSpPr>
-          <p:cNvPr id="50" name="Rectangle 49"/>
-          <p:cNvSpPr/>
-          <p:nvPr/>
-        </p:nvSpPr>
-        <p:spPr>
-          <a:xfrm>
-            <a:off x="640080" y="4361688"/>
-            <a:ext cx="10927080" cy="365760"/>
+              <a:t>—</a:t>
+            </a:r>
+          </a:p>
+        </p:txBody>
+      </p:sp>
+      <p:sp>
+        <p:nvSpPr>
+          <p:cNvPr id="16" name="TextBox 15"/>
+          <p:cNvSpPr txBox="1"/>
+          <p:nvPr/>
+        </p:nvSpPr>
+        <p:spPr>
+          <a:xfrm>
+            <a:off x="7022592" y="2331720"/>
+            <a:ext cx="4507992" cy="182880"/>
+          </a:xfrm>
+          <a:prstGeom prst="rect">
+            <a:avLst/>
+          </a:prstGeom>
+          <a:noFill/>
+        </p:spPr>
+        <p:txBody>
+          <a:bodyPr wrap="square" lIns="0" rIns="0" tIns="0" bIns="0">
+            <a:spAutoFit/>
+          </a:bodyPr>
+          <a:lstStyle/>
+          <a:p>
+            <a:pPr algn="l"/>
+            <a:r>
+              <a:rPr sz="880" b="0">
+                <a:solidFill>
+                  <a:srgbClr val="0F172A"/>
+                </a:solidFill>
+              </a:rPr>
+              <a:t>Everything the M&amp;A screen returned</a:t>
+            </a:r>
+          </a:p>
+        </p:txBody>
+      </p:sp>
+      <p:sp>
+        <p:nvSpPr>
+          <p:cNvPr id="17" name="Rectangle 16"/>
+          <p:cNvSpPr/>
+          <p:nvPr/>
+        </p:nvSpPr>
+        <p:spPr>
+          <a:xfrm>
+            <a:off x="640080" y="2633472"/>
+            <a:ext cx="10927080" cy="402336"/>
           </a:xfrm>
           <a:prstGeom prst="rect">
             <a:avLst/>
           </a:prstGeom>
           <a:solidFill>
-            <a:srgbClr val="FFFFFF"/>
+            <a:srgbClr val="F7F9FC"/>
           </a:solidFill>
           <a:ln>
             <a:noFill/>
@@ -7528,14 +10109,14 @@
       </p:sp>
       <p:sp>
         <p:nvSpPr>
-          <p:cNvPr id="51" name="TextBox 50"/>
+          <p:cNvPr id="18" name="TextBox 17"/>
           <p:cNvSpPr txBox="1"/>
           <p:nvPr/>
         </p:nvSpPr>
         <p:spPr>
           <a:xfrm>
-            <a:off x="713231" y="4462272"/>
-            <a:ext cx="2907791" cy="182880"/>
+            <a:off x="713231" y="2734056"/>
+            <a:ext cx="3822191" cy="182880"/>
           </a:xfrm>
           <a:prstGeom prst="rect">
             <a:avLst/>
@@ -7555,21 +10136,21 @@
                   <a:srgbClr val="0F172A"/>
                 </a:solidFill>
               </a:rPr>
-              <a:t>5  Deadline spread</a:t>
-            </a:r>
-          </a:p>
-        </p:txBody>
-      </p:sp>
-      <p:sp>
-        <p:nvSpPr>
-          <p:cNvPr id="52" name="TextBox 51"/>
+              <a:t>Keep “Cash or Stock” (true election)</a:t>
+            </a:r>
+          </a:p>
+        </p:txBody>
+      </p:sp>
+      <p:sp>
+        <p:nvSpPr>
+          <p:cNvPr id="19" name="TextBox 18"/>
           <p:cNvSpPr txBox="1"/>
           <p:nvPr/>
         </p:nvSpPr>
         <p:spPr>
           <a:xfrm>
-            <a:off x="3730752" y="4462272"/>
-            <a:ext cx="3502152" cy="182880"/>
+            <a:off x="4645152" y="2734056"/>
+            <a:ext cx="1078992" cy="182880"/>
           </a:xfrm>
           <a:prstGeom prst="rect">
             <a:avLst/>
@@ -7589,21 +10170,21 @@
                   <a:srgbClr val="0F172A"/>
                 </a:solidFill>
               </a:rPr>
-              <a:t>deadline_spread.csv</a:t>
-            </a:r>
-          </a:p>
-        </p:txBody>
-      </p:sp>
-      <p:sp>
-        <p:nvSpPr>
-          <p:cNvPr id="53" name="TextBox 52"/>
+              <a:t>727</a:t>
+            </a:r>
+          </a:p>
+        </p:txBody>
+      </p:sp>
+      <p:sp>
+        <p:nvSpPr>
+          <p:cNvPr id="20" name="TextBox 19"/>
           <p:cNvSpPr txBox="1"/>
           <p:nvPr/>
         </p:nvSpPr>
         <p:spPr>
           <a:xfrm>
-            <a:off x="7342632" y="4462272"/>
-            <a:ext cx="4187952" cy="182880"/>
+            <a:off x="5833872" y="2734056"/>
+            <a:ext cx="1078992" cy="182880"/>
           </a:xfrm>
           <a:prstGeom prst="rect">
             <a:avLst/>
@@ -7623,27 +10204,61 @@
                   <a:srgbClr val="0F172A"/>
                 </a:solidFill>
               </a:rPr>
-              <a:t>Fixed vs floating split (floating = spread≈0, excluded)</a:t>
-            </a:r>
-          </a:p>
-        </p:txBody>
-      </p:sp>
-      <p:sp>
-        <p:nvSpPr>
-          <p:cNvPr id="54" name="Rectangle 53"/>
-          <p:cNvSpPr/>
-          <p:nvPr/>
-        </p:nvSpPr>
-        <p:spPr>
-          <a:xfrm>
-            <a:off x="640080" y="4727448"/>
-            <a:ext cx="10927080" cy="365760"/>
+              <a:t>−1,341</a:t>
+            </a:r>
+          </a:p>
+        </p:txBody>
+      </p:sp>
+      <p:sp>
+        <p:nvSpPr>
+          <p:cNvPr id="21" name="TextBox 20"/>
+          <p:cNvSpPr txBox="1"/>
+          <p:nvPr/>
+        </p:nvSpPr>
+        <p:spPr>
+          <a:xfrm>
+            <a:off x="7022592" y="2734056"/>
+            <a:ext cx="4507992" cy="182880"/>
+          </a:xfrm>
+          <a:prstGeom prst="rect">
+            <a:avLst/>
+          </a:prstGeom>
+          <a:noFill/>
+        </p:spPr>
+        <p:txBody>
+          <a:bodyPr wrap="square" lIns="0" rIns="0" tIns="0" bIns="0">
+            <a:spAutoFit/>
+          </a:bodyPr>
+          <a:lstStyle/>
+          <a:p>
+            <a:pPr algn="l"/>
+            <a:r>
+              <a:rPr sz="880" b="0">
+                <a:solidFill>
+                  <a:srgbClr val="0F172A"/>
+                </a:solidFill>
+              </a:rPr>
+              <a:t>Fixed-mix deals — no election, no proration</a:t>
+            </a:r>
+          </a:p>
+        </p:txBody>
+      </p:sp>
+      <p:sp>
+        <p:nvSpPr>
+          <p:cNvPr id="22" name="Rectangle 21"/>
+          <p:cNvSpPr/>
+          <p:nvPr/>
+        </p:nvSpPr>
+        <p:spPr>
+          <a:xfrm>
+            <a:off x="640080" y="3035808"/>
+            <a:ext cx="10927080" cy="402336"/>
           </a:xfrm>
           <a:prstGeom prst="rect">
             <a:avLst/>
           </a:prstGeom>
           <a:solidFill>
-            <a:srgbClr val="F7F9FC"/>
+            <a:srgbClr val="FFFFFF"/>
           </a:solidFill>
           <a:ln>
             <a:noFill/>
@@ -7674,14 +10289,14 @@
       </p:sp>
       <p:sp>
         <p:nvSpPr>
-          <p:cNvPr id="55" name="TextBox 54"/>
+          <p:cNvPr id="23" name="TextBox 22"/>
           <p:cNvSpPr txBox="1"/>
           <p:nvPr/>
         </p:nvSpPr>
         <p:spPr>
           <a:xfrm>
-            <a:off x="713231" y="4828032"/>
-            <a:ext cx="2907791" cy="182880"/>
+            <a:off x="713231" y="3136391"/>
+            <a:ext cx="3822191" cy="182880"/>
           </a:xfrm>
           <a:prstGeom prst="rect">
             <a:avLst/>
@@ -7701,21 +10316,21 @@
                   <a:srgbClr val="0F172A"/>
                 </a:solidFill>
               </a:rPr>
-              <a:t>6  Monte Carlo  (arb_mc / arb_run)</a:t>
-            </a:r>
-          </a:p>
-        </p:txBody>
-      </p:sp>
-      <p:sp>
-        <p:nvSpPr>
-          <p:cNvPr id="56" name="TextBox 55"/>
+              <a:t>Keep completed</a:t>
+            </a:r>
+          </a:p>
+        </p:txBody>
+      </p:sp>
+      <p:sp>
+        <p:nvSpPr>
+          <p:cNvPr id="24" name="TextBox 23"/>
           <p:cNvSpPr txBox="1"/>
           <p:nvPr/>
         </p:nvSpPr>
         <p:spPr>
           <a:xfrm>
-            <a:off x="3730752" y="4828032"/>
-            <a:ext cx="3502152" cy="182880"/>
+            <a:off x="4645152" y="3136391"/>
+            <a:ext cx="1078992" cy="182880"/>
           </a:xfrm>
           <a:prstGeom prst="rect">
             <a:avLst/>
@@ -7735,21 +10350,21 @@
                   <a:srgbClr val="0F172A"/>
                 </a:solidFill>
               </a:rPr>
-              <a:t>arb_output/ figures + summary</a:t>
-            </a:r>
-          </a:p>
-        </p:txBody>
-      </p:sp>
-      <p:sp>
-        <p:nvSpPr>
-          <p:cNvPr id="57" name="TextBox 56"/>
+              <a:t>619</a:t>
+            </a:r>
+          </a:p>
+        </p:txBody>
+      </p:sp>
+      <p:sp>
+        <p:nvSpPr>
+          <p:cNvPr id="25" name="TextBox 24"/>
           <p:cNvSpPr txBox="1"/>
           <p:nvPr/>
         </p:nvSpPr>
         <p:spPr>
           <a:xfrm>
-            <a:off x="7342632" y="4828032"/>
-            <a:ext cx="4187952" cy="182880"/>
+            <a:off x="5833872" y="3136391"/>
+            <a:ext cx="1078992" cy="182880"/>
           </a:xfrm>
           <a:prstGeom prst="rect">
             <a:avLst/>
@@ -7769,27 +10384,61 @@
                   <a:srgbClr val="0F172A"/>
                 </a:solidFill>
               </a:rPr>
-              <a:t>Demand Beta; calibration KS p = 0.96</a:t>
-            </a:r>
-          </a:p>
-        </p:txBody>
-      </p:sp>
-      <p:sp>
-        <p:nvSpPr>
-          <p:cNvPr id="58" name="Rectangle 57"/>
-          <p:cNvSpPr/>
-          <p:nvPr/>
-        </p:nvSpPr>
-        <p:spPr>
-          <a:xfrm>
-            <a:off x="640080" y="5093208"/>
-            <a:ext cx="10927080" cy="365760"/>
+              <a:t>−108</a:t>
+            </a:r>
+          </a:p>
+        </p:txBody>
+      </p:sp>
+      <p:sp>
+        <p:nvSpPr>
+          <p:cNvPr id="26" name="TextBox 25"/>
+          <p:cNvSpPr txBox="1"/>
+          <p:nvPr/>
+        </p:nvSpPr>
+        <p:spPr>
+          <a:xfrm>
+            <a:off x="7022592" y="3136391"/>
+            <a:ext cx="4507992" cy="182880"/>
+          </a:xfrm>
+          <a:prstGeom prst="rect">
+            <a:avLst/>
+          </a:prstGeom>
+          <a:noFill/>
+        </p:spPr>
+        <p:txBody>
+          <a:bodyPr wrap="square" lIns="0" rIns="0" tIns="0" bIns="0">
+            <a:spAutoFit/>
+          </a:bodyPr>
+          <a:lstStyle/>
+          <a:p>
+            <a:pPr algn="l"/>
+            <a:r>
+              <a:rPr sz="880" b="0">
+                <a:solidFill>
+                  <a:srgbClr val="0F172A"/>
+                </a:solidFill>
+              </a:rPr>
+              <a:t>Terminated / withdrawn — no election happened</a:t>
+            </a:r>
+          </a:p>
+        </p:txBody>
+      </p:sp>
+      <p:sp>
+        <p:nvSpPr>
+          <p:cNvPr id="27" name="Rectangle 26"/>
+          <p:cNvSpPr/>
+          <p:nvPr/>
+        </p:nvSpPr>
+        <p:spPr>
+          <a:xfrm>
+            <a:off x="640080" y="3438144"/>
+            <a:ext cx="10927080" cy="402336"/>
           </a:xfrm>
           <a:prstGeom prst="rect">
             <a:avLst/>
           </a:prstGeom>
           <a:solidFill>
-            <a:srgbClr val="FFFFFF"/>
+            <a:srgbClr val="F7F9FC"/>
           </a:solidFill>
           <a:ln>
             <a:noFill/>
@@ -7820,14 +10469,14 @@
       </p:sp>
       <p:sp>
         <p:nvSpPr>
-          <p:cNvPr id="59" name="TextBox 58"/>
+          <p:cNvPr id="28" name="TextBox 27"/>
           <p:cNvSpPr txBox="1"/>
           <p:nvPr/>
         </p:nvSpPr>
         <p:spPr>
           <a:xfrm>
-            <a:off x="713231" y="5193792"/>
-            <a:ext cx="2907791" cy="182880"/>
+            <a:off x="713231" y="3538727"/>
+            <a:ext cx="3822191" cy="182880"/>
           </a:xfrm>
           <a:prstGeom prst="rect">
             <a:avLst/>
@@ -7847,21 +10496,21 @@
                   <a:srgbClr val="0F172A"/>
                 </a:solidFill>
               </a:rPr>
-              <a:t>7  Trade decision  (arb_signal)</a:t>
-            </a:r>
-          </a:p>
-        </p:txBody>
-      </p:sp>
-      <p:sp>
-        <p:nvSpPr>
-          <p:cNvPr id="60" name="TextBox 59"/>
+              <a:t>US + resolvable identifier</a:t>
+            </a:r>
+          </a:p>
+        </p:txBody>
+      </p:sp>
+      <p:sp>
+        <p:nvSpPr>
+          <p:cNvPr id="29" name="TextBox 28"/>
           <p:cNvSpPr txBox="1"/>
           <p:nvPr/>
         </p:nvSpPr>
         <p:spPr>
           <a:xfrm>
-            <a:off x="3730752" y="5193792"/>
-            <a:ext cx="3502152" cy="182880"/>
+            <a:off x="4645152" y="3538727"/>
+            <a:ext cx="1078992" cy="182880"/>
           </a:xfrm>
           <a:prstGeom prst="rect">
             <a:avLst/>
@@ -7881,21 +10530,21 @@
                   <a:srgbClr val="0F172A"/>
                 </a:solidFill>
               </a:rPr>
-              <a:t>arb_signals.csv</a:t>
-            </a:r>
-          </a:p>
-        </p:txBody>
-      </p:sp>
-      <p:sp>
-        <p:nvSpPr>
-          <p:cNvPr id="61" name="TextBox 60"/>
+              <a:t>317</a:t>
+            </a:r>
+          </a:p>
+        </p:txBody>
+      </p:sp>
+      <p:sp>
+        <p:nvSpPr>
+          <p:cNvPr id="30" name="TextBox 29"/>
           <p:cNvSpPr txBox="1"/>
           <p:nvPr/>
         </p:nvSpPr>
         <p:spPr>
           <a:xfrm>
-            <a:off x="7342632" y="5193792"/>
-            <a:ext cx="4187952" cy="182880"/>
+            <a:off x="5833872" y="3538727"/>
+            <a:ext cx="1078992" cy="182880"/>
           </a:xfrm>
           <a:prstGeom prst="rect">
             <a:avLst/>
@@ -7915,27 +10564,61 @@
                   <a:srgbClr val="0F172A"/>
                 </a:solidFill>
               </a:rPr>
-              <a:t>31 deals, 22 ENTER, signal skill corr +0.67</a:t>
-            </a:r>
-          </a:p>
-        </p:txBody>
-      </p:sp>
-      <p:sp>
-        <p:nvSpPr>
-          <p:cNvPr id="62" name="Rectangle 61"/>
-          <p:cNvSpPr/>
-          <p:nvPr/>
-        </p:nvSpPr>
-        <p:spPr>
-          <a:xfrm>
-            <a:off x="640080" y="5458968"/>
-            <a:ext cx="10927080" cy="365760"/>
+              <a:t>−302</a:t>
+            </a:r>
+          </a:p>
+        </p:txBody>
+      </p:sp>
+      <p:sp>
+        <p:nvSpPr>
+          <p:cNvPr id="31" name="TextBox 30"/>
+          <p:cNvSpPr txBox="1"/>
+          <p:nvPr/>
+        </p:nvSpPr>
+        <p:spPr>
+          <a:xfrm>
+            <a:off x="7022592" y="3538727"/>
+            <a:ext cx="4507992" cy="182880"/>
+          </a:xfrm>
+          <a:prstGeom prst="rect">
+            <a:avLst/>
+          </a:prstGeom>
+          <a:noFill/>
+        </p:spPr>
+        <p:txBody>
+          <a:bodyPr wrap="square" lIns="0" rIns="0" tIns="0" bIns="0">
+            <a:spAutoFit/>
+          </a:bodyPr>
+          <a:lstStyle/>
+          <a:p>
+            <a:pPr algn="l"/>
+            <a:r>
+              <a:rPr sz="880" b="0">
+                <a:solidFill>
+                  <a:srgbClr val="0F172A"/>
+                </a:solidFill>
+              </a:rPr>
+              <a:t>Non-US — no EDGAR filings to read</a:t>
+            </a:r>
+          </a:p>
+        </p:txBody>
+      </p:sp>
+      <p:sp>
+        <p:nvSpPr>
+          <p:cNvPr id="32" name="Rectangle 31"/>
+          <p:cNvSpPr/>
+          <p:nvPr/>
+        </p:nvSpPr>
+        <p:spPr>
+          <a:xfrm>
+            <a:off x="640080" y="3840480"/>
+            <a:ext cx="10927080" cy="402336"/>
           </a:xfrm>
           <a:prstGeom prst="rect">
             <a:avLst/>
           </a:prstGeom>
           <a:solidFill>
-            <a:srgbClr val="F7F9FC"/>
+            <a:srgbClr val="FFFFFF"/>
           </a:solidFill>
           <a:ln>
             <a:noFill/>
@@ -7966,14 +10649,14 @@
       </p:sp>
       <p:sp>
         <p:nvSpPr>
-          <p:cNvPr id="63" name="TextBox 62"/>
+          <p:cNvPr id="33" name="TextBox 32"/>
           <p:cNvSpPr txBox="1"/>
           <p:nvPr/>
         </p:nvSpPr>
         <p:spPr>
           <a:xfrm>
-            <a:off x="713231" y="5559552"/>
-            <a:ext cx="2907791" cy="182880"/>
+            <a:off x="713231" y="3941064"/>
+            <a:ext cx="3822191" cy="182880"/>
           </a:xfrm>
           <a:prstGeom prst="rect">
             <a:avLst/>
@@ -7993,21 +10676,21 @@
                   <a:srgbClr val="0F172A"/>
                 </a:solidFill>
               </a:rPr>
-              <a:t>8  Deliverable</a:t>
-            </a:r>
-          </a:p>
-        </p:txBody>
-      </p:sp>
-      <p:sp>
-        <p:nvSpPr>
-          <p:cNvPr id="64" name="TextBox 63"/>
+              <a:t>Ran through EDGAR + Claude</a:t>
+            </a:r>
+          </a:p>
+        </p:txBody>
+      </p:sp>
+      <p:sp>
+        <p:nvSpPr>
+          <p:cNvPr id="34" name="TextBox 33"/>
           <p:cNvSpPr txBox="1"/>
           <p:nvPr/>
         </p:nvSpPr>
         <p:spPr>
           <a:xfrm>
-            <a:off x="3730752" y="5559552"/>
-            <a:ext cx="3502152" cy="182880"/>
+            <a:off x="4645152" y="3941064"/>
+            <a:ext cx="1078992" cy="182880"/>
           </a:xfrm>
           <a:prstGeom prst="rect">
             <a:avLst/>
@@ -8027,21 +10710,21 @@
                   <a:srgbClr val="0F172A"/>
                 </a:solidFill>
               </a:rPr>
-              <a:t>arb_output/walkthrough.html</a:t>
-            </a:r>
-          </a:p>
-        </p:txBody>
-      </p:sp>
-      <p:sp>
-        <p:nvSpPr>
-          <p:cNvPr id="65" name="TextBox 64"/>
+              <a:t>303</a:t>
+            </a:r>
+          </a:p>
+        </p:txBody>
+      </p:sp>
+      <p:sp>
+        <p:nvSpPr>
+          <p:cNvPr id="35" name="TextBox 34"/>
           <p:cNvSpPr txBox="1"/>
           <p:nvPr/>
         </p:nvSpPr>
         <p:spPr>
           <a:xfrm>
-            <a:off x="7342632" y="5559552"/>
-            <a:ext cx="4187952" cy="182880"/>
+            <a:off x="5833872" y="3941064"/>
+            <a:ext cx="1078992" cy="182880"/>
           </a:xfrm>
           <a:prstGeom prst="rect">
             <a:avLst/>
@@ -8061,21 +10744,21 @@
                   <a:srgbClr val="0F172A"/>
                 </a:solidFill>
               </a:rPr>
-              <a:t>This deck + the browser walkthrough artifact</a:t>
-            </a:r>
-          </a:p>
-        </p:txBody>
-      </p:sp>
-      <p:sp>
-        <p:nvSpPr>
-          <p:cNvPr id="66" name="TextBox 65"/>
+              <a:t>−14</a:t>
+            </a:r>
+          </a:p>
+        </p:txBody>
+      </p:sp>
+      <p:sp>
+        <p:nvSpPr>
+          <p:cNvPr id="36" name="TextBox 35"/>
           <p:cNvSpPr txBox="1"/>
           <p:nvPr/>
         </p:nvSpPr>
         <p:spPr>
           <a:xfrm>
-            <a:off x="11064240" y="6473952"/>
-            <a:ext cx="731520" cy="182880"/>
+            <a:off x="7022592" y="3941064"/>
+            <a:ext cx="4507992" cy="182880"/>
           </a:xfrm>
           <a:prstGeom prst="rect">
             <a:avLst/>
@@ -8088,52 +10771,34 @@
           </a:bodyPr>
           <a:lstStyle/>
           <a:p>
-            <a:pPr algn="r"/>
-            <a:r>
-              <a:rPr sz="780" b="0">
-                <a:solidFill>
-                  <a:srgbClr val="475569"/>
-                </a:solidFill>
-              </a:rPr>
-              <a:t>12 / 14</a:t>
-            </a:r>
-          </a:p>
-        </p:txBody>
-      </p:sp>
-    </p:spTree>
-  </p:cSld>
-  <p:clrMapOvr>
-    <a:masterClrMapping/>
-  </p:clrMapOvr>
-</p:sld>
-</file>
-
-<file path=ppt/slides/slide15.xml><?xml version="1.0" encoding="utf-8"?>
-<p:sld xmlns:a="http://schemas.openxmlformats.org/drawingml/2006/main" xmlns:p="http://schemas.openxmlformats.org/presentationml/2006/main" xmlns:r="http://schemas.openxmlformats.org/officeDocument/2006/relationships">
-  <p:cSld>
-    <p:spTree>
-      <p:nvGrpSpPr>
-        <p:cNvPr id="1" name=""/>
-        <p:cNvGrpSpPr/>
-        <p:nvPr/>
-      </p:nvGrpSpPr>
-      <p:grpSpPr/>
-      <p:sp>
-        <p:nvSpPr>
-          <p:cNvPr id="2" name="Rectangle 1"/>
-          <p:cNvSpPr/>
-          <p:nvPr/>
-        </p:nvSpPr>
-        <p:spPr>
-          <a:xfrm>
-            <a:off x="0" y="0"/>
-            <a:ext cx="12188952" cy="6858000"/>
+            <a:pPr algn="l"/>
+            <a:r>
+              <a:rPr sz="880" b="0">
+                <a:solidFill>
+                  <a:srgbClr val="0F172A"/>
+                </a:solidFill>
+              </a:rPr>
+              <a:t>No CIK / no election filing found</a:t>
+            </a:r>
+          </a:p>
+        </p:txBody>
+      </p:sp>
+      <p:sp>
+        <p:nvSpPr>
+          <p:cNvPr id="37" name="Rectangle 36"/>
+          <p:cNvSpPr/>
+          <p:nvPr/>
+        </p:nvSpPr>
+        <p:spPr>
+          <a:xfrm>
+            <a:off x="640080" y="4242816"/>
+            <a:ext cx="10927080" cy="402336"/>
           </a:xfrm>
           <a:prstGeom prst="rect">
             <a:avLst/>
           </a:prstGeom>
           <a:solidFill>
-            <a:srgbClr val="FFFFFF"/>
+            <a:srgbClr val="F7F9FC"/>
           </a:solidFill>
           <a:ln>
             <a:noFill/>
@@ -8164,20 +10829,156 @@
       </p:sp>
       <p:sp>
         <p:nvSpPr>
-          <p:cNvPr id="3" name="Rectangle 2"/>
-          <p:cNvSpPr/>
-          <p:nvPr/>
-        </p:nvSpPr>
-        <p:spPr>
-          <a:xfrm>
-            <a:off x="0" y="0"/>
-            <a:ext cx="12188952" cy="164592"/>
+          <p:cNvPr id="38" name="TextBox 37"/>
+          <p:cNvSpPr txBox="1"/>
+          <p:nvPr/>
+        </p:nvSpPr>
+        <p:spPr>
+          <a:xfrm>
+            <a:off x="713231" y="4343400"/>
+            <a:ext cx="3822191" cy="182880"/>
+          </a:xfrm>
+          <a:prstGeom prst="rect">
+            <a:avLst/>
+          </a:prstGeom>
+          <a:noFill/>
+        </p:spPr>
+        <p:txBody>
+          <a:bodyPr wrap="square" lIns="0" rIns="0" tIns="0" bIns="0">
+            <a:spAutoFit/>
+          </a:bodyPr>
+          <a:lstStyle/>
+          <a:p>
+            <a:pPr algn="l"/>
+            <a:r>
+              <a:rPr sz="880" b="0">
+                <a:solidFill>
+                  <a:srgbClr val="0F172A"/>
+                </a:solidFill>
+              </a:rPr>
+              <a:t>Clean disclosed election demand</a:t>
+            </a:r>
+          </a:p>
+        </p:txBody>
+      </p:sp>
+      <p:sp>
+        <p:nvSpPr>
+          <p:cNvPr id="39" name="TextBox 38"/>
+          <p:cNvSpPr txBox="1"/>
+          <p:nvPr/>
+        </p:nvSpPr>
+        <p:spPr>
+          <a:xfrm>
+            <a:off x="4645152" y="4343400"/>
+            <a:ext cx="1078992" cy="182880"/>
+          </a:xfrm>
+          <a:prstGeom prst="rect">
+            <a:avLst/>
+          </a:prstGeom>
+          <a:noFill/>
+        </p:spPr>
+        <p:txBody>
+          <a:bodyPr wrap="square" lIns="0" rIns="0" tIns="0" bIns="0">
+            <a:spAutoFit/>
+          </a:bodyPr>
+          <a:lstStyle/>
+          <a:p>
+            <a:pPr algn="l"/>
+            <a:r>
+              <a:rPr sz="880" b="0">
+                <a:solidFill>
+                  <a:srgbClr val="0F172A"/>
+                </a:solidFill>
+              </a:rPr>
+              <a:t>73</a:t>
+            </a:r>
+          </a:p>
+        </p:txBody>
+      </p:sp>
+      <p:sp>
+        <p:nvSpPr>
+          <p:cNvPr id="40" name="TextBox 39"/>
+          <p:cNvSpPr txBox="1"/>
+          <p:nvPr/>
+        </p:nvSpPr>
+        <p:spPr>
+          <a:xfrm>
+            <a:off x="5833872" y="4343400"/>
+            <a:ext cx="1078992" cy="182880"/>
+          </a:xfrm>
+          <a:prstGeom prst="rect">
+            <a:avLst/>
+          </a:prstGeom>
+          <a:noFill/>
+        </p:spPr>
+        <p:txBody>
+          <a:bodyPr wrap="square" lIns="0" rIns="0" tIns="0" bIns="0">
+            <a:spAutoFit/>
+          </a:bodyPr>
+          <a:lstStyle/>
+          <a:p>
+            <a:pPr algn="l"/>
+            <a:r>
+              <a:rPr sz="880" b="0">
+                <a:solidFill>
+                  <a:srgbClr val="0F172A"/>
+                </a:solidFill>
+              </a:rPr>
+              <a:t>−231</a:t>
+            </a:r>
+          </a:p>
+        </p:txBody>
+      </p:sp>
+      <p:sp>
+        <p:nvSpPr>
+          <p:cNvPr id="41" name="TextBox 40"/>
+          <p:cNvSpPr txBox="1"/>
+          <p:nvPr/>
+        </p:nvSpPr>
+        <p:spPr>
+          <a:xfrm>
+            <a:off x="7022592" y="4343400"/>
+            <a:ext cx="4507992" cy="182880"/>
+          </a:xfrm>
+          <a:prstGeom prst="rect">
+            <a:avLst/>
+          </a:prstGeom>
+          <a:noFill/>
+        </p:spPr>
+        <p:txBody>
+          <a:bodyPr wrap="square" lIns="0" rIns="0" tIns="0" bIns="0">
+            <a:spAutoFit/>
+          </a:bodyPr>
+          <a:lstStyle/>
+          <a:p>
+            <a:pPr algn="l"/>
+            <a:r>
+              <a:rPr sz="880" b="0">
+                <a:solidFill>
+                  <a:srgbClr val="0F172A"/>
+                </a:solidFill>
+              </a:rPr>
+              <a:t>Not disclosed, or unparseable prose</a:t>
+            </a:r>
+          </a:p>
+        </p:txBody>
+      </p:sp>
+      <p:sp>
+        <p:nvSpPr>
+          <p:cNvPr id="42" name="Rectangle 41"/>
+          <p:cNvSpPr/>
+          <p:nvPr/>
+        </p:nvSpPr>
+        <p:spPr>
+          <a:xfrm>
+            <a:off x="640080" y="5285232"/>
+            <a:ext cx="10927080" cy="841248"/>
           </a:xfrm>
           <a:prstGeom prst="rect">
             <a:avLst/>
           </a:prstGeom>
           <a:solidFill>
-            <a:srgbClr val="14315A"/>
+            <a:srgbClr val="EAF2FF"/>
           </a:solidFill>
           <a:ln>
             <a:noFill/>
@@ -8208,14 +11009,14 @@
       </p:sp>
       <p:sp>
         <p:nvSpPr>
-          <p:cNvPr id="4" name="TextBox 3"/>
+          <p:cNvPr id="43" name="TextBox 42"/>
           <p:cNvSpPr txBox="1"/>
           <p:nvPr/>
         </p:nvSpPr>
         <p:spPr>
           <a:xfrm>
-            <a:off x="502920" y="365760"/>
-            <a:ext cx="11155680" cy="502920"/>
+            <a:off x="786384" y="5394960"/>
+            <a:ext cx="10607040" cy="182880"/>
           </a:xfrm>
           <a:prstGeom prst="rect">
             <a:avLst/>
@@ -8230,26 +11031,26 @@
           <a:p>
             <a:pPr algn="l"/>
             <a:r>
-              <a:rPr sz="2800" b="1">
+              <a:rPr sz="950" b="1">
                 <a:solidFill>
                   <a:srgbClr val="14315A"/>
                 </a:solidFill>
               </a:rPr>
-              <a:t>Extraction walkthrough — one deal, end to end</a:t>
-            </a:r>
-          </a:p>
-        </p:txBody>
-      </p:sp>
-      <p:sp>
-        <p:nvSpPr>
-          <p:cNvPr id="5" name="TextBox 4"/>
+              <a:t>Where the deals go</a:t>
+            </a:r>
+          </a:p>
+        </p:txBody>
+      </p:sp>
+      <p:sp>
+        <p:nvSpPr>
+          <p:cNvPr id="44" name="TextBox 43"/>
           <p:cNvSpPr txBox="1"/>
           <p:nvPr/>
         </p:nvSpPr>
         <p:spPr>
           <a:xfrm>
-            <a:off x="512064" y="923544"/>
-            <a:ext cx="10881360" cy="329184"/>
+            <a:off x="786384" y="5614416"/>
+            <a:ext cx="10634472" cy="457200"/>
           </a:xfrm>
           <a:prstGeom prst="rect">
             <a:avLst/>
@@ -8264,26 +11065,26 @@
           <a:p>
             <a:pPr algn="l"/>
             <a:r>
-              <a:rPr sz="1350" b="0">
-                <a:solidFill>
-                  <a:srgbClr val="475569"/>
-                </a:solidFill>
-              </a:rPr>
-              <a:t>PepsiAmericas ← PepsiCo (announced 2009-04-20, cash-or-stock election) — raw filings to a priced trade</a:t>
-            </a:r>
-          </a:p>
-        </p:txBody>
-      </p:sp>
-      <p:sp>
-        <p:nvSpPr>
-          <p:cNvPr id="6" name="TextBox 5"/>
+              <a:rPr sz="960" b="0">
+                <a:solidFill>
+                  <a:srgbClr val="0F172A"/>
+                </a:solidFill>
+              </a:rPr>
+              <a:t>The two largest cuts are structural, not pipeline losses — 1,341 “Cash-and-Stock” deals have no election at all, and 302 non-US deals have no EDGAR filings (together ~79% of the drop, right at the top). The remaining 73 are near the disclosure ceiling: election demand simply isn’t disclosed on most other deals — a sharp-prompt re-extraction of 26 candidates recovered only 1.</a:t>
+            </a:r>
+          </a:p>
+        </p:txBody>
+      </p:sp>
+      <p:sp>
+        <p:nvSpPr>
+          <p:cNvPr id="45" name="TextBox 44"/>
           <p:cNvSpPr txBox="1"/>
           <p:nvPr/>
         </p:nvSpPr>
         <p:spPr>
           <a:xfrm>
-            <a:off x="502920" y="6473952"/>
-            <a:ext cx="6858000" cy="182880"/>
+            <a:off x="11064240" y="6473952"/>
+            <a:ext cx="731520" cy="182880"/>
           </a:xfrm>
           <a:prstGeom prst="rect">
             <a:avLst/>
@@ -8296,1200 +11097,14 @@
           </a:bodyPr>
           <a:lstStyle/>
           <a:p>
-            <a:pPr algn="l"/>
+            <a:pPr algn="r"/>
             <a:r>
               <a:rPr sz="780" b="0">
                 <a:solidFill>
                   <a:srgbClr val="475569"/>
                 </a:solidFill>
               </a:rPr>
-              <a:t>JPM Project 3ii · Weekly workflow validation</a:t>
-            </a:r>
-          </a:p>
-        </p:txBody>
-      </p:sp>
-      <p:sp>
-        <p:nvSpPr>
-          <p:cNvPr id="7" name="Rectangle 6"/>
-          <p:cNvSpPr/>
-          <p:nvPr/>
-        </p:nvSpPr>
-        <p:spPr>
-          <a:xfrm>
-            <a:off x="640080" y="1517904"/>
-            <a:ext cx="2514600" cy="731520"/>
-          </a:xfrm>
-          <a:prstGeom prst="rect">
-            <a:avLst/>
-          </a:prstGeom>
-          <a:solidFill>
-            <a:srgbClr val="EAF2FF"/>
-          </a:solidFill>
-          <a:ln>
-            <a:noFill/>
-          </a:ln>
-          <a:effectLst/>
-        </p:spPr>
-        <p:style>
-          <a:lnRef idx="1">
-            <a:schemeClr val="accent1"/>
-          </a:lnRef>
-          <a:fillRef idx="3">
-            <a:schemeClr val="accent1"/>
-          </a:fillRef>
-          <a:effectRef idx="2">
-            <a:schemeClr val="accent1"/>
-          </a:effectRef>
-          <a:fontRef idx="minor">
-            <a:schemeClr val="lt1"/>
-          </a:fontRef>
-        </p:style>
-        <p:txBody>
-          <a:bodyPr rtlCol="0" anchor="ctr"/>
-          <a:lstStyle/>
-          <a:p>
-            <a:pPr algn="ctr"/>
-          </a:p>
-        </p:txBody>
-      </p:sp>
-      <p:sp>
-        <p:nvSpPr>
-          <p:cNvPr id="8" name="TextBox 7"/>
-          <p:cNvSpPr txBox="1"/>
-          <p:nvPr/>
-        </p:nvSpPr>
-        <p:spPr>
-          <a:xfrm>
-            <a:off x="731520" y="1645919"/>
-            <a:ext cx="2331720" cy="182880"/>
-          </a:xfrm>
-          <a:prstGeom prst="rect">
-            <a:avLst/>
-          </a:prstGeom>
-          <a:noFill/>
-        </p:spPr>
-        <p:txBody>
-          <a:bodyPr wrap="square" lIns="0" rIns="0" tIns="0" bIns="0">
-            <a:spAutoFit/>
-          </a:bodyPr>
-          <a:lstStyle/>
-          <a:p>
-            <a:pPr algn="l"/>
-            <a:r>
-              <a:rPr sz="1050" b="1">
-                <a:solidFill>
-                  <a:srgbClr val="14315A"/>
-                </a:solidFill>
-              </a:rPr>
-              <a:t>1  Deal input</a:t>
-            </a:r>
-          </a:p>
-        </p:txBody>
-      </p:sp>
-      <p:sp>
-        <p:nvSpPr>
-          <p:cNvPr id="9" name="TextBox 8"/>
-          <p:cNvSpPr txBox="1"/>
-          <p:nvPr/>
-        </p:nvSpPr>
-        <p:spPr>
-          <a:xfrm>
-            <a:off x="731520" y="1901952"/>
-            <a:ext cx="2331720" cy="182880"/>
-          </a:xfrm>
-          <a:prstGeom prst="rect">
-            <a:avLst/>
-          </a:prstGeom>
-          <a:noFill/>
-        </p:spPr>
-        <p:txBody>
-          <a:bodyPr wrap="square" lIns="0" rIns="0" tIns="0" bIns="0">
-            <a:spAutoFit/>
-          </a:bodyPr>
-          <a:lstStyle/>
-          <a:p>
-            <a:pPr algn="l"/>
-            <a:r>
-              <a:rPr sz="819" b="0">
-                <a:solidFill>
-                  <a:srgbClr val="475569"/>
-                </a:solidFill>
-              </a:rPr>
-              <a:t>Bloomberg row</a:t>
-            </a:r>
-          </a:p>
-        </p:txBody>
-      </p:sp>
-      <p:sp>
-        <p:nvSpPr>
-          <p:cNvPr id="10" name="Rectangle 9"/>
-          <p:cNvSpPr/>
-          <p:nvPr/>
-        </p:nvSpPr>
-        <p:spPr>
-          <a:xfrm>
-            <a:off x="3310128" y="1517904"/>
-            <a:ext cx="8257031" cy="731520"/>
-          </a:xfrm>
-          <a:prstGeom prst="rect">
-            <a:avLst/>
-          </a:prstGeom>
-          <a:solidFill>
-            <a:srgbClr val="FFFFFF"/>
-          </a:solidFill>
-          <a:ln w="9525">
-            <a:solidFill>
-              <a:srgbClr val="E2E8F0"/>
-            </a:solidFill>
-          </a:ln>
-          <a:effectLst/>
-        </p:spPr>
-        <p:style>
-          <a:lnRef idx="1">
-            <a:schemeClr val="accent1"/>
-          </a:lnRef>
-          <a:fillRef idx="3">
-            <a:schemeClr val="accent1"/>
-          </a:fillRef>
-          <a:effectRef idx="2">
-            <a:schemeClr val="accent1"/>
-          </a:effectRef>
-          <a:fontRef idx="minor">
-            <a:schemeClr val="lt1"/>
-          </a:fontRef>
-        </p:style>
-        <p:txBody>
-          <a:bodyPr rtlCol="0" anchor="ctr"/>
-          <a:lstStyle/>
-          <a:p>
-            <a:pPr algn="ctr"/>
-          </a:p>
-        </p:txBody>
-      </p:sp>
-      <p:sp>
-        <p:nvSpPr>
-          <p:cNvPr id="11" name="TextBox 10"/>
-          <p:cNvSpPr txBox="1"/>
-          <p:nvPr/>
-        </p:nvSpPr>
-        <p:spPr>
-          <a:xfrm>
-            <a:off x="3456432" y="1673351"/>
-            <a:ext cx="8001000" cy="457200"/>
-          </a:xfrm>
-          <a:prstGeom prst="rect">
-            <a:avLst/>
-          </a:prstGeom>
-          <a:noFill/>
-        </p:spPr>
-        <p:txBody>
-          <a:bodyPr wrap="square" lIns="0" rIns="0" tIns="0" bIns="0">
-            <a:spAutoFit/>
-          </a:bodyPr>
-          <a:lstStyle/>
-          <a:p>
-            <a:pPr algn="l"/>
-            <a:r>
-              <a:rPr sz="1019" b="0">
-                <a:solidFill>
-                  <a:srgbClr val="0F172A"/>
-                </a:solidFill>
-              </a:rPr>
-              <a:t>PepsiAmericas Inc  ←  PepsiCo Inc  ·  announced 2009-04-20  ·  Cash-or-Stock election  ·  status: completed</a:t>
-            </a:r>
-          </a:p>
-        </p:txBody>
-      </p:sp>
-      <p:sp>
-        <p:nvSpPr>
-          <p:cNvPr id="12" name="Rectangle 11"/>
-          <p:cNvSpPr/>
-          <p:nvPr/>
-        </p:nvSpPr>
-        <p:spPr>
-          <a:xfrm>
-            <a:off x="640080" y="2336291"/>
-            <a:ext cx="2514600" cy="731520"/>
-          </a:xfrm>
-          <a:prstGeom prst="rect">
-            <a:avLst/>
-          </a:prstGeom>
-          <a:solidFill>
-            <a:srgbClr val="EAF2FF"/>
-          </a:solidFill>
-          <a:ln>
-            <a:noFill/>
-          </a:ln>
-          <a:effectLst/>
-        </p:spPr>
-        <p:style>
-          <a:lnRef idx="1">
-            <a:schemeClr val="accent1"/>
-          </a:lnRef>
-          <a:fillRef idx="3">
-            <a:schemeClr val="accent1"/>
-          </a:fillRef>
-          <a:effectRef idx="2">
-            <a:schemeClr val="accent1"/>
-          </a:effectRef>
-          <a:fontRef idx="minor">
-            <a:schemeClr val="lt1"/>
-          </a:fontRef>
-        </p:style>
-        <p:txBody>
-          <a:bodyPr rtlCol="0" anchor="ctr"/>
-          <a:lstStyle/>
-          <a:p>
-            <a:pPr algn="ctr"/>
-          </a:p>
-        </p:txBody>
-      </p:sp>
-      <p:sp>
-        <p:nvSpPr>
-          <p:cNvPr id="13" name="TextBox 12"/>
-          <p:cNvSpPr txBox="1"/>
-          <p:nvPr/>
-        </p:nvSpPr>
-        <p:spPr>
-          <a:xfrm>
-            <a:off x="731520" y="2464308"/>
-            <a:ext cx="2331720" cy="182880"/>
-          </a:xfrm>
-          <a:prstGeom prst="rect">
-            <a:avLst/>
-          </a:prstGeom>
-          <a:noFill/>
-        </p:spPr>
-        <p:txBody>
-          <a:bodyPr wrap="square" lIns="0" rIns="0" tIns="0" bIns="0">
-            <a:spAutoFit/>
-          </a:bodyPr>
-          <a:lstStyle/>
-          <a:p>
-            <a:pPr algn="l"/>
-            <a:r>
-              <a:rPr sz="1050" b="1">
-                <a:solidFill>
-                  <a:srgbClr val="14315A"/>
-                </a:solidFill>
-              </a:rPr>
-              <a:t>2  SEC retrieval</a:t>
-            </a:r>
-          </a:p>
-        </p:txBody>
-      </p:sp>
-      <p:sp>
-        <p:nvSpPr>
-          <p:cNvPr id="14" name="TextBox 13"/>
-          <p:cNvSpPr txBox="1"/>
-          <p:nvPr/>
-        </p:nvSpPr>
-        <p:spPr>
-          <a:xfrm>
-            <a:off x="731520" y="2720339"/>
-            <a:ext cx="2331720" cy="182880"/>
-          </a:xfrm>
-          <a:prstGeom prst="rect">
-            <a:avLst/>
-          </a:prstGeom>
-          <a:noFill/>
-        </p:spPr>
-        <p:txBody>
-          <a:bodyPr wrap="square" lIns="0" rIns="0" tIns="0" bIns="0">
-            <a:spAutoFit/>
-          </a:bodyPr>
-          <a:lstStyle/>
-          <a:p>
-            <a:pPr algn="l"/>
-            <a:r>
-              <a:rPr sz="819" b="0">
-                <a:solidFill>
-                  <a:srgbClr val="475569"/>
-                </a:solidFill>
-              </a:rPr>
-              <a:t>download_ma_edgar_files.py</a:t>
-            </a:r>
-          </a:p>
-        </p:txBody>
-      </p:sp>
-      <p:sp>
-        <p:nvSpPr>
-          <p:cNvPr id="15" name="Rectangle 14"/>
-          <p:cNvSpPr/>
-          <p:nvPr/>
-        </p:nvSpPr>
-        <p:spPr>
-          <a:xfrm>
-            <a:off x="3310128" y="2336291"/>
-            <a:ext cx="8257031" cy="731520"/>
-          </a:xfrm>
-          <a:prstGeom prst="rect">
-            <a:avLst/>
-          </a:prstGeom>
-          <a:solidFill>
-            <a:srgbClr val="FFFFFF"/>
-          </a:solidFill>
-          <a:ln w="9525">
-            <a:solidFill>
-              <a:srgbClr val="E2E8F0"/>
-            </a:solidFill>
-          </a:ln>
-          <a:effectLst/>
-        </p:spPr>
-        <p:style>
-          <a:lnRef idx="1">
-            <a:schemeClr val="accent1"/>
-          </a:lnRef>
-          <a:fillRef idx="3">
-            <a:schemeClr val="accent1"/>
-          </a:fillRef>
-          <a:effectRef idx="2">
-            <a:schemeClr val="accent1"/>
-          </a:effectRef>
-          <a:fontRef idx="minor">
-            <a:schemeClr val="lt1"/>
-          </a:fontRef>
-        </p:style>
-        <p:txBody>
-          <a:bodyPr rtlCol="0" anchor="ctr"/>
-          <a:lstStyle/>
-          <a:p>
-            <a:pPr algn="ctr"/>
-          </a:p>
-        </p:txBody>
-      </p:sp>
-      <p:sp>
-        <p:nvSpPr>
-          <p:cNvPr id="16" name="TextBox 15"/>
-          <p:cNvSpPr txBox="1"/>
-          <p:nvPr/>
-        </p:nvSpPr>
-        <p:spPr>
-          <a:xfrm>
-            <a:off x="3456432" y="2491739"/>
-            <a:ext cx="8001000" cy="457200"/>
-          </a:xfrm>
-          <a:prstGeom prst="rect">
-            <a:avLst/>
-          </a:prstGeom>
-          <a:noFill/>
-        </p:spPr>
-        <p:txBody>
-          <a:bodyPr wrap="square" lIns="0" rIns="0" tIns="0" bIns="0">
-            <a:spAutoFit/>
-          </a:bodyPr>
-          <a:lstStyle/>
-          <a:p>
-            <a:pPr algn="l"/>
-            <a:r>
-              <a:rPr sz="1019" b="0">
-                <a:solidFill>
-                  <a:srgbClr val="0F172A"/>
-                </a:solidFill>
-              </a:rPr>
-              <a:t>Resolved CIK → pulled 553 documents / 104 unique filings (8-K, 425, DEFA14A, SC 13E3/A) → top 10 scored &amp; sent to Claude</a:t>
-            </a:r>
-          </a:p>
-        </p:txBody>
-      </p:sp>
-      <p:sp>
-        <p:nvSpPr>
-          <p:cNvPr id="17" name="Rectangle 16"/>
-          <p:cNvSpPr/>
-          <p:nvPr/>
-        </p:nvSpPr>
-        <p:spPr>
-          <a:xfrm>
-            <a:off x="640080" y="3154679"/>
-            <a:ext cx="2514600" cy="731520"/>
-          </a:xfrm>
-          <a:prstGeom prst="rect">
-            <a:avLst/>
-          </a:prstGeom>
-          <a:solidFill>
-            <a:srgbClr val="EAF2FF"/>
-          </a:solidFill>
-          <a:ln>
-            <a:noFill/>
-          </a:ln>
-          <a:effectLst/>
-        </p:spPr>
-        <p:style>
-          <a:lnRef idx="1">
-            <a:schemeClr val="accent1"/>
-          </a:lnRef>
-          <a:fillRef idx="3">
-            <a:schemeClr val="accent1"/>
-          </a:fillRef>
-          <a:effectRef idx="2">
-            <a:schemeClr val="accent1"/>
-          </a:effectRef>
-          <a:fontRef idx="minor">
-            <a:schemeClr val="lt1"/>
-          </a:fontRef>
-        </p:style>
-        <p:txBody>
-          <a:bodyPr rtlCol="0" anchor="ctr"/>
-          <a:lstStyle/>
-          <a:p>
-            <a:pPr algn="ctr"/>
-          </a:p>
-        </p:txBody>
-      </p:sp>
-      <p:sp>
-        <p:nvSpPr>
-          <p:cNvPr id="18" name="TextBox 17"/>
-          <p:cNvSpPr txBox="1"/>
-          <p:nvPr/>
-        </p:nvSpPr>
-        <p:spPr>
-          <a:xfrm>
-            <a:off x="731520" y="3282696"/>
-            <a:ext cx="2331720" cy="182880"/>
-          </a:xfrm>
-          <a:prstGeom prst="rect">
-            <a:avLst/>
-          </a:prstGeom>
-          <a:noFill/>
-        </p:spPr>
-        <p:txBody>
-          <a:bodyPr wrap="square" lIns="0" rIns="0" tIns="0" bIns="0">
-            <a:spAutoFit/>
-          </a:bodyPr>
-          <a:lstStyle/>
-          <a:p>
-            <a:pPr algn="l"/>
-            <a:r>
-              <a:rPr sz="1050" b="1">
-                <a:solidFill>
-                  <a:srgbClr val="14315A"/>
-                </a:solidFill>
-              </a:rPr>
-              <a:t>3  Claude extraction</a:t>
-            </a:r>
-          </a:p>
-        </p:txBody>
-      </p:sp>
-      <p:sp>
-        <p:nvSpPr>
-          <p:cNvPr id="19" name="TextBox 18"/>
-          <p:cNvSpPr txBox="1"/>
-          <p:nvPr/>
-        </p:nvSpPr>
-        <p:spPr>
-          <a:xfrm>
-            <a:off x="731520" y="3538727"/>
-            <a:ext cx="2331720" cy="182880"/>
-          </a:xfrm>
-          <a:prstGeom prst="rect">
-            <a:avLst/>
-          </a:prstGeom>
-          <a:noFill/>
-        </p:spPr>
-        <p:txBody>
-          <a:bodyPr wrap="square" lIns="0" rIns="0" tIns="0" bIns="0">
-            <a:spAutoFit/>
-          </a:bodyPr>
-          <a:lstStyle/>
-          <a:p>
-            <a:pPr algn="l"/>
-            <a:r>
-              <a:rPr sz="819" b="0">
-                <a:solidFill>
-                  <a:srgbClr val="475569"/>
-                </a:solidFill>
-              </a:rPr>
-              <a:t>17 canonical fields</a:t>
-            </a:r>
-          </a:p>
-        </p:txBody>
-      </p:sp>
-      <p:sp>
-        <p:nvSpPr>
-          <p:cNvPr id="20" name="Rectangle 19"/>
-          <p:cNvSpPr/>
-          <p:nvPr/>
-        </p:nvSpPr>
-        <p:spPr>
-          <a:xfrm>
-            <a:off x="3310128" y="3154679"/>
-            <a:ext cx="8257031" cy="731520"/>
-          </a:xfrm>
-          <a:prstGeom prst="rect">
-            <a:avLst/>
-          </a:prstGeom>
-          <a:solidFill>
-            <a:srgbClr val="FFFFFF"/>
-          </a:solidFill>
-          <a:ln w="9525">
-            <a:solidFill>
-              <a:srgbClr val="E2E8F0"/>
-            </a:solidFill>
-          </a:ln>
-          <a:effectLst/>
-        </p:spPr>
-        <p:style>
-          <a:lnRef idx="1">
-            <a:schemeClr val="accent1"/>
-          </a:lnRef>
-          <a:fillRef idx="3">
-            <a:schemeClr val="accent1"/>
-          </a:fillRef>
-          <a:effectRef idx="2">
-            <a:schemeClr val="accent1"/>
-          </a:effectRef>
-          <a:fontRef idx="minor">
-            <a:schemeClr val="lt1"/>
-          </a:fontRef>
-        </p:style>
-        <p:txBody>
-          <a:bodyPr rtlCol="0" anchor="ctr"/>
-          <a:lstStyle/>
-          <a:p>
-            <a:pPr algn="ctr"/>
-          </a:p>
-        </p:txBody>
-      </p:sp>
-      <p:sp>
-        <p:nvSpPr>
-          <p:cNvPr id="21" name="TextBox 20"/>
-          <p:cNvSpPr txBox="1"/>
-          <p:nvPr/>
-        </p:nvSpPr>
-        <p:spPr>
-          <a:xfrm>
-            <a:off x="3456432" y="3310127"/>
-            <a:ext cx="8001000" cy="457200"/>
-          </a:xfrm>
-          <a:prstGeom prst="rect">
-            <a:avLst/>
-          </a:prstGeom>
-          <a:noFill/>
-        </p:spPr>
-        <p:txBody>
-          <a:bodyPr wrap="square" lIns="0" rIns="0" tIns="0" bIns="0">
-            <a:spAutoFit/>
-          </a:bodyPr>
-          <a:lstStyle/>
-          <a:p>
-            <a:pPr algn="l"/>
-            <a:r>
-              <a:rPr sz="1019" b="0">
-                <a:solidFill>
-                  <a:srgbClr val="0F172A"/>
-                </a:solidFill>
-              </a:rPr>
-              <a:t>Cash $28.50/sh  ·  Stock 0.5022 PEP sh (fixed ratio)  ·  Cash cap 50% of shares  ·  deadline = 3rd business day pre-close</a:t>
-            </a:r>
-          </a:p>
-        </p:txBody>
-      </p:sp>
-      <p:sp>
-        <p:nvSpPr>
-          <p:cNvPr id="22" name="Rectangle 21"/>
-          <p:cNvSpPr/>
-          <p:nvPr/>
-        </p:nvSpPr>
-        <p:spPr>
-          <a:xfrm>
-            <a:off x="640080" y="3973068"/>
-            <a:ext cx="2514600" cy="731520"/>
-          </a:xfrm>
-          <a:prstGeom prst="rect">
-            <a:avLst/>
-          </a:prstGeom>
-          <a:solidFill>
-            <a:srgbClr val="EAF2FF"/>
-          </a:solidFill>
-          <a:ln>
-            <a:noFill/>
-          </a:ln>
-          <a:effectLst/>
-        </p:spPr>
-        <p:style>
-          <a:lnRef idx="1">
-            <a:schemeClr val="accent1"/>
-          </a:lnRef>
-          <a:fillRef idx="3">
-            <a:schemeClr val="accent1"/>
-          </a:fillRef>
-          <a:effectRef idx="2">
-            <a:schemeClr val="accent1"/>
-          </a:effectRef>
-          <a:fontRef idx="minor">
-            <a:schemeClr val="lt1"/>
-          </a:fontRef>
-        </p:style>
-        <p:txBody>
-          <a:bodyPr rtlCol="0" anchor="ctr"/>
-          <a:lstStyle/>
-          <a:p>
-            <a:pPr algn="ctr"/>
-          </a:p>
-        </p:txBody>
-      </p:sp>
-      <p:sp>
-        <p:nvSpPr>
-          <p:cNvPr id="23" name="TextBox 22"/>
-          <p:cNvSpPr txBox="1"/>
-          <p:nvPr/>
-        </p:nvSpPr>
-        <p:spPr>
-          <a:xfrm>
-            <a:off x="731520" y="4101083"/>
-            <a:ext cx="2331720" cy="182880"/>
-          </a:xfrm>
-          <a:prstGeom prst="rect">
-            <a:avLst/>
-          </a:prstGeom>
-          <a:noFill/>
-        </p:spPr>
-        <p:txBody>
-          <a:bodyPr wrap="square" lIns="0" rIns="0" tIns="0" bIns="0">
-            <a:spAutoFit/>
-          </a:bodyPr>
-          <a:lstStyle/>
-          <a:p>
-            <a:pPr algn="l"/>
-            <a:r>
-              <a:rPr sz="1050" b="1">
-                <a:solidFill>
-                  <a:srgbClr val="14315A"/>
-                </a:solidFill>
-              </a:rPr>
-              <a:t>4  Realized label</a:t>
-            </a:r>
-          </a:p>
-        </p:txBody>
-      </p:sp>
-      <p:sp>
-        <p:nvSpPr>
-          <p:cNvPr id="24" name="TextBox 23"/>
-          <p:cNvSpPr txBox="1"/>
-          <p:nvPr/>
-        </p:nvSpPr>
-        <p:spPr>
-          <a:xfrm>
-            <a:off x="731520" y="4357116"/>
-            <a:ext cx="2331720" cy="182880"/>
-          </a:xfrm>
-          <a:prstGeom prst="rect">
-            <a:avLst/>
-          </a:prstGeom>
-          <a:noFill/>
-        </p:spPr>
-        <p:txBody>
-          <a:bodyPr wrap="square" lIns="0" rIns="0" tIns="0" bIns="0">
-            <a:spAutoFit/>
-          </a:bodyPr>
-          <a:lstStyle/>
-          <a:p>
-            <a:pPr algn="l"/>
-            <a:r>
-              <a:rPr sz="819" b="0">
-                <a:solidFill>
-                  <a:srgbClr val="475569"/>
-                </a:solidFill>
-              </a:rPr>
-              <a:t>normalized_labels.csv</a:t>
-            </a:r>
-          </a:p>
-        </p:txBody>
-      </p:sp>
-      <p:sp>
-        <p:nvSpPr>
-          <p:cNvPr id="25" name="Rectangle 24"/>
-          <p:cNvSpPr/>
-          <p:nvPr/>
-        </p:nvSpPr>
-        <p:spPr>
-          <a:xfrm>
-            <a:off x="3310128" y="3973068"/>
-            <a:ext cx="8257031" cy="731520"/>
-          </a:xfrm>
-          <a:prstGeom prst="rect">
-            <a:avLst/>
-          </a:prstGeom>
-          <a:solidFill>
-            <a:srgbClr val="FFFFFF"/>
-          </a:solidFill>
-          <a:ln w="9525">
-            <a:solidFill>
-              <a:srgbClr val="E2E8F0"/>
-            </a:solidFill>
-          </a:ln>
-          <a:effectLst/>
-        </p:spPr>
-        <p:style>
-          <a:lnRef idx="1">
-            <a:schemeClr val="accent1"/>
-          </a:lnRef>
-          <a:fillRef idx="3">
-            <a:schemeClr val="accent1"/>
-          </a:fillRef>
-          <a:effectRef idx="2">
-            <a:schemeClr val="accent1"/>
-          </a:effectRef>
-          <a:fontRef idx="minor">
-            <a:schemeClr val="lt1"/>
-          </a:fontRef>
-        </p:style>
-        <p:txBody>
-          <a:bodyPr rtlCol="0" anchor="ctr"/>
-          <a:lstStyle/>
-          <a:p>
-            <a:pPr algn="ctr"/>
-          </a:p>
-        </p:txBody>
-      </p:sp>
-      <p:sp>
-        <p:nvSpPr>
-          <p:cNvPr id="26" name="TextBox 25"/>
-          <p:cNvSpPr txBox="1"/>
-          <p:nvPr/>
-        </p:nvSpPr>
-        <p:spPr>
-          <a:xfrm>
-            <a:off x="3456432" y="4128515"/>
-            <a:ext cx="8001000" cy="457200"/>
-          </a:xfrm>
-          <a:prstGeom prst="rect">
-            <a:avLst/>
-          </a:prstGeom>
-          <a:noFill/>
-        </p:spPr>
-        <p:txBody>
-          <a:bodyPr wrap="square" lIns="0" rIns="0" tIns="0" bIns="0">
-            <a:spAutoFit/>
-          </a:bodyPr>
-          <a:lstStyle/>
-          <a:p>
-            <a:pPr algn="l"/>
-            <a:r>
-              <a:rPr sz="1019" b="0">
-                <a:solidFill>
-                  <a:srgbClr val="0F172A"/>
-                </a:solidFill>
-              </a:rPr>
-              <a:t>Filing discloses DEMAND: ≈ 2,304,733 PAS shares elected cash → % elected cash (pre-proration) — the model's target variable</a:t>
-            </a:r>
-          </a:p>
-        </p:txBody>
-      </p:sp>
-      <p:sp>
-        <p:nvSpPr>
-          <p:cNvPr id="27" name="Rectangle 26"/>
-          <p:cNvSpPr/>
-          <p:nvPr/>
-        </p:nvSpPr>
-        <p:spPr>
-          <a:xfrm>
-            <a:off x="640080" y="4791456"/>
-            <a:ext cx="2514600" cy="731520"/>
-          </a:xfrm>
-          <a:prstGeom prst="rect">
-            <a:avLst/>
-          </a:prstGeom>
-          <a:solidFill>
-            <a:srgbClr val="EAF2FF"/>
-          </a:solidFill>
-          <a:ln>
-            <a:noFill/>
-          </a:ln>
-          <a:effectLst/>
-        </p:spPr>
-        <p:style>
-          <a:lnRef idx="1">
-            <a:schemeClr val="accent1"/>
-          </a:lnRef>
-          <a:fillRef idx="3">
-            <a:schemeClr val="accent1"/>
-          </a:fillRef>
-          <a:effectRef idx="2">
-            <a:schemeClr val="accent1"/>
-          </a:effectRef>
-          <a:fontRef idx="minor">
-            <a:schemeClr val="lt1"/>
-          </a:fontRef>
-        </p:style>
-        <p:txBody>
-          <a:bodyPr rtlCol="0" anchor="ctr"/>
-          <a:lstStyle/>
-          <a:p>
-            <a:pPr algn="ctr"/>
-          </a:p>
-        </p:txBody>
-      </p:sp>
-      <p:sp>
-        <p:nvSpPr>
-          <p:cNvPr id="28" name="TextBox 27"/>
-          <p:cNvSpPr txBox="1"/>
-          <p:nvPr/>
-        </p:nvSpPr>
-        <p:spPr>
-          <a:xfrm>
-            <a:off x="731520" y="4919472"/>
-            <a:ext cx="2331720" cy="182880"/>
-          </a:xfrm>
-          <a:prstGeom prst="rect">
-            <a:avLst/>
-          </a:prstGeom>
-          <a:noFill/>
-        </p:spPr>
-        <p:txBody>
-          <a:bodyPr wrap="square" lIns="0" rIns="0" tIns="0" bIns="0">
-            <a:spAutoFit/>
-          </a:bodyPr>
-          <a:lstStyle/>
-          <a:p>
-            <a:pPr algn="l"/>
-            <a:r>
-              <a:rPr sz="1050" b="1">
-                <a:solidFill>
-                  <a:srgbClr val="14315A"/>
-                </a:solidFill>
-              </a:rPr>
-              <a:t>5  WRDS join</a:t>
-            </a:r>
-          </a:p>
-        </p:txBody>
-      </p:sp>
-      <p:sp>
-        <p:nvSpPr>
-          <p:cNvPr id="29" name="TextBox 28"/>
-          <p:cNvSpPr txBox="1"/>
-          <p:nvPr/>
-        </p:nvSpPr>
-        <p:spPr>
-          <a:xfrm>
-            <a:off x="731520" y="5175504"/>
-            <a:ext cx="2331720" cy="182880"/>
-          </a:xfrm>
-          <a:prstGeom prst="rect">
-            <a:avLst/>
-          </a:prstGeom>
-          <a:noFill/>
-        </p:spPr>
-        <p:txBody>
-          <a:bodyPr wrap="square" lIns="0" rIns="0" tIns="0" bIns="0">
-            <a:spAutoFit/>
-          </a:bodyPr>
-          <a:lstStyle/>
-          <a:p>
-            <a:pPr algn="l"/>
-            <a:r>
-              <a:rPr sz="819" b="0">
-                <a:solidFill>
-                  <a:srgbClr val="475569"/>
-                </a:solidFill>
-              </a:rPr>
-              <a:t>wrds_market_daily.csv</a:t>
-            </a:r>
-          </a:p>
-        </p:txBody>
-      </p:sp>
-      <p:sp>
-        <p:nvSpPr>
-          <p:cNvPr id="30" name="Rectangle 29"/>
-          <p:cNvSpPr/>
-          <p:nvPr/>
-        </p:nvSpPr>
-        <p:spPr>
-          <a:xfrm>
-            <a:off x="3310128" y="4791456"/>
-            <a:ext cx="8257031" cy="731520"/>
-          </a:xfrm>
-          <a:prstGeom prst="rect">
-            <a:avLst/>
-          </a:prstGeom>
-          <a:solidFill>
-            <a:srgbClr val="FFFFFF"/>
-          </a:solidFill>
-          <a:ln w="9525">
-            <a:solidFill>
-              <a:srgbClr val="E2E8F0"/>
-            </a:solidFill>
-          </a:ln>
-          <a:effectLst/>
-        </p:spPr>
-        <p:style>
-          <a:lnRef idx="1">
-            <a:schemeClr val="accent1"/>
-          </a:lnRef>
-          <a:fillRef idx="3">
-            <a:schemeClr val="accent1"/>
-          </a:fillRef>
-          <a:effectRef idx="2">
-            <a:schemeClr val="accent1"/>
-          </a:effectRef>
-          <a:fontRef idx="minor">
-            <a:schemeClr val="lt1"/>
-          </a:fontRef>
-        </p:style>
-        <p:txBody>
-          <a:bodyPr rtlCol="0" anchor="ctr"/>
-          <a:lstStyle/>
-          <a:p>
-            <a:pPr algn="ctr"/>
-          </a:p>
-        </p:txBody>
-      </p:sp>
-      <p:sp>
-        <p:nvSpPr>
-          <p:cNvPr id="31" name="TextBox 30"/>
-          <p:cNvSpPr txBox="1"/>
-          <p:nvPr/>
-        </p:nvSpPr>
-        <p:spPr>
-          <a:xfrm>
-            <a:off x="3456432" y="4946904"/>
-            <a:ext cx="8001000" cy="457200"/>
-          </a:xfrm>
-          <a:prstGeom prst="rect">
-            <a:avLst/>
-          </a:prstGeom>
-          <a:noFill/>
-        </p:spPr>
-        <p:txBody>
-          <a:bodyPr wrap="square" lIns="0" rIns="0" tIns="0" bIns="0">
-            <a:spAutoFit/>
-          </a:bodyPr>
-          <a:lstStyle/>
-          <a:p>
-            <a:pPr algn="l"/>
-            <a:r>
-              <a:rPr sz="1019" b="0">
-                <a:solidFill>
-                  <a:srgbClr val="0F172A"/>
-                </a:solidFill>
-              </a:rPr>
-              <a:t>Target + acquirer (PepsiCo) daily prices joined — 85 trading days each; supplies the entry price and the hedge leg</a:t>
-            </a:r>
-          </a:p>
-        </p:txBody>
-      </p:sp>
-      <p:sp>
-        <p:nvSpPr>
-          <p:cNvPr id="32" name="Rectangle 31"/>
-          <p:cNvSpPr/>
-          <p:nvPr/>
-        </p:nvSpPr>
-        <p:spPr>
-          <a:xfrm>
-            <a:off x="640080" y="5609844"/>
-            <a:ext cx="2514600" cy="731520"/>
-          </a:xfrm>
-          <a:prstGeom prst="rect">
-            <a:avLst/>
-          </a:prstGeom>
-          <a:solidFill>
-            <a:srgbClr val="EAF2FF"/>
-          </a:solidFill>
-          <a:ln>
-            <a:noFill/>
-          </a:ln>
-          <a:effectLst/>
-        </p:spPr>
-        <p:style>
-          <a:lnRef idx="1">
-            <a:schemeClr val="accent1"/>
-          </a:lnRef>
-          <a:fillRef idx="3">
-            <a:schemeClr val="accent1"/>
-          </a:fillRef>
-          <a:effectRef idx="2">
-            <a:schemeClr val="accent1"/>
-          </a:effectRef>
-          <a:fontRef idx="minor">
-            <a:schemeClr val="lt1"/>
-          </a:fontRef>
-        </p:style>
-        <p:txBody>
-          <a:bodyPr rtlCol="0" anchor="ctr"/>
-          <a:lstStyle/>
-          <a:p>
-            <a:pPr algn="ctr"/>
-          </a:p>
-        </p:txBody>
-      </p:sp>
-      <p:sp>
-        <p:nvSpPr>
-          <p:cNvPr id="33" name="TextBox 32"/>
-          <p:cNvSpPr txBox="1"/>
-          <p:nvPr/>
-        </p:nvSpPr>
-        <p:spPr>
-          <a:xfrm>
-            <a:off x="731520" y="5737859"/>
-            <a:ext cx="2331720" cy="182880"/>
-          </a:xfrm>
-          <a:prstGeom prst="rect">
-            <a:avLst/>
-          </a:prstGeom>
-          <a:noFill/>
-        </p:spPr>
-        <p:txBody>
-          <a:bodyPr wrap="square" lIns="0" rIns="0" tIns="0" bIns="0">
-            <a:spAutoFit/>
-          </a:bodyPr>
-          <a:lstStyle/>
-          <a:p>
-            <a:pPr algn="l"/>
-            <a:r>
-              <a:rPr sz="1050" b="1">
-                <a:solidFill>
-                  <a:srgbClr val="14315A"/>
-                </a:solidFill>
-              </a:rPr>
-              <a:t>6  Trade decision</a:t>
-            </a:r>
-          </a:p>
-        </p:txBody>
-      </p:sp>
-      <p:sp>
-        <p:nvSpPr>
-          <p:cNvPr id="34" name="TextBox 33"/>
-          <p:cNvSpPr txBox="1"/>
-          <p:nvPr/>
-        </p:nvSpPr>
-        <p:spPr>
-          <a:xfrm>
-            <a:off x="731520" y="5993892"/>
-            <a:ext cx="2331720" cy="182880"/>
-          </a:xfrm>
-          <a:prstGeom prst="rect">
-            <a:avLst/>
-          </a:prstGeom>
-          <a:noFill/>
-        </p:spPr>
-        <p:txBody>
-          <a:bodyPr wrap="square" lIns="0" rIns="0" tIns="0" bIns="0">
-            <a:spAutoFit/>
-          </a:bodyPr>
-          <a:lstStyle/>
-          <a:p>
-            <a:pPr algn="l"/>
-            <a:r>
-              <a:rPr sz="819" b="0">
-                <a:solidFill>
-                  <a:srgbClr val="475569"/>
-                </a:solidFill>
-              </a:rPr>
-              <a:t>arb_signal.py</a:t>
-            </a:r>
-          </a:p>
-        </p:txBody>
-      </p:sp>
-      <p:sp>
-        <p:nvSpPr>
-          <p:cNvPr id="35" name="Rectangle 34"/>
-          <p:cNvSpPr/>
-          <p:nvPr/>
-        </p:nvSpPr>
-        <p:spPr>
-          <a:xfrm>
-            <a:off x="3310128" y="5609844"/>
-            <a:ext cx="8257031" cy="731520"/>
-          </a:xfrm>
-          <a:prstGeom prst="rect">
-            <a:avLst/>
-          </a:prstGeom>
-          <a:solidFill>
-            <a:srgbClr val="FFFFFF"/>
-          </a:solidFill>
-          <a:ln w="9525">
-            <a:solidFill>
-              <a:srgbClr val="E2E8F0"/>
-            </a:solidFill>
-          </a:ln>
-          <a:effectLst/>
-        </p:spPr>
-        <p:style>
-          <a:lnRef idx="1">
-            <a:schemeClr val="accent1"/>
-          </a:lnRef>
-          <a:fillRef idx="3">
-            <a:schemeClr val="accent1"/>
-          </a:fillRef>
-          <a:effectRef idx="2">
-            <a:schemeClr val="accent1"/>
-          </a:effectRef>
-          <a:fontRef idx="minor">
-            <a:schemeClr val="lt1"/>
-          </a:fontRef>
-        </p:style>
-        <p:txBody>
-          <a:bodyPr rtlCol="0" anchor="ctr"/>
-          <a:lstStyle/>
-          <a:p>
-            <a:pPr algn="ctr"/>
-          </a:p>
-        </p:txBody>
-      </p:sp>
-      <p:sp>
-        <p:nvSpPr>
-          <p:cNvPr id="36" name="TextBox 35"/>
-          <p:cNvSpPr txBox="1"/>
-          <p:nvPr/>
-        </p:nvSpPr>
-        <p:spPr>
-          <a:xfrm>
-            <a:off x="3456432" y="5765292"/>
-            <a:ext cx="8001000" cy="457200"/>
-          </a:xfrm>
-          <a:prstGeom prst="rect">
-            <a:avLst/>
-          </a:prstGeom>
-          <a:noFill/>
-        </p:spPr>
-        <p:txBody>
-          <a:bodyPr wrap="square" lIns="0" rIns="0" tIns="0" bIns="0">
-            <a:spAutoFit/>
-          </a:bodyPr>
-          <a:lstStyle/>
-          <a:p>
-            <a:pPr algn="l"/>
-            <a:r>
-              <a:rPr sz="1019" b="0">
-                <a:solidFill>
-                  <a:srgbClr val="0F172A"/>
-                </a:solidFill>
-              </a:rPr>
-              <a:t>Fair value $27.99 vs market $24.66 = +13.5% → risk-adjusted +9.1% → ENTER, elect CASH, hedge 0.066  ·  realized +15.6%</a:t>
-            </a:r>
-          </a:p>
-        </p:txBody>
-      </p:sp>
-      <p:sp>
-        <p:nvSpPr>
-          <p:cNvPr id="37" name="TextBox 36"/>
-          <p:cNvSpPr txBox="1"/>
-          <p:nvPr/>
-        </p:nvSpPr>
-        <p:spPr>
-          <a:xfrm>
-            <a:off x="11064240" y="6473952"/>
-            <a:ext cx="731520" cy="182880"/>
-          </a:xfrm>
-          <a:prstGeom prst="rect">
-            <a:avLst/>
-          </a:prstGeom>
-          <a:noFill/>
-        </p:spPr>
-        <p:txBody>
-          <a:bodyPr wrap="square" lIns="0" rIns="0" tIns="0" bIns="0">
-            <a:spAutoFit/>
-          </a:bodyPr>
-          <a:lstStyle/>
-          <a:p>
-            <a:pPr algn="r"/>
-            <a:r>
-              <a:rPr sz="780" b="0">
-                <a:solidFill>
-                  <a:srgbClr val="475569"/>
-                </a:solidFill>
-              </a:rPr>
-              <a:t>13 / 14</a:t>
+              <a:t>12 / 15</a:t>
             </a:r>
           </a:p>
         </p:txBody>
@@ -10131,7 +11746,7 @@
                   <a:srgbClr val="475569"/>
                 </a:solidFill>
               </a:rPr>
-              <a:t>2 / 14</a:t>
+              <a:t>2 / 15</a:t>
             </a:r>
             <a:endParaRPr lang="en-US" sz="780" dirty="0"/>
           </a:p>
@@ -10678,7 +12293,7 @@
                   <a:srgbClr val="475569"/>
                 </a:solidFill>
               </a:rPr>
-              <a:t>3 / 14</a:t>
+              <a:t>3 / 15</a:t>
             </a:r>
             <a:endParaRPr lang="en-US" sz="780" dirty="0"/>
           </a:p>
@@ -12573,7 +14188,7 @@
                   <a:srgbClr val="475569"/>
                 </a:solidFill>
               </a:rPr>
-              <a:t>4 / 14</a:t>
+              <a:t>4 / 15</a:t>
             </a:r>
             <a:endParaRPr lang="en-US" sz="780" dirty="0"/>
           </a:p>
@@ -13733,7 +15348,7 @@
                   <a:srgbClr val="475569"/>
                 </a:solidFill>
               </a:rPr>
-              <a:t>5 / 14</a:t>
+              <a:t>5 / 15</a:t>
             </a:r>
             <a:endParaRPr lang="en-US" sz="780" dirty="0"/>
           </a:p>
@@ -14563,7 +16178,7 @@
                   <a:srgbClr val="475569"/>
                 </a:solidFill>
               </a:rPr>
-              <a:t>6 / 14</a:t>
+              <a:t>6 / 15</a:t>
             </a:r>
             <a:endParaRPr lang="en-US" sz="780" dirty="0"/>
           </a:p>
@@ -15679,7 +17294,7 @@
                   <a:srgbClr val="475569"/>
                 </a:solidFill>
               </a:rPr>
-              <a:t>7 / 14</a:t>
+              <a:t>7 / 15</a:t>
             </a:r>
             <a:endParaRPr lang="en-US" sz="780" dirty="0"/>
           </a:p>
@@ -17392,7 +19007,7 @@
                   <a:srgbClr val="475569"/>
                 </a:solidFill>
               </a:rPr>
-              <a:t>8 / 14</a:t>
+              <a:t>8 / 15</a:t>
             </a:r>
             <a:endParaRPr lang="en-US" sz="780" dirty="0"/>
           </a:p>
